--- a/presentation/中国跨境电商出海赛道分析-项目故事-v2.pptx
+++ b/presentation/中国跨境电商出海赛道分析-项目故事-v2.pptx
@@ -5771,7 +5771,7 @@
         <p:spPr>
           <a:xfrm>
             <a:off x="640080" y="1874519"/>
-            <a:ext cx="6035040" cy="4572000"/>
+            <a:ext cx="10698480" cy="4572000"/>
           </a:xfrm>
           <a:prstGeom prst="rect">
             <a:avLst/>
@@ -5786,7 +5786,7 @@
           <a:p>
             <a:pPr>
               <a:spcAft>
-                <a:spcPts val="1200"/>
+                <a:spcPts val="1500"/>
               </a:spcAft>
             </a:pPr>
             <a:r>
@@ -5796,61 +5796,61 @@
                 </a:solidFill>
                 <a:latin typeface="微软雅黑"/>
               </a:rPr>
-              <a:t>▪ 上一份工作：亚马逊运营，卖 1000+ SKU 的工业阀门（品牌 U.S. Solid）</a:t>
-            </a:r>
-          </a:p>
-          <a:p>
-            <a:pPr lvl="1">
+              <a:t>▪ 上一份工作在 U.S. Solid 做亚马逊运营——自有品牌出海，卖阀门/管件、实验室仪器、封口机这类偏专业的设备，店铺里 1000+ SKU。</a:t>
+            </a:r>
+          </a:p>
+          <a:p>
+            <a:pPr>
               <a:spcAft>
-                <a:spcPts val="1200"/>
+                <a:spcPts val="1500"/>
               </a:spcAft>
             </a:pPr>
             <a:r>
-              <a:rPr sz="1450" b="0">
-                <a:solidFill>
-                  <a:srgbClr val="5B6470"/>
-                </a:solidFill>
-                <a:latin typeface="微软雅黑"/>
-              </a:rPr>
-              <a:t>— 职责覆盖：新品选品 / 定价 / 广告 / 库存，会为每个新品算 ROI</a:t>
+              <a:rPr sz="1600" b="0">
+                <a:solidFill>
+                  <a:srgbClr val="1B2430"/>
+                </a:solidFill>
+                <a:latin typeface="微软雅黑"/>
+              </a:rPr>
+              <a:t>▪ 打法是把一个品类做全：同一种阀，两通、三通，1/2"~2"，不锈钢、黄铜、PVC 都上。买家多是工程师、实验室或做自动化改造的人，很懂行，照着型号买。</a:t>
             </a:r>
           </a:p>
           <a:p>
             <a:pPr>
               <a:spcAft>
-                <a:spcPts val="1200"/>
+                <a:spcPts val="1500"/>
               </a:spcAft>
             </a:pPr>
             <a:r>
-              <a:rPr sz="1600" b="1">
+              <a:rPr sz="1600" b="0">
                 <a:solidFill>
                   <a:srgbClr val="1B2430"/>
                 </a:solidFill>
                 <a:latin typeface="微软雅黑"/>
               </a:rPr>
-              <a:t>▪ 一个让我困惑的现象：单 SKU 定价时 ROI 算得过来</a:t>
-            </a:r>
-          </a:p>
-          <a:p>
-            <a:pPr lvl="1">
+              <a:t>▪ 我除了日常运营，还兼新品选品：定价前先算单件 ROI，再决定广告和备货怎么排。</a:t>
+            </a:r>
+          </a:p>
+          <a:p>
+            <a:pPr>
               <a:spcAft>
-                <a:spcPts val="1200"/>
+                <a:spcPts val="1500"/>
               </a:spcAft>
             </a:pPr>
             <a:r>
-              <a:rPr sz="1450" b="0">
-                <a:solidFill>
-                  <a:srgbClr val="5B6470"/>
-                </a:solidFill>
-                <a:latin typeface="微软雅黑"/>
-              </a:rPr>
-              <a:t>— 但公司整体却是“利润挺高、越来越不赚钱”</a:t>
+              <a:rPr sz="1600" b="1">
+                <a:solidFill>
+                  <a:srgbClr val="1B2430"/>
+                </a:solidFill>
+                <a:latin typeface="微软雅黑"/>
+              </a:rPr>
+              <a:t>▪ 但越算越困惑：单看每个 SKU 的 ROI 都过得去，公司整体却一年比一年不赚钱。</a:t>
             </a:r>
           </a:p>
           <a:p>
             <a:pPr>
               <a:spcAft>
-                <a:spcPts val="1200"/>
+                <a:spcPts val="1500"/>
               </a:spcAft>
             </a:pPr>
             <a:r>
@@ -5860,39 +5860,23 @@
                 </a:solidFill>
                 <a:latin typeface="微软雅黑"/>
               </a:rPr>
-              <a:t>▪ 我始终在想：钱到底被谁赚走了？</a:t>
-            </a:r>
-          </a:p>
-          <a:p>
-            <a:pPr lvl="1">
+              <a:t>▪ 钱到底被谁赚走了？是平台佣金、仓储费、广告费，还是我们这种把 SKU 铺得很开的打法本身有问题？</a:t>
+            </a:r>
+          </a:p>
+          <a:p>
+            <a:pPr>
               <a:spcAft>
-                <a:spcPts val="1200"/>
+                <a:spcPts val="1500"/>
               </a:spcAft>
             </a:pPr>
             <a:r>
-              <a:rPr sz="1450" b="0">
-                <a:solidFill>
-                  <a:srgbClr val="5B6470"/>
-                </a:solidFill>
-                <a:latin typeface="微软雅黑"/>
-              </a:rPr>
-              <a:t>— 是平台（佣金 / 仓储 / 广告）？还是我们自己的模式问题？</a:t>
-            </a:r>
-          </a:p>
-          <a:p>
-            <a:pPr>
-              <a:spcAft>
-                <a:spcPts val="1200"/>
-              </a:spcAft>
-            </a:pPr>
-            <a:r>
               <a:rPr sz="1600" b="0">
                 <a:solidFill>
                   <a:srgbClr val="1B2430"/>
                 </a:solidFill>
                 <a:latin typeface="微软雅黑"/>
               </a:rPr>
-              <a:t>▪ 于是决定：不套用现成数据集，用公开财报 + 官方数据，自己做一次行业级验证</a:t>
+              <a:t>▪ 想不通就自己查：不套现成数据集，用上市公司财报 + 海关官方数据，从行业层面验证一遍。</a:t>
             </a:r>
           </a:p>
         </p:txBody>

--- a/presentation/中国跨境电商出海赛道分析-项目故事-v2.pptx
+++ b/presentation/中国跨境电商出海赛道分析-项目故事-v2.pptx
@@ -5796,7 +5796,7 @@
                 </a:solidFill>
                 <a:latin typeface="微软雅黑"/>
               </a:rPr>
-              <a:t>▪ 上一份工作在 U.S. Solid 做亚马逊运营——自有品牌出海，卖阀门/管件、实验室仪器、封口机这类偏专业的设备，店铺里 1000+ SKU。</a:t>
+              <a:t>▪ 我上一份工作在 U.S. Solid 做亚马逊运营。它做自有品牌出海，卖阀门/管件、实验室仪器、封口机这类偏专业的产品，在售 SKU 超过 1000 个。</a:t>
             </a:r>
           </a:p>
           <a:p>
@@ -5812,7 +5812,7 @@
                 </a:solidFill>
                 <a:latin typeface="微软雅黑"/>
               </a:rPr>
-              <a:t>▪ 打法是把一个品类做全：同一种阀，两通、三通，1/2"~2"，不锈钢、黄铜、PVC 都上。买家多是工程师、实验室或做自动化改造的人，很懂行，照着型号买。</a:t>
+              <a:t>▪ 经营上我们把品类做深做全：同一类阀门按通径、材质和螺纹标准展开，两通/三通、1/2 到 2 英寸、不锈钢/黄铜/PVC 都会配齐。客户多是工程师、实验室或做自动化改造的人，下单前会核对型号参数。</a:t>
             </a:r>
           </a:p>
           <a:p>
@@ -5828,7 +5828,7 @@
                 </a:solidFill>
                 <a:latin typeface="微软雅黑"/>
               </a:rPr>
-              <a:t>▪ 我除了日常运营，还兼新品选品：定价前先算单件 ROI，再决定广告和备货怎么排。</a:t>
+              <a:t>▪ 我负责日常运营，也参与新品选品。给新品定价前先算单件 ROI，再决定广告投入和备货节奏。</a:t>
             </a:r>
           </a:p>
           <a:p>
@@ -5838,13 +5838,13 @@
               </a:spcAft>
             </a:pPr>
             <a:r>
-              <a:rPr sz="1600" b="1">
+              <a:rPr sz="1600" b="0">
                 <a:solidFill>
                   <a:srgbClr val="1B2430"/>
                 </a:solidFill>
                 <a:latin typeface="微软雅黑"/>
               </a:rPr>
-              <a:t>▪ 但越算越困惑：单看每个 SKU 的 ROI 都过得去，公司整体却一年比一年不赚钱。</a:t>
+              <a:t>▪ 让我一直没想通的是：单个 SKU 怎么算都能盈利，公司整体却一年比一年不赚钱。</a:t>
             </a:r>
           </a:p>
           <a:p>
@@ -5854,13 +5854,13 @@
               </a:spcAft>
             </a:pPr>
             <a:r>
-              <a:rPr sz="1600" b="1">
+              <a:rPr sz="1600" b="0">
                 <a:solidFill>
                   <a:srgbClr val="1B2430"/>
                 </a:solidFill>
                 <a:latin typeface="微软雅黑"/>
               </a:rPr>
-              <a:t>▪ 钱到底被谁赚走了？是平台佣金、仓储费、广告费，还是我们这种把 SKU 铺得很开的打法本身有问题？</a:t>
+              <a:t>▪ 我怀疑问题出在两处：平台拿走的佣金、仓储和广告费用，或是我们这种把 SKU 铺得很开的打法本身有问题。</a:t>
             </a:r>
           </a:p>
           <a:p>
@@ -5876,7 +5876,7 @@
                 </a:solidFill>
                 <a:latin typeface="微软雅黑"/>
               </a:rPr>
-              <a:t>▪ 想不通就自己查：不套现成数据集，用上市公司财报 + 海关官方数据，从行业层面验证一遍。</a:t>
+              <a:t>▪ 这些靠经验判断不了，我决定用数据验证：不用现成数据集，用上市公司财报和海关官方数据，从行业层面重新看一遍。</a:t>
             </a:r>
           </a:p>
         </p:txBody>

--- a/presentation/中国跨境电商出海赛道分析-项目故事-v2.pptx
+++ b/presentation/中国跨境电商出海赛道分析-项目故事-v2.pptx
@@ -5796,7 +5796,7 @@
                 </a:solidFill>
                 <a:latin typeface="微软雅黑"/>
               </a:rPr>
-              <a:t>▪ 我上一份工作在 U.S. Solid 做亚马逊运营。它做自有品牌出海，卖阀门/管件、实验室仪器、封口机这类偏专业的产品，在售 SKU 超过 1000 个。</a:t>
+              <a:t>▪ 我上一份工作在一家做自有品牌出海的公司做亚马逊运营，卖阀门/管件、实验室仪器、封口机这类偏专业的产品，在售 SKU 超过 1000 个。</a:t>
             </a:r>
           </a:p>
           <a:p>
@@ -5844,7 +5844,7 @@
                 </a:solidFill>
                 <a:latin typeface="微软雅黑"/>
               </a:rPr>
-              <a:t>▪ 让我一直没想通的是：单个 SKU 怎么算都能盈利，公司整体却一年比一年不赚钱。</a:t>
+              <a:t>▪ 让我一直没想通的是：单个 SKU 怎么算都能盈利，公司整体却没以前那么赚钱了。这只是我听来的说法，未必准确，可能也和广告投放的调整有关。</a:t>
             </a:r>
           </a:p>
           <a:p>
@@ -5876,7 +5876,7 @@
                 </a:solidFill>
                 <a:latin typeface="微软雅黑"/>
               </a:rPr>
-              <a:t>▪ 这些靠经验判断不了，我决定用数据验证：不用现成数据集，用上市公司财报和海关官方数据，从行业层面重新看一遍。</a:t>
+              <a:t>▪ 为了解决自己的疑惑，我决定用数据验证：不用现成数据集，用上市公司财报和海关官方数据，从行业层面重新分析。</a:t>
             </a:r>
           </a:p>
         </p:txBody>
@@ -9261,7 +9261,7 @@
                 </a:solidFill>
                 <a:latin typeface="微软雅黑"/>
               </a:rPr>
-              <a:t>我的经历：U.S. Solid 1000+ SKU 按规格矩阵做全 —— 第三种路径“目录式长尾品牌”。</a:t>
+              <a:t>我的经历：上一家公司 1000+ SKU 按规格矩阵做全 —— 第三种路径“目录式长尾品牌”。</a:t>
             </a:r>
           </a:p>
         </p:txBody>

--- a/presentation/中国跨境电商出海赛道分析-项目故事-v2.pptx
+++ b/presentation/中国跨境电商出海赛道分析-项目故事-v2.pptx
@@ -20,6 +20,7 @@
     <p:sldId id="268" r:id="rId19"/>
     <p:sldId id="269" r:id="rId20"/>
     <p:sldId id="270" r:id="rId21"/>
+    <p:sldId id="271" r:id="rId22"/>
   </p:sldIdLst>
   <p:sldSz cx="12191695" cy="6858000" type="screen4x3"/>
   <p:notesSz cx="6858000" cy="9144000"/>
@@ -3402,7 +3403,7 @@
                 </a:solidFill>
                 <a:latin typeface="微软雅黑"/>
               </a:rPr>
-              <a:t>FINDING ④ · 现金流</a:t>
+              <a:t>FINDING ③ · 市场</a:t>
             </a:r>
           </a:p>
           <a:p>
@@ -3418,7 +3419,7 @@
                 </a:solidFill>
                 <a:latin typeface="微软雅黑"/>
               </a:rPr>
-              <a:t>利润 ≠ 现金：安克 2025 的“有利润没现金”</a:t>
+              <a:t>欧洲毛利更高，但天花板与本地化门槛并存</a:t>
             </a:r>
           </a:p>
         </p:txBody>
@@ -3457,7 +3458,7 @@
                 </a:solidFill>
                 <a:latin typeface="微软雅黑"/>
               </a:rPr>
-              <a:t>▪ 安克 2025：归母净利 25.5 亿，经营现金流仅 4.8 亿（OCF/净利 ≈ 0.19）</a:t>
+              <a:t>▪ 致欧是唯一披露欧美细分的公司：欧洲毛利率 36.4% &gt; 美加 30.3%</a:t>
             </a:r>
           </a:p>
           <a:p>
@@ -3473,7 +3474,7 @@
                 </a:solidFill>
                 <a:latin typeface="微软雅黑"/>
               </a:rPr>
-              <a:t>▪ 追查调节附表：存货增加占用约 20 亿、应收增加约 6.6 亿</a:t>
+              <a:t>▪ 但致欧增速 +7.1%，明显慢于北美为主的安克（+23.5%）</a:t>
             </a:r>
           </a:p>
           <a:p>
@@ -3489,7 +3490,23 @@
                 </a:solidFill>
                 <a:latin typeface="微软雅黑"/>
               </a:rPr>
-              <a:t>— 资产负债表交叉验证：存货余额 24 → 32 → 50 亿</a:t>
+              <a:t>— 本地化门槛：VAT/EPR、多语言、产品标准</a:t>
+            </a:r>
+          </a:p>
+          <a:p>
+            <a:pPr lvl="1">
+              <a:spcAft>
+                <a:spcPts val="1200"/>
+              </a:spcAft>
+            </a:pPr>
+            <a:r>
+              <a:rPr sz="1350" b="1">
+                <a:solidFill>
+                  <a:srgbClr val="5B6470"/>
+                </a:solidFill>
+                <a:latin typeface="微软雅黑"/>
+              </a:rPr>
+              <a:t>— 我的亲历：美国 NPT 螺纹 vs 欧洲 G 螺纹 → 同一品类要重做产品线</a:t>
             </a:r>
           </a:p>
           <a:p>
@@ -3505,30 +3522,14 @@
                 </a:solidFill>
                 <a:latin typeface="微软雅黑"/>
               </a:rPr>
-              <a:t>▪ 这就是我上一份工作困惑的“上市公司版”：利润被货和应收占住了</a:t>
-            </a:r>
-          </a:p>
-          <a:p>
-            <a:pPr lvl="1">
-              <a:spcAft>
-                <a:spcPts val="1200"/>
-              </a:spcAft>
-            </a:pPr>
-            <a:r>
-              <a:rPr sz="1350" b="0">
-                <a:solidFill>
-                  <a:srgbClr val="5B6470"/>
-                </a:solidFill>
-                <a:latin typeface="微软雅黑"/>
-              </a:rPr>
-              <a:t>— 结论：规模扩张期，经营现金流才是生命线</a:t>
+              <a:t>▪ 判断：美国走规模、欧洲赚毛利；先单点跑通再复制</a:t>
             </a:r>
           </a:p>
         </p:txBody>
       </p:sp>
       <p:pic>
         <p:nvPicPr>
-          <p:cNvPr id="5" name="Picture 4" descr="m3b_anker_cashflow.png"/>
+          <p:cNvPr id="5" name="Picture 4" descr="m3_revenue.png"/>
           <p:cNvPicPr>
             <a:picLocks noChangeAspect="1"/>
           </p:cNvPicPr>
@@ -3543,7 +3544,7 @@
         <p:spPr>
           <a:xfrm>
             <a:off x="6492240" y="2103120"/>
-            <a:ext cx="5120640" cy="2020069"/>
+            <a:ext cx="5120640" cy="2531552"/>
           </a:xfrm>
           <a:prstGeom prst="rect">
             <a:avLst/>
@@ -3614,7 +3615,7 @@
                 </a:solidFill>
                 <a:latin typeface="微软雅黑"/>
               </a:rPr>
-              <a:t>10 / 15</a:t>
+              <a:t>10 / 16</a:t>
             </a:r>
           </a:p>
         </p:txBody>
@@ -3710,7 +3711,7 @@
                 </a:solidFill>
                 <a:latin typeface="微软雅黑"/>
               </a:rPr>
-              <a:t>VALIDATION · 验证</a:t>
+              <a:t>FINDING ④ · 现金流</a:t>
             </a:r>
           </a:p>
           <a:p>
@@ -3726,7 +3727,7 @@
                 </a:solidFill>
                 <a:latin typeface="微软雅黑"/>
               </a:rPr>
-              <a:t>结论之前，我先做三件事</a:t>
+              <a:t>利润 ≠ 现金：安克 2025 的“有利润没现金”</a:t>
             </a:r>
           </a:p>
         </p:txBody>
@@ -3740,7 +3741,7 @@
         <p:spPr>
           <a:xfrm>
             <a:off x="640080" y="1874519"/>
-            <a:ext cx="6035040" cy="4572000"/>
+            <a:ext cx="5669280" cy="4572000"/>
           </a:xfrm>
           <a:prstGeom prst="rect">
             <a:avLst/>
@@ -3759,13 +3760,13 @@
               </a:spcAft>
             </a:pPr>
             <a:r>
-              <a:rPr sz="1600" b="0">
+              <a:rPr sz="1500" b="1">
                 <a:solidFill>
                   <a:srgbClr val="1B2430"/>
                 </a:solidFill>
                 <a:latin typeface="微软雅黑"/>
               </a:rPr>
-              <a:t>① 数据抽查：安克 2025 营收 305.1 亿 与公开报道核对一致</a:t>
+              <a:t>▪ 安克 2025：归母净利 25.5 亿，经营现金流仅 4.8 亿（OCF/净利 ≈ 0.19）</a:t>
             </a:r>
           </a:p>
           <a:p>
@@ -3775,13 +3776,29 @@
               </a:spcAft>
             </a:pPr>
             <a:r>
-              <a:rPr sz="1600" b="0">
+              <a:rPr sz="1500" b="0">
                 <a:solidFill>
                   <a:srgbClr val="1B2430"/>
                 </a:solidFill>
                 <a:latin typeface="微软雅黑"/>
               </a:rPr>
-              <a:t>② 交叉验证：调节表（存货 -20 亿）↔ 资产负债表（存货 +17.6 亿）互相印证</a:t>
+              <a:t>▪ 追查调节附表：存货增加占用约 20 亿、应收增加约 6.6 亿</a:t>
+            </a:r>
+          </a:p>
+          <a:p>
+            <a:pPr lvl="1">
+              <a:spcAft>
+                <a:spcPts val="1200"/>
+              </a:spcAft>
+            </a:pPr>
+            <a:r>
+              <a:rPr sz="1350" b="0">
+                <a:solidFill>
+                  <a:srgbClr val="5B6470"/>
+                </a:solidFill>
+                <a:latin typeface="微软雅黑"/>
+              </a:rPr>
+              <a:t>— 资产负债表交叉验证：存货余额 24 → 32 → 50 亿</a:t>
             </a:r>
           </a:p>
           <a:p>
@@ -3791,36 +3808,60 @@
               </a:spcAft>
             </a:pPr>
             <a:r>
-              <a:rPr sz="1600" b="0">
+              <a:rPr sz="1500" b="1">
                 <a:solidFill>
                   <a:srgbClr val="1B2430"/>
                 </a:solidFill>
                 <a:latin typeface="微软雅黑"/>
               </a:rPr>
-              <a:t>③ 主动声明局限：上市公司是幸存者（幸存者偏差）；欧美细分只有致欧披露；吉宏含包装需看分部</a:t>
-            </a:r>
-          </a:p>
-          <a:p>
-            <a:pPr>
+              <a:t>▪ 这就是我上一份工作困惑的“上市公司版”：利润被货和应收占住了</a:t>
+            </a:r>
+          </a:p>
+          <a:p>
+            <a:pPr lvl="1">
               <a:spcAft>
                 <a:spcPts val="1200"/>
               </a:spcAft>
             </a:pPr>
             <a:r>
-              <a:rPr sz="1600" b="1">
-                <a:solidFill>
-                  <a:srgbClr val="1B2430"/>
-                </a:solidFill>
-                <a:latin typeface="微软雅黑"/>
-              </a:rPr>
-              <a:t>▪ 结论只到证据能到的地方：安克备货是主动还是被动？→ 标“待年报附注确认”，不下定论</a:t>
-            </a:r>
-          </a:p>
-        </p:txBody>
-      </p:sp>
-      <p:sp>
-        <p:nvSpPr>
-          <p:cNvPr id="5" name="TextBox 4"/>
+              <a:rPr sz="1350" b="0">
+                <a:solidFill>
+                  <a:srgbClr val="5B6470"/>
+                </a:solidFill>
+                <a:latin typeface="微软雅黑"/>
+              </a:rPr>
+              <a:t>— 结论：规模扩张期，经营现金流才是生命线</a:t>
+            </a:r>
+          </a:p>
+        </p:txBody>
+      </p:sp>
+      <p:pic>
+        <p:nvPicPr>
+          <p:cNvPr id="5" name="Picture 4" descr="m3b_anker_cashflow.png"/>
+          <p:cNvPicPr>
+            <a:picLocks noChangeAspect="1"/>
+          </p:cNvPicPr>
+          <p:nvPr/>
+        </p:nvPicPr>
+        <p:blipFill>
+          <a:blip r:embed="rId2"/>
+          <a:stretch>
+            <a:fillRect/>
+          </a:stretch>
+        </p:blipFill>
+        <p:spPr>
+          <a:xfrm>
+            <a:off x="6492240" y="2103120"/>
+            <a:ext cx="5120640" cy="2020069"/>
+          </a:xfrm>
+          <a:prstGeom prst="rect">
+            <a:avLst/>
+          </a:prstGeom>
+        </p:spPr>
+      </p:pic>
+      <p:sp>
+        <p:nvSpPr>
+          <p:cNvPr id="6" name="TextBox 5"/>
           <p:cNvSpPr txBox="1"/>
           <p:nvPr/>
         </p:nvSpPr>
@@ -3854,7 +3895,7 @@
       </p:sp>
       <p:sp>
         <p:nvSpPr>
-          <p:cNvPr id="6" name="TextBox 5"/>
+          <p:cNvPr id="7" name="TextBox 6"/>
           <p:cNvSpPr txBox="1"/>
           <p:nvPr/>
         </p:nvSpPr>
@@ -3882,7 +3923,7 @@
                 </a:solidFill>
                 <a:latin typeface="微软雅黑"/>
               </a:rPr>
-              <a:t>11 / 15</a:t>
+              <a:t>11 / 16</a:t>
             </a:r>
           </a:p>
         </p:txBody>
@@ -3978,7 +4019,7 @@
                 </a:solidFill>
                 <a:latin typeface="微软雅黑"/>
               </a:rPr>
-              <a:t>CONCLUSION · 结论</a:t>
+              <a:t>VALIDATION · 验证</a:t>
             </a:r>
           </a:p>
           <a:p>
@@ -3994,65 +4035,21 @@
                 </a:solidFill>
                 <a:latin typeface="微软雅黑"/>
               </a:rPr>
-              <a:t>四个可以带走、也能被追问的判断</a:t>
-            </a:r>
-          </a:p>
-        </p:txBody>
-      </p:sp>
-      <p:sp>
-        <p:nvSpPr>
-          <p:cNvPr id="4" name="Rectangle 3"/>
-          <p:cNvSpPr/>
-          <p:nvPr/>
-        </p:nvSpPr>
-        <p:spPr>
-          <a:xfrm>
-            <a:off x="640080" y="2011680"/>
-            <a:ext cx="658368" cy="841248"/>
-          </a:xfrm>
-          <a:prstGeom prst="rect">
-            <a:avLst/>
-          </a:prstGeom>
-          <a:solidFill>
-            <a:srgbClr val="2F5AA8"/>
-          </a:solidFill>
-          <a:ln>
-            <a:noFill/>
-          </a:ln>
-          <a:effectLst/>
-        </p:spPr>
-        <p:style>
-          <a:lnRef idx="1">
-            <a:schemeClr val="accent1"/>
-          </a:lnRef>
-          <a:fillRef idx="3">
-            <a:schemeClr val="accent1"/>
-          </a:fillRef>
-          <a:effectRef idx="2">
-            <a:schemeClr val="accent1"/>
-          </a:effectRef>
-          <a:fontRef idx="minor">
-            <a:schemeClr val="lt1"/>
-          </a:fontRef>
-        </p:style>
-        <p:txBody>
-          <a:bodyPr rtlCol="0" anchor="ctr"/>
-          <a:lstStyle/>
-          <a:p>
-            <a:pPr algn="ctr"/>
-          </a:p>
-        </p:txBody>
-      </p:sp>
-      <p:sp>
-        <p:nvSpPr>
-          <p:cNvPr id="5" name="TextBox 4"/>
+              <a:t>结论之前，我先做三件事</a:t>
+            </a:r>
+          </a:p>
+        </p:txBody>
+      </p:sp>
+      <p:sp>
+        <p:nvSpPr>
+          <p:cNvPr id="4" name="TextBox 3"/>
           <p:cNvSpPr txBox="1"/>
           <p:nvPr/>
         </p:nvSpPr>
         <p:spPr>
           <a:xfrm>
-            <a:off x="640080" y="2212848"/>
-            <a:ext cx="658368" cy="457200"/>
+            <a:off x="640080" y="1874519"/>
+            <a:ext cx="6035040" cy="4572000"/>
           </a:xfrm>
           <a:prstGeom prst="rect">
             <a:avLst/>
@@ -4065,29 +4062,81 @@
           </a:bodyPr>
           <a:lstStyle/>
           <a:p>
-            <a:pPr algn="ctr"/>
-            <a:r>
-              <a:rPr sz="1500" b="1">
-                <a:solidFill>
-                  <a:srgbClr val="FFFFFF"/>
-                </a:solidFill>
-                <a:latin typeface="微软雅黑"/>
-              </a:rPr>
-              <a:t>① 模式</a:t>
-            </a:r>
-          </a:p>
-        </p:txBody>
-      </p:sp>
-      <p:sp>
-        <p:nvSpPr>
-          <p:cNvPr id="6" name="TextBox 5"/>
+            <a:pPr>
+              <a:spcAft>
+                <a:spcPts val="1200"/>
+              </a:spcAft>
+            </a:pPr>
+            <a:r>
+              <a:rPr sz="1600" b="0">
+                <a:solidFill>
+                  <a:srgbClr val="1B2430"/>
+                </a:solidFill>
+                <a:latin typeface="微软雅黑"/>
+              </a:rPr>
+              <a:t>① 数据抽查：安克 2025 营收 305.1 亿 与公开报道核对一致</a:t>
+            </a:r>
+          </a:p>
+          <a:p>
+            <a:pPr>
+              <a:spcAft>
+                <a:spcPts val="1200"/>
+              </a:spcAft>
+            </a:pPr>
+            <a:r>
+              <a:rPr sz="1600" b="0">
+                <a:solidFill>
+                  <a:srgbClr val="1B2430"/>
+                </a:solidFill>
+                <a:latin typeface="微软雅黑"/>
+              </a:rPr>
+              <a:t>② 交叉验证：调节表（存货 -20 亿）↔ 资产负债表（存货 +17.6 亿）互相印证</a:t>
+            </a:r>
+          </a:p>
+          <a:p>
+            <a:pPr>
+              <a:spcAft>
+                <a:spcPts val="1200"/>
+              </a:spcAft>
+            </a:pPr>
+            <a:r>
+              <a:rPr sz="1600" b="0">
+                <a:solidFill>
+                  <a:srgbClr val="1B2430"/>
+                </a:solidFill>
+                <a:latin typeface="微软雅黑"/>
+              </a:rPr>
+              <a:t>③ 主动声明局限：上市公司是幸存者（幸存者偏差）；欧美细分只有致欧披露；吉宏含包装需看分部</a:t>
+            </a:r>
+          </a:p>
+          <a:p>
+            <a:pPr>
+              <a:spcAft>
+                <a:spcPts val="1200"/>
+              </a:spcAft>
+            </a:pPr>
+            <a:r>
+              <a:rPr sz="1600" b="1">
+                <a:solidFill>
+                  <a:srgbClr val="1B2430"/>
+                </a:solidFill>
+                <a:latin typeface="微软雅黑"/>
+              </a:rPr>
+              <a:t>▪ 结论只到证据能到的地方：安克备货是主动还是被动？→ 标“待年报附注确认”，不下定论</a:t>
+            </a:r>
+          </a:p>
+        </p:txBody>
+      </p:sp>
+      <p:sp>
+        <p:nvSpPr>
+          <p:cNvPr id="5" name="TextBox 4"/>
           <p:cNvSpPr txBox="1"/>
           <p:nvPr/>
         </p:nvSpPr>
         <p:spPr>
           <a:xfrm>
-            <a:off x="1554480" y="2103120"/>
-            <a:ext cx="9966960" cy="685800"/>
+            <a:off x="640080" y="6446520"/>
+            <a:ext cx="3657600" cy="320040"/>
           </a:xfrm>
           <a:prstGeom prst="rect">
             <a:avLst/>
@@ -4101,71 +4150,27 @@
           <a:lstStyle/>
           <a:p>
             <a:r>
-              <a:rPr sz="1550" b="0">
-                <a:solidFill>
-                  <a:srgbClr val="1B2430"/>
-                </a:solidFill>
-                <a:latin typeface="微软雅黑"/>
-              </a:rPr>
-              <a:t>销售费用率是分水岭：精品 22% vs 铺货 35%，毛利率高≠赚钱</a:t>
-            </a:r>
-          </a:p>
-        </p:txBody>
-      </p:sp>
-      <p:sp>
-        <p:nvSpPr>
-          <p:cNvPr id="7" name="Rectangle 6"/>
-          <p:cNvSpPr/>
-          <p:nvPr/>
-        </p:nvSpPr>
-        <p:spPr>
-          <a:xfrm>
-            <a:off x="640080" y="3044952"/>
-            <a:ext cx="658368" cy="841248"/>
-          </a:xfrm>
-          <a:prstGeom prst="rect">
-            <a:avLst/>
-          </a:prstGeom>
-          <a:solidFill>
-            <a:srgbClr val="2F5AA8"/>
-          </a:solidFill>
-          <a:ln>
-            <a:noFill/>
-          </a:ln>
-          <a:effectLst/>
-        </p:spPr>
-        <p:style>
-          <a:lnRef idx="1">
-            <a:schemeClr val="accent1"/>
-          </a:lnRef>
-          <a:fillRef idx="3">
-            <a:schemeClr val="accent1"/>
-          </a:fillRef>
-          <a:effectRef idx="2">
-            <a:schemeClr val="accent1"/>
-          </a:effectRef>
-          <a:fontRef idx="minor">
-            <a:schemeClr val="lt1"/>
-          </a:fontRef>
-        </p:style>
-        <p:txBody>
-          <a:bodyPr rtlCol="0" anchor="ctr"/>
-          <a:lstStyle/>
-          <a:p>
-            <a:pPr algn="ctr"/>
-          </a:p>
-        </p:txBody>
-      </p:sp>
-      <p:sp>
-        <p:nvSpPr>
-          <p:cNvPr id="8" name="TextBox 7"/>
+              <a:rPr sz="950" b="0">
+                <a:solidFill>
+                  <a:srgbClr val="5B6470"/>
+                </a:solidFill>
+                <a:latin typeface="微软雅黑"/>
+              </a:rPr>
+              <a:t>Xuefei Wang · 2026</a:t>
+            </a:r>
+          </a:p>
+        </p:txBody>
+      </p:sp>
+      <p:sp>
+        <p:nvSpPr>
+          <p:cNvPr id="6" name="TextBox 5"/>
           <p:cNvSpPr txBox="1"/>
           <p:nvPr/>
         </p:nvSpPr>
         <p:spPr>
           <a:xfrm>
-            <a:off x="640080" y="3246120"/>
-            <a:ext cx="658368" cy="457200"/>
+            <a:off x="10972800" y="6446520"/>
+            <a:ext cx="640080" cy="320040"/>
           </a:xfrm>
           <a:prstGeom prst="rect">
             <a:avLst/>
@@ -4178,301 +4183,7 @@
           </a:bodyPr>
           <a:lstStyle/>
           <a:p>
-            <a:pPr algn="ctr"/>
-            <a:r>
-              <a:rPr sz="1500" b="1">
-                <a:solidFill>
-                  <a:srgbClr val="FFFFFF"/>
-                </a:solidFill>
-                <a:latin typeface="微软雅黑"/>
-              </a:rPr>
-              <a:t>② 市场</a:t>
-            </a:r>
-          </a:p>
-        </p:txBody>
-      </p:sp>
-      <p:sp>
-        <p:nvSpPr>
-          <p:cNvPr id="9" name="TextBox 8"/>
-          <p:cNvSpPr txBox="1"/>
-          <p:nvPr/>
-        </p:nvSpPr>
-        <p:spPr>
-          <a:xfrm>
-            <a:off x="1554480" y="3136392"/>
-            <a:ext cx="9966960" cy="685800"/>
-          </a:xfrm>
-          <a:prstGeom prst="rect">
-            <a:avLst/>
-          </a:prstGeom>
-          <a:noFill/>
-        </p:spPr>
-        <p:txBody>
-          <a:bodyPr wrap="square">
-            <a:spAutoFit/>
-          </a:bodyPr>
-          <a:lstStyle/>
-          <a:p>
-            <a:r>
-              <a:rPr sz="1550" b="0">
-                <a:solidFill>
-                  <a:srgbClr val="1B2430"/>
-                </a:solidFill>
-                <a:latin typeface="微软雅黑"/>
-              </a:rPr>
-              <a:t>美国走规模、欧洲赚毛利；本地化是欧洲的隐形门槛</a:t>
-            </a:r>
-          </a:p>
-        </p:txBody>
-      </p:sp>
-      <p:sp>
-        <p:nvSpPr>
-          <p:cNvPr id="10" name="Rectangle 9"/>
-          <p:cNvSpPr/>
-          <p:nvPr/>
-        </p:nvSpPr>
-        <p:spPr>
-          <a:xfrm>
-            <a:off x="640080" y="4078224"/>
-            <a:ext cx="658368" cy="841248"/>
-          </a:xfrm>
-          <a:prstGeom prst="rect">
-            <a:avLst/>
-          </a:prstGeom>
-          <a:solidFill>
-            <a:srgbClr val="2F5AA8"/>
-          </a:solidFill>
-          <a:ln>
-            <a:noFill/>
-          </a:ln>
-          <a:effectLst/>
-        </p:spPr>
-        <p:style>
-          <a:lnRef idx="1">
-            <a:schemeClr val="accent1"/>
-          </a:lnRef>
-          <a:fillRef idx="3">
-            <a:schemeClr val="accent1"/>
-          </a:fillRef>
-          <a:effectRef idx="2">
-            <a:schemeClr val="accent1"/>
-          </a:effectRef>
-          <a:fontRef idx="minor">
-            <a:schemeClr val="lt1"/>
-          </a:fontRef>
-        </p:style>
-        <p:txBody>
-          <a:bodyPr rtlCol="0" anchor="ctr"/>
-          <a:lstStyle/>
-          <a:p>
-            <a:pPr algn="ctr"/>
-          </a:p>
-        </p:txBody>
-      </p:sp>
-      <p:sp>
-        <p:nvSpPr>
-          <p:cNvPr id="11" name="TextBox 10"/>
-          <p:cNvSpPr txBox="1"/>
-          <p:nvPr/>
-        </p:nvSpPr>
-        <p:spPr>
-          <a:xfrm>
-            <a:off x="640080" y="4279392"/>
-            <a:ext cx="658368" cy="457200"/>
-          </a:xfrm>
-          <a:prstGeom prst="rect">
-            <a:avLst/>
-          </a:prstGeom>
-          <a:noFill/>
-        </p:spPr>
-        <p:txBody>
-          <a:bodyPr wrap="square">
-            <a:spAutoFit/>
-          </a:bodyPr>
-          <a:lstStyle/>
-          <a:p>
-            <a:pPr algn="ctr"/>
-            <a:r>
-              <a:rPr sz="1500" b="1">
-                <a:solidFill>
-                  <a:srgbClr val="FFFFFF"/>
-                </a:solidFill>
-                <a:latin typeface="微软雅黑"/>
-              </a:rPr>
-              <a:t>③ 现金流</a:t>
-            </a:r>
-          </a:p>
-        </p:txBody>
-      </p:sp>
-      <p:sp>
-        <p:nvSpPr>
-          <p:cNvPr id="12" name="TextBox 11"/>
-          <p:cNvSpPr txBox="1"/>
-          <p:nvPr/>
-        </p:nvSpPr>
-        <p:spPr>
-          <a:xfrm>
-            <a:off x="1554480" y="4169663"/>
-            <a:ext cx="9966960" cy="685800"/>
-          </a:xfrm>
-          <a:prstGeom prst="rect">
-            <a:avLst/>
-          </a:prstGeom>
-          <a:noFill/>
-        </p:spPr>
-        <p:txBody>
-          <a:bodyPr wrap="square">
-            <a:spAutoFit/>
-          </a:bodyPr>
-          <a:lstStyle/>
-          <a:p>
-            <a:r>
-              <a:rPr sz="1550" b="0">
-                <a:solidFill>
-                  <a:srgbClr val="1B2430"/>
-                </a:solidFill>
-                <a:latin typeface="微软雅黑"/>
-              </a:rPr>
-              <a:t>利润≠现金：备货与回款是跨境电商的生死线</a:t>
-            </a:r>
-          </a:p>
-        </p:txBody>
-      </p:sp>
-      <p:sp>
-        <p:nvSpPr>
-          <p:cNvPr id="13" name="Rectangle 12"/>
-          <p:cNvSpPr/>
-          <p:nvPr/>
-        </p:nvSpPr>
-        <p:spPr>
-          <a:xfrm>
-            <a:off x="640080" y="5111496"/>
-            <a:ext cx="658368" cy="841248"/>
-          </a:xfrm>
-          <a:prstGeom prst="rect">
-            <a:avLst/>
-          </a:prstGeom>
-          <a:solidFill>
-            <a:srgbClr val="2F5AA8"/>
-          </a:solidFill>
-          <a:ln>
-            <a:noFill/>
-          </a:ln>
-          <a:effectLst/>
-        </p:spPr>
-        <p:style>
-          <a:lnRef idx="1">
-            <a:schemeClr val="accent1"/>
-          </a:lnRef>
-          <a:fillRef idx="3">
-            <a:schemeClr val="accent1"/>
-          </a:fillRef>
-          <a:effectRef idx="2">
-            <a:schemeClr val="accent1"/>
-          </a:effectRef>
-          <a:fontRef idx="minor">
-            <a:schemeClr val="lt1"/>
-          </a:fontRef>
-        </p:style>
-        <p:txBody>
-          <a:bodyPr rtlCol="0" anchor="ctr"/>
-          <a:lstStyle/>
-          <a:p>
-            <a:pPr algn="ctr"/>
-          </a:p>
-        </p:txBody>
-      </p:sp>
-      <p:sp>
-        <p:nvSpPr>
-          <p:cNvPr id="14" name="TextBox 13"/>
-          <p:cNvSpPr txBox="1"/>
-          <p:nvPr/>
-        </p:nvSpPr>
-        <p:spPr>
-          <a:xfrm>
-            <a:off x="640080" y="5312664"/>
-            <a:ext cx="658368" cy="457200"/>
-          </a:xfrm>
-          <a:prstGeom prst="rect">
-            <a:avLst/>
-          </a:prstGeom>
-          <a:noFill/>
-        </p:spPr>
-        <p:txBody>
-          <a:bodyPr wrap="square">
-            <a:spAutoFit/>
-          </a:bodyPr>
-          <a:lstStyle/>
-          <a:p>
-            <a:pPr algn="ctr"/>
-            <a:r>
-              <a:rPr sz="1500" b="1">
-                <a:solidFill>
-                  <a:srgbClr val="FFFFFF"/>
-                </a:solidFill>
-                <a:latin typeface="微软雅黑"/>
-              </a:rPr>
-              <a:t>④ 格局</a:t>
-            </a:r>
-          </a:p>
-        </p:txBody>
-      </p:sp>
-      <p:sp>
-        <p:nvSpPr>
-          <p:cNvPr id="15" name="TextBox 14"/>
-          <p:cNvSpPr txBox="1"/>
-          <p:nvPr/>
-        </p:nvSpPr>
-        <p:spPr>
-          <a:xfrm>
-            <a:off x="1554480" y="5202936"/>
-            <a:ext cx="9966960" cy="685800"/>
-          </a:xfrm>
-          <a:prstGeom prst="rect">
-            <a:avLst/>
-          </a:prstGeom>
-          <a:noFill/>
-        </p:spPr>
-        <p:txBody>
-          <a:bodyPr wrap="square">
-            <a:spAutoFit/>
-          </a:bodyPr>
-          <a:lstStyle/>
-          <a:p>
-            <a:r>
-              <a:rPr sz="1550" b="0">
-                <a:solidFill>
-                  <a:srgbClr val="1B2430"/>
-                </a:solidFill>
-                <a:latin typeface="微软雅黑"/>
-              </a:rPr>
-              <a:t>龙头集中度 &lt;3%：细分做深（如目录式长尾品牌）是中小卖家的路</a:t>
-            </a:r>
-          </a:p>
-        </p:txBody>
-      </p:sp>
-      <p:sp>
-        <p:nvSpPr>
-          <p:cNvPr id="16" name="TextBox 15"/>
-          <p:cNvSpPr txBox="1"/>
-          <p:nvPr/>
-        </p:nvSpPr>
-        <p:spPr>
-          <a:xfrm>
-            <a:off x="640080" y="6446520"/>
-            <a:ext cx="3657600" cy="320040"/>
-          </a:xfrm>
-          <a:prstGeom prst="rect">
-            <a:avLst/>
-          </a:prstGeom>
-          <a:noFill/>
-        </p:spPr>
-        <p:txBody>
-          <a:bodyPr wrap="square">
-            <a:spAutoFit/>
-          </a:bodyPr>
-          <a:lstStyle/>
-          <a:p>
+            <a:pPr algn="r"/>
             <a:r>
               <a:rPr sz="950" b="0">
                 <a:solidFill>
@@ -4480,42 +4191,7 @@
                 </a:solidFill>
                 <a:latin typeface="微软雅黑"/>
               </a:rPr>
-              <a:t>Xuefei Wang · 2026</a:t>
-            </a:r>
-          </a:p>
-        </p:txBody>
-      </p:sp>
-      <p:sp>
-        <p:nvSpPr>
-          <p:cNvPr id="17" name="TextBox 16"/>
-          <p:cNvSpPr txBox="1"/>
-          <p:nvPr/>
-        </p:nvSpPr>
-        <p:spPr>
-          <a:xfrm>
-            <a:off x="10972800" y="6446520"/>
-            <a:ext cx="640080" cy="320040"/>
-          </a:xfrm>
-          <a:prstGeom prst="rect">
-            <a:avLst/>
-          </a:prstGeom>
-          <a:noFill/>
-        </p:spPr>
-        <p:txBody>
-          <a:bodyPr wrap="square">
-            <a:spAutoFit/>
-          </a:bodyPr>
-          <a:lstStyle/>
-          <a:p>
-            <a:pPr algn="r"/>
-            <a:r>
-              <a:rPr sz="950" b="0">
-                <a:solidFill>
-                  <a:srgbClr val="5B6470"/>
-                </a:solidFill>
-                <a:latin typeface="微软雅黑"/>
-              </a:rPr>
-              <a:t>12 / 15</a:t>
+              <a:t>12 / 16</a:t>
             </a:r>
           </a:p>
         </p:txBody>
@@ -4611,7 +4287,7 @@
                 </a:solidFill>
                 <a:latin typeface="微软雅黑"/>
               </a:rPr>
-              <a:t>PRODUCTIZE · 落地</a:t>
+              <a:t>CONCLUSION · 结论</a:t>
             </a:r>
           </a:p>
           <a:p>
@@ -4627,7 +4303,7 @@
                 </a:solidFill>
                 <a:latin typeface="微软雅黑"/>
               </a:rPr>
-              <a:t>把结论做成能用的工具：创业决策工作台</a:t>
+              <a:t>四个可以带走、也能被追问的判断</a:t>
             </a:r>
           </a:p>
         </p:txBody>
@@ -4640,14 +4316,14 @@
         </p:nvSpPr>
         <p:spPr>
           <a:xfrm>
-            <a:off x="640080" y="2057400"/>
-            <a:ext cx="4572000" cy="822960"/>
+            <a:off x="640080" y="2011680"/>
+            <a:ext cx="658368" cy="841248"/>
           </a:xfrm>
           <a:prstGeom prst="rect">
             <a:avLst/>
           </a:prstGeom>
           <a:solidFill>
-            <a:srgbClr val="F3F5F8"/>
+            <a:srgbClr val="2F5AA8"/>
           </a:solidFill>
           <a:ln>
             <a:noFill/>
@@ -4684,8 +4360,8 @@
         </p:nvSpPr>
         <p:spPr>
           <a:xfrm>
-            <a:off x="868680" y="2167128"/>
-            <a:ext cx="4206240" cy="640080"/>
+            <a:off x="640080" y="2212848"/>
+            <a:ext cx="658368" cy="457200"/>
           </a:xfrm>
           <a:prstGeom prst="rect">
             <a:avLst/>
@@ -4698,14 +4374,15 @@
           </a:bodyPr>
           <a:lstStyle/>
           <a:p>
-            <a:r>
-              <a:rPr sz="1550" b="1">
-                <a:solidFill>
-                  <a:srgbClr val="2F5AA8"/>
-                </a:solidFill>
-                <a:latin typeface="微软雅黑"/>
-              </a:rPr>
-              <a:t>P1 单位经济测算</a:t>
+            <a:pPr algn="ctr"/>
+            <a:r>
+              <a:rPr sz="1500" b="1">
+                <a:solidFill>
+                  <a:srgbClr val="FFFFFF"/>
+                </a:solidFill>
+                <a:latin typeface="微软雅黑"/>
+              </a:rPr>
+              <a:t>① 模式</a:t>
             </a:r>
           </a:p>
         </p:txBody>
@@ -4718,8 +4395,8 @@
         </p:nvSpPr>
         <p:spPr>
           <a:xfrm>
-            <a:off x="5486400" y="2148840"/>
-            <a:ext cx="6126480" cy="685800"/>
+            <a:off x="1554480" y="2103120"/>
+            <a:ext cx="9966960" cy="685800"/>
           </a:xfrm>
           <a:prstGeom prst="rect">
             <a:avLst/>
@@ -4733,13 +4410,13 @@
           <a:lstStyle/>
           <a:p>
             <a:r>
-              <a:rPr sz="1400" b="0">
-                <a:solidFill>
-                  <a:srgbClr val="5B6470"/>
-                </a:solidFill>
-                <a:latin typeface="微软雅黑"/>
-              </a:rPr>
-              <a:t>单件赚不赚钱？盈亏平衡 ACOS；Case Pack 双方案对比</a:t>
+              <a:rPr sz="1550" b="0">
+                <a:solidFill>
+                  <a:srgbClr val="1B2430"/>
+                </a:solidFill>
+                <a:latin typeface="微软雅黑"/>
+              </a:rPr>
+              <a:t>销售费用率是分水岭：精品 22% vs 铺货 35%，毛利率高≠赚钱</a:t>
             </a:r>
           </a:p>
         </p:txBody>
@@ -4752,14 +4429,14 @@
         </p:nvSpPr>
         <p:spPr>
           <a:xfrm>
-            <a:off x="640080" y="3017520"/>
-            <a:ext cx="4572000" cy="822960"/>
+            <a:off x="640080" y="3044952"/>
+            <a:ext cx="658368" cy="841248"/>
           </a:xfrm>
           <a:prstGeom prst="rect">
             <a:avLst/>
           </a:prstGeom>
           <a:solidFill>
-            <a:srgbClr val="F3F5F8"/>
+            <a:srgbClr val="2F5AA8"/>
           </a:solidFill>
           <a:ln>
             <a:noFill/>
@@ -4796,8 +4473,8 @@
         </p:nvSpPr>
         <p:spPr>
           <a:xfrm>
-            <a:off x="868680" y="3127248"/>
-            <a:ext cx="4206240" cy="640080"/>
+            <a:off x="640080" y="3246120"/>
+            <a:ext cx="658368" cy="457200"/>
           </a:xfrm>
           <a:prstGeom prst="rect">
             <a:avLst/>
@@ -4810,14 +4487,15 @@
           </a:bodyPr>
           <a:lstStyle/>
           <a:p>
-            <a:r>
-              <a:rPr sz="1550" b="1">
-                <a:solidFill>
-                  <a:srgbClr val="2F5AA8"/>
-                </a:solidFill>
-                <a:latin typeface="微软雅黑"/>
-              </a:rPr>
-              <a:t>P2 选品类助手</a:t>
+            <a:pPr algn="ctr"/>
+            <a:r>
+              <a:rPr sz="1500" b="1">
+                <a:solidFill>
+                  <a:srgbClr val="FFFFFF"/>
+                </a:solidFill>
+                <a:latin typeface="微软雅黑"/>
+              </a:rPr>
+              <a:t>② 市场</a:t>
             </a:r>
           </a:p>
         </p:txBody>
@@ -4830,8 +4508,8 @@
         </p:nvSpPr>
         <p:spPr>
           <a:xfrm>
-            <a:off x="5486400" y="3108960"/>
-            <a:ext cx="6126480" cy="685800"/>
+            <a:off x="1554480" y="3136392"/>
+            <a:ext cx="9966960" cy="685800"/>
           </a:xfrm>
           <a:prstGeom prst="rect">
             <a:avLst/>
@@ -4845,13 +4523,13 @@
           <a:lstStyle/>
           <a:p>
             <a:r>
-              <a:rPr sz="1400" b="0">
-                <a:solidFill>
-                  <a:srgbClr val="5B6470"/>
-                </a:solidFill>
-                <a:latin typeface="微软雅黑"/>
-              </a:rPr>
-              <a:t>单位经济可行性 + 风险规则 → 能不能做</a:t>
+              <a:rPr sz="1550" b="0">
+                <a:solidFill>
+                  <a:srgbClr val="1B2430"/>
+                </a:solidFill>
+                <a:latin typeface="微软雅黑"/>
+              </a:rPr>
+              <a:t>美国走规模、欧洲赚毛利；本地化是欧洲的隐形门槛</a:t>
             </a:r>
           </a:p>
         </p:txBody>
@@ -4864,14 +4542,14 @@
         </p:nvSpPr>
         <p:spPr>
           <a:xfrm>
-            <a:off x="640080" y="3977639"/>
-            <a:ext cx="4572000" cy="822960"/>
+            <a:off x="640080" y="4078224"/>
+            <a:ext cx="658368" cy="841248"/>
           </a:xfrm>
           <a:prstGeom prst="rect">
             <a:avLst/>
           </a:prstGeom>
           <a:solidFill>
-            <a:srgbClr val="F3F5F8"/>
+            <a:srgbClr val="2F5AA8"/>
           </a:solidFill>
           <a:ln>
             <a:noFill/>
@@ -4908,8 +4586,8 @@
         </p:nvSpPr>
         <p:spPr>
           <a:xfrm>
-            <a:off x="868680" y="4087368"/>
-            <a:ext cx="4206240" cy="640080"/>
+            <a:off x="640080" y="4279392"/>
+            <a:ext cx="658368" cy="457200"/>
           </a:xfrm>
           <a:prstGeom prst="rect">
             <a:avLst/>
@@ -4922,14 +4600,15 @@
           </a:bodyPr>
           <a:lstStyle/>
           <a:p>
-            <a:r>
-              <a:rPr sz="1550" b="1">
-                <a:solidFill>
-                  <a:srgbClr val="2F5AA8"/>
-                </a:solidFill>
-                <a:latin typeface="微软雅黑"/>
-              </a:rPr>
-              <a:t>P3 市场选择器</a:t>
+            <a:pPr algn="ctr"/>
+            <a:r>
+              <a:rPr sz="1500" b="1">
+                <a:solidFill>
+                  <a:srgbClr val="FFFFFF"/>
+                </a:solidFill>
+                <a:latin typeface="微软雅黑"/>
+              </a:rPr>
+              <a:t>③ 现金流</a:t>
             </a:r>
           </a:p>
         </p:txBody>
@@ -4942,8 +4621,8 @@
         </p:nvSpPr>
         <p:spPr>
           <a:xfrm>
-            <a:off x="5486400" y="4069079"/>
-            <a:ext cx="6126480" cy="685800"/>
+            <a:off x="1554480" y="4169663"/>
+            <a:ext cx="9966960" cy="685800"/>
           </a:xfrm>
           <a:prstGeom prst="rect">
             <a:avLst/>
@@ -4957,13 +4636,13 @@
           <a:lstStyle/>
           <a:p>
             <a:r>
-              <a:rPr sz="1400" b="0">
-                <a:solidFill>
-                  <a:srgbClr val="5B6470"/>
-                </a:solidFill>
-                <a:latin typeface="微软雅黑"/>
-              </a:rPr>
-              <a:t>规模 / 毛利 / 竞争 / 本地化 加权 → 先做哪个市场</a:t>
+              <a:rPr sz="1550" b="0">
+                <a:solidFill>
+                  <a:srgbClr val="1B2430"/>
+                </a:solidFill>
+                <a:latin typeface="微软雅黑"/>
+              </a:rPr>
+              <a:t>利润≠现金：备货与回款是跨境电商的生死线</a:t>
             </a:r>
           </a:p>
         </p:txBody>
@@ -4976,14 +4655,14 @@
         </p:nvSpPr>
         <p:spPr>
           <a:xfrm>
-            <a:off x="640080" y="4937759"/>
-            <a:ext cx="4572000" cy="822960"/>
+            <a:off x="640080" y="5111496"/>
+            <a:ext cx="658368" cy="841248"/>
           </a:xfrm>
           <a:prstGeom prst="rect">
             <a:avLst/>
           </a:prstGeom>
           <a:solidFill>
-            <a:srgbClr val="F3F5F8"/>
+            <a:srgbClr val="2F5AA8"/>
           </a:solidFill>
           <a:ln>
             <a:noFill/>
@@ -5020,8 +4699,8 @@
         </p:nvSpPr>
         <p:spPr>
           <a:xfrm>
-            <a:off x="868680" y="5047488"/>
-            <a:ext cx="4206240" cy="640080"/>
+            <a:off x="640080" y="5312664"/>
+            <a:ext cx="658368" cy="457200"/>
           </a:xfrm>
           <a:prstGeom prst="rect">
             <a:avLst/>
@@ -5034,14 +4713,15 @@
           </a:bodyPr>
           <a:lstStyle/>
           <a:p>
-            <a:r>
-              <a:rPr sz="1550" b="1">
-                <a:solidFill>
-                  <a:srgbClr val="2F5AA8"/>
-                </a:solidFill>
-                <a:latin typeface="微软雅黑"/>
-              </a:rPr>
-              <a:t>P4 经营健康体检</a:t>
+            <a:pPr algn="ctr"/>
+            <a:r>
+              <a:rPr sz="1500" b="1">
+                <a:solidFill>
+                  <a:srgbClr val="FFFFFF"/>
+                </a:solidFill>
+                <a:latin typeface="微软雅黑"/>
+              </a:rPr>
+              <a:t>④ 格局</a:t>
             </a:r>
           </a:p>
         </p:txBody>
@@ -5054,8 +4734,8 @@
         </p:nvSpPr>
         <p:spPr>
           <a:xfrm>
-            <a:off x="5486400" y="5029199"/>
-            <a:ext cx="6126480" cy="685800"/>
+            <a:off x="1554480" y="5202936"/>
+            <a:ext cx="9966960" cy="685800"/>
           </a:xfrm>
           <a:prstGeom prst="rect">
             <a:avLst/>
@@ -5069,13 +4749,13 @@
           <a:lstStyle/>
           <a:p>
             <a:r>
-              <a:rPr sz="1400" b="0">
-                <a:solidFill>
-                  <a:srgbClr val="5B6470"/>
-                </a:solidFill>
-                <a:latin typeface="微软雅黑"/>
-              </a:rPr>
-              <a:t>输入你的指标 → 对标 5 家上市公司 → 危险信号 + 阶段建议</a:t>
+              <a:rPr sz="1550" b="0">
+                <a:solidFill>
+                  <a:srgbClr val="1B2430"/>
+                </a:solidFill>
+                <a:latin typeface="微软雅黑"/>
+              </a:rPr>
+              <a:t>龙头集中度 &lt;3%：细分做深（如目录式长尾品牌）是中小卖家的路</a:t>
             </a:r>
           </a:p>
         </p:txBody>
@@ -5088,8 +4768,8 @@
         </p:nvSpPr>
         <p:spPr>
           <a:xfrm>
-            <a:off x="640080" y="6126480"/>
-            <a:ext cx="10972800" cy="457200"/>
+            <a:off x="640080" y="6446520"/>
+            <a:ext cx="3657600" cy="320040"/>
           </a:xfrm>
           <a:prstGeom prst="rect">
             <a:avLst/>
@@ -5103,13 +4783,13 @@
           <a:lstStyle/>
           <a:p>
             <a:r>
-              <a:rPr sz="1250" b="1">
-                <a:solidFill>
-                  <a:srgbClr val="C97B1E"/>
-                </a:solidFill>
-                <a:latin typeface="微软雅黑"/>
-              </a:rPr>
-              <a:t>从“看报表”到“能决策”：每一页都基于 5 家公司的真实财务基准</a:t>
+              <a:rPr sz="950" b="0">
+                <a:solidFill>
+                  <a:srgbClr val="5B6470"/>
+                </a:solidFill>
+                <a:latin typeface="微软雅黑"/>
+              </a:rPr>
+              <a:t>Xuefei Wang · 2026</a:t>
             </a:r>
           </a:p>
         </p:txBody>
@@ -5122,8 +4802,8 @@
         </p:nvSpPr>
         <p:spPr>
           <a:xfrm>
-            <a:off x="640080" y="6446520"/>
-            <a:ext cx="3657600" cy="320040"/>
+            <a:off x="10972800" y="6446520"/>
+            <a:ext cx="640080" cy="320040"/>
           </a:xfrm>
           <a:prstGeom prst="rect">
             <a:avLst/>
@@ -5136,6 +4816,7 @@
           </a:bodyPr>
           <a:lstStyle/>
           <a:p>
+            <a:pPr algn="r"/>
             <a:r>
               <a:rPr sz="950" b="0">
                 <a:solidFill>
@@ -5143,42 +4824,7 @@
                 </a:solidFill>
                 <a:latin typeface="微软雅黑"/>
               </a:rPr>
-              <a:t>Xuefei Wang · 2026</a:t>
-            </a:r>
-          </a:p>
-        </p:txBody>
-      </p:sp>
-      <p:sp>
-        <p:nvSpPr>
-          <p:cNvPr id="18" name="TextBox 17"/>
-          <p:cNvSpPr txBox="1"/>
-          <p:nvPr/>
-        </p:nvSpPr>
-        <p:spPr>
-          <a:xfrm>
-            <a:off x="10972800" y="6446520"/>
-            <a:ext cx="640080" cy="320040"/>
-          </a:xfrm>
-          <a:prstGeom prst="rect">
-            <a:avLst/>
-          </a:prstGeom>
-          <a:noFill/>
-        </p:spPr>
-        <p:txBody>
-          <a:bodyPr wrap="square">
-            <a:spAutoFit/>
-          </a:bodyPr>
-          <a:lstStyle/>
-          <a:p>
-            <a:pPr algn="r"/>
-            <a:r>
-              <a:rPr sz="950" b="0">
-                <a:solidFill>
-                  <a:srgbClr val="5B6470"/>
-                </a:solidFill>
-                <a:latin typeface="微软雅黑"/>
-              </a:rPr>
-              <a:t>13 / 15</a:t>
+              <a:t>13 / 16</a:t>
             </a:r>
           </a:p>
         </p:txBody>
@@ -5274,7 +4920,7 @@
                 </a:solidFill>
                 <a:latin typeface="微软雅黑"/>
               </a:rPr>
-              <a:t>REFLECTION · 复盘</a:t>
+              <a:t>PRODUCTIZE · 落地</a:t>
             </a:r>
           </a:p>
           <a:p>
@@ -5290,21 +4936,65 @@
                 </a:solidFill>
                 <a:latin typeface="微软雅黑"/>
               </a:rPr>
-              <a:t>做得好的 &amp; 下次能更好的</a:t>
-            </a:r>
-          </a:p>
-        </p:txBody>
-      </p:sp>
-      <p:sp>
-        <p:nvSpPr>
-          <p:cNvPr id="4" name="TextBox 3"/>
+              <a:t>把结论做成能用的工具：创业决策工作台</a:t>
+            </a:r>
+          </a:p>
+        </p:txBody>
+      </p:sp>
+      <p:sp>
+        <p:nvSpPr>
+          <p:cNvPr id="4" name="Rectangle 3"/>
+          <p:cNvSpPr/>
+          <p:nvPr/>
+        </p:nvSpPr>
+        <p:spPr>
+          <a:xfrm>
+            <a:off x="640080" y="2057400"/>
+            <a:ext cx="4572000" cy="822960"/>
+          </a:xfrm>
+          <a:prstGeom prst="rect">
+            <a:avLst/>
+          </a:prstGeom>
+          <a:solidFill>
+            <a:srgbClr val="F3F5F8"/>
+          </a:solidFill>
+          <a:ln>
+            <a:noFill/>
+          </a:ln>
+          <a:effectLst/>
+        </p:spPr>
+        <p:style>
+          <a:lnRef idx="1">
+            <a:schemeClr val="accent1"/>
+          </a:lnRef>
+          <a:fillRef idx="3">
+            <a:schemeClr val="accent1"/>
+          </a:fillRef>
+          <a:effectRef idx="2">
+            <a:schemeClr val="accent1"/>
+          </a:effectRef>
+          <a:fontRef idx="minor">
+            <a:schemeClr val="lt1"/>
+          </a:fontRef>
+        </p:style>
+        <p:txBody>
+          <a:bodyPr rtlCol="0" anchor="ctr"/>
+          <a:lstStyle/>
+          <a:p>
+            <a:pPr algn="ctr"/>
+          </a:p>
+        </p:txBody>
+      </p:sp>
+      <p:sp>
+        <p:nvSpPr>
+          <p:cNvPr id="5" name="TextBox 4"/>
           <p:cNvSpPr txBox="1"/>
           <p:nvPr/>
         </p:nvSpPr>
         <p:spPr>
           <a:xfrm>
-            <a:off x="640080" y="1874519"/>
-            <a:ext cx="6035040" cy="4572000"/>
+            <a:off x="868680" y="2167128"/>
+            <a:ext cx="4206240" cy="640080"/>
           </a:xfrm>
           <a:prstGeom prst="rect">
             <a:avLst/>
@@ -5317,81 +5007,28 @@
           </a:bodyPr>
           <a:lstStyle/>
           <a:p>
-            <a:pPr>
-              <a:spcAft>
-                <a:spcPts val="1200"/>
-              </a:spcAft>
-            </a:pPr>
-            <a:r>
-              <a:rPr sz="1600" b="1">
-                <a:solidFill>
-                  <a:srgbClr val="1B2430"/>
-                </a:solidFill>
-                <a:latin typeface="微软雅黑"/>
-              </a:rPr>
-              <a:t>▪ 做得好的：从亲身困惑出发 / 三层框架 / 现金流深挖 / 把结论做成工具</a:t>
-            </a:r>
-          </a:p>
-          <a:p>
-            <a:pPr>
-              <a:spcAft>
-                <a:spcPts val="1200"/>
-              </a:spcAft>
-            </a:pPr>
-            <a:r>
-              <a:rPr sz="1600" b="0">
-                <a:solidFill>
-                  <a:srgbClr val="1B2430"/>
-                </a:solidFill>
-                <a:latin typeface="微软雅黑"/>
-              </a:rPr>
-              <a:t>▪ 不足与边界：销售费用没拆“广告 vs 佣金”；缺 2026H1 与关税影响；供应商报价、需求热度这类私有数据只能给框架</a:t>
-            </a:r>
-          </a:p>
-          <a:p>
-            <a:pPr>
-              <a:spcAft>
-                <a:spcPts val="1200"/>
-              </a:spcAft>
-            </a:pPr>
-            <a:r>
-              <a:rPr sz="1600" b="1">
-                <a:solidFill>
-                  <a:srgbClr val="1B2430"/>
-                </a:solidFill>
-                <a:latin typeface="微软雅黑"/>
-              </a:rPr>
-              <a:t>▪ 如果重来：会更早看现金流量表；先用少量行业访谈补定性，再用数据验证定量</a:t>
-            </a:r>
-          </a:p>
-          <a:p>
-            <a:pPr>
-              <a:spcAft>
-                <a:spcPts val="1200"/>
-              </a:spcAft>
-            </a:pPr>
-            <a:r>
-              <a:rPr sz="1600" b="0">
-                <a:solidFill>
-                  <a:srgbClr val="1B2430"/>
-                </a:solidFill>
-                <a:latin typeface="微软雅黑"/>
-              </a:rPr>
-              <a:t>▪ 可迁移：这套“提问 → 取数 → 验证 → 结论 → 工具化”的流程，适用于任何行业研究 / 商业分析</a:t>
-            </a:r>
-          </a:p>
-        </p:txBody>
-      </p:sp>
-      <p:sp>
-        <p:nvSpPr>
-          <p:cNvPr id="5" name="TextBox 4"/>
+            <a:r>
+              <a:rPr sz="1550" b="1">
+                <a:solidFill>
+                  <a:srgbClr val="2F5AA8"/>
+                </a:solidFill>
+                <a:latin typeface="微软雅黑"/>
+              </a:rPr>
+              <a:t>P1 单位经济测算</a:t>
+            </a:r>
+          </a:p>
+        </p:txBody>
+      </p:sp>
+      <p:sp>
+        <p:nvSpPr>
+          <p:cNvPr id="6" name="TextBox 5"/>
           <p:cNvSpPr txBox="1"/>
           <p:nvPr/>
         </p:nvSpPr>
         <p:spPr>
           <a:xfrm>
-            <a:off x="640080" y="6446520"/>
-            <a:ext cx="3657600" cy="320040"/>
+            <a:off x="5486400" y="2148840"/>
+            <a:ext cx="6126480" cy="685800"/>
           </a:xfrm>
           <a:prstGeom prst="rect">
             <a:avLst/>
@@ -5405,27 +5042,71 @@
           <a:lstStyle/>
           <a:p>
             <a:r>
-              <a:rPr sz="950" b="0">
+              <a:rPr sz="1400" b="0">
                 <a:solidFill>
                   <a:srgbClr val="5B6470"/>
                 </a:solidFill>
                 <a:latin typeface="微软雅黑"/>
               </a:rPr>
-              <a:t>Xuefei Wang · 2026</a:t>
-            </a:r>
-          </a:p>
-        </p:txBody>
-      </p:sp>
-      <p:sp>
-        <p:nvSpPr>
-          <p:cNvPr id="6" name="TextBox 5"/>
+              <a:t>单件赚不赚钱？盈亏平衡 ACOS；Case Pack 双方案对比</a:t>
+            </a:r>
+          </a:p>
+        </p:txBody>
+      </p:sp>
+      <p:sp>
+        <p:nvSpPr>
+          <p:cNvPr id="7" name="Rectangle 6"/>
+          <p:cNvSpPr/>
+          <p:nvPr/>
+        </p:nvSpPr>
+        <p:spPr>
+          <a:xfrm>
+            <a:off x="640080" y="3017520"/>
+            <a:ext cx="4572000" cy="822960"/>
+          </a:xfrm>
+          <a:prstGeom prst="rect">
+            <a:avLst/>
+          </a:prstGeom>
+          <a:solidFill>
+            <a:srgbClr val="F3F5F8"/>
+          </a:solidFill>
+          <a:ln>
+            <a:noFill/>
+          </a:ln>
+          <a:effectLst/>
+        </p:spPr>
+        <p:style>
+          <a:lnRef idx="1">
+            <a:schemeClr val="accent1"/>
+          </a:lnRef>
+          <a:fillRef idx="3">
+            <a:schemeClr val="accent1"/>
+          </a:fillRef>
+          <a:effectRef idx="2">
+            <a:schemeClr val="accent1"/>
+          </a:effectRef>
+          <a:fontRef idx="minor">
+            <a:schemeClr val="lt1"/>
+          </a:fontRef>
+        </p:style>
+        <p:txBody>
+          <a:bodyPr rtlCol="0" anchor="ctr"/>
+          <a:lstStyle/>
+          <a:p>
+            <a:pPr algn="ctr"/>
+          </a:p>
+        </p:txBody>
+      </p:sp>
+      <p:sp>
+        <p:nvSpPr>
+          <p:cNvPr id="8" name="TextBox 7"/>
           <p:cNvSpPr txBox="1"/>
           <p:nvPr/>
         </p:nvSpPr>
         <p:spPr>
           <a:xfrm>
-            <a:off x="10972800" y="6446520"/>
-            <a:ext cx="640080" cy="320040"/>
+            <a:off x="868680" y="3127248"/>
+            <a:ext cx="4206240" cy="640080"/>
           </a:xfrm>
           <a:prstGeom prst="rect">
             <a:avLst/>
@@ -5438,6 +5119,366 @@
           </a:bodyPr>
           <a:lstStyle/>
           <a:p>
+            <a:r>
+              <a:rPr sz="1550" b="1">
+                <a:solidFill>
+                  <a:srgbClr val="2F5AA8"/>
+                </a:solidFill>
+                <a:latin typeface="微软雅黑"/>
+              </a:rPr>
+              <a:t>P2 选品类助手</a:t>
+            </a:r>
+          </a:p>
+        </p:txBody>
+      </p:sp>
+      <p:sp>
+        <p:nvSpPr>
+          <p:cNvPr id="9" name="TextBox 8"/>
+          <p:cNvSpPr txBox="1"/>
+          <p:nvPr/>
+        </p:nvSpPr>
+        <p:spPr>
+          <a:xfrm>
+            <a:off x="5486400" y="3108960"/>
+            <a:ext cx="6126480" cy="685800"/>
+          </a:xfrm>
+          <a:prstGeom prst="rect">
+            <a:avLst/>
+          </a:prstGeom>
+          <a:noFill/>
+        </p:spPr>
+        <p:txBody>
+          <a:bodyPr wrap="square">
+            <a:spAutoFit/>
+          </a:bodyPr>
+          <a:lstStyle/>
+          <a:p>
+            <a:r>
+              <a:rPr sz="1400" b="0">
+                <a:solidFill>
+                  <a:srgbClr val="5B6470"/>
+                </a:solidFill>
+                <a:latin typeface="微软雅黑"/>
+              </a:rPr>
+              <a:t>单位经济可行性 + 风险规则 → 能不能做</a:t>
+            </a:r>
+          </a:p>
+        </p:txBody>
+      </p:sp>
+      <p:sp>
+        <p:nvSpPr>
+          <p:cNvPr id="10" name="Rectangle 9"/>
+          <p:cNvSpPr/>
+          <p:nvPr/>
+        </p:nvSpPr>
+        <p:spPr>
+          <a:xfrm>
+            <a:off x="640080" y="3977639"/>
+            <a:ext cx="4572000" cy="822960"/>
+          </a:xfrm>
+          <a:prstGeom prst="rect">
+            <a:avLst/>
+          </a:prstGeom>
+          <a:solidFill>
+            <a:srgbClr val="F3F5F8"/>
+          </a:solidFill>
+          <a:ln>
+            <a:noFill/>
+          </a:ln>
+          <a:effectLst/>
+        </p:spPr>
+        <p:style>
+          <a:lnRef idx="1">
+            <a:schemeClr val="accent1"/>
+          </a:lnRef>
+          <a:fillRef idx="3">
+            <a:schemeClr val="accent1"/>
+          </a:fillRef>
+          <a:effectRef idx="2">
+            <a:schemeClr val="accent1"/>
+          </a:effectRef>
+          <a:fontRef idx="minor">
+            <a:schemeClr val="lt1"/>
+          </a:fontRef>
+        </p:style>
+        <p:txBody>
+          <a:bodyPr rtlCol="0" anchor="ctr"/>
+          <a:lstStyle/>
+          <a:p>
+            <a:pPr algn="ctr"/>
+          </a:p>
+        </p:txBody>
+      </p:sp>
+      <p:sp>
+        <p:nvSpPr>
+          <p:cNvPr id="11" name="TextBox 10"/>
+          <p:cNvSpPr txBox="1"/>
+          <p:nvPr/>
+        </p:nvSpPr>
+        <p:spPr>
+          <a:xfrm>
+            <a:off x="868680" y="4087368"/>
+            <a:ext cx="4206240" cy="640080"/>
+          </a:xfrm>
+          <a:prstGeom prst="rect">
+            <a:avLst/>
+          </a:prstGeom>
+          <a:noFill/>
+        </p:spPr>
+        <p:txBody>
+          <a:bodyPr wrap="square">
+            <a:spAutoFit/>
+          </a:bodyPr>
+          <a:lstStyle/>
+          <a:p>
+            <a:r>
+              <a:rPr sz="1550" b="1">
+                <a:solidFill>
+                  <a:srgbClr val="2F5AA8"/>
+                </a:solidFill>
+                <a:latin typeface="微软雅黑"/>
+              </a:rPr>
+              <a:t>P3 市场选择器</a:t>
+            </a:r>
+          </a:p>
+        </p:txBody>
+      </p:sp>
+      <p:sp>
+        <p:nvSpPr>
+          <p:cNvPr id="12" name="TextBox 11"/>
+          <p:cNvSpPr txBox="1"/>
+          <p:nvPr/>
+        </p:nvSpPr>
+        <p:spPr>
+          <a:xfrm>
+            <a:off x="5486400" y="4069079"/>
+            <a:ext cx="6126480" cy="685800"/>
+          </a:xfrm>
+          <a:prstGeom prst="rect">
+            <a:avLst/>
+          </a:prstGeom>
+          <a:noFill/>
+        </p:spPr>
+        <p:txBody>
+          <a:bodyPr wrap="square">
+            <a:spAutoFit/>
+          </a:bodyPr>
+          <a:lstStyle/>
+          <a:p>
+            <a:r>
+              <a:rPr sz="1400" b="0">
+                <a:solidFill>
+                  <a:srgbClr val="5B6470"/>
+                </a:solidFill>
+                <a:latin typeface="微软雅黑"/>
+              </a:rPr>
+              <a:t>规模 / 毛利 / 竞争 / 本地化 加权 → 先做哪个市场</a:t>
+            </a:r>
+          </a:p>
+        </p:txBody>
+      </p:sp>
+      <p:sp>
+        <p:nvSpPr>
+          <p:cNvPr id="13" name="Rectangle 12"/>
+          <p:cNvSpPr/>
+          <p:nvPr/>
+        </p:nvSpPr>
+        <p:spPr>
+          <a:xfrm>
+            <a:off x="640080" y="4937759"/>
+            <a:ext cx="4572000" cy="822960"/>
+          </a:xfrm>
+          <a:prstGeom prst="rect">
+            <a:avLst/>
+          </a:prstGeom>
+          <a:solidFill>
+            <a:srgbClr val="F3F5F8"/>
+          </a:solidFill>
+          <a:ln>
+            <a:noFill/>
+          </a:ln>
+          <a:effectLst/>
+        </p:spPr>
+        <p:style>
+          <a:lnRef idx="1">
+            <a:schemeClr val="accent1"/>
+          </a:lnRef>
+          <a:fillRef idx="3">
+            <a:schemeClr val="accent1"/>
+          </a:fillRef>
+          <a:effectRef idx="2">
+            <a:schemeClr val="accent1"/>
+          </a:effectRef>
+          <a:fontRef idx="minor">
+            <a:schemeClr val="lt1"/>
+          </a:fontRef>
+        </p:style>
+        <p:txBody>
+          <a:bodyPr rtlCol="0" anchor="ctr"/>
+          <a:lstStyle/>
+          <a:p>
+            <a:pPr algn="ctr"/>
+          </a:p>
+        </p:txBody>
+      </p:sp>
+      <p:sp>
+        <p:nvSpPr>
+          <p:cNvPr id="14" name="TextBox 13"/>
+          <p:cNvSpPr txBox="1"/>
+          <p:nvPr/>
+        </p:nvSpPr>
+        <p:spPr>
+          <a:xfrm>
+            <a:off x="868680" y="5047488"/>
+            <a:ext cx="4206240" cy="640080"/>
+          </a:xfrm>
+          <a:prstGeom prst="rect">
+            <a:avLst/>
+          </a:prstGeom>
+          <a:noFill/>
+        </p:spPr>
+        <p:txBody>
+          <a:bodyPr wrap="square">
+            <a:spAutoFit/>
+          </a:bodyPr>
+          <a:lstStyle/>
+          <a:p>
+            <a:r>
+              <a:rPr sz="1550" b="1">
+                <a:solidFill>
+                  <a:srgbClr val="2F5AA8"/>
+                </a:solidFill>
+                <a:latin typeface="微软雅黑"/>
+              </a:rPr>
+              <a:t>P4 经营健康体检</a:t>
+            </a:r>
+          </a:p>
+        </p:txBody>
+      </p:sp>
+      <p:sp>
+        <p:nvSpPr>
+          <p:cNvPr id="15" name="TextBox 14"/>
+          <p:cNvSpPr txBox="1"/>
+          <p:nvPr/>
+        </p:nvSpPr>
+        <p:spPr>
+          <a:xfrm>
+            <a:off x="5486400" y="5029199"/>
+            <a:ext cx="6126480" cy="685800"/>
+          </a:xfrm>
+          <a:prstGeom prst="rect">
+            <a:avLst/>
+          </a:prstGeom>
+          <a:noFill/>
+        </p:spPr>
+        <p:txBody>
+          <a:bodyPr wrap="square">
+            <a:spAutoFit/>
+          </a:bodyPr>
+          <a:lstStyle/>
+          <a:p>
+            <a:r>
+              <a:rPr sz="1400" b="0">
+                <a:solidFill>
+                  <a:srgbClr val="5B6470"/>
+                </a:solidFill>
+                <a:latin typeface="微软雅黑"/>
+              </a:rPr>
+              <a:t>输入你的指标 → 对标 5 家上市公司 → 危险信号 + 阶段建议</a:t>
+            </a:r>
+          </a:p>
+        </p:txBody>
+      </p:sp>
+      <p:sp>
+        <p:nvSpPr>
+          <p:cNvPr id="16" name="TextBox 15"/>
+          <p:cNvSpPr txBox="1"/>
+          <p:nvPr/>
+        </p:nvSpPr>
+        <p:spPr>
+          <a:xfrm>
+            <a:off x="640080" y="6126480"/>
+            <a:ext cx="10972800" cy="457200"/>
+          </a:xfrm>
+          <a:prstGeom prst="rect">
+            <a:avLst/>
+          </a:prstGeom>
+          <a:noFill/>
+        </p:spPr>
+        <p:txBody>
+          <a:bodyPr wrap="square">
+            <a:spAutoFit/>
+          </a:bodyPr>
+          <a:lstStyle/>
+          <a:p>
+            <a:r>
+              <a:rPr sz="1250" b="1">
+                <a:solidFill>
+                  <a:srgbClr val="C97B1E"/>
+                </a:solidFill>
+                <a:latin typeface="微软雅黑"/>
+              </a:rPr>
+              <a:t>从“看报表”到“能决策”：每一页都基于 5 家公司的真实财务基准</a:t>
+            </a:r>
+          </a:p>
+        </p:txBody>
+      </p:sp>
+      <p:sp>
+        <p:nvSpPr>
+          <p:cNvPr id="17" name="TextBox 16"/>
+          <p:cNvSpPr txBox="1"/>
+          <p:nvPr/>
+        </p:nvSpPr>
+        <p:spPr>
+          <a:xfrm>
+            <a:off x="640080" y="6446520"/>
+            <a:ext cx="3657600" cy="320040"/>
+          </a:xfrm>
+          <a:prstGeom prst="rect">
+            <a:avLst/>
+          </a:prstGeom>
+          <a:noFill/>
+        </p:spPr>
+        <p:txBody>
+          <a:bodyPr wrap="square">
+            <a:spAutoFit/>
+          </a:bodyPr>
+          <a:lstStyle/>
+          <a:p>
+            <a:r>
+              <a:rPr sz="950" b="0">
+                <a:solidFill>
+                  <a:srgbClr val="5B6470"/>
+                </a:solidFill>
+                <a:latin typeface="微软雅黑"/>
+              </a:rPr>
+              <a:t>Xuefei Wang · 2026</a:t>
+            </a:r>
+          </a:p>
+        </p:txBody>
+      </p:sp>
+      <p:sp>
+        <p:nvSpPr>
+          <p:cNvPr id="18" name="TextBox 17"/>
+          <p:cNvSpPr txBox="1"/>
+          <p:nvPr/>
+        </p:nvSpPr>
+        <p:spPr>
+          <a:xfrm>
+            <a:off x="10972800" y="6446520"/>
+            <a:ext cx="640080" cy="320040"/>
+          </a:xfrm>
+          <a:prstGeom prst="rect">
+            <a:avLst/>
+          </a:prstGeom>
+          <a:noFill/>
+        </p:spPr>
+        <p:txBody>
+          <a:bodyPr wrap="square">
+            <a:spAutoFit/>
+          </a:bodyPr>
+          <a:lstStyle/>
+          <a:p>
             <a:pPr algn="r"/>
             <a:r>
               <a:rPr sz="950" b="0">
@@ -5446,7 +5487,7 @@
                 </a:solidFill>
                 <a:latin typeface="微软雅黑"/>
               </a:rPr>
-              <a:t>14 / 15</a:t>
+              <a:t>14 / 16</a:t>
             </a:r>
           </a:p>
         </p:txBody>
@@ -5477,6 +5518,274 @@
         </p:nvSpPr>
         <p:spPr>
           <a:xfrm>
+            <a:off x="640080" y="502920"/>
+            <a:ext cx="82296" cy="566928"/>
+          </a:xfrm>
+          <a:prstGeom prst="rect">
+            <a:avLst/>
+          </a:prstGeom>
+          <a:solidFill>
+            <a:srgbClr val="2F5AA8"/>
+          </a:solidFill>
+          <a:ln>
+            <a:noFill/>
+          </a:ln>
+          <a:effectLst/>
+        </p:spPr>
+        <p:style>
+          <a:lnRef idx="1">
+            <a:schemeClr val="accent1"/>
+          </a:lnRef>
+          <a:fillRef idx="3">
+            <a:schemeClr val="accent1"/>
+          </a:fillRef>
+          <a:effectRef idx="2">
+            <a:schemeClr val="accent1"/>
+          </a:effectRef>
+          <a:fontRef idx="minor">
+            <a:schemeClr val="lt1"/>
+          </a:fontRef>
+        </p:style>
+        <p:txBody>
+          <a:bodyPr rtlCol="0" anchor="ctr"/>
+          <a:lstStyle/>
+          <a:p>
+            <a:pPr algn="ctr"/>
+          </a:p>
+        </p:txBody>
+      </p:sp>
+      <p:sp>
+        <p:nvSpPr>
+          <p:cNvPr id="3" name="TextBox 2"/>
+          <p:cNvSpPr txBox="1"/>
+          <p:nvPr/>
+        </p:nvSpPr>
+        <p:spPr>
+          <a:xfrm>
+            <a:off x="896112" y="457200"/>
+            <a:ext cx="10607040" cy="1097280"/>
+          </a:xfrm>
+          <a:prstGeom prst="rect">
+            <a:avLst/>
+          </a:prstGeom>
+          <a:noFill/>
+        </p:spPr>
+        <p:txBody>
+          <a:bodyPr wrap="square">
+            <a:spAutoFit/>
+          </a:bodyPr>
+          <a:lstStyle/>
+          <a:p>
+            <a:r>
+              <a:rPr sz="1150" b="1">
+                <a:solidFill>
+                  <a:srgbClr val="2F5AA8"/>
+                </a:solidFill>
+                <a:latin typeface="微软雅黑"/>
+              </a:rPr>
+              <a:t>REFLECTION · 复盘</a:t>
+            </a:r>
+          </a:p>
+          <a:p>
+            <a:pPr>
+              <a:spcBef>
+                <a:spcPts val="400"/>
+              </a:spcBef>
+            </a:pPr>
+            <a:r>
+              <a:rPr sz="2700" b="1">
+                <a:solidFill>
+                  <a:srgbClr val="1B2430"/>
+                </a:solidFill>
+                <a:latin typeface="微软雅黑"/>
+              </a:rPr>
+              <a:t>做得好的 &amp; 下次能更好的</a:t>
+            </a:r>
+          </a:p>
+        </p:txBody>
+      </p:sp>
+      <p:sp>
+        <p:nvSpPr>
+          <p:cNvPr id="4" name="TextBox 3"/>
+          <p:cNvSpPr txBox="1"/>
+          <p:nvPr/>
+        </p:nvSpPr>
+        <p:spPr>
+          <a:xfrm>
+            <a:off x="640080" y="1874519"/>
+            <a:ext cx="6035040" cy="4572000"/>
+          </a:xfrm>
+          <a:prstGeom prst="rect">
+            <a:avLst/>
+          </a:prstGeom>
+          <a:noFill/>
+        </p:spPr>
+        <p:txBody>
+          <a:bodyPr wrap="square">
+            <a:spAutoFit/>
+          </a:bodyPr>
+          <a:lstStyle/>
+          <a:p>
+            <a:pPr>
+              <a:spcAft>
+                <a:spcPts val="1200"/>
+              </a:spcAft>
+            </a:pPr>
+            <a:r>
+              <a:rPr sz="1600" b="1">
+                <a:solidFill>
+                  <a:srgbClr val="1B2430"/>
+                </a:solidFill>
+                <a:latin typeface="微软雅黑"/>
+              </a:rPr>
+              <a:t>▪ 做得好的：从亲身困惑出发 / 三层框架 / 现金流深挖 / 把结论做成工具</a:t>
+            </a:r>
+          </a:p>
+          <a:p>
+            <a:pPr>
+              <a:spcAft>
+                <a:spcPts val="1200"/>
+              </a:spcAft>
+            </a:pPr>
+            <a:r>
+              <a:rPr sz="1600" b="0">
+                <a:solidFill>
+                  <a:srgbClr val="1B2430"/>
+                </a:solidFill>
+                <a:latin typeface="微软雅黑"/>
+              </a:rPr>
+              <a:t>▪ 不足与边界：销售费用没拆“广告 vs 佣金”；缺 2026H1 与关税影响；供应商报价、需求热度这类私有数据只能给框架</a:t>
+            </a:r>
+          </a:p>
+          <a:p>
+            <a:pPr>
+              <a:spcAft>
+                <a:spcPts val="1200"/>
+              </a:spcAft>
+            </a:pPr>
+            <a:r>
+              <a:rPr sz="1600" b="1">
+                <a:solidFill>
+                  <a:srgbClr val="1B2430"/>
+                </a:solidFill>
+                <a:latin typeface="微软雅黑"/>
+              </a:rPr>
+              <a:t>▪ 如果重来：会更早看现金流量表；先用少量行业访谈补定性，再用数据验证定量</a:t>
+            </a:r>
+          </a:p>
+          <a:p>
+            <a:pPr>
+              <a:spcAft>
+                <a:spcPts val="1200"/>
+              </a:spcAft>
+            </a:pPr>
+            <a:r>
+              <a:rPr sz="1600" b="0">
+                <a:solidFill>
+                  <a:srgbClr val="1B2430"/>
+                </a:solidFill>
+                <a:latin typeface="微软雅黑"/>
+              </a:rPr>
+              <a:t>▪ 可迁移：这套“提问 → 取数 → 验证 → 结论 → 工具化”的流程，适用于任何行业研究 / 商业分析</a:t>
+            </a:r>
+          </a:p>
+        </p:txBody>
+      </p:sp>
+      <p:sp>
+        <p:nvSpPr>
+          <p:cNvPr id="5" name="TextBox 4"/>
+          <p:cNvSpPr txBox="1"/>
+          <p:nvPr/>
+        </p:nvSpPr>
+        <p:spPr>
+          <a:xfrm>
+            <a:off x="640080" y="6446520"/>
+            <a:ext cx="3657600" cy="320040"/>
+          </a:xfrm>
+          <a:prstGeom prst="rect">
+            <a:avLst/>
+          </a:prstGeom>
+          <a:noFill/>
+        </p:spPr>
+        <p:txBody>
+          <a:bodyPr wrap="square">
+            <a:spAutoFit/>
+          </a:bodyPr>
+          <a:lstStyle/>
+          <a:p>
+            <a:r>
+              <a:rPr sz="950" b="0">
+                <a:solidFill>
+                  <a:srgbClr val="5B6470"/>
+                </a:solidFill>
+                <a:latin typeface="微软雅黑"/>
+              </a:rPr>
+              <a:t>Xuefei Wang · 2026</a:t>
+            </a:r>
+          </a:p>
+        </p:txBody>
+      </p:sp>
+      <p:sp>
+        <p:nvSpPr>
+          <p:cNvPr id="6" name="TextBox 5"/>
+          <p:cNvSpPr txBox="1"/>
+          <p:nvPr/>
+        </p:nvSpPr>
+        <p:spPr>
+          <a:xfrm>
+            <a:off x="10972800" y="6446520"/>
+            <a:ext cx="640080" cy="320040"/>
+          </a:xfrm>
+          <a:prstGeom prst="rect">
+            <a:avLst/>
+          </a:prstGeom>
+          <a:noFill/>
+        </p:spPr>
+        <p:txBody>
+          <a:bodyPr wrap="square">
+            <a:spAutoFit/>
+          </a:bodyPr>
+          <a:lstStyle/>
+          <a:p>
+            <a:pPr algn="r"/>
+            <a:r>
+              <a:rPr sz="950" b="0">
+                <a:solidFill>
+                  <a:srgbClr val="5B6470"/>
+                </a:solidFill>
+                <a:latin typeface="微软雅黑"/>
+              </a:rPr>
+              <a:t>15 / 16</a:t>
+            </a:r>
+          </a:p>
+        </p:txBody>
+      </p:sp>
+    </p:spTree>
+  </p:cSld>
+  <p:clrMapOvr>
+    <a:masterClrMapping/>
+  </p:clrMapOvr>
+</p:sld>
+</file>
+
+<file path=ppt/slides/slide16.xml><?xml version="1.0" encoding="utf-8"?>
+<p:sld xmlns:a="http://schemas.openxmlformats.org/drawingml/2006/main" xmlns:p="http://schemas.openxmlformats.org/presentationml/2006/main" xmlns:r="http://schemas.openxmlformats.org/officeDocument/2006/relationships">
+  <p:cSld>
+    <p:spTree>
+      <p:nvGrpSpPr>
+        <p:cNvPr id="1" name=""/>
+        <p:cNvGrpSpPr/>
+        <p:nvPr/>
+      </p:nvGrpSpPr>
+      <p:grpSpPr/>
+      <p:sp>
+        <p:nvSpPr>
+          <p:cNvPr id="2" name="Rectangle 1"/>
+          <p:cNvSpPr/>
+          <p:nvPr/>
+        </p:nvSpPr>
+        <p:spPr>
+          <a:xfrm>
             <a:off x="0" y="0"/>
             <a:ext cx="201168" cy="6858000"/>
           </a:xfrm>
@@ -5945,7 +6254,7 @@
                 </a:solidFill>
                 <a:latin typeface="微软雅黑"/>
               </a:rPr>
-              <a:t>02 / 15</a:t>
+              <a:t>02 / 16</a:t>
             </a:r>
           </a:p>
         </p:txBody>
@@ -6678,7 +6987,7 @@
                 </a:solidFill>
                 <a:latin typeface="微软雅黑"/>
               </a:rPr>
-              <a:t>03 / 15</a:t>
+              <a:t>03 / 16</a:t>
             </a:r>
           </a:p>
         </p:txBody>
@@ -6978,7 +7287,7 @@
                 </a:solidFill>
                 <a:latin typeface="微软雅黑"/>
               </a:rPr>
-              <a:t>04 / 15</a:t>
+              <a:t>04 / 16</a:t>
             </a:r>
           </a:p>
         </p:txBody>
@@ -7310,7 +7619,7 @@
                 </a:solidFill>
                 <a:latin typeface="微软雅黑"/>
               </a:rPr>
-              <a:t>05 / 15</a:t>
+              <a:t>05 / 16</a:t>
             </a:r>
           </a:p>
         </p:txBody>
@@ -7406,7 +7715,7 @@
                 </a:solidFill>
                 <a:latin typeface="微软雅黑"/>
               </a:rPr>
-              <a:t>FINDING ② · 模式</a:t>
+              <a:t>FINDING ① · 赛道</a:t>
             </a:r>
           </a:p>
           <a:p>
@@ -7422,21 +7731,109 @@
                 </a:solidFill>
                 <a:latin typeface="微软雅黑"/>
               </a:rPr>
-              <a:t>精品 vs 铺货：销售费用率是分水岭</a:t>
-            </a:r>
-          </a:p>
-        </p:txBody>
-      </p:sp>
-      <p:sp>
-        <p:nvSpPr>
-          <p:cNvPr id="4" name="TextBox 3"/>
+              <a:t>支撑数据：这个行业进得有多快、洗牌有多快</a:t>
+            </a:r>
+          </a:p>
+        </p:txBody>
+      </p:sp>
+      <p:sp>
+        <p:nvSpPr>
+          <p:cNvPr id="4" name="Rectangle 3"/>
+          <p:cNvSpPr/>
+          <p:nvPr/>
+        </p:nvSpPr>
+        <p:spPr>
+          <a:xfrm>
+            <a:off x="640080" y="1874519"/>
+            <a:ext cx="5349240" cy="1828800"/>
+          </a:xfrm>
+          <a:prstGeom prst="rect">
+            <a:avLst/>
+          </a:prstGeom>
+          <a:solidFill>
+            <a:srgbClr val="F3F5F8"/>
+          </a:solidFill>
+          <a:ln>
+            <a:noFill/>
+          </a:ln>
+          <a:effectLst/>
+        </p:spPr>
+        <p:style>
+          <a:lnRef idx="1">
+            <a:schemeClr val="accent1"/>
+          </a:lnRef>
+          <a:fillRef idx="3">
+            <a:schemeClr val="accent1"/>
+          </a:fillRef>
+          <a:effectRef idx="2">
+            <a:schemeClr val="accent1"/>
+          </a:effectRef>
+          <a:fontRef idx="minor">
+            <a:schemeClr val="lt1"/>
+          </a:fontRef>
+        </p:style>
+        <p:txBody>
+          <a:bodyPr rtlCol="0" anchor="ctr"/>
+          <a:lstStyle/>
+          <a:p>
+            <a:pPr algn="ctr"/>
+          </a:p>
+        </p:txBody>
+      </p:sp>
+      <p:sp>
+        <p:nvSpPr>
+          <p:cNvPr id="5" name="Rectangle 4"/>
+          <p:cNvSpPr/>
+          <p:nvPr/>
+        </p:nvSpPr>
+        <p:spPr>
+          <a:xfrm>
+            <a:off x="640080" y="1874519"/>
+            <a:ext cx="64008" cy="1828800"/>
+          </a:xfrm>
+          <a:prstGeom prst="rect">
+            <a:avLst/>
+          </a:prstGeom>
+          <a:solidFill>
+            <a:srgbClr val="2F5AA8"/>
+          </a:solidFill>
+          <a:ln>
+            <a:noFill/>
+          </a:ln>
+          <a:effectLst/>
+        </p:spPr>
+        <p:style>
+          <a:lnRef idx="1">
+            <a:schemeClr val="accent1"/>
+          </a:lnRef>
+          <a:fillRef idx="3">
+            <a:schemeClr val="accent1"/>
+          </a:fillRef>
+          <a:effectRef idx="2">
+            <a:schemeClr val="accent1"/>
+          </a:effectRef>
+          <a:fontRef idx="minor">
+            <a:schemeClr val="lt1"/>
+          </a:fontRef>
+        </p:style>
+        <p:txBody>
+          <a:bodyPr rtlCol="0" anchor="ctr"/>
+          <a:lstStyle/>
+          <a:p>
+            <a:pPr algn="ctr"/>
+          </a:p>
+        </p:txBody>
+      </p:sp>
+      <p:sp>
+        <p:nvSpPr>
+          <p:cNvPr id="6" name="TextBox 5"/>
           <p:cNvSpPr txBox="1"/>
           <p:nvPr/>
         </p:nvSpPr>
         <p:spPr>
           <a:xfrm>
-            <a:off x="640080" y="1874519"/>
-            <a:ext cx="5669280" cy="4572000"/>
+            <a:off x="868680" y="2020824"/>
+            <a:ext cx="4937759" cy="1554480"/>
           </a:xfrm>
           <a:prstGeom prst="rect">
             <a:avLst/>
@@ -7449,121 +7846,132 @@
           </a:bodyPr>
           <a:lstStyle/>
           <a:p>
+            <a:r>
+              <a:rPr sz="1450" b="1">
+                <a:solidFill>
+                  <a:srgbClr val="1B2430"/>
+                </a:solidFill>
+                <a:latin typeface="微软雅黑"/>
+              </a:rPr>
+              <a:t>体量 · 官方口径</a:t>
+            </a:r>
+          </a:p>
+          <a:p>
             <a:pPr>
-              <a:spcAft>
-                <a:spcPts val="1200"/>
-              </a:spcAft>
+              <a:spcBef>
+                <a:spcPts val="500"/>
+              </a:spcBef>
             </a:pPr>
             <a:r>
-              <a:rPr sz="1500" b="1">
-                <a:solidFill>
-                  <a:srgbClr val="1B2430"/>
-                </a:solidFill>
-                <a:latin typeface="微软雅黑"/>
-              </a:rPr>
-              <a:t>▪ 安克（精品品牌）：毛利 45% + 销售费用 22% → 净利 8.3%、营收 +23.5%</a:t>
-            </a:r>
-          </a:p>
-          <a:p>
-            <a:pPr>
-              <a:spcAft>
-                <a:spcPts val="1200"/>
-              </a:spcAft>
-            </a:pPr>
-            <a:r>
-              <a:rPr sz="1500" b="0">
-                <a:solidFill>
-                  <a:srgbClr val="1B2430"/>
-                </a:solidFill>
-                <a:latin typeface="微软雅黑"/>
-              </a:rPr>
-              <a:t>▪ 赛维（铺货）：毛利 43% 不低，但销售费用 35% → 净利只剩 2.4%</a:t>
-            </a:r>
-          </a:p>
-          <a:p>
-            <a:pPr lvl="1">
-              <a:spcAft>
-                <a:spcPts val="1200"/>
-              </a:spcAft>
-            </a:pPr>
-            <a:r>
-              <a:rPr sz="1350" b="0">
+              <a:rPr sz="1150" b="0">
                 <a:solidFill>
                   <a:srgbClr val="5B6470"/>
                 </a:solidFill>
                 <a:latin typeface="微软雅黑"/>
               </a:rPr>
-              <a:t>— 华凯易佰（铺货）：净利 1.6%、增速 +1.2% —— 增收不增利、增长见顶</a:t>
-            </a:r>
-          </a:p>
-          <a:p>
-            <a:pPr>
-              <a:spcAft>
-                <a:spcPts val="1200"/>
-              </a:spcAft>
-            </a:pPr>
-            <a:r>
-              <a:rPr sz="1500" b="1">
-                <a:solidFill>
-                  <a:srgbClr val="1B2430"/>
-                </a:solidFill>
-                <a:latin typeface="微软雅黑"/>
-              </a:rPr>
-              <a:t>▪ 结论：毛利率高 ≠ 赚钱，费用结构才是模式分水岭</a:t>
-            </a:r>
-          </a:p>
-          <a:p>
-            <a:pPr lvl="1">
-              <a:spcAft>
-                <a:spcPts val="1200"/>
-              </a:spcAft>
-            </a:pPr>
-            <a:r>
-              <a:rPr sz="1350" b="0">
-                <a:solidFill>
-                  <a:srgbClr val="5B6470"/>
-                </a:solidFill>
-                <a:latin typeface="微软雅黑"/>
-              </a:rPr>
-              <a:t>— 精品靠产品力与复购压低“流量税”，铺货靠买量，天然更重</a:t>
-            </a:r>
-          </a:p>
-        </p:txBody>
-      </p:sp>
-      <p:pic>
-        <p:nvPicPr>
-          <p:cNvPr id="5" name="Picture 4" descr="m3_margin_2025.png"/>
-          <p:cNvPicPr>
-            <a:picLocks noChangeAspect="1"/>
-          </p:cNvPicPr>
-          <p:nvPr/>
-        </p:nvPicPr>
-        <p:blipFill>
-          <a:blip r:embed="rId2"/>
-          <a:stretch>
-            <a:fillRect/>
-          </a:stretch>
-        </p:blipFill>
-        <p:spPr>
-          <a:xfrm>
-            <a:off x="6492240" y="2103120"/>
-            <a:ext cx="5120640" cy="2531552"/>
-          </a:xfrm>
-          <a:prstGeom prst="rect">
-            <a:avLst/>
-          </a:prstGeom>
-        </p:spPr>
-      </p:pic>
-      <p:sp>
-        <p:nvSpPr>
-          <p:cNvPr id="6" name="TextBox 5"/>
+              <a:t>跨境电商主体超 12 万家（约占近 70 万家有进出口记录经营主体的 1/6）；2024 进出口 2.63 万亿、+10.8%。来源：商务部 / 经济日报 2025-02</a:t>
+            </a:r>
+          </a:p>
+        </p:txBody>
+      </p:sp>
+      <p:sp>
+        <p:nvSpPr>
+          <p:cNvPr id="7" name="Rectangle 6"/>
+          <p:cNvSpPr/>
+          <p:nvPr/>
+        </p:nvSpPr>
+        <p:spPr>
+          <a:xfrm>
+            <a:off x="6263640" y="1874519"/>
+            <a:ext cx="5349240" cy="1828800"/>
+          </a:xfrm>
+          <a:prstGeom prst="rect">
+            <a:avLst/>
+          </a:prstGeom>
+          <a:solidFill>
+            <a:srgbClr val="F3F5F8"/>
+          </a:solidFill>
+          <a:ln>
+            <a:noFill/>
+          </a:ln>
+          <a:effectLst/>
+        </p:spPr>
+        <p:style>
+          <a:lnRef idx="1">
+            <a:schemeClr val="accent1"/>
+          </a:lnRef>
+          <a:fillRef idx="3">
+            <a:schemeClr val="accent1"/>
+          </a:fillRef>
+          <a:effectRef idx="2">
+            <a:schemeClr val="accent1"/>
+          </a:effectRef>
+          <a:fontRef idx="minor">
+            <a:schemeClr val="lt1"/>
+          </a:fontRef>
+        </p:style>
+        <p:txBody>
+          <a:bodyPr rtlCol="0" anchor="ctr"/>
+          <a:lstStyle/>
+          <a:p>
+            <a:pPr algn="ctr"/>
+          </a:p>
+        </p:txBody>
+      </p:sp>
+      <p:sp>
+        <p:nvSpPr>
+          <p:cNvPr id="8" name="Rectangle 7"/>
+          <p:cNvSpPr/>
+          <p:nvPr/>
+        </p:nvSpPr>
+        <p:spPr>
+          <a:xfrm>
+            <a:off x="6263640" y="1874519"/>
+            <a:ext cx="64008" cy="1828800"/>
+          </a:xfrm>
+          <a:prstGeom prst="rect">
+            <a:avLst/>
+          </a:prstGeom>
+          <a:solidFill>
+            <a:srgbClr val="2F5AA8"/>
+          </a:solidFill>
+          <a:ln>
+            <a:noFill/>
+          </a:ln>
+          <a:effectLst/>
+        </p:spPr>
+        <p:style>
+          <a:lnRef idx="1">
+            <a:schemeClr val="accent1"/>
+          </a:lnRef>
+          <a:fillRef idx="3">
+            <a:schemeClr val="accent1"/>
+          </a:fillRef>
+          <a:effectRef idx="2">
+            <a:schemeClr val="accent1"/>
+          </a:effectRef>
+          <a:fontRef idx="minor">
+            <a:schemeClr val="lt1"/>
+          </a:fontRef>
+        </p:style>
+        <p:txBody>
+          <a:bodyPr rtlCol="0" anchor="ctr"/>
+          <a:lstStyle/>
+          <a:p>
+            <a:pPr algn="ctr"/>
+          </a:p>
+        </p:txBody>
+      </p:sp>
+      <p:sp>
+        <p:nvSpPr>
+          <p:cNvPr id="9" name="TextBox 8"/>
           <p:cNvSpPr txBox="1"/>
           <p:nvPr/>
         </p:nvSpPr>
         <p:spPr>
           <a:xfrm>
-            <a:off x="640080" y="6446520"/>
-            <a:ext cx="3657600" cy="320040"/>
+            <a:off x="6492240" y="2020824"/>
+            <a:ext cx="4937759" cy="1554480"/>
           </a:xfrm>
           <a:prstGeom prst="rect">
             <a:avLst/>
@@ -7577,27 +7985,131 @@
           <a:lstStyle/>
           <a:p>
             <a:r>
-              <a:rPr sz="950" b="0">
+              <a:rPr sz="1450" b="1">
+                <a:solidFill>
+                  <a:srgbClr val="1B2430"/>
+                </a:solidFill>
+                <a:latin typeface="微软雅黑"/>
+              </a:rPr>
+              <a:t>新增进入 ① · 企查查</a:t>
+            </a:r>
+          </a:p>
+          <a:p>
+            <a:pPr>
+              <a:spcBef>
+                <a:spcPts val="500"/>
+              </a:spcBef>
+            </a:pPr>
+            <a:r>
+              <a:rPr sz="1150" b="0">
                 <a:solidFill>
                   <a:srgbClr val="5B6470"/>
                 </a:solidFill>
                 <a:latin typeface="微软雅黑"/>
               </a:rPr>
-              <a:t>Xuefei Wang · 2026</a:t>
-            </a:r>
-          </a:p>
-        </p:txBody>
-      </p:sp>
-      <p:sp>
-        <p:nvSpPr>
-          <p:cNvPr id="7" name="TextBox 6"/>
+              <a:t>2023 注册 5,818 家（+44%）→ 2024 注册 8,598 家（+47%）→ 2025 前 4 月 5,080 家（+173%）；现存 2.89 万家（2025-05）</a:t>
+            </a:r>
+          </a:p>
+        </p:txBody>
+      </p:sp>
+      <p:sp>
+        <p:nvSpPr>
+          <p:cNvPr id="10" name="Rectangle 9"/>
+          <p:cNvSpPr/>
+          <p:nvPr/>
+        </p:nvSpPr>
+        <p:spPr>
+          <a:xfrm>
+            <a:off x="640080" y="3931920"/>
+            <a:ext cx="5349240" cy="1828800"/>
+          </a:xfrm>
+          <a:prstGeom prst="rect">
+            <a:avLst/>
+          </a:prstGeom>
+          <a:solidFill>
+            <a:srgbClr val="F3F5F8"/>
+          </a:solidFill>
+          <a:ln>
+            <a:noFill/>
+          </a:ln>
+          <a:effectLst/>
+        </p:spPr>
+        <p:style>
+          <a:lnRef idx="1">
+            <a:schemeClr val="accent1"/>
+          </a:lnRef>
+          <a:fillRef idx="3">
+            <a:schemeClr val="accent1"/>
+          </a:fillRef>
+          <a:effectRef idx="2">
+            <a:schemeClr val="accent1"/>
+          </a:effectRef>
+          <a:fontRef idx="minor">
+            <a:schemeClr val="lt1"/>
+          </a:fontRef>
+        </p:style>
+        <p:txBody>
+          <a:bodyPr rtlCol="0" anchor="ctr"/>
+          <a:lstStyle/>
+          <a:p>
+            <a:pPr algn="ctr"/>
+          </a:p>
+        </p:txBody>
+      </p:sp>
+      <p:sp>
+        <p:nvSpPr>
+          <p:cNvPr id="11" name="Rectangle 10"/>
+          <p:cNvSpPr/>
+          <p:nvPr/>
+        </p:nvSpPr>
+        <p:spPr>
+          <a:xfrm>
+            <a:off x="640080" y="3931920"/>
+            <a:ext cx="64008" cy="1828800"/>
+          </a:xfrm>
+          <a:prstGeom prst="rect">
+            <a:avLst/>
+          </a:prstGeom>
+          <a:solidFill>
+            <a:srgbClr val="C97B1E"/>
+          </a:solidFill>
+          <a:ln>
+            <a:noFill/>
+          </a:ln>
+          <a:effectLst/>
+        </p:spPr>
+        <p:style>
+          <a:lnRef idx="1">
+            <a:schemeClr val="accent1"/>
+          </a:lnRef>
+          <a:fillRef idx="3">
+            <a:schemeClr val="accent1"/>
+          </a:fillRef>
+          <a:effectRef idx="2">
+            <a:schemeClr val="accent1"/>
+          </a:effectRef>
+          <a:fontRef idx="minor">
+            <a:schemeClr val="lt1"/>
+          </a:fontRef>
+        </p:style>
+        <p:txBody>
+          <a:bodyPr rtlCol="0" anchor="ctr"/>
+          <a:lstStyle/>
+          <a:p>
+            <a:pPr algn="ctr"/>
+          </a:p>
+        </p:txBody>
+      </p:sp>
+      <p:sp>
+        <p:nvSpPr>
+          <p:cNvPr id="12" name="TextBox 11"/>
           <p:cNvSpPr txBox="1"/>
           <p:nvPr/>
         </p:nvSpPr>
         <p:spPr>
           <a:xfrm>
-            <a:off x="10972800" y="6446520"/>
-            <a:ext cx="640080" cy="320040"/>
+            <a:off x="868680" y="4078224"/>
+            <a:ext cx="4937759" cy="1554480"/>
           </a:xfrm>
           <a:prstGeom prst="rect">
             <a:avLst/>
@@ -7610,6 +8122,262 @@
           </a:bodyPr>
           <a:lstStyle/>
           <a:p>
+            <a:r>
+              <a:rPr sz="1450" b="1">
+                <a:solidFill>
+                  <a:srgbClr val="1B2430"/>
+                </a:solidFill>
+                <a:latin typeface="微软雅黑"/>
+              </a:rPr>
+              <a:t>新增进入 ② · 天眼查</a:t>
+            </a:r>
+          </a:p>
+          <a:p>
+            <a:pPr>
+              <a:spcBef>
+                <a:spcPts val="500"/>
+              </a:spcBef>
+            </a:pPr>
+            <a:r>
+              <a:rPr sz="1150" b="0">
+                <a:solidFill>
+                  <a:srgbClr val="5B6470"/>
+                </a:solidFill>
+                <a:latin typeface="微软雅黑"/>
+              </a:rPr>
+              <a:t>现存超 3.4 万家（2025-09）；2024 新增 7,000+（较 2023 约 +50%）；2025 已新增 1.3 万+；成立不足 1 年的企业占 46.7%</a:t>
+            </a:r>
+          </a:p>
+        </p:txBody>
+      </p:sp>
+      <p:sp>
+        <p:nvSpPr>
+          <p:cNvPr id="13" name="Rectangle 12"/>
+          <p:cNvSpPr/>
+          <p:nvPr/>
+        </p:nvSpPr>
+        <p:spPr>
+          <a:xfrm>
+            <a:off x="6263640" y="3931920"/>
+            <a:ext cx="5349240" cy="1828800"/>
+          </a:xfrm>
+          <a:prstGeom prst="rect">
+            <a:avLst/>
+          </a:prstGeom>
+          <a:solidFill>
+            <a:srgbClr val="F3F5F8"/>
+          </a:solidFill>
+          <a:ln>
+            <a:noFill/>
+          </a:ln>
+          <a:effectLst/>
+        </p:spPr>
+        <p:style>
+          <a:lnRef idx="1">
+            <a:schemeClr val="accent1"/>
+          </a:lnRef>
+          <a:fillRef idx="3">
+            <a:schemeClr val="accent1"/>
+          </a:fillRef>
+          <a:effectRef idx="2">
+            <a:schemeClr val="accent1"/>
+          </a:effectRef>
+          <a:fontRef idx="minor">
+            <a:schemeClr val="lt1"/>
+          </a:fontRef>
+        </p:style>
+        <p:txBody>
+          <a:bodyPr rtlCol="0" anchor="ctr"/>
+          <a:lstStyle/>
+          <a:p>
+            <a:pPr algn="ctr"/>
+          </a:p>
+        </p:txBody>
+      </p:sp>
+      <p:sp>
+        <p:nvSpPr>
+          <p:cNvPr id="14" name="Rectangle 13"/>
+          <p:cNvSpPr/>
+          <p:nvPr/>
+        </p:nvSpPr>
+        <p:spPr>
+          <a:xfrm>
+            <a:off x="6263640" y="3931920"/>
+            <a:ext cx="64008" cy="1828800"/>
+          </a:xfrm>
+          <a:prstGeom prst="rect">
+            <a:avLst/>
+          </a:prstGeom>
+          <a:solidFill>
+            <a:srgbClr val="C97B1E"/>
+          </a:solidFill>
+          <a:ln>
+            <a:noFill/>
+          </a:ln>
+          <a:effectLst/>
+        </p:spPr>
+        <p:style>
+          <a:lnRef idx="1">
+            <a:schemeClr val="accent1"/>
+          </a:lnRef>
+          <a:fillRef idx="3">
+            <a:schemeClr val="accent1"/>
+          </a:fillRef>
+          <a:effectRef idx="2">
+            <a:schemeClr val="accent1"/>
+          </a:effectRef>
+          <a:fontRef idx="minor">
+            <a:schemeClr val="lt1"/>
+          </a:fontRef>
+        </p:style>
+        <p:txBody>
+          <a:bodyPr rtlCol="0" anchor="ctr"/>
+          <a:lstStyle/>
+          <a:p>
+            <a:pPr algn="ctr"/>
+          </a:p>
+        </p:txBody>
+      </p:sp>
+      <p:sp>
+        <p:nvSpPr>
+          <p:cNvPr id="15" name="TextBox 14"/>
+          <p:cNvSpPr txBox="1"/>
+          <p:nvPr/>
+        </p:nvSpPr>
+        <p:spPr>
+          <a:xfrm>
+            <a:off x="6492240" y="4078224"/>
+            <a:ext cx="4937759" cy="1554480"/>
+          </a:xfrm>
+          <a:prstGeom prst="rect">
+            <a:avLst/>
+          </a:prstGeom>
+          <a:noFill/>
+        </p:spPr>
+        <p:txBody>
+          <a:bodyPr wrap="square">
+            <a:spAutoFit/>
+          </a:bodyPr>
+          <a:lstStyle/>
+          <a:p>
+            <a:r>
+              <a:rPr sz="1450" b="1">
+                <a:solidFill>
+                  <a:srgbClr val="1B2430"/>
+                </a:solidFill>
+                <a:latin typeface="微软雅黑"/>
+              </a:rPr>
+              <a:t>退出 · 可见案例</a:t>
+            </a:r>
+          </a:p>
+          <a:p>
+            <a:pPr>
+              <a:spcBef>
+                <a:spcPts val="500"/>
+              </a:spcBef>
+            </a:pPr>
+            <a:r>
+              <a:rPr sz="1150" b="0">
+                <a:solidFill>
+                  <a:srgbClr val="5B6470"/>
+                </a:solidFill>
+                <a:latin typeface="微软雅黑"/>
+              </a:rPr>
+              <a:t>网经社“死亡名单”：2022 年 31 家 → 2023 年 11 家 → 2024 年 50 家（+354.5%）。仅统计有知名度的倒闭/关停，不是退出总数</a:t>
+            </a:r>
+          </a:p>
+        </p:txBody>
+      </p:sp>
+      <p:sp>
+        <p:nvSpPr>
+          <p:cNvPr id="16" name="TextBox 15"/>
+          <p:cNvSpPr txBox="1"/>
+          <p:nvPr/>
+        </p:nvSpPr>
+        <p:spPr>
+          <a:xfrm>
+            <a:off x="640080" y="5989320"/>
+            <a:ext cx="10972800" cy="548640"/>
+          </a:xfrm>
+          <a:prstGeom prst="rect">
+            <a:avLst/>
+          </a:prstGeom>
+          <a:noFill/>
+        </p:spPr>
+        <p:txBody>
+          <a:bodyPr wrap="square">
+            <a:spAutoFit/>
+          </a:bodyPr>
+          <a:lstStyle/>
+          <a:p>
+            <a:r>
+              <a:rPr sz="1150" b="0">
+                <a:solidFill>
+                  <a:srgbClr val="5B6470"/>
+                </a:solidFill>
+                <a:latin typeface="微软雅黑"/>
+              </a:rPr>
+              <a:t>口径提醒：官方“主体 12 万”≠工商注册“2.9~3.4 万家”（多数卖家经营范围不含“跨境电商”字样）；企查查/天眼查不能混比；退出无官方逐年统计，故只做定性判断。</a:t>
+            </a:r>
+          </a:p>
+        </p:txBody>
+      </p:sp>
+      <p:sp>
+        <p:nvSpPr>
+          <p:cNvPr id="17" name="TextBox 16"/>
+          <p:cNvSpPr txBox="1"/>
+          <p:nvPr/>
+        </p:nvSpPr>
+        <p:spPr>
+          <a:xfrm>
+            <a:off x="640080" y="6446520"/>
+            <a:ext cx="3657600" cy="320040"/>
+          </a:xfrm>
+          <a:prstGeom prst="rect">
+            <a:avLst/>
+          </a:prstGeom>
+          <a:noFill/>
+        </p:spPr>
+        <p:txBody>
+          <a:bodyPr wrap="square">
+            <a:spAutoFit/>
+          </a:bodyPr>
+          <a:lstStyle/>
+          <a:p>
+            <a:r>
+              <a:rPr sz="950" b="0">
+                <a:solidFill>
+                  <a:srgbClr val="5B6470"/>
+                </a:solidFill>
+                <a:latin typeface="微软雅黑"/>
+              </a:rPr>
+              <a:t>Xuefei Wang · 2026</a:t>
+            </a:r>
+          </a:p>
+        </p:txBody>
+      </p:sp>
+      <p:sp>
+        <p:nvSpPr>
+          <p:cNvPr id="18" name="TextBox 17"/>
+          <p:cNvSpPr txBox="1"/>
+          <p:nvPr/>
+        </p:nvSpPr>
+        <p:spPr>
+          <a:xfrm>
+            <a:off x="10972800" y="6446520"/>
+            <a:ext cx="640080" cy="320040"/>
+          </a:xfrm>
+          <a:prstGeom prst="rect">
+            <a:avLst/>
+          </a:prstGeom>
+          <a:noFill/>
+        </p:spPr>
+        <p:txBody>
+          <a:bodyPr wrap="square">
+            <a:spAutoFit/>
+          </a:bodyPr>
+          <a:lstStyle/>
+          <a:p>
             <a:pPr algn="r"/>
             <a:r>
               <a:rPr sz="950" b="0">
@@ -7618,7 +8386,7 @@
                 </a:solidFill>
                 <a:latin typeface="微软雅黑"/>
               </a:rPr>
-              <a:t>06 / 15</a:t>
+              <a:t>06 / 16</a:t>
             </a:r>
           </a:p>
         </p:txBody>
@@ -7714,7 +8482,7 @@
                 </a:solidFill>
                 <a:latin typeface="微软雅黑"/>
               </a:rPr>
-              <a:t>METHOD · 分类</a:t>
+              <a:t>FINDING ② · 模式</a:t>
             </a:r>
           </a:p>
           <a:p>
@@ -7730,109 +8498,21 @@
                 </a:solidFill>
                 <a:latin typeface="微软雅黑"/>
               </a:rPr>
-              <a:t>我怎么定义“精品 vs 铺货”：四个可核对的信号</a:t>
-            </a:r>
-          </a:p>
-        </p:txBody>
-      </p:sp>
-      <p:sp>
-        <p:nvSpPr>
-          <p:cNvPr id="4" name="Rectangle 3"/>
-          <p:cNvSpPr/>
-          <p:nvPr/>
-        </p:nvSpPr>
-        <p:spPr>
-          <a:xfrm>
-            <a:off x="640080" y="1965960"/>
-            <a:ext cx="5349240" cy="1691640"/>
-          </a:xfrm>
-          <a:prstGeom prst="rect">
-            <a:avLst/>
-          </a:prstGeom>
-          <a:solidFill>
-            <a:srgbClr val="F3F5F8"/>
-          </a:solidFill>
-          <a:ln>
-            <a:noFill/>
-          </a:ln>
-          <a:effectLst/>
-        </p:spPr>
-        <p:style>
-          <a:lnRef idx="1">
-            <a:schemeClr val="accent1"/>
-          </a:lnRef>
-          <a:fillRef idx="3">
-            <a:schemeClr val="accent1"/>
-          </a:fillRef>
-          <a:effectRef idx="2">
-            <a:schemeClr val="accent1"/>
-          </a:effectRef>
-          <a:fontRef idx="minor">
-            <a:schemeClr val="lt1"/>
-          </a:fontRef>
-        </p:style>
-        <p:txBody>
-          <a:bodyPr rtlCol="0" anchor="ctr"/>
-          <a:lstStyle/>
-          <a:p>
-            <a:pPr algn="ctr"/>
-          </a:p>
-        </p:txBody>
-      </p:sp>
-      <p:sp>
-        <p:nvSpPr>
-          <p:cNvPr id="5" name="Rectangle 4"/>
-          <p:cNvSpPr/>
-          <p:nvPr/>
-        </p:nvSpPr>
-        <p:spPr>
-          <a:xfrm>
-            <a:off x="640080" y="1965960"/>
-            <a:ext cx="64008" cy="1691640"/>
-          </a:xfrm>
-          <a:prstGeom prst="rect">
-            <a:avLst/>
-          </a:prstGeom>
-          <a:solidFill>
-            <a:srgbClr val="2F5AA8"/>
-          </a:solidFill>
-          <a:ln>
-            <a:noFill/>
-          </a:ln>
-          <a:effectLst/>
-        </p:spPr>
-        <p:style>
-          <a:lnRef idx="1">
-            <a:schemeClr val="accent1"/>
-          </a:lnRef>
-          <a:fillRef idx="3">
-            <a:schemeClr val="accent1"/>
-          </a:fillRef>
-          <a:effectRef idx="2">
-            <a:schemeClr val="accent1"/>
-          </a:effectRef>
-          <a:fontRef idx="minor">
-            <a:schemeClr val="lt1"/>
-          </a:fontRef>
-        </p:style>
-        <p:txBody>
-          <a:bodyPr rtlCol="0" anchor="ctr"/>
-          <a:lstStyle/>
-          <a:p>
-            <a:pPr algn="ctr"/>
-          </a:p>
-        </p:txBody>
-      </p:sp>
-      <p:sp>
-        <p:nvSpPr>
-          <p:cNvPr id="6" name="TextBox 5"/>
+              <a:t>精品 vs 铺货：销售费用率是分水岭</a:t>
+            </a:r>
+          </a:p>
+        </p:txBody>
+      </p:sp>
+      <p:sp>
+        <p:nvSpPr>
+          <p:cNvPr id="4" name="TextBox 3"/>
           <p:cNvSpPr txBox="1"/>
           <p:nvPr/>
         </p:nvSpPr>
         <p:spPr>
           <a:xfrm>
-            <a:off x="868680" y="2112264"/>
-            <a:ext cx="4937759" cy="1417320"/>
+            <a:off x="640080" y="1874519"/>
+            <a:ext cx="5669280" cy="4572000"/>
           </a:xfrm>
           <a:prstGeom prst="rect">
             <a:avLst/>
@@ -7845,132 +8525,121 @@
           </a:bodyPr>
           <a:lstStyle/>
           <a:p>
-            <a:r>
-              <a:rPr sz="1400" b="1">
+            <a:pPr>
+              <a:spcAft>
+                <a:spcPts val="1200"/>
+              </a:spcAft>
+            </a:pPr>
+            <a:r>
+              <a:rPr sz="1500" b="1">
                 <a:solidFill>
                   <a:srgbClr val="1B2430"/>
                 </a:solidFill>
                 <a:latin typeface="微软雅黑"/>
               </a:rPr>
-              <a:t>研发 / 产品投入</a:t>
+              <a:t>▪ 安克（精品品牌）：毛利 45% + 销售费用 22% → 净利 8.3%、营收 +23.5%</a:t>
             </a:r>
           </a:p>
           <a:p>
             <a:pPr>
-              <a:spcBef>
-                <a:spcPts val="500"/>
-              </a:spcBef>
+              <a:spcAft>
+                <a:spcPts val="1200"/>
+              </a:spcAft>
             </a:pPr>
             <a:r>
-              <a:rPr sz="1200" b="0">
+              <a:rPr sz="1500" b="0">
+                <a:solidFill>
+                  <a:srgbClr val="1B2430"/>
+                </a:solidFill>
+                <a:latin typeface="微软雅黑"/>
+              </a:rPr>
+              <a:t>▪ 赛维（铺货）：毛利 43% 不低，但销售费用 35% → 净利只剩 2.4%</a:t>
+            </a:r>
+          </a:p>
+          <a:p>
+            <a:pPr lvl="1">
+              <a:spcAft>
+                <a:spcPts val="1200"/>
+              </a:spcAft>
+            </a:pPr>
+            <a:r>
+              <a:rPr sz="1350" b="0">
                 <a:solidFill>
                   <a:srgbClr val="5B6470"/>
                 </a:solidFill>
                 <a:latin typeface="微软雅黑"/>
               </a:rPr>
-              <a:t>精品高（私模、自研、专利）；铺货低（贴牌、公模、跟随选品）</a:t>
-            </a:r>
-          </a:p>
-        </p:txBody>
-      </p:sp>
-      <p:sp>
-        <p:nvSpPr>
-          <p:cNvPr id="7" name="Rectangle 6"/>
-          <p:cNvSpPr/>
-          <p:nvPr/>
-        </p:nvSpPr>
-        <p:spPr>
-          <a:xfrm>
-            <a:off x="6263640" y="1965960"/>
-            <a:ext cx="5349240" cy="1691640"/>
-          </a:xfrm>
-          <a:prstGeom prst="rect">
-            <a:avLst/>
-          </a:prstGeom>
-          <a:solidFill>
-            <a:srgbClr val="F3F5F8"/>
-          </a:solidFill>
-          <a:ln>
-            <a:noFill/>
-          </a:ln>
-          <a:effectLst/>
-        </p:spPr>
-        <p:style>
-          <a:lnRef idx="1">
-            <a:schemeClr val="accent1"/>
-          </a:lnRef>
-          <a:fillRef idx="3">
-            <a:schemeClr val="accent1"/>
-          </a:fillRef>
-          <a:effectRef idx="2">
-            <a:schemeClr val="accent1"/>
-          </a:effectRef>
-          <a:fontRef idx="minor">
-            <a:schemeClr val="lt1"/>
-          </a:fontRef>
-        </p:style>
-        <p:txBody>
-          <a:bodyPr rtlCol="0" anchor="ctr"/>
-          <a:lstStyle/>
-          <a:p>
-            <a:pPr algn="ctr"/>
-          </a:p>
-        </p:txBody>
-      </p:sp>
-      <p:sp>
-        <p:nvSpPr>
-          <p:cNvPr id="8" name="Rectangle 7"/>
-          <p:cNvSpPr/>
-          <p:nvPr/>
-        </p:nvSpPr>
-        <p:spPr>
-          <a:xfrm>
-            <a:off x="6263640" y="1965960"/>
-            <a:ext cx="64008" cy="1691640"/>
-          </a:xfrm>
-          <a:prstGeom prst="rect">
-            <a:avLst/>
-          </a:prstGeom>
-          <a:solidFill>
-            <a:srgbClr val="2F5AA8"/>
-          </a:solidFill>
-          <a:ln>
-            <a:noFill/>
-          </a:ln>
-          <a:effectLst/>
-        </p:spPr>
-        <p:style>
-          <a:lnRef idx="1">
-            <a:schemeClr val="accent1"/>
-          </a:lnRef>
-          <a:fillRef idx="3">
-            <a:schemeClr val="accent1"/>
-          </a:fillRef>
-          <a:effectRef idx="2">
-            <a:schemeClr val="accent1"/>
-          </a:effectRef>
-          <a:fontRef idx="minor">
-            <a:schemeClr val="lt1"/>
-          </a:fontRef>
-        </p:style>
-        <p:txBody>
-          <a:bodyPr rtlCol="0" anchor="ctr"/>
-          <a:lstStyle/>
-          <a:p>
-            <a:pPr algn="ctr"/>
-          </a:p>
-        </p:txBody>
-      </p:sp>
-      <p:sp>
-        <p:nvSpPr>
-          <p:cNvPr id="9" name="TextBox 8"/>
+              <a:t>— 华凯易佰（铺货）：净利 1.6%、增速 +1.2% —— 增收不增利、增长见顶</a:t>
+            </a:r>
+          </a:p>
+          <a:p>
+            <a:pPr>
+              <a:spcAft>
+                <a:spcPts val="1200"/>
+              </a:spcAft>
+            </a:pPr>
+            <a:r>
+              <a:rPr sz="1500" b="1">
+                <a:solidFill>
+                  <a:srgbClr val="1B2430"/>
+                </a:solidFill>
+                <a:latin typeface="微软雅黑"/>
+              </a:rPr>
+              <a:t>▪ 结论：毛利率高 ≠ 赚钱，费用结构才是模式分水岭</a:t>
+            </a:r>
+          </a:p>
+          <a:p>
+            <a:pPr lvl="1">
+              <a:spcAft>
+                <a:spcPts val="1200"/>
+              </a:spcAft>
+            </a:pPr>
+            <a:r>
+              <a:rPr sz="1350" b="0">
+                <a:solidFill>
+                  <a:srgbClr val="5B6470"/>
+                </a:solidFill>
+                <a:latin typeface="微软雅黑"/>
+              </a:rPr>
+              <a:t>— 精品靠产品力与复购压低“流量税”，铺货靠买量，天然更重</a:t>
+            </a:r>
+          </a:p>
+        </p:txBody>
+      </p:sp>
+      <p:pic>
+        <p:nvPicPr>
+          <p:cNvPr id="5" name="Picture 4" descr="m3_margin_2025.png"/>
+          <p:cNvPicPr>
+            <a:picLocks noChangeAspect="1"/>
+          </p:cNvPicPr>
+          <p:nvPr/>
+        </p:nvPicPr>
+        <p:blipFill>
+          <a:blip r:embed="rId2"/>
+          <a:stretch>
+            <a:fillRect/>
+          </a:stretch>
+        </p:blipFill>
+        <p:spPr>
+          <a:xfrm>
+            <a:off x="6492240" y="2103120"/>
+            <a:ext cx="5120640" cy="2531552"/>
+          </a:xfrm>
+          <a:prstGeom prst="rect">
+            <a:avLst/>
+          </a:prstGeom>
+        </p:spPr>
+      </p:pic>
+      <p:sp>
+        <p:nvSpPr>
+          <p:cNvPr id="6" name="TextBox 5"/>
           <p:cNvSpPr txBox="1"/>
           <p:nvPr/>
         </p:nvSpPr>
         <p:spPr>
           <a:xfrm>
-            <a:off x="6492240" y="2112264"/>
-            <a:ext cx="4937759" cy="1417320"/>
+            <a:off x="640080" y="6446520"/>
+            <a:ext cx="3657600" cy="320040"/>
           </a:xfrm>
           <a:prstGeom prst="rect">
             <a:avLst/>
@@ -7984,131 +8653,27 @@
           <a:lstStyle/>
           <a:p>
             <a:r>
-              <a:rPr sz="1400" b="1">
-                <a:solidFill>
-                  <a:srgbClr val="1B2430"/>
-                </a:solidFill>
-                <a:latin typeface="微软雅黑"/>
-              </a:rPr>
-              <a:t>SKU 广度与打法</a:t>
-            </a:r>
-          </a:p>
-          <a:p>
-            <a:pPr>
-              <a:spcBef>
-                <a:spcPts val="500"/>
-              </a:spcBef>
-            </a:pPr>
-            <a:r>
-              <a:rPr sz="1200" b="0">
+              <a:rPr sz="950" b="0">
                 <a:solidFill>
                   <a:srgbClr val="5B6470"/>
                 </a:solidFill>
                 <a:latin typeface="微软雅黑"/>
               </a:rPr>
-              <a:t>精品少而聚焦、靠爆款+系列；铺货海量 SKU、上架测款跑概率</a:t>
-            </a:r>
-          </a:p>
-        </p:txBody>
-      </p:sp>
-      <p:sp>
-        <p:nvSpPr>
-          <p:cNvPr id="10" name="Rectangle 9"/>
-          <p:cNvSpPr/>
-          <p:nvPr/>
-        </p:nvSpPr>
-        <p:spPr>
-          <a:xfrm>
-            <a:off x="640080" y="3931920"/>
-            <a:ext cx="5349240" cy="1691640"/>
-          </a:xfrm>
-          <a:prstGeom prst="rect">
-            <a:avLst/>
-          </a:prstGeom>
-          <a:solidFill>
-            <a:srgbClr val="F3F5F8"/>
-          </a:solidFill>
-          <a:ln>
-            <a:noFill/>
-          </a:ln>
-          <a:effectLst/>
-        </p:spPr>
-        <p:style>
-          <a:lnRef idx="1">
-            <a:schemeClr val="accent1"/>
-          </a:lnRef>
-          <a:fillRef idx="3">
-            <a:schemeClr val="accent1"/>
-          </a:fillRef>
-          <a:effectRef idx="2">
-            <a:schemeClr val="accent1"/>
-          </a:effectRef>
-          <a:fontRef idx="minor">
-            <a:schemeClr val="lt1"/>
-          </a:fontRef>
-        </p:style>
-        <p:txBody>
-          <a:bodyPr rtlCol="0" anchor="ctr"/>
-          <a:lstStyle/>
-          <a:p>
-            <a:pPr algn="ctr"/>
-          </a:p>
-        </p:txBody>
-      </p:sp>
-      <p:sp>
-        <p:nvSpPr>
-          <p:cNvPr id="11" name="Rectangle 10"/>
-          <p:cNvSpPr/>
-          <p:nvPr/>
-        </p:nvSpPr>
-        <p:spPr>
-          <a:xfrm>
-            <a:off x="640080" y="3931920"/>
-            <a:ext cx="64008" cy="1691640"/>
-          </a:xfrm>
-          <a:prstGeom prst="rect">
-            <a:avLst/>
-          </a:prstGeom>
-          <a:solidFill>
-            <a:srgbClr val="2F5AA8"/>
-          </a:solidFill>
-          <a:ln>
-            <a:noFill/>
-          </a:ln>
-          <a:effectLst/>
-        </p:spPr>
-        <p:style>
-          <a:lnRef idx="1">
-            <a:schemeClr val="accent1"/>
-          </a:lnRef>
-          <a:fillRef idx="3">
-            <a:schemeClr val="accent1"/>
-          </a:fillRef>
-          <a:effectRef idx="2">
-            <a:schemeClr val="accent1"/>
-          </a:effectRef>
-          <a:fontRef idx="minor">
-            <a:schemeClr val="lt1"/>
-          </a:fontRef>
-        </p:style>
-        <p:txBody>
-          <a:bodyPr rtlCol="0" anchor="ctr"/>
-          <a:lstStyle/>
-          <a:p>
-            <a:pPr algn="ctr"/>
-          </a:p>
-        </p:txBody>
-      </p:sp>
-      <p:sp>
-        <p:nvSpPr>
-          <p:cNvPr id="12" name="TextBox 11"/>
+              <a:t>Xuefei Wang · 2026</a:t>
+            </a:r>
+          </a:p>
+        </p:txBody>
+      </p:sp>
+      <p:sp>
+        <p:nvSpPr>
+          <p:cNvPr id="7" name="TextBox 6"/>
           <p:cNvSpPr txBox="1"/>
           <p:nvPr/>
         </p:nvSpPr>
         <p:spPr>
           <a:xfrm>
-            <a:off x="868680" y="4078224"/>
-            <a:ext cx="4937759" cy="1417320"/>
+            <a:off x="10972800" y="6446520"/>
+            <a:ext cx="640080" cy="320040"/>
           </a:xfrm>
           <a:prstGeom prst="rect">
             <a:avLst/>
@@ -8121,271 +8686,15 @@
           </a:bodyPr>
           <a:lstStyle/>
           <a:p>
-            <a:r>
-              <a:rPr sz="1400" b="1">
-                <a:solidFill>
-                  <a:srgbClr val="1B2430"/>
-                </a:solidFill>
-                <a:latin typeface="微软雅黑"/>
-              </a:rPr>
-              <a:t>收入集中度</a:t>
-            </a:r>
-          </a:p>
-          <a:p>
-            <a:pPr>
-              <a:spcBef>
-                <a:spcPts val="500"/>
-              </a:spcBef>
-            </a:pPr>
-            <a:r>
-              <a:rPr sz="1200" b="0">
+            <a:pPr algn="r"/>
+            <a:r>
+              <a:rPr sz="950" b="0">
                 <a:solidFill>
                   <a:srgbClr val="5B6470"/>
                 </a:solidFill>
                 <a:latin typeface="微软雅黑"/>
               </a:rPr>
-              <a:t>精品头部品类占比高（安克充电储能 50.5%）；铺货分散在无数 SKU</a:t>
-            </a:r>
-          </a:p>
-        </p:txBody>
-      </p:sp>
-      <p:sp>
-        <p:nvSpPr>
-          <p:cNvPr id="13" name="Rectangle 12"/>
-          <p:cNvSpPr/>
-          <p:nvPr/>
-        </p:nvSpPr>
-        <p:spPr>
-          <a:xfrm>
-            <a:off x="6263640" y="3931920"/>
-            <a:ext cx="5349240" cy="1691640"/>
-          </a:xfrm>
-          <a:prstGeom prst="rect">
-            <a:avLst/>
-          </a:prstGeom>
-          <a:solidFill>
-            <a:srgbClr val="F3F5F8"/>
-          </a:solidFill>
-          <a:ln>
-            <a:noFill/>
-          </a:ln>
-          <a:effectLst/>
-        </p:spPr>
-        <p:style>
-          <a:lnRef idx="1">
-            <a:schemeClr val="accent1"/>
-          </a:lnRef>
-          <a:fillRef idx="3">
-            <a:schemeClr val="accent1"/>
-          </a:fillRef>
-          <a:effectRef idx="2">
-            <a:schemeClr val="accent1"/>
-          </a:effectRef>
-          <a:fontRef idx="minor">
-            <a:schemeClr val="lt1"/>
-          </a:fontRef>
-        </p:style>
-        <p:txBody>
-          <a:bodyPr rtlCol="0" anchor="ctr"/>
-          <a:lstStyle/>
-          <a:p>
-            <a:pPr algn="ctr"/>
-          </a:p>
-        </p:txBody>
-      </p:sp>
-      <p:sp>
-        <p:nvSpPr>
-          <p:cNvPr id="14" name="Rectangle 13"/>
-          <p:cNvSpPr/>
-          <p:nvPr/>
-        </p:nvSpPr>
-        <p:spPr>
-          <a:xfrm>
-            <a:off x="6263640" y="3931920"/>
-            <a:ext cx="64008" cy="1691640"/>
-          </a:xfrm>
-          <a:prstGeom prst="rect">
-            <a:avLst/>
-          </a:prstGeom>
-          <a:solidFill>
-            <a:srgbClr val="2F5AA8"/>
-          </a:solidFill>
-          <a:ln>
-            <a:noFill/>
-          </a:ln>
-          <a:effectLst/>
-        </p:spPr>
-        <p:style>
-          <a:lnRef idx="1">
-            <a:schemeClr val="accent1"/>
-          </a:lnRef>
-          <a:fillRef idx="3">
-            <a:schemeClr val="accent1"/>
-          </a:fillRef>
-          <a:effectRef idx="2">
-            <a:schemeClr val="accent1"/>
-          </a:effectRef>
-          <a:fontRef idx="minor">
-            <a:schemeClr val="lt1"/>
-          </a:fontRef>
-        </p:style>
-        <p:txBody>
-          <a:bodyPr rtlCol="0" anchor="ctr"/>
-          <a:lstStyle/>
-          <a:p>
-            <a:pPr algn="ctr"/>
-          </a:p>
-        </p:txBody>
-      </p:sp>
-      <p:sp>
-        <p:nvSpPr>
-          <p:cNvPr id="15" name="TextBox 14"/>
-          <p:cNvSpPr txBox="1"/>
-          <p:nvPr/>
-        </p:nvSpPr>
-        <p:spPr>
-          <a:xfrm>
-            <a:off x="6492240" y="4078224"/>
-            <a:ext cx="4937759" cy="1417320"/>
-          </a:xfrm>
-          <a:prstGeom prst="rect">
-            <a:avLst/>
-          </a:prstGeom>
-          <a:noFill/>
-        </p:spPr>
-        <p:txBody>
-          <a:bodyPr wrap="square">
-            <a:spAutoFit/>
-          </a:bodyPr>
-          <a:lstStyle/>
-          <a:p>
-            <a:r>
-              <a:rPr sz="1400" b="1">
-                <a:solidFill>
-                  <a:srgbClr val="1B2430"/>
-                </a:solidFill>
-                <a:latin typeface="微软雅黑"/>
-              </a:rPr>
-              <a:t>销售费用率与流量</a:t>
-            </a:r>
-          </a:p>
-          <a:p>
-            <a:pPr>
-              <a:spcBef>
-                <a:spcPts val="500"/>
-              </a:spcBef>
-            </a:pPr>
-            <a:r>
-              <a:rPr sz="1200" b="0">
-                <a:solidFill>
-                  <a:srgbClr val="5B6470"/>
-                </a:solidFill>
-                <a:latin typeface="微软雅黑"/>
-              </a:rPr>
-              <a:t>精品较低（品牌词/复购）；铺货高（广告买量，靠流量吃饭）</a:t>
-            </a:r>
-          </a:p>
-        </p:txBody>
-      </p:sp>
-      <p:sp>
-        <p:nvSpPr>
-          <p:cNvPr id="16" name="TextBox 15"/>
-          <p:cNvSpPr txBox="1"/>
-          <p:nvPr/>
-        </p:nvSpPr>
-        <p:spPr>
-          <a:xfrm>
-            <a:off x="640080" y="5989320"/>
-            <a:ext cx="10972800" cy="548640"/>
-          </a:xfrm>
-          <a:prstGeom prst="rect">
-            <a:avLst/>
-          </a:prstGeom>
-          <a:noFill/>
-        </p:spPr>
-        <p:txBody>
-          <a:bodyPr wrap="square">
-            <a:spAutoFit/>
-          </a:bodyPr>
-          <a:lstStyle/>
-          <a:p>
-            <a:r>
-              <a:rPr sz="1200" b="0">
-                <a:solidFill>
-                  <a:srgbClr val="5B6470"/>
-                </a:solidFill>
-                <a:latin typeface="微软雅黑"/>
-              </a:rPr>
-              <a:t>说明：这是“谱带”不是“开关”——判断看经营结构，而非有没有品牌名。</a:t>
-            </a:r>
-          </a:p>
-        </p:txBody>
-      </p:sp>
-      <p:sp>
-        <p:nvSpPr>
-          <p:cNvPr id="17" name="TextBox 16"/>
-          <p:cNvSpPr txBox="1"/>
-          <p:nvPr/>
-        </p:nvSpPr>
-        <p:spPr>
-          <a:xfrm>
-            <a:off x="640080" y="6446520"/>
-            <a:ext cx="3657600" cy="320040"/>
-          </a:xfrm>
-          <a:prstGeom prst="rect">
-            <a:avLst/>
-          </a:prstGeom>
-          <a:noFill/>
-        </p:spPr>
-        <p:txBody>
-          <a:bodyPr wrap="square">
-            <a:spAutoFit/>
-          </a:bodyPr>
-          <a:lstStyle/>
-          <a:p>
-            <a:r>
-              <a:rPr sz="950" b="0">
-                <a:solidFill>
-                  <a:srgbClr val="5B6470"/>
-                </a:solidFill>
-                <a:latin typeface="微软雅黑"/>
-              </a:rPr>
-              <a:t>Xuefei Wang · 2026</a:t>
-            </a:r>
-          </a:p>
-        </p:txBody>
-      </p:sp>
-      <p:sp>
-        <p:nvSpPr>
-          <p:cNvPr id="18" name="TextBox 17"/>
-          <p:cNvSpPr txBox="1"/>
-          <p:nvPr/>
-        </p:nvSpPr>
-        <p:spPr>
-          <a:xfrm>
-            <a:off x="10972800" y="6446520"/>
-            <a:ext cx="640080" cy="320040"/>
-          </a:xfrm>
-          <a:prstGeom prst="rect">
-            <a:avLst/>
-          </a:prstGeom>
-          <a:noFill/>
-        </p:spPr>
-        <p:txBody>
-          <a:bodyPr wrap="square">
-            <a:spAutoFit/>
-          </a:bodyPr>
-          <a:lstStyle/>
-          <a:p>
-            <a:pPr algn="r"/>
-            <a:r>
-              <a:rPr sz="950" b="0">
-                <a:solidFill>
-                  <a:srgbClr val="5B6470"/>
-                </a:solidFill>
-                <a:latin typeface="微软雅黑"/>
-              </a:rPr>
-              <a:t>07 / 15</a:t>
+              <a:t>07 / 16</a:t>
             </a:r>
           </a:p>
         </p:txBody>
@@ -8481,7 +8790,7 @@
                 </a:solidFill>
                 <a:latin typeface="微软雅黑"/>
               </a:rPr>
-              <a:t>METHOD · 定位</a:t>
+              <a:t>METHOD · 分类</a:t>
             </a:r>
           </a:p>
           <a:p>
@@ -8497,7 +8806,7 @@
                 </a:solidFill>
                 <a:latin typeface="微软雅黑"/>
               </a:rPr>
-              <a:t>5 家上市公司落在哪里 + 三种原型</a:t>
+              <a:t>我怎么定义“精品 vs 铺货”：四个可核对的信号</a:t>
             </a:r>
           </a:p>
         </p:txBody>
@@ -8510,8 +8819,8 @@
         </p:nvSpPr>
         <p:spPr>
           <a:xfrm>
-            <a:off x="640080" y="1828800"/>
-            <a:ext cx="10881360" cy="713232"/>
+            <a:off x="640080" y="1965960"/>
+            <a:ext cx="5349240" cy="1691640"/>
           </a:xfrm>
           <a:prstGeom prst="rect">
             <a:avLst/>
@@ -8548,14 +8857,58 @@
       </p:sp>
       <p:sp>
         <p:nvSpPr>
-          <p:cNvPr id="5" name="TextBox 4"/>
+          <p:cNvPr id="5" name="Rectangle 4"/>
+          <p:cNvSpPr/>
+          <p:nvPr/>
+        </p:nvSpPr>
+        <p:spPr>
+          <a:xfrm>
+            <a:off x="640080" y="1965960"/>
+            <a:ext cx="64008" cy="1691640"/>
+          </a:xfrm>
+          <a:prstGeom prst="rect">
+            <a:avLst/>
+          </a:prstGeom>
+          <a:solidFill>
+            <a:srgbClr val="2F5AA8"/>
+          </a:solidFill>
+          <a:ln>
+            <a:noFill/>
+          </a:ln>
+          <a:effectLst/>
+        </p:spPr>
+        <p:style>
+          <a:lnRef idx="1">
+            <a:schemeClr val="accent1"/>
+          </a:lnRef>
+          <a:fillRef idx="3">
+            <a:schemeClr val="accent1"/>
+          </a:fillRef>
+          <a:effectRef idx="2">
+            <a:schemeClr val="accent1"/>
+          </a:effectRef>
+          <a:fontRef idx="minor">
+            <a:schemeClr val="lt1"/>
+          </a:fontRef>
+        </p:style>
+        <p:txBody>
+          <a:bodyPr rtlCol="0" anchor="ctr"/>
+          <a:lstStyle/>
+          <a:p>
+            <a:pPr algn="ctr"/>
+          </a:p>
+        </p:txBody>
+      </p:sp>
+      <p:sp>
+        <p:nvSpPr>
+          <p:cNvPr id="6" name="TextBox 5"/>
           <p:cNvSpPr txBox="1"/>
           <p:nvPr/>
         </p:nvSpPr>
         <p:spPr>
           <a:xfrm>
-            <a:off x="868680" y="1901952"/>
-            <a:ext cx="1920240" cy="548640"/>
+            <a:off x="868680" y="2112264"/>
+            <a:ext cx="4937759" cy="1417320"/>
           </a:xfrm>
           <a:prstGeom prst="rect">
             <a:avLst/>
@@ -8569,95 +8922,43 @@
           <a:lstStyle/>
           <a:p>
             <a:r>
-              <a:rPr sz="1350" b="1">
+              <a:rPr sz="1400" b="1">
                 <a:solidFill>
                   <a:srgbClr val="1B2430"/>
                 </a:solidFill>
                 <a:latin typeface="微软雅黑"/>
               </a:rPr>
-              <a:t>安克创新</a:t>
-            </a:r>
-          </a:p>
-        </p:txBody>
-      </p:sp>
-      <p:sp>
-        <p:nvSpPr>
-          <p:cNvPr id="6" name="TextBox 5"/>
-          <p:cNvSpPr txBox="1"/>
-          <p:nvPr/>
-        </p:nvSpPr>
-        <p:spPr>
-          <a:xfrm>
-            <a:off x="2834640" y="1901952"/>
-            <a:ext cx="2377440" cy="548640"/>
-          </a:xfrm>
-          <a:prstGeom prst="rect">
-            <a:avLst/>
-          </a:prstGeom>
-          <a:noFill/>
-        </p:spPr>
-        <p:txBody>
-          <a:bodyPr wrap="square">
-            <a:spAutoFit/>
-          </a:bodyPr>
-          <a:lstStyle/>
-          <a:p>
-            <a:r>
-              <a:rPr sz="1300" b="1">
-                <a:solidFill>
-                  <a:srgbClr val="2F5AA8"/>
-                </a:solidFill>
-                <a:latin typeface="微软雅黑"/>
-              </a:rPr>
-              <a:t>精品品牌</a:t>
-            </a:r>
-          </a:p>
-        </p:txBody>
-      </p:sp>
-      <p:sp>
-        <p:nvSpPr>
-          <p:cNvPr id="7" name="TextBox 6"/>
-          <p:cNvSpPr txBox="1"/>
-          <p:nvPr/>
-        </p:nvSpPr>
-        <p:spPr>
-          <a:xfrm>
-            <a:off x="5303520" y="1901952"/>
-            <a:ext cx="6035040" cy="548640"/>
-          </a:xfrm>
-          <a:prstGeom prst="rect">
-            <a:avLst/>
-          </a:prstGeom>
-          <a:noFill/>
-        </p:spPr>
-        <p:txBody>
-          <a:bodyPr wrap="square">
-            <a:spAutoFit/>
-          </a:bodyPr>
-          <a:lstStyle/>
-          <a:p>
-            <a:r>
-              <a:rPr sz="1150" b="0">
+              <a:t>研发 / 产品投入</a:t>
+            </a:r>
+          </a:p>
+          <a:p>
+            <a:pPr>
+              <a:spcBef>
+                <a:spcPts val="500"/>
+              </a:spcBef>
+            </a:pPr>
+            <a:r>
+              <a:rPr sz="1200" b="0">
                 <a:solidFill>
                   <a:srgbClr val="5B6470"/>
                 </a:solidFill>
                 <a:latin typeface="微软雅黑"/>
               </a:rPr>
-              <a:t>研发 9.5% 全场最高；充电储能占 50.5%；品牌+私模</a:t>
-            </a:r>
-          </a:p>
-        </p:txBody>
-      </p:sp>
-      <p:sp>
-        <p:nvSpPr>
-          <p:cNvPr id="8" name="Rectangle 7"/>
+              <a:t>精品高（私模、自研、专利）；铺货低（贴牌、公模、跟随选品）</a:t>
+            </a:r>
+          </a:p>
+        </p:txBody>
+      </p:sp>
+      <p:sp>
+        <p:nvSpPr>
+          <p:cNvPr id="7" name="Rectangle 6"/>
           <p:cNvSpPr/>
           <p:nvPr/>
         </p:nvSpPr>
         <p:spPr>
           <a:xfrm>
-            <a:off x="640080" y="2633472"/>
-            <a:ext cx="10881360" cy="713232"/>
+            <a:off x="6263640" y="1965960"/>
+            <a:ext cx="5349240" cy="1691640"/>
           </a:xfrm>
           <a:prstGeom prst="rect">
             <a:avLst/>
@@ -8694,14 +8995,58 @@
       </p:sp>
       <p:sp>
         <p:nvSpPr>
+          <p:cNvPr id="8" name="Rectangle 7"/>
+          <p:cNvSpPr/>
+          <p:nvPr/>
+        </p:nvSpPr>
+        <p:spPr>
+          <a:xfrm>
+            <a:off x="6263640" y="1965960"/>
+            <a:ext cx="64008" cy="1691640"/>
+          </a:xfrm>
+          <a:prstGeom prst="rect">
+            <a:avLst/>
+          </a:prstGeom>
+          <a:solidFill>
+            <a:srgbClr val="2F5AA8"/>
+          </a:solidFill>
+          <a:ln>
+            <a:noFill/>
+          </a:ln>
+          <a:effectLst/>
+        </p:spPr>
+        <p:style>
+          <a:lnRef idx="1">
+            <a:schemeClr val="accent1"/>
+          </a:lnRef>
+          <a:fillRef idx="3">
+            <a:schemeClr val="accent1"/>
+          </a:fillRef>
+          <a:effectRef idx="2">
+            <a:schemeClr val="accent1"/>
+          </a:effectRef>
+          <a:fontRef idx="minor">
+            <a:schemeClr val="lt1"/>
+          </a:fontRef>
+        </p:style>
+        <p:txBody>
+          <a:bodyPr rtlCol="0" anchor="ctr"/>
+          <a:lstStyle/>
+          <a:p>
+            <a:pPr algn="ctr"/>
+          </a:p>
+        </p:txBody>
+      </p:sp>
+      <p:sp>
+        <p:nvSpPr>
           <p:cNvPr id="9" name="TextBox 8"/>
           <p:cNvSpPr txBox="1"/>
           <p:nvPr/>
         </p:nvSpPr>
         <p:spPr>
           <a:xfrm>
-            <a:off x="868680" y="2706624"/>
-            <a:ext cx="1920240" cy="548640"/>
+            <a:off x="6492240" y="2112264"/>
+            <a:ext cx="4937759" cy="1417320"/>
           </a:xfrm>
           <a:prstGeom prst="rect">
             <a:avLst/>
@@ -8715,95 +9060,43 @@
           <a:lstStyle/>
           <a:p>
             <a:r>
-              <a:rPr sz="1350" b="1">
+              <a:rPr sz="1400" b="1">
                 <a:solidFill>
                   <a:srgbClr val="1B2430"/>
                 </a:solidFill>
                 <a:latin typeface="微软雅黑"/>
               </a:rPr>
-              <a:t>致欧科技</a:t>
-            </a:r>
-          </a:p>
-        </p:txBody>
-      </p:sp>
-      <p:sp>
-        <p:nvSpPr>
-          <p:cNvPr id="10" name="TextBox 9"/>
-          <p:cNvSpPr txBox="1"/>
-          <p:nvPr/>
-        </p:nvSpPr>
-        <p:spPr>
-          <a:xfrm>
-            <a:off x="2834640" y="2706624"/>
-            <a:ext cx="2377440" cy="548640"/>
-          </a:xfrm>
-          <a:prstGeom prst="rect">
-            <a:avLst/>
-          </a:prstGeom>
-          <a:noFill/>
-        </p:spPr>
-        <p:txBody>
-          <a:bodyPr wrap="square">
-            <a:spAutoFit/>
-          </a:bodyPr>
-          <a:lstStyle/>
-          <a:p>
-            <a:r>
-              <a:rPr sz="1300" b="1">
-                <a:solidFill>
-                  <a:srgbClr val="2F5AA8"/>
-                </a:solidFill>
-                <a:latin typeface="微软雅黑"/>
-              </a:rPr>
-              <a:t>目录式长尾品牌</a:t>
-            </a:r>
-          </a:p>
-        </p:txBody>
-      </p:sp>
-      <p:sp>
-        <p:nvSpPr>
-          <p:cNvPr id="11" name="TextBox 10"/>
-          <p:cNvSpPr txBox="1"/>
-          <p:nvPr/>
-        </p:nvSpPr>
-        <p:spPr>
-          <a:xfrm>
-            <a:off x="5303520" y="2706624"/>
-            <a:ext cx="6035040" cy="548640"/>
-          </a:xfrm>
-          <a:prstGeom prst="rect">
-            <a:avLst/>
-          </a:prstGeom>
-          <a:noFill/>
-        </p:spPr>
-        <p:txBody>
-          <a:bodyPr wrap="square">
-            <a:spAutoFit/>
-          </a:bodyPr>
-          <a:lstStyle/>
-          <a:p>
-            <a:r>
-              <a:rPr sz="1150" b="0">
+              <a:t>SKU 广度与打法</a:t>
+            </a:r>
+          </a:p>
+          <a:p>
+            <a:pPr>
+              <a:spcBef>
+                <a:spcPts val="500"/>
+              </a:spcBef>
+            </a:pPr>
+            <a:r>
+              <a:rPr sz="1200" b="0">
                 <a:solidFill>
                   <a:srgbClr val="5B6470"/>
                 </a:solidFill>
                 <a:latin typeface="微软雅黑"/>
               </a:rPr>
-              <a:t>自有品牌矩阵、SKU 大而全；重产品设计而非铺货</a:t>
-            </a:r>
-          </a:p>
-        </p:txBody>
-      </p:sp>
-      <p:sp>
-        <p:nvSpPr>
-          <p:cNvPr id="12" name="Rectangle 11"/>
+              <a:t>精品少而聚焦、靠爆款+系列；铺货海量 SKU、上架测款跑概率</a:t>
+            </a:r>
+          </a:p>
+        </p:txBody>
+      </p:sp>
+      <p:sp>
+        <p:nvSpPr>
+          <p:cNvPr id="10" name="Rectangle 9"/>
           <p:cNvSpPr/>
           <p:nvPr/>
         </p:nvSpPr>
         <p:spPr>
           <a:xfrm>
-            <a:off x="640080" y="3438144"/>
-            <a:ext cx="10881360" cy="713232"/>
+            <a:off x="640080" y="3931920"/>
+            <a:ext cx="5349240" cy="1691640"/>
           </a:xfrm>
           <a:prstGeom prst="rect">
             <a:avLst/>
@@ -8840,14 +9133,58 @@
       </p:sp>
       <p:sp>
         <p:nvSpPr>
-          <p:cNvPr id="13" name="TextBox 12"/>
+          <p:cNvPr id="11" name="Rectangle 10"/>
+          <p:cNvSpPr/>
+          <p:nvPr/>
+        </p:nvSpPr>
+        <p:spPr>
+          <a:xfrm>
+            <a:off x="640080" y="3931920"/>
+            <a:ext cx="64008" cy="1691640"/>
+          </a:xfrm>
+          <a:prstGeom prst="rect">
+            <a:avLst/>
+          </a:prstGeom>
+          <a:solidFill>
+            <a:srgbClr val="2F5AA8"/>
+          </a:solidFill>
+          <a:ln>
+            <a:noFill/>
+          </a:ln>
+          <a:effectLst/>
+        </p:spPr>
+        <p:style>
+          <a:lnRef idx="1">
+            <a:schemeClr val="accent1"/>
+          </a:lnRef>
+          <a:fillRef idx="3">
+            <a:schemeClr val="accent1"/>
+          </a:fillRef>
+          <a:effectRef idx="2">
+            <a:schemeClr val="accent1"/>
+          </a:effectRef>
+          <a:fontRef idx="minor">
+            <a:schemeClr val="lt1"/>
+          </a:fontRef>
+        </p:style>
+        <p:txBody>
+          <a:bodyPr rtlCol="0" anchor="ctr"/>
+          <a:lstStyle/>
+          <a:p>
+            <a:pPr algn="ctr"/>
+          </a:p>
+        </p:txBody>
+      </p:sp>
+      <p:sp>
+        <p:nvSpPr>
+          <p:cNvPr id="12" name="TextBox 11"/>
           <p:cNvSpPr txBox="1"/>
           <p:nvPr/>
         </p:nvSpPr>
         <p:spPr>
           <a:xfrm>
-            <a:off x="868680" y="3511296"/>
-            <a:ext cx="1920240" cy="548640"/>
+            <a:off x="868680" y="4078224"/>
+            <a:ext cx="4937759" cy="1417320"/>
           </a:xfrm>
           <a:prstGeom prst="rect">
             <a:avLst/>
@@ -8861,95 +9198,43 @@
           <a:lstStyle/>
           <a:p>
             <a:r>
-              <a:rPr sz="1350" b="1">
+              <a:rPr sz="1400" b="1">
                 <a:solidFill>
                   <a:srgbClr val="1B2430"/>
                 </a:solidFill>
                 <a:latin typeface="微软雅黑"/>
               </a:rPr>
-              <a:t>赛维时代</a:t>
-            </a:r>
-          </a:p>
-        </p:txBody>
-      </p:sp>
-      <p:sp>
-        <p:nvSpPr>
-          <p:cNvPr id="14" name="TextBox 13"/>
-          <p:cNvSpPr txBox="1"/>
-          <p:nvPr/>
-        </p:nvSpPr>
-        <p:spPr>
-          <a:xfrm>
-            <a:off x="2834640" y="3511296"/>
-            <a:ext cx="2377440" cy="548640"/>
-          </a:xfrm>
-          <a:prstGeom prst="rect">
-            <a:avLst/>
-          </a:prstGeom>
-          <a:noFill/>
-        </p:spPr>
-        <p:txBody>
-          <a:bodyPr wrap="square">
-            <a:spAutoFit/>
-          </a:bodyPr>
-          <a:lstStyle/>
-          <a:p>
-            <a:r>
-              <a:rPr sz="1300" b="1">
-                <a:solidFill>
-                  <a:srgbClr val="2F5AA8"/>
-                </a:solidFill>
-                <a:latin typeface="微软雅黑"/>
-              </a:rPr>
-              <a:t>铺货（泛品）</a:t>
-            </a:r>
-          </a:p>
-        </p:txBody>
-      </p:sp>
-      <p:sp>
-        <p:nvSpPr>
-          <p:cNvPr id="15" name="TextBox 14"/>
-          <p:cNvSpPr txBox="1"/>
-          <p:nvPr/>
-        </p:nvSpPr>
-        <p:spPr>
-          <a:xfrm>
-            <a:off x="5303520" y="3511296"/>
-            <a:ext cx="6035040" cy="548640"/>
-          </a:xfrm>
-          <a:prstGeom prst="rect">
-            <a:avLst/>
-          </a:prstGeom>
-          <a:noFill/>
-        </p:spPr>
-        <p:txBody>
-          <a:bodyPr wrap="square">
-            <a:spAutoFit/>
-          </a:bodyPr>
-          <a:lstStyle/>
-          <a:p>
-            <a:r>
-              <a:rPr sz="1150" b="0">
+              <a:t>收入集中度</a:t>
+            </a:r>
+          </a:p>
+          <a:p>
+            <a:pPr>
+              <a:spcBef>
+                <a:spcPts val="500"/>
+              </a:spcBef>
+            </a:pPr>
+            <a:r>
+              <a:rPr sz="1200" b="0">
                 <a:solidFill>
                   <a:srgbClr val="5B6470"/>
                 </a:solidFill>
                 <a:latin typeface="微软雅黑"/>
               </a:rPr>
-              <a:t>数十万 SKU；研发 &lt;1%；销售费用 35.4%</a:t>
-            </a:r>
-          </a:p>
-        </p:txBody>
-      </p:sp>
-      <p:sp>
-        <p:nvSpPr>
-          <p:cNvPr id="16" name="Rectangle 15"/>
+              <a:t>精品头部品类占比高（安克充电储能 50.5%）；铺货分散在无数 SKU</a:t>
+            </a:r>
+          </a:p>
+        </p:txBody>
+      </p:sp>
+      <p:sp>
+        <p:nvSpPr>
+          <p:cNvPr id="13" name="Rectangle 12"/>
           <p:cNvSpPr/>
           <p:nvPr/>
         </p:nvSpPr>
         <p:spPr>
           <a:xfrm>
-            <a:off x="640080" y="4242816"/>
-            <a:ext cx="10881360" cy="713232"/>
+            <a:off x="6263640" y="3931920"/>
+            <a:ext cx="5349240" cy="1691640"/>
           </a:xfrm>
           <a:prstGeom prst="rect">
             <a:avLst/>
@@ -8986,122 +9271,20 @@
       </p:sp>
       <p:sp>
         <p:nvSpPr>
-          <p:cNvPr id="17" name="TextBox 16"/>
-          <p:cNvSpPr txBox="1"/>
-          <p:nvPr/>
-        </p:nvSpPr>
-        <p:spPr>
-          <a:xfrm>
-            <a:off x="868680" y="4315968"/>
-            <a:ext cx="1920240" cy="548640"/>
-          </a:xfrm>
-          <a:prstGeom prst="rect">
-            <a:avLst/>
-          </a:prstGeom>
-          <a:noFill/>
-        </p:spPr>
-        <p:txBody>
-          <a:bodyPr wrap="square">
-            <a:spAutoFit/>
-          </a:bodyPr>
-          <a:lstStyle/>
-          <a:p>
-            <a:r>
-              <a:rPr sz="1350" b="1">
-                <a:solidFill>
-                  <a:srgbClr val="1B2430"/>
-                </a:solidFill>
-                <a:latin typeface="微软雅黑"/>
-              </a:rPr>
-              <a:t>华凯易佰</a:t>
-            </a:r>
-          </a:p>
-        </p:txBody>
-      </p:sp>
-      <p:sp>
-        <p:nvSpPr>
-          <p:cNvPr id="18" name="TextBox 17"/>
-          <p:cNvSpPr txBox="1"/>
-          <p:nvPr/>
-        </p:nvSpPr>
-        <p:spPr>
-          <a:xfrm>
-            <a:off x="2834640" y="4315968"/>
-            <a:ext cx="2377440" cy="548640"/>
-          </a:xfrm>
-          <a:prstGeom prst="rect">
-            <a:avLst/>
-          </a:prstGeom>
-          <a:noFill/>
-        </p:spPr>
-        <p:txBody>
-          <a:bodyPr wrap="square">
-            <a:spAutoFit/>
-          </a:bodyPr>
-          <a:lstStyle/>
-          <a:p>
-            <a:r>
-              <a:rPr sz="1300" b="1">
-                <a:solidFill>
-                  <a:srgbClr val="2F5AA8"/>
-                </a:solidFill>
-                <a:latin typeface="微软雅黑"/>
-              </a:rPr>
-              <a:t>铺货（泛品）</a:t>
-            </a:r>
-          </a:p>
-        </p:txBody>
-      </p:sp>
-      <p:sp>
-        <p:nvSpPr>
-          <p:cNvPr id="19" name="TextBox 18"/>
-          <p:cNvSpPr txBox="1"/>
-          <p:nvPr/>
-        </p:nvSpPr>
-        <p:spPr>
-          <a:xfrm>
-            <a:off x="5303520" y="4315968"/>
-            <a:ext cx="6035040" cy="548640"/>
-          </a:xfrm>
-          <a:prstGeom prst="rect">
-            <a:avLst/>
-          </a:prstGeom>
-          <a:noFill/>
-        </p:spPr>
-        <p:txBody>
-          <a:bodyPr wrap="square">
-            <a:spAutoFit/>
-          </a:bodyPr>
-          <a:lstStyle/>
-          <a:p>
-            <a:r>
-              <a:rPr sz="1150" b="0">
-                <a:solidFill>
-                  <a:srgbClr val="5B6470"/>
-                </a:solidFill>
-                <a:latin typeface="微软雅黑"/>
-              </a:rPr>
-              <a:t>海量 SKU + 综合服务；净利率 1.6%、增速 +1.2%</a:t>
-            </a:r>
-          </a:p>
-        </p:txBody>
-      </p:sp>
-      <p:sp>
-        <p:nvSpPr>
-          <p:cNvPr id="20" name="Rectangle 19"/>
+          <p:cNvPr id="14" name="Rectangle 13"/>
           <p:cNvSpPr/>
           <p:nvPr/>
         </p:nvSpPr>
         <p:spPr>
           <a:xfrm>
-            <a:off x="640080" y="5047488"/>
-            <a:ext cx="10881360" cy="713232"/>
+            <a:off x="6263640" y="3931920"/>
+            <a:ext cx="64008" cy="1691640"/>
           </a:xfrm>
           <a:prstGeom prst="rect">
             <a:avLst/>
           </a:prstGeom>
           <a:solidFill>
-            <a:srgbClr val="F3F5F8"/>
+            <a:srgbClr val="2F5AA8"/>
           </a:solidFill>
           <a:ln>
             <a:noFill/>
@@ -9132,14 +9315,14 @@
       </p:sp>
       <p:sp>
         <p:nvSpPr>
-          <p:cNvPr id="21" name="TextBox 20"/>
+          <p:cNvPr id="15" name="TextBox 14"/>
           <p:cNvSpPr txBox="1"/>
           <p:nvPr/>
         </p:nvSpPr>
         <p:spPr>
           <a:xfrm>
-            <a:off x="868680" y="5120640"/>
-            <a:ext cx="1920240" cy="548640"/>
+            <a:off x="6492240" y="4078224"/>
+            <a:ext cx="4937759" cy="1417320"/>
           </a:xfrm>
           <a:prstGeom prst="rect">
             <a:avLst/>
@@ -9153,27 +9336,43 @@
           <a:lstStyle/>
           <a:p>
             <a:r>
-              <a:rPr sz="1350" b="1">
+              <a:rPr sz="1400" b="1">
                 <a:solidFill>
                   <a:srgbClr val="1B2430"/>
                 </a:solidFill>
                 <a:latin typeface="微软雅黑"/>
               </a:rPr>
-              <a:t>吉宏股份</a:t>
-            </a:r>
-          </a:p>
-        </p:txBody>
-      </p:sp>
-      <p:sp>
-        <p:nvSpPr>
-          <p:cNvPr id="22" name="TextBox 21"/>
+              <a:t>销售费用率与流量</a:t>
+            </a:r>
+          </a:p>
+          <a:p>
+            <a:pPr>
+              <a:spcBef>
+                <a:spcPts val="500"/>
+              </a:spcBef>
+            </a:pPr>
+            <a:r>
+              <a:rPr sz="1200" b="0">
+                <a:solidFill>
+                  <a:srgbClr val="5B6470"/>
+                </a:solidFill>
+                <a:latin typeface="微软雅黑"/>
+              </a:rPr>
+              <a:t>精品较低（品牌词/复购）；铺货高（广告买量，靠流量吃饭）</a:t>
+            </a:r>
+          </a:p>
+        </p:txBody>
+      </p:sp>
+      <p:sp>
+        <p:nvSpPr>
+          <p:cNvPr id="16" name="TextBox 15"/>
           <p:cNvSpPr txBox="1"/>
           <p:nvPr/>
         </p:nvSpPr>
         <p:spPr>
           <a:xfrm>
-            <a:off x="2834640" y="5120640"/>
-            <a:ext cx="2377440" cy="548640"/>
+            <a:off x="640080" y="5989320"/>
+            <a:ext cx="10972800" cy="548640"/>
           </a:xfrm>
           <a:prstGeom prst="rect">
             <a:avLst/>
@@ -9187,27 +9386,27 @@
           <a:lstStyle/>
           <a:p>
             <a:r>
-              <a:rPr sz="1300" b="1">
-                <a:solidFill>
-                  <a:srgbClr val="2F5AA8"/>
-                </a:solidFill>
-                <a:latin typeface="微软雅黑"/>
-              </a:rPr>
-              <a:t>流量驱动（非典型）</a:t>
-            </a:r>
-          </a:p>
-        </p:txBody>
-      </p:sp>
-      <p:sp>
-        <p:nvSpPr>
-          <p:cNvPr id="23" name="TextBox 22"/>
+              <a:rPr sz="1200" b="0">
+                <a:solidFill>
+                  <a:srgbClr val="5B6470"/>
+                </a:solidFill>
+                <a:latin typeface="微软雅黑"/>
+              </a:rPr>
+              <a:t>说明：这是“谱带”不是“开关”——判断看经营结构，而非有没有品牌名。</a:t>
+            </a:r>
+          </a:p>
+        </p:txBody>
+      </p:sp>
+      <p:sp>
+        <p:nvSpPr>
+          <p:cNvPr id="17" name="TextBox 16"/>
           <p:cNvSpPr txBox="1"/>
           <p:nvPr/>
         </p:nvSpPr>
         <p:spPr>
           <a:xfrm>
-            <a:off x="5303520" y="5120640"/>
-            <a:ext cx="6035040" cy="548640"/>
+            <a:off x="640080" y="6446520"/>
+            <a:ext cx="3657600" cy="320040"/>
           </a:xfrm>
           <a:prstGeom prst="rect">
             <a:avLst/>
@@ -9221,27 +9420,27 @@
           <a:lstStyle/>
           <a:p>
             <a:r>
-              <a:rPr sz="1150" b="0">
+              <a:rPr sz="950" b="0">
                 <a:solidFill>
                   <a:srgbClr val="5B6470"/>
                 </a:solidFill>
                 <a:latin typeface="微软雅黑"/>
               </a:rPr>
-              <a:t>社交电商/独立站投放为主；另含包装需分部看</a:t>
-            </a:r>
-          </a:p>
-        </p:txBody>
-      </p:sp>
-      <p:sp>
-        <p:nvSpPr>
-          <p:cNvPr id="24" name="TextBox 23"/>
+              <a:t>Xuefei Wang · 2026</a:t>
+            </a:r>
+          </a:p>
+        </p:txBody>
+      </p:sp>
+      <p:sp>
+        <p:nvSpPr>
+          <p:cNvPr id="18" name="TextBox 17"/>
           <p:cNvSpPr txBox="1"/>
           <p:nvPr/>
         </p:nvSpPr>
         <p:spPr>
           <a:xfrm>
-            <a:off x="640080" y="6035040"/>
-            <a:ext cx="10972800" cy="640080"/>
+            <a:off x="10972800" y="6446520"/>
+            <a:ext cx="640080" cy="320040"/>
           </a:xfrm>
           <a:prstGeom prst="rect">
             <a:avLst/>
@@ -9254,40 +9453,7 @@
           </a:bodyPr>
           <a:lstStyle/>
           <a:p>
-            <a:r>
-              <a:rPr sz="1250" b="1">
-                <a:solidFill>
-                  <a:srgbClr val="C97B1E"/>
-                </a:solidFill>
-                <a:latin typeface="微软雅黑"/>
-              </a:rPr>
-              <a:t>我的经历：上一家公司 1000+ SKU 按规格矩阵做全 —— 第三种路径“目录式长尾品牌”。</a:t>
-            </a:r>
-          </a:p>
-        </p:txBody>
-      </p:sp>
-      <p:sp>
-        <p:nvSpPr>
-          <p:cNvPr id="25" name="TextBox 24"/>
-          <p:cNvSpPr txBox="1"/>
-          <p:nvPr/>
-        </p:nvSpPr>
-        <p:spPr>
-          <a:xfrm>
-            <a:off x="640080" y="6446520"/>
-            <a:ext cx="3657600" cy="320040"/>
-          </a:xfrm>
-          <a:prstGeom prst="rect">
-            <a:avLst/>
-          </a:prstGeom>
-          <a:noFill/>
-        </p:spPr>
-        <p:txBody>
-          <a:bodyPr wrap="square">
-            <a:spAutoFit/>
-          </a:bodyPr>
-          <a:lstStyle/>
-          <a:p>
+            <a:pPr algn="r"/>
             <a:r>
               <a:rPr sz="950" b="0">
                 <a:solidFill>
@@ -9295,42 +9461,7 @@
                 </a:solidFill>
                 <a:latin typeface="微软雅黑"/>
               </a:rPr>
-              <a:t>Xuefei Wang · 2026</a:t>
-            </a:r>
-          </a:p>
-        </p:txBody>
-      </p:sp>
-      <p:sp>
-        <p:nvSpPr>
-          <p:cNvPr id="26" name="TextBox 25"/>
-          <p:cNvSpPr txBox="1"/>
-          <p:nvPr/>
-        </p:nvSpPr>
-        <p:spPr>
-          <a:xfrm>
-            <a:off x="10972800" y="6446520"/>
-            <a:ext cx="640080" cy="320040"/>
-          </a:xfrm>
-          <a:prstGeom prst="rect">
-            <a:avLst/>
-          </a:prstGeom>
-          <a:noFill/>
-        </p:spPr>
-        <p:txBody>
-          <a:bodyPr wrap="square">
-            <a:spAutoFit/>
-          </a:bodyPr>
-          <a:lstStyle/>
-          <a:p>
-            <a:pPr algn="r"/>
-            <a:r>
-              <a:rPr sz="950" b="0">
-                <a:solidFill>
-                  <a:srgbClr val="5B6470"/>
-                </a:solidFill>
-                <a:latin typeface="微软雅黑"/>
-              </a:rPr>
-              <a:t>08 / 15</a:t>
+              <a:t>08 / 16</a:t>
             </a:r>
           </a:p>
         </p:txBody>
@@ -9426,7 +9557,7 @@
                 </a:solidFill>
                 <a:latin typeface="微软雅黑"/>
               </a:rPr>
-              <a:t>FINDING ③ · 市场</a:t>
+              <a:t>METHOD · 定位</a:t>
             </a:r>
           </a:p>
           <a:p>
@@ -9442,21 +9573,65 @@
                 </a:solidFill>
                 <a:latin typeface="微软雅黑"/>
               </a:rPr>
-              <a:t>欧洲毛利更高，但天花板与本地化门槛并存</a:t>
-            </a:r>
-          </a:p>
-        </p:txBody>
-      </p:sp>
-      <p:sp>
-        <p:nvSpPr>
-          <p:cNvPr id="4" name="TextBox 3"/>
+              <a:t>5 家上市公司落在哪里 + 三种原型</a:t>
+            </a:r>
+          </a:p>
+        </p:txBody>
+      </p:sp>
+      <p:sp>
+        <p:nvSpPr>
+          <p:cNvPr id="4" name="Rectangle 3"/>
+          <p:cNvSpPr/>
+          <p:nvPr/>
+        </p:nvSpPr>
+        <p:spPr>
+          <a:xfrm>
+            <a:off x="640080" y="1828800"/>
+            <a:ext cx="10881360" cy="713232"/>
+          </a:xfrm>
+          <a:prstGeom prst="rect">
+            <a:avLst/>
+          </a:prstGeom>
+          <a:solidFill>
+            <a:srgbClr val="F3F5F8"/>
+          </a:solidFill>
+          <a:ln>
+            <a:noFill/>
+          </a:ln>
+          <a:effectLst/>
+        </p:spPr>
+        <p:style>
+          <a:lnRef idx="1">
+            <a:schemeClr val="accent1"/>
+          </a:lnRef>
+          <a:fillRef idx="3">
+            <a:schemeClr val="accent1"/>
+          </a:fillRef>
+          <a:effectRef idx="2">
+            <a:schemeClr val="accent1"/>
+          </a:effectRef>
+          <a:fontRef idx="minor">
+            <a:schemeClr val="lt1"/>
+          </a:fontRef>
+        </p:style>
+        <p:txBody>
+          <a:bodyPr rtlCol="0" anchor="ctr"/>
+          <a:lstStyle/>
+          <a:p>
+            <a:pPr algn="ctr"/>
+          </a:p>
+        </p:txBody>
+      </p:sp>
+      <p:sp>
+        <p:nvSpPr>
+          <p:cNvPr id="5" name="TextBox 4"/>
           <p:cNvSpPr txBox="1"/>
           <p:nvPr/>
         </p:nvSpPr>
         <p:spPr>
           <a:xfrm>
-            <a:off x="640080" y="1874519"/>
-            <a:ext cx="5669280" cy="4572000"/>
+            <a:off x="868680" y="1901952"/>
+            <a:ext cx="1920240" cy="548640"/>
           </a:xfrm>
           <a:prstGeom prst="rect">
             <a:avLst/>
@@ -9469,111 +9644,18 @@
           </a:bodyPr>
           <a:lstStyle/>
           <a:p>
-            <a:pPr>
-              <a:spcAft>
-                <a:spcPts val="1200"/>
-              </a:spcAft>
-            </a:pPr>
-            <a:r>
-              <a:rPr sz="1500" b="1">
+            <a:r>
+              <a:rPr sz="1350" b="1">
                 <a:solidFill>
                   <a:srgbClr val="1B2430"/>
                 </a:solidFill>
                 <a:latin typeface="微软雅黑"/>
               </a:rPr>
-              <a:t>▪ 致欧是唯一披露欧美细分的公司：欧洲毛利率 36.4% &gt; 美加 30.3%</a:t>
-            </a:r>
-          </a:p>
-          <a:p>
-            <a:pPr>
-              <a:spcAft>
-                <a:spcPts val="1200"/>
-              </a:spcAft>
-            </a:pPr>
-            <a:r>
-              <a:rPr sz="1500" b="0">
-                <a:solidFill>
-                  <a:srgbClr val="1B2430"/>
-                </a:solidFill>
-                <a:latin typeface="微软雅黑"/>
-              </a:rPr>
-              <a:t>▪ 但致欧增速 +7.1%，明显慢于北美为主的安克（+23.5%）</a:t>
-            </a:r>
-          </a:p>
-          <a:p>
-            <a:pPr lvl="1">
-              <a:spcAft>
-                <a:spcPts val="1200"/>
-              </a:spcAft>
-            </a:pPr>
-            <a:r>
-              <a:rPr sz="1350" b="0">
-                <a:solidFill>
-                  <a:srgbClr val="5B6470"/>
-                </a:solidFill>
-                <a:latin typeface="微软雅黑"/>
-              </a:rPr>
-              <a:t>— 本地化门槛：VAT/EPR、多语言、产品标准</a:t>
-            </a:r>
-          </a:p>
-          <a:p>
-            <a:pPr lvl="1">
-              <a:spcAft>
-                <a:spcPts val="1200"/>
-              </a:spcAft>
-            </a:pPr>
-            <a:r>
-              <a:rPr sz="1350" b="1">
-                <a:solidFill>
-                  <a:srgbClr val="5B6470"/>
-                </a:solidFill>
-                <a:latin typeface="微软雅黑"/>
-              </a:rPr>
-              <a:t>— 我的亲历：美国 NPT 螺纹 vs 欧洲 G 螺纹 → 同一品类要重做产品线</a:t>
-            </a:r>
-          </a:p>
-          <a:p>
-            <a:pPr>
-              <a:spcAft>
-                <a:spcPts val="1200"/>
-              </a:spcAft>
-            </a:pPr>
-            <a:r>
-              <a:rPr sz="1500" b="1">
-                <a:solidFill>
-                  <a:srgbClr val="1B2430"/>
-                </a:solidFill>
-                <a:latin typeface="微软雅黑"/>
-              </a:rPr>
-              <a:t>▪ 判断：美国走规模、欧洲赚毛利；先单点跑通再复制</a:t>
-            </a:r>
-          </a:p>
-        </p:txBody>
-      </p:sp>
-      <p:pic>
-        <p:nvPicPr>
-          <p:cNvPr id="5" name="Picture 4" descr="m3_revenue.png"/>
-          <p:cNvPicPr>
-            <a:picLocks noChangeAspect="1"/>
-          </p:cNvPicPr>
-          <p:nvPr/>
-        </p:nvPicPr>
-        <p:blipFill>
-          <a:blip r:embed="rId2"/>
-          <a:stretch>
-            <a:fillRect/>
-          </a:stretch>
-        </p:blipFill>
-        <p:spPr>
-          <a:xfrm>
-            <a:off x="6492240" y="2103120"/>
-            <a:ext cx="5120640" cy="2531552"/>
-          </a:xfrm>
-          <a:prstGeom prst="rect">
-            <a:avLst/>
-          </a:prstGeom>
-        </p:spPr>
-      </p:pic>
+              <a:t>安克创新</a:t>
+            </a:r>
+          </a:p>
+        </p:txBody>
+      </p:sp>
       <p:sp>
         <p:nvSpPr>
           <p:cNvPr id="6" name="TextBox 5"/>
@@ -9582,8 +9664,8 @@
         </p:nvSpPr>
         <p:spPr>
           <a:xfrm>
-            <a:off x="640080" y="6446520"/>
-            <a:ext cx="3657600" cy="320040"/>
+            <a:off x="2834640" y="1901952"/>
+            <a:ext cx="2377440" cy="548640"/>
           </a:xfrm>
           <a:prstGeom prst="rect">
             <a:avLst/>
@@ -9597,13 +9679,13 @@
           <a:lstStyle/>
           <a:p>
             <a:r>
-              <a:rPr sz="950" b="0">
-                <a:solidFill>
-                  <a:srgbClr val="5B6470"/>
-                </a:solidFill>
-                <a:latin typeface="微软雅黑"/>
-              </a:rPr>
-              <a:t>Xuefei Wang · 2026</a:t>
+              <a:rPr sz="1300" b="1">
+                <a:solidFill>
+                  <a:srgbClr val="2F5AA8"/>
+                </a:solidFill>
+                <a:latin typeface="微软雅黑"/>
+              </a:rPr>
+              <a:t>精品品牌</a:t>
             </a:r>
           </a:p>
         </p:txBody>
@@ -9616,8 +9698,8 @@
         </p:nvSpPr>
         <p:spPr>
           <a:xfrm>
-            <a:off x="10972800" y="6446520"/>
-            <a:ext cx="640080" cy="320040"/>
+            <a:off x="5303520" y="1901952"/>
+            <a:ext cx="6035040" cy="548640"/>
           </a:xfrm>
           <a:prstGeom prst="rect">
             <a:avLst/>
@@ -9630,6 +9712,692 @@
           </a:bodyPr>
           <a:lstStyle/>
           <a:p>
+            <a:r>
+              <a:rPr sz="1150" b="0">
+                <a:solidFill>
+                  <a:srgbClr val="5B6470"/>
+                </a:solidFill>
+                <a:latin typeface="微软雅黑"/>
+              </a:rPr>
+              <a:t>研发 9.5% 全场最高；充电储能占 50.5%；品牌+私模</a:t>
+            </a:r>
+          </a:p>
+        </p:txBody>
+      </p:sp>
+      <p:sp>
+        <p:nvSpPr>
+          <p:cNvPr id="8" name="Rectangle 7"/>
+          <p:cNvSpPr/>
+          <p:nvPr/>
+        </p:nvSpPr>
+        <p:spPr>
+          <a:xfrm>
+            <a:off x="640080" y="2633472"/>
+            <a:ext cx="10881360" cy="713232"/>
+          </a:xfrm>
+          <a:prstGeom prst="rect">
+            <a:avLst/>
+          </a:prstGeom>
+          <a:solidFill>
+            <a:srgbClr val="F3F5F8"/>
+          </a:solidFill>
+          <a:ln>
+            <a:noFill/>
+          </a:ln>
+          <a:effectLst/>
+        </p:spPr>
+        <p:style>
+          <a:lnRef idx="1">
+            <a:schemeClr val="accent1"/>
+          </a:lnRef>
+          <a:fillRef idx="3">
+            <a:schemeClr val="accent1"/>
+          </a:fillRef>
+          <a:effectRef idx="2">
+            <a:schemeClr val="accent1"/>
+          </a:effectRef>
+          <a:fontRef idx="minor">
+            <a:schemeClr val="lt1"/>
+          </a:fontRef>
+        </p:style>
+        <p:txBody>
+          <a:bodyPr rtlCol="0" anchor="ctr"/>
+          <a:lstStyle/>
+          <a:p>
+            <a:pPr algn="ctr"/>
+          </a:p>
+        </p:txBody>
+      </p:sp>
+      <p:sp>
+        <p:nvSpPr>
+          <p:cNvPr id="9" name="TextBox 8"/>
+          <p:cNvSpPr txBox="1"/>
+          <p:nvPr/>
+        </p:nvSpPr>
+        <p:spPr>
+          <a:xfrm>
+            <a:off x="868680" y="2706624"/>
+            <a:ext cx="1920240" cy="548640"/>
+          </a:xfrm>
+          <a:prstGeom prst="rect">
+            <a:avLst/>
+          </a:prstGeom>
+          <a:noFill/>
+        </p:spPr>
+        <p:txBody>
+          <a:bodyPr wrap="square">
+            <a:spAutoFit/>
+          </a:bodyPr>
+          <a:lstStyle/>
+          <a:p>
+            <a:r>
+              <a:rPr sz="1350" b="1">
+                <a:solidFill>
+                  <a:srgbClr val="1B2430"/>
+                </a:solidFill>
+                <a:latin typeface="微软雅黑"/>
+              </a:rPr>
+              <a:t>致欧科技</a:t>
+            </a:r>
+          </a:p>
+        </p:txBody>
+      </p:sp>
+      <p:sp>
+        <p:nvSpPr>
+          <p:cNvPr id="10" name="TextBox 9"/>
+          <p:cNvSpPr txBox="1"/>
+          <p:nvPr/>
+        </p:nvSpPr>
+        <p:spPr>
+          <a:xfrm>
+            <a:off x="2834640" y="2706624"/>
+            <a:ext cx="2377440" cy="548640"/>
+          </a:xfrm>
+          <a:prstGeom prst="rect">
+            <a:avLst/>
+          </a:prstGeom>
+          <a:noFill/>
+        </p:spPr>
+        <p:txBody>
+          <a:bodyPr wrap="square">
+            <a:spAutoFit/>
+          </a:bodyPr>
+          <a:lstStyle/>
+          <a:p>
+            <a:r>
+              <a:rPr sz="1300" b="1">
+                <a:solidFill>
+                  <a:srgbClr val="2F5AA8"/>
+                </a:solidFill>
+                <a:latin typeface="微软雅黑"/>
+              </a:rPr>
+              <a:t>目录式长尾品牌</a:t>
+            </a:r>
+          </a:p>
+        </p:txBody>
+      </p:sp>
+      <p:sp>
+        <p:nvSpPr>
+          <p:cNvPr id="11" name="TextBox 10"/>
+          <p:cNvSpPr txBox="1"/>
+          <p:nvPr/>
+        </p:nvSpPr>
+        <p:spPr>
+          <a:xfrm>
+            <a:off x="5303520" y="2706624"/>
+            <a:ext cx="6035040" cy="548640"/>
+          </a:xfrm>
+          <a:prstGeom prst="rect">
+            <a:avLst/>
+          </a:prstGeom>
+          <a:noFill/>
+        </p:spPr>
+        <p:txBody>
+          <a:bodyPr wrap="square">
+            <a:spAutoFit/>
+          </a:bodyPr>
+          <a:lstStyle/>
+          <a:p>
+            <a:r>
+              <a:rPr sz="1150" b="0">
+                <a:solidFill>
+                  <a:srgbClr val="5B6470"/>
+                </a:solidFill>
+                <a:latin typeface="微软雅黑"/>
+              </a:rPr>
+              <a:t>自有品牌矩阵、SKU 大而全；重产品设计而非铺货</a:t>
+            </a:r>
+          </a:p>
+        </p:txBody>
+      </p:sp>
+      <p:sp>
+        <p:nvSpPr>
+          <p:cNvPr id="12" name="Rectangle 11"/>
+          <p:cNvSpPr/>
+          <p:nvPr/>
+        </p:nvSpPr>
+        <p:spPr>
+          <a:xfrm>
+            <a:off x="640080" y="3438144"/>
+            <a:ext cx="10881360" cy="713232"/>
+          </a:xfrm>
+          <a:prstGeom prst="rect">
+            <a:avLst/>
+          </a:prstGeom>
+          <a:solidFill>
+            <a:srgbClr val="F3F5F8"/>
+          </a:solidFill>
+          <a:ln>
+            <a:noFill/>
+          </a:ln>
+          <a:effectLst/>
+        </p:spPr>
+        <p:style>
+          <a:lnRef idx="1">
+            <a:schemeClr val="accent1"/>
+          </a:lnRef>
+          <a:fillRef idx="3">
+            <a:schemeClr val="accent1"/>
+          </a:fillRef>
+          <a:effectRef idx="2">
+            <a:schemeClr val="accent1"/>
+          </a:effectRef>
+          <a:fontRef idx="minor">
+            <a:schemeClr val="lt1"/>
+          </a:fontRef>
+        </p:style>
+        <p:txBody>
+          <a:bodyPr rtlCol="0" anchor="ctr"/>
+          <a:lstStyle/>
+          <a:p>
+            <a:pPr algn="ctr"/>
+          </a:p>
+        </p:txBody>
+      </p:sp>
+      <p:sp>
+        <p:nvSpPr>
+          <p:cNvPr id="13" name="TextBox 12"/>
+          <p:cNvSpPr txBox="1"/>
+          <p:nvPr/>
+        </p:nvSpPr>
+        <p:spPr>
+          <a:xfrm>
+            <a:off x="868680" y="3511296"/>
+            <a:ext cx="1920240" cy="548640"/>
+          </a:xfrm>
+          <a:prstGeom prst="rect">
+            <a:avLst/>
+          </a:prstGeom>
+          <a:noFill/>
+        </p:spPr>
+        <p:txBody>
+          <a:bodyPr wrap="square">
+            <a:spAutoFit/>
+          </a:bodyPr>
+          <a:lstStyle/>
+          <a:p>
+            <a:r>
+              <a:rPr sz="1350" b="1">
+                <a:solidFill>
+                  <a:srgbClr val="1B2430"/>
+                </a:solidFill>
+                <a:latin typeface="微软雅黑"/>
+              </a:rPr>
+              <a:t>赛维时代</a:t>
+            </a:r>
+          </a:p>
+        </p:txBody>
+      </p:sp>
+      <p:sp>
+        <p:nvSpPr>
+          <p:cNvPr id="14" name="TextBox 13"/>
+          <p:cNvSpPr txBox="1"/>
+          <p:nvPr/>
+        </p:nvSpPr>
+        <p:spPr>
+          <a:xfrm>
+            <a:off x="2834640" y="3511296"/>
+            <a:ext cx="2377440" cy="548640"/>
+          </a:xfrm>
+          <a:prstGeom prst="rect">
+            <a:avLst/>
+          </a:prstGeom>
+          <a:noFill/>
+        </p:spPr>
+        <p:txBody>
+          <a:bodyPr wrap="square">
+            <a:spAutoFit/>
+          </a:bodyPr>
+          <a:lstStyle/>
+          <a:p>
+            <a:r>
+              <a:rPr sz="1300" b="1">
+                <a:solidFill>
+                  <a:srgbClr val="2F5AA8"/>
+                </a:solidFill>
+                <a:latin typeface="微软雅黑"/>
+              </a:rPr>
+              <a:t>铺货（泛品）</a:t>
+            </a:r>
+          </a:p>
+        </p:txBody>
+      </p:sp>
+      <p:sp>
+        <p:nvSpPr>
+          <p:cNvPr id="15" name="TextBox 14"/>
+          <p:cNvSpPr txBox="1"/>
+          <p:nvPr/>
+        </p:nvSpPr>
+        <p:spPr>
+          <a:xfrm>
+            <a:off x="5303520" y="3511296"/>
+            <a:ext cx="6035040" cy="548640"/>
+          </a:xfrm>
+          <a:prstGeom prst="rect">
+            <a:avLst/>
+          </a:prstGeom>
+          <a:noFill/>
+        </p:spPr>
+        <p:txBody>
+          <a:bodyPr wrap="square">
+            <a:spAutoFit/>
+          </a:bodyPr>
+          <a:lstStyle/>
+          <a:p>
+            <a:r>
+              <a:rPr sz="1150" b="0">
+                <a:solidFill>
+                  <a:srgbClr val="5B6470"/>
+                </a:solidFill>
+                <a:latin typeface="微软雅黑"/>
+              </a:rPr>
+              <a:t>数十万 SKU；研发 &lt;1%；销售费用 35.4%</a:t>
+            </a:r>
+          </a:p>
+        </p:txBody>
+      </p:sp>
+      <p:sp>
+        <p:nvSpPr>
+          <p:cNvPr id="16" name="Rectangle 15"/>
+          <p:cNvSpPr/>
+          <p:nvPr/>
+        </p:nvSpPr>
+        <p:spPr>
+          <a:xfrm>
+            <a:off x="640080" y="4242816"/>
+            <a:ext cx="10881360" cy="713232"/>
+          </a:xfrm>
+          <a:prstGeom prst="rect">
+            <a:avLst/>
+          </a:prstGeom>
+          <a:solidFill>
+            <a:srgbClr val="F3F5F8"/>
+          </a:solidFill>
+          <a:ln>
+            <a:noFill/>
+          </a:ln>
+          <a:effectLst/>
+        </p:spPr>
+        <p:style>
+          <a:lnRef idx="1">
+            <a:schemeClr val="accent1"/>
+          </a:lnRef>
+          <a:fillRef idx="3">
+            <a:schemeClr val="accent1"/>
+          </a:fillRef>
+          <a:effectRef idx="2">
+            <a:schemeClr val="accent1"/>
+          </a:effectRef>
+          <a:fontRef idx="minor">
+            <a:schemeClr val="lt1"/>
+          </a:fontRef>
+        </p:style>
+        <p:txBody>
+          <a:bodyPr rtlCol="0" anchor="ctr"/>
+          <a:lstStyle/>
+          <a:p>
+            <a:pPr algn="ctr"/>
+          </a:p>
+        </p:txBody>
+      </p:sp>
+      <p:sp>
+        <p:nvSpPr>
+          <p:cNvPr id="17" name="TextBox 16"/>
+          <p:cNvSpPr txBox="1"/>
+          <p:nvPr/>
+        </p:nvSpPr>
+        <p:spPr>
+          <a:xfrm>
+            <a:off x="868680" y="4315968"/>
+            <a:ext cx="1920240" cy="548640"/>
+          </a:xfrm>
+          <a:prstGeom prst="rect">
+            <a:avLst/>
+          </a:prstGeom>
+          <a:noFill/>
+        </p:spPr>
+        <p:txBody>
+          <a:bodyPr wrap="square">
+            <a:spAutoFit/>
+          </a:bodyPr>
+          <a:lstStyle/>
+          <a:p>
+            <a:r>
+              <a:rPr sz="1350" b="1">
+                <a:solidFill>
+                  <a:srgbClr val="1B2430"/>
+                </a:solidFill>
+                <a:latin typeface="微软雅黑"/>
+              </a:rPr>
+              <a:t>华凯易佰</a:t>
+            </a:r>
+          </a:p>
+        </p:txBody>
+      </p:sp>
+      <p:sp>
+        <p:nvSpPr>
+          <p:cNvPr id="18" name="TextBox 17"/>
+          <p:cNvSpPr txBox="1"/>
+          <p:nvPr/>
+        </p:nvSpPr>
+        <p:spPr>
+          <a:xfrm>
+            <a:off x="2834640" y="4315968"/>
+            <a:ext cx="2377440" cy="548640"/>
+          </a:xfrm>
+          <a:prstGeom prst="rect">
+            <a:avLst/>
+          </a:prstGeom>
+          <a:noFill/>
+        </p:spPr>
+        <p:txBody>
+          <a:bodyPr wrap="square">
+            <a:spAutoFit/>
+          </a:bodyPr>
+          <a:lstStyle/>
+          <a:p>
+            <a:r>
+              <a:rPr sz="1300" b="1">
+                <a:solidFill>
+                  <a:srgbClr val="2F5AA8"/>
+                </a:solidFill>
+                <a:latin typeface="微软雅黑"/>
+              </a:rPr>
+              <a:t>铺货（泛品）</a:t>
+            </a:r>
+          </a:p>
+        </p:txBody>
+      </p:sp>
+      <p:sp>
+        <p:nvSpPr>
+          <p:cNvPr id="19" name="TextBox 18"/>
+          <p:cNvSpPr txBox="1"/>
+          <p:nvPr/>
+        </p:nvSpPr>
+        <p:spPr>
+          <a:xfrm>
+            <a:off x="5303520" y="4315968"/>
+            <a:ext cx="6035040" cy="548640"/>
+          </a:xfrm>
+          <a:prstGeom prst="rect">
+            <a:avLst/>
+          </a:prstGeom>
+          <a:noFill/>
+        </p:spPr>
+        <p:txBody>
+          <a:bodyPr wrap="square">
+            <a:spAutoFit/>
+          </a:bodyPr>
+          <a:lstStyle/>
+          <a:p>
+            <a:r>
+              <a:rPr sz="1150" b="0">
+                <a:solidFill>
+                  <a:srgbClr val="5B6470"/>
+                </a:solidFill>
+                <a:latin typeface="微软雅黑"/>
+              </a:rPr>
+              <a:t>海量 SKU + 综合服务；净利率 1.6%、增速 +1.2%</a:t>
+            </a:r>
+          </a:p>
+        </p:txBody>
+      </p:sp>
+      <p:sp>
+        <p:nvSpPr>
+          <p:cNvPr id="20" name="Rectangle 19"/>
+          <p:cNvSpPr/>
+          <p:nvPr/>
+        </p:nvSpPr>
+        <p:spPr>
+          <a:xfrm>
+            <a:off x="640080" y="5047488"/>
+            <a:ext cx="10881360" cy="713232"/>
+          </a:xfrm>
+          <a:prstGeom prst="rect">
+            <a:avLst/>
+          </a:prstGeom>
+          <a:solidFill>
+            <a:srgbClr val="F3F5F8"/>
+          </a:solidFill>
+          <a:ln>
+            <a:noFill/>
+          </a:ln>
+          <a:effectLst/>
+        </p:spPr>
+        <p:style>
+          <a:lnRef idx="1">
+            <a:schemeClr val="accent1"/>
+          </a:lnRef>
+          <a:fillRef idx="3">
+            <a:schemeClr val="accent1"/>
+          </a:fillRef>
+          <a:effectRef idx="2">
+            <a:schemeClr val="accent1"/>
+          </a:effectRef>
+          <a:fontRef idx="minor">
+            <a:schemeClr val="lt1"/>
+          </a:fontRef>
+        </p:style>
+        <p:txBody>
+          <a:bodyPr rtlCol="0" anchor="ctr"/>
+          <a:lstStyle/>
+          <a:p>
+            <a:pPr algn="ctr"/>
+          </a:p>
+        </p:txBody>
+      </p:sp>
+      <p:sp>
+        <p:nvSpPr>
+          <p:cNvPr id="21" name="TextBox 20"/>
+          <p:cNvSpPr txBox="1"/>
+          <p:nvPr/>
+        </p:nvSpPr>
+        <p:spPr>
+          <a:xfrm>
+            <a:off x="868680" y="5120640"/>
+            <a:ext cx="1920240" cy="548640"/>
+          </a:xfrm>
+          <a:prstGeom prst="rect">
+            <a:avLst/>
+          </a:prstGeom>
+          <a:noFill/>
+        </p:spPr>
+        <p:txBody>
+          <a:bodyPr wrap="square">
+            <a:spAutoFit/>
+          </a:bodyPr>
+          <a:lstStyle/>
+          <a:p>
+            <a:r>
+              <a:rPr sz="1350" b="1">
+                <a:solidFill>
+                  <a:srgbClr val="1B2430"/>
+                </a:solidFill>
+                <a:latin typeface="微软雅黑"/>
+              </a:rPr>
+              <a:t>吉宏股份</a:t>
+            </a:r>
+          </a:p>
+        </p:txBody>
+      </p:sp>
+      <p:sp>
+        <p:nvSpPr>
+          <p:cNvPr id="22" name="TextBox 21"/>
+          <p:cNvSpPr txBox="1"/>
+          <p:nvPr/>
+        </p:nvSpPr>
+        <p:spPr>
+          <a:xfrm>
+            <a:off x="2834640" y="5120640"/>
+            <a:ext cx="2377440" cy="548640"/>
+          </a:xfrm>
+          <a:prstGeom prst="rect">
+            <a:avLst/>
+          </a:prstGeom>
+          <a:noFill/>
+        </p:spPr>
+        <p:txBody>
+          <a:bodyPr wrap="square">
+            <a:spAutoFit/>
+          </a:bodyPr>
+          <a:lstStyle/>
+          <a:p>
+            <a:r>
+              <a:rPr sz="1300" b="1">
+                <a:solidFill>
+                  <a:srgbClr val="2F5AA8"/>
+                </a:solidFill>
+                <a:latin typeface="微软雅黑"/>
+              </a:rPr>
+              <a:t>流量驱动（非典型）</a:t>
+            </a:r>
+          </a:p>
+        </p:txBody>
+      </p:sp>
+      <p:sp>
+        <p:nvSpPr>
+          <p:cNvPr id="23" name="TextBox 22"/>
+          <p:cNvSpPr txBox="1"/>
+          <p:nvPr/>
+        </p:nvSpPr>
+        <p:spPr>
+          <a:xfrm>
+            <a:off x="5303520" y="5120640"/>
+            <a:ext cx="6035040" cy="548640"/>
+          </a:xfrm>
+          <a:prstGeom prst="rect">
+            <a:avLst/>
+          </a:prstGeom>
+          <a:noFill/>
+        </p:spPr>
+        <p:txBody>
+          <a:bodyPr wrap="square">
+            <a:spAutoFit/>
+          </a:bodyPr>
+          <a:lstStyle/>
+          <a:p>
+            <a:r>
+              <a:rPr sz="1150" b="0">
+                <a:solidFill>
+                  <a:srgbClr val="5B6470"/>
+                </a:solidFill>
+                <a:latin typeface="微软雅黑"/>
+              </a:rPr>
+              <a:t>社交电商/独立站投放为主；另含包装需分部看</a:t>
+            </a:r>
+          </a:p>
+        </p:txBody>
+      </p:sp>
+      <p:sp>
+        <p:nvSpPr>
+          <p:cNvPr id="24" name="TextBox 23"/>
+          <p:cNvSpPr txBox="1"/>
+          <p:nvPr/>
+        </p:nvSpPr>
+        <p:spPr>
+          <a:xfrm>
+            <a:off x="640080" y="6035040"/>
+            <a:ext cx="10972800" cy="640080"/>
+          </a:xfrm>
+          <a:prstGeom prst="rect">
+            <a:avLst/>
+          </a:prstGeom>
+          <a:noFill/>
+        </p:spPr>
+        <p:txBody>
+          <a:bodyPr wrap="square">
+            <a:spAutoFit/>
+          </a:bodyPr>
+          <a:lstStyle/>
+          <a:p>
+            <a:r>
+              <a:rPr sz="1250" b="1">
+                <a:solidFill>
+                  <a:srgbClr val="C97B1E"/>
+                </a:solidFill>
+                <a:latin typeface="微软雅黑"/>
+              </a:rPr>
+              <a:t>我的经历：上一家公司 1000+ SKU 按规格矩阵做全 —— 第三种路径“目录式长尾品牌”。</a:t>
+            </a:r>
+          </a:p>
+        </p:txBody>
+      </p:sp>
+      <p:sp>
+        <p:nvSpPr>
+          <p:cNvPr id="25" name="TextBox 24"/>
+          <p:cNvSpPr txBox="1"/>
+          <p:nvPr/>
+        </p:nvSpPr>
+        <p:spPr>
+          <a:xfrm>
+            <a:off x="640080" y="6446520"/>
+            <a:ext cx="3657600" cy="320040"/>
+          </a:xfrm>
+          <a:prstGeom prst="rect">
+            <a:avLst/>
+          </a:prstGeom>
+          <a:noFill/>
+        </p:spPr>
+        <p:txBody>
+          <a:bodyPr wrap="square">
+            <a:spAutoFit/>
+          </a:bodyPr>
+          <a:lstStyle/>
+          <a:p>
+            <a:r>
+              <a:rPr sz="950" b="0">
+                <a:solidFill>
+                  <a:srgbClr val="5B6470"/>
+                </a:solidFill>
+                <a:latin typeface="微软雅黑"/>
+              </a:rPr>
+              <a:t>Xuefei Wang · 2026</a:t>
+            </a:r>
+          </a:p>
+        </p:txBody>
+      </p:sp>
+      <p:sp>
+        <p:nvSpPr>
+          <p:cNvPr id="26" name="TextBox 25"/>
+          <p:cNvSpPr txBox="1"/>
+          <p:nvPr/>
+        </p:nvSpPr>
+        <p:spPr>
+          <a:xfrm>
+            <a:off x="10972800" y="6446520"/>
+            <a:ext cx="640080" cy="320040"/>
+          </a:xfrm>
+          <a:prstGeom prst="rect">
+            <a:avLst/>
+          </a:prstGeom>
+          <a:noFill/>
+        </p:spPr>
+        <p:txBody>
+          <a:bodyPr wrap="square">
+            <a:spAutoFit/>
+          </a:bodyPr>
+          <a:lstStyle/>
+          <a:p>
             <a:pPr algn="r"/>
             <a:r>
               <a:rPr sz="950" b="0">
@@ -9638,7 +10406,7 @@
                 </a:solidFill>
                 <a:latin typeface="微软雅黑"/>
               </a:rPr>
-              <a:t>09 / 15</a:t>
+              <a:t>09 / 16</a:t>
             </a:r>
           </a:p>
         </p:txBody>

--- a/presentation/中国跨境电商出海赛道分析-项目故事-v2.pptx
+++ b/presentation/中国跨境电商出海赛道分析-项目故事-v2.pptx
@@ -6079,8 +6079,8 @@
         </p:nvSpPr>
         <p:spPr>
           <a:xfrm>
-            <a:off x="640080" y="1874519"/>
-            <a:ext cx="10698480" cy="4572000"/>
+            <a:off x="640080" y="1737360"/>
+            <a:ext cx="10881360" cy="4709160"/>
           </a:xfrm>
           <a:prstGeom prst="rect">
             <a:avLst/>
@@ -6095,97 +6095,151 @@
           <a:p>
             <a:pPr>
               <a:spcAft>
-                <a:spcPts val="1500"/>
+                <a:spcPts val="1300"/>
               </a:spcAft>
             </a:pPr>
             <a:r>
-              <a:rPr sz="1600" b="0">
+              <a:rPr sz="1600" b="1">
+                <a:solidFill>
+                  <a:srgbClr val="2F5AA8"/>
+                </a:solidFill>
+                <a:latin typeface="微软雅黑"/>
+              </a:rPr>
+              <a:t>背景：</a:t>
+            </a:r>
+            <a:r>
+              <a:rPr sz="1550" b="0">
                 <a:solidFill>
                   <a:srgbClr val="1B2430"/>
                 </a:solidFill>
                 <a:latin typeface="微软雅黑"/>
               </a:rPr>
-              <a:t>▪ 我上一份工作在一家做自有品牌出海的公司做亚马逊运营，卖阀门/管件、实验室仪器、封口机这类偏专业的产品，在售 SKU 超过 1000 个。</a:t>
+              <a:t>我上一份工作在一家做自有品牌出海的公司做亚马逊运营，卖阀门/管件、实验室仪器、封口机这类偏专业的产品，在售 SKU 超过 1000 个。</a:t>
             </a:r>
           </a:p>
           <a:p>
             <a:pPr>
               <a:spcAft>
-                <a:spcPts val="1500"/>
+                <a:spcPts val="1300"/>
               </a:spcAft>
             </a:pPr>
             <a:r>
-              <a:rPr sz="1600" b="0">
+              <a:rPr sz="1600" b="1">
+                <a:solidFill>
+                  <a:srgbClr val="2F5AA8"/>
+                </a:solidFill>
+                <a:latin typeface="微软雅黑"/>
+              </a:rPr>
+              <a:t>经营模式：</a:t>
+            </a:r>
+            <a:r>
+              <a:rPr sz="1550" b="0">
                 <a:solidFill>
                   <a:srgbClr val="1B2430"/>
                 </a:solidFill>
                 <a:latin typeface="微软雅黑"/>
               </a:rPr>
-              <a:t>▪ 经营上我们把品类做深做全：同一类阀门按通径、材质和螺纹标准展开，两通/三通、1/2 到 2 英寸、不锈钢/黄铜/PVC 都会配齐。客户多是工程师、实验室或做自动化改造的人，下单前会核对型号参数。</a:t>
+              <a:t>同一类阀门按通径、材质和螺纹标准展开，两通/三通、1/2 到 2 英寸、不锈钢/黄铜/PVC 都会配齐。客户多是工程师、实验室或做自动化改造的人，下单前会核对型号参数。</a:t>
             </a:r>
           </a:p>
           <a:p>
             <a:pPr>
               <a:spcAft>
-                <a:spcPts val="1500"/>
+                <a:spcPts val="1300"/>
               </a:spcAft>
             </a:pPr>
             <a:r>
-              <a:rPr sz="1600" b="0">
+              <a:rPr sz="1600" b="1">
+                <a:solidFill>
+                  <a:srgbClr val="2F5AA8"/>
+                </a:solidFill>
+                <a:latin typeface="微软雅黑"/>
+              </a:rPr>
+              <a:t>负责工作：</a:t>
+            </a:r>
+            <a:r>
+              <a:rPr sz="1550" b="0">
                 <a:solidFill>
                   <a:srgbClr val="1B2430"/>
                 </a:solidFill>
                 <a:latin typeface="微软雅黑"/>
               </a:rPr>
-              <a:t>▪ 我负责日常运营，也参与新品选品。给新品定价前先算单件 ROI，再决定广告投入和备货节奏。</a:t>
+              <a:t>日常运营及新品选品，通过市场调研、竞品分析和单件 ROI 测算，制定新品定价、广告投入及备货策略。</a:t>
             </a:r>
           </a:p>
           <a:p>
             <a:pPr>
               <a:spcAft>
-                <a:spcPts val="1500"/>
+                <a:spcPts val="1300"/>
               </a:spcAft>
             </a:pPr>
             <a:r>
-              <a:rPr sz="1600" b="0">
+              <a:rPr sz="1600" b="1">
+                <a:solidFill>
+                  <a:srgbClr val="2F5AA8"/>
+                </a:solidFill>
+                <a:latin typeface="微软雅黑"/>
+              </a:rPr>
+              <a:t>问题：</a:t>
+            </a:r>
+            <a:r>
+              <a:rPr sz="1550" b="0">
                 <a:solidFill>
                   <a:srgbClr val="1B2430"/>
                 </a:solidFill>
                 <a:latin typeface="微软雅黑"/>
               </a:rPr>
-              <a:t>▪ 让我一直没想通的是：单个 SKU 怎么算都能盈利，公司整体却没以前那么赚钱了。这只是我听来的说法，未必准确，可能也和广告投放的调整有关。</a:t>
+              <a:t>大部分 SKU 单独核算均为盈利，但公司在亚马逊平台的整体表现不佳。为什么“单品盈利”没有转化为“整体增长”？</a:t>
             </a:r>
           </a:p>
           <a:p>
             <a:pPr>
               <a:spcAft>
-                <a:spcPts val="1500"/>
+                <a:spcPts val="1300"/>
               </a:spcAft>
             </a:pPr>
             <a:r>
-              <a:rPr sz="1600" b="0">
+              <a:rPr sz="1600" b="1">
+                <a:solidFill>
+                  <a:srgbClr val="2F5AA8"/>
+                </a:solidFill>
+                <a:latin typeface="微软雅黑"/>
+              </a:rPr>
+              <a:t>猜测：</a:t>
+            </a:r>
+            <a:r>
+              <a:rPr sz="1550" b="0">
                 <a:solidFill>
                   <a:srgbClr val="1B2430"/>
                 </a:solidFill>
                 <a:latin typeface="微软雅黑"/>
               </a:rPr>
-              <a:t>▪ 我怀疑问题出在两处：平台拿走的佣金、仓储和广告费用，或是我们这种把 SKU 铺得很开的打法本身有问题。</a:t>
+              <a:t>① 平台佣金、仓储及履约成本上升；② 竞争加剧导致广告获客成本提高；③ 1000+ SKU 铺得过广，资源及库存被长尾 SKU 分散</a:t>
             </a:r>
           </a:p>
           <a:p>
             <a:pPr>
               <a:spcAft>
-                <a:spcPts val="1500"/>
+                <a:spcPts val="1300"/>
               </a:spcAft>
             </a:pPr>
             <a:r>
-              <a:rPr sz="1600" b="0">
+              <a:rPr sz="1600" b="1">
+                <a:solidFill>
+                  <a:srgbClr val="2F5AA8"/>
+                </a:solidFill>
+                <a:latin typeface="微软雅黑"/>
+              </a:rPr>
+              <a:t>验证：</a:t>
+            </a:r>
+            <a:r>
+              <a:rPr sz="1550" b="0">
                 <a:solidFill>
                   <a:srgbClr val="1B2430"/>
                 </a:solidFill>
                 <a:latin typeface="微软雅黑"/>
               </a:rPr>
-              <a:t>▪ 为了解决自己的疑惑，我决定用数据验证：不用现成数据集，用上市公司财报和海关官方数据，从行业层面重新分析。</a:t>
+              <a:t>用上市公司财报和海关官方数据，从行业、公司、现金流三个层面拆解业务表现。</a:t>
             </a:r>
           </a:p>
         </p:txBody>

--- a/presentation/中国跨境电商出海赛道分析-项目故事-v2.pptx
+++ b/presentation/中国跨境电商出海赛道分析-项目故事-v2.pptx
@@ -19,8 +19,6 @@
     <p:sldId id="267" r:id="rId18"/>
     <p:sldId id="268" r:id="rId19"/>
     <p:sldId id="269" r:id="rId20"/>
-    <p:sldId id="270" r:id="rId21"/>
-    <p:sldId id="271" r:id="rId22"/>
   </p:sldIdLst>
   <p:sldSz cx="12191695" cy="6858000" type="screen4x3"/>
   <p:notesSz cx="6858000" cy="9144000"/>
@@ -3615,7 +3613,7 @@
                 </a:solidFill>
                 <a:latin typeface="微软雅黑"/>
               </a:rPr>
-              <a:t>10 / 16</a:t>
+              <a:t>10 / 14</a:t>
             </a:r>
           </a:p>
         </p:txBody>
@@ -3923,7 +3921,7 @@
                 </a:solidFill>
                 <a:latin typeface="微软雅黑"/>
               </a:rPr>
-              <a:t>11 / 16</a:t>
+              <a:t>11 / 14</a:t>
             </a:r>
           </a:p>
         </p:txBody>
@@ -4191,7 +4189,7 @@
                 </a:solidFill>
                 <a:latin typeface="微软雅黑"/>
               </a:rPr>
-              <a:t>12 / 16</a:t>
+              <a:t>12 / 14</a:t>
             </a:r>
           </a:p>
         </p:txBody>
@@ -4824,7 +4822,7 @@
                 </a:solidFill>
                 <a:latin typeface="微软雅黑"/>
               </a:rPr>
-              <a:t>13 / 16</a:t>
+              <a:t>13 / 14</a:t>
             </a:r>
           </a:p>
         </p:txBody>
@@ -5487,474 +5485,7 @@
                 </a:solidFill>
                 <a:latin typeface="微软雅黑"/>
               </a:rPr>
-              <a:t>14 / 16</a:t>
-            </a:r>
-          </a:p>
-        </p:txBody>
-      </p:sp>
-    </p:spTree>
-  </p:cSld>
-  <p:clrMapOvr>
-    <a:masterClrMapping/>
-  </p:clrMapOvr>
-</p:sld>
-</file>
-
-<file path=ppt/slides/slide15.xml><?xml version="1.0" encoding="utf-8"?>
-<p:sld xmlns:a="http://schemas.openxmlformats.org/drawingml/2006/main" xmlns:p="http://schemas.openxmlformats.org/presentationml/2006/main" xmlns:r="http://schemas.openxmlformats.org/officeDocument/2006/relationships">
-  <p:cSld>
-    <p:spTree>
-      <p:nvGrpSpPr>
-        <p:cNvPr id="1" name=""/>
-        <p:cNvGrpSpPr/>
-        <p:nvPr/>
-      </p:nvGrpSpPr>
-      <p:grpSpPr/>
-      <p:sp>
-        <p:nvSpPr>
-          <p:cNvPr id="2" name="Rectangle 1"/>
-          <p:cNvSpPr/>
-          <p:nvPr/>
-        </p:nvSpPr>
-        <p:spPr>
-          <a:xfrm>
-            <a:off x="640080" y="502920"/>
-            <a:ext cx="82296" cy="566928"/>
-          </a:xfrm>
-          <a:prstGeom prst="rect">
-            <a:avLst/>
-          </a:prstGeom>
-          <a:solidFill>
-            <a:srgbClr val="2F5AA8"/>
-          </a:solidFill>
-          <a:ln>
-            <a:noFill/>
-          </a:ln>
-          <a:effectLst/>
-        </p:spPr>
-        <p:style>
-          <a:lnRef idx="1">
-            <a:schemeClr val="accent1"/>
-          </a:lnRef>
-          <a:fillRef idx="3">
-            <a:schemeClr val="accent1"/>
-          </a:fillRef>
-          <a:effectRef idx="2">
-            <a:schemeClr val="accent1"/>
-          </a:effectRef>
-          <a:fontRef idx="minor">
-            <a:schemeClr val="lt1"/>
-          </a:fontRef>
-        </p:style>
-        <p:txBody>
-          <a:bodyPr rtlCol="0" anchor="ctr"/>
-          <a:lstStyle/>
-          <a:p>
-            <a:pPr algn="ctr"/>
-          </a:p>
-        </p:txBody>
-      </p:sp>
-      <p:sp>
-        <p:nvSpPr>
-          <p:cNvPr id="3" name="TextBox 2"/>
-          <p:cNvSpPr txBox="1"/>
-          <p:nvPr/>
-        </p:nvSpPr>
-        <p:spPr>
-          <a:xfrm>
-            <a:off x="896112" y="457200"/>
-            <a:ext cx="10607040" cy="1097280"/>
-          </a:xfrm>
-          <a:prstGeom prst="rect">
-            <a:avLst/>
-          </a:prstGeom>
-          <a:noFill/>
-        </p:spPr>
-        <p:txBody>
-          <a:bodyPr wrap="square">
-            <a:spAutoFit/>
-          </a:bodyPr>
-          <a:lstStyle/>
-          <a:p>
-            <a:r>
-              <a:rPr sz="1150" b="1">
-                <a:solidFill>
-                  <a:srgbClr val="2F5AA8"/>
-                </a:solidFill>
-                <a:latin typeface="微软雅黑"/>
-              </a:rPr>
-              <a:t>REFLECTION · 复盘</a:t>
-            </a:r>
-          </a:p>
-          <a:p>
-            <a:pPr>
-              <a:spcBef>
-                <a:spcPts val="400"/>
-              </a:spcBef>
-            </a:pPr>
-            <a:r>
-              <a:rPr sz="2700" b="1">
-                <a:solidFill>
-                  <a:srgbClr val="1B2430"/>
-                </a:solidFill>
-                <a:latin typeface="微软雅黑"/>
-              </a:rPr>
-              <a:t>做得好的 &amp; 下次能更好的</a:t>
-            </a:r>
-          </a:p>
-        </p:txBody>
-      </p:sp>
-      <p:sp>
-        <p:nvSpPr>
-          <p:cNvPr id="4" name="TextBox 3"/>
-          <p:cNvSpPr txBox="1"/>
-          <p:nvPr/>
-        </p:nvSpPr>
-        <p:spPr>
-          <a:xfrm>
-            <a:off x="640080" y="1874519"/>
-            <a:ext cx="6035040" cy="4572000"/>
-          </a:xfrm>
-          <a:prstGeom prst="rect">
-            <a:avLst/>
-          </a:prstGeom>
-          <a:noFill/>
-        </p:spPr>
-        <p:txBody>
-          <a:bodyPr wrap="square">
-            <a:spAutoFit/>
-          </a:bodyPr>
-          <a:lstStyle/>
-          <a:p>
-            <a:pPr>
-              <a:spcAft>
-                <a:spcPts val="1200"/>
-              </a:spcAft>
-            </a:pPr>
-            <a:r>
-              <a:rPr sz="1600" b="1">
-                <a:solidFill>
-                  <a:srgbClr val="1B2430"/>
-                </a:solidFill>
-                <a:latin typeface="微软雅黑"/>
-              </a:rPr>
-              <a:t>▪ 做得好的：从亲身困惑出发 / 三层框架 / 现金流深挖 / 把结论做成工具</a:t>
-            </a:r>
-          </a:p>
-          <a:p>
-            <a:pPr>
-              <a:spcAft>
-                <a:spcPts val="1200"/>
-              </a:spcAft>
-            </a:pPr>
-            <a:r>
-              <a:rPr sz="1600" b="0">
-                <a:solidFill>
-                  <a:srgbClr val="1B2430"/>
-                </a:solidFill>
-                <a:latin typeface="微软雅黑"/>
-              </a:rPr>
-              <a:t>▪ 不足与边界：销售费用没拆“广告 vs 佣金”；缺 2026H1 与关税影响；供应商报价、需求热度这类私有数据只能给框架</a:t>
-            </a:r>
-          </a:p>
-          <a:p>
-            <a:pPr>
-              <a:spcAft>
-                <a:spcPts val="1200"/>
-              </a:spcAft>
-            </a:pPr>
-            <a:r>
-              <a:rPr sz="1600" b="1">
-                <a:solidFill>
-                  <a:srgbClr val="1B2430"/>
-                </a:solidFill>
-                <a:latin typeface="微软雅黑"/>
-              </a:rPr>
-              <a:t>▪ 如果重来：会更早看现金流量表；先用少量行业访谈补定性，再用数据验证定量</a:t>
-            </a:r>
-          </a:p>
-          <a:p>
-            <a:pPr>
-              <a:spcAft>
-                <a:spcPts val="1200"/>
-              </a:spcAft>
-            </a:pPr>
-            <a:r>
-              <a:rPr sz="1600" b="0">
-                <a:solidFill>
-                  <a:srgbClr val="1B2430"/>
-                </a:solidFill>
-                <a:latin typeface="微软雅黑"/>
-              </a:rPr>
-              <a:t>▪ 可迁移：这套“提问 → 取数 → 验证 → 结论 → 工具化”的流程，适用于任何行业研究 / 商业分析</a:t>
-            </a:r>
-          </a:p>
-        </p:txBody>
-      </p:sp>
-      <p:sp>
-        <p:nvSpPr>
-          <p:cNvPr id="5" name="TextBox 4"/>
-          <p:cNvSpPr txBox="1"/>
-          <p:nvPr/>
-        </p:nvSpPr>
-        <p:spPr>
-          <a:xfrm>
-            <a:off x="640080" y="6446520"/>
-            <a:ext cx="3657600" cy="320040"/>
-          </a:xfrm>
-          <a:prstGeom prst="rect">
-            <a:avLst/>
-          </a:prstGeom>
-          <a:noFill/>
-        </p:spPr>
-        <p:txBody>
-          <a:bodyPr wrap="square">
-            <a:spAutoFit/>
-          </a:bodyPr>
-          <a:lstStyle/>
-          <a:p>
-            <a:r>
-              <a:rPr sz="950" b="0">
-                <a:solidFill>
-                  <a:srgbClr val="5B6470"/>
-                </a:solidFill>
-                <a:latin typeface="微软雅黑"/>
-              </a:rPr>
-              <a:t>Xuefei Wang · 2026</a:t>
-            </a:r>
-          </a:p>
-        </p:txBody>
-      </p:sp>
-      <p:sp>
-        <p:nvSpPr>
-          <p:cNvPr id="6" name="TextBox 5"/>
-          <p:cNvSpPr txBox="1"/>
-          <p:nvPr/>
-        </p:nvSpPr>
-        <p:spPr>
-          <a:xfrm>
-            <a:off x="10972800" y="6446520"/>
-            <a:ext cx="640080" cy="320040"/>
-          </a:xfrm>
-          <a:prstGeom prst="rect">
-            <a:avLst/>
-          </a:prstGeom>
-          <a:noFill/>
-        </p:spPr>
-        <p:txBody>
-          <a:bodyPr wrap="square">
-            <a:spAutoFit/>
-          </a:bodyPr>
-          <a:lstStyle/>
-          <a:p>
-            <a:pPr algn="r"/>
-            <a:r>
-              <a:rPr sz="950" b="0">
-                <a:solidFill>
-                  <a:srgbClr val="5B6470"/>
-                </a:solidFill>
-                <a:latin typeface="微软雅黑"/>
-              </a:rPr>
-              <a:t>15 / 16</a:t>
-            </a:r>
-          </a:p>
-        </p:txBody>
-      </p:sp>
-    </p:spTree>
-  </p:cSld>
-  <p:clrMapOvr>
-    <a:masterClrMapping/>
-  </p:clrMapOvr>
-</p:sld>
-</file>
-
-<file path=ppt/slides/slide16.xml><?xml version="1.0" encoding="utf-8"?>
-<p:sld xmlns:a="http://schemas.openxmlformats.org/drawingml/2006/main" xmlns:p="http://schemas.openxmlformats.org/presentationml/2006/main" xmlns:r="http://schemas.openxmlformats.org/officeDocument/2006/relationships">
-  <p:cSld>
-    <p:spTree>
-      <p:nvGrpSpPr>
-        <p:cNvPr id="1" name=""/>
-        <p:cNvGrpSpPr/>
-        <p:nvPr/>
-      </p:nvGrpSpPr>
-      <p:grpSpPr/>
-      <p:sp>
-        <p:nvSpPr>
-          <p:cNvPr id="2" name="Rectangle 1"/>
-          <p:cNvSpPr/>
-          <p:nvPr/>
-        </p:nvSpPr>
-        <p:spPr>
-          <a:xfrm>
-            <a:off x="0" y="0"/>
-            <a:ext cx="201168" cy="6858000"/>
-          </a:xfrm>
-          <a:prstGeom prst="rect">
-            <a:avLst/>
-          </a:prstGeom>
-          <a:solidFill>
-            <a:srgbClr val="2F5AA8"/>
-          </a:solidFill>
-          <a:ln>
-            <a:noFill/>
-          </a:ln>
-          <a:effectLst/>
-        </p:spPr>
-        <p:style>
-          <a:lnRef idx="1">
-            <a:schemeClr val="accent1"/>
-          </a:lnRef>
-          <a:fillRef idx="3">
-            <a:schemeClr val="accent1"/>
-          </a:fillRef>
-          <a:effectRef idx="2">
-            <a:schemeClr val="accent1"/>
-          </a:effectRef>
-          <a:fontRef idx="minor">
-            <a:schemeClr val="lt1"/>
-          </a:fontRef>
-        </p:style>
-        <p:txBody>
-          <a:bodyPr rtlCol="0" anchor="ctr"/>
-          <a:lstStyle/>
-          <a:p>
-            <a:pPr algn="ctr"/>
-          </a:p>
-        </p:txBody>
-      </p:sp>
-      <p:sp>
-        <p:nvSpPr>
-          <p:cNvPr id="3" name="TextBox 2"/>
-          <p:cNvSpPr txBox="1"/>
-          <p:nvPr/>
-        </p:nvSpPr>
-        <p:spPr>
-          <a:xfrm>
-            <a:off x="1097280" y="2011680"/>
-            <a:ext cx="10058400" cy="3108960"/>
-          </a:xfrm>
-          <a:prstGeom prst="rect">
-            <a:avLst/>
-          </a:prstGeom>
-          <a:noFill/>
-        </p:spPr>
-        <p:txBody>
-          <a:bodyPr wrap="square">
-            <a:spAutoFit/>
-          </a:bodyPr>
-          <a:lstStyle/>
-          <a:p>
-            <a:pPr>
-              <a:spcAft>
-                <a:spcPts val="1000"/>
-              </a:spcAft>
-            </a:pPr>
-            <a:r>
-              <a:rPr sz="2100" b="1">
-                <a:solidFill>
-                  <a:srgbClr val="1B2430"/>
-                </a:solidFill>
-                <a:latin typeface="微软雅黑"/>
-              </a:rPr>
-              <a:t>数据之外，我更想让你看到的，是我的思考方式：</a:t>
-            </a:r>
-          </a:p>
-          <a:p>
-            <a:pPr>
-              <a:spcAft>
-                <a:spcPts val="1000"/>
-              </a:spcAft>
-            </a:pPr>
-            <a:r>
-              <a:rPr sz="1650" b="0">
-                <a:solidFill>
-                  <a:srgbClr val="5B6470"/>
-                </a:solidFill>
-                <a:latin typeface="微软雅黑"/>
-              </a:rPr>
-              <a:t>会提问 —— 从一句“公司怎么不赚钱”出发</a:t>
-            </a:r>
-          </a:p>
-          <a:p>
-            <a:pPr>
-              <a:spcAft>
-                <a:spcPts val="1000"/>
-              </a:spcAft>
-            </a:pPr>
-            <a:r>
-              <a:rPr sz="1650" b="0">
-                <a:solidFill>
-                  <a:srgbClr val="5B6470"/>
-                </a:solidFill>
-                <a:latin typeface="微软雅黑"/>
-              </a:rPr>
-              <a:t>会验证 —— 公开数据也能做严谨的研究：口径、抽查、交叉验证、写清局限</a:t>
-            </a:r>
-          </a:p>
-          <a:p>
-            <a:pPr>
-              <a:spcAft>
-                <a:spcPts val="1000"/>
-              </a:spcAft>
-            </a:pPr>
-            <a:r>
-              <a:rPr sz="1650" b="0">
-                <a:solidFill>
-                  <a:srgbClr val="5B6470"/>
-                </a:solidFill>
-                <a:latin typeface="微软雅黑"/>
-              </a:rPr>
-              <a:t>会落地 —— 把结论做成能用的工具，而不只是报告</a:t>
-            </a:r>
-          </a:p>
-          <a:p>
-            <a:pPr>
-              <a:spcAft>
-                <a:spcPts val="1000"/>
-              </a:spcAft>
-            </a:pPr>
-            <a:r>
-              <a:rPr sz="1650" b="0">
-                <a:solidFill>
-                  <a:srgbClr val="5B6470"/>
-                </a:solidFill>
-                <a:latin typeface="微软雅黑"/>
-              </a:rPr>
-              <a:t>会复盘 —— 知道自己哪里好、哪里还能更好</a:t>
-            </a:r>
-          </a:p>
-        </p:txBody>
-      </p:sp>
-      <p:sp>
-        <p:nvSpPr>
-          <p:cNvPr id="4" name="TextBox 3"/>
-          <p:cNvSpPr txBox="1"/>
-          <p:nvPr/>
-        </p:nvSpPr>
-        <p:spPr>
-          <a:xfrm>
-            <a:off x="1097280" y="5760720"/>
-            <a:ext cx="10058400" cy="731520"/>
-          </a:xfrm>
-          <a:prstGeom prst="rect">
-            <a:avLst/>
-          </a:prstGeom>
-          <a:noFill/>
-        </p:spPr>
-        <p:txBody>
-          <a:bodyPr wrap="square">
-            <a:spAutoFit/>
-          </a:bodyPr>
-          <a:lstStyle/>
-          <a:p>
-            <a:r>
-              <a:rPr sz="1300" b="0">
-                <a:solidFill>
-                  <a:srgbClr val="5B6470"/>
-                </a:solidFill>
-                <a:latin typeface="微软雅黑"/>
-              </a:rPr>
-              <a:t>Xuefei Wang · 2026.09 · 联系与更多材料见简历</a:t>
+              <a:t>14 / 14</a:t>
             </a:r>
           </a:p>
         </p:txBody>
@@ -6079,8 +5610,8 @@
         </p:nvSpPr>
         <p:spPr>
           <a:xfrm>
-            <a:off x="640080" y="1737360"/>
-            <a:ext cx="10881360" cy="4709160"/>
+            <a:off x="640080" y="1874519"/>
+            <a:ext cx="10698480" cy="4572000"/>
           </a:xfrm>
           <a:prstGeom prst="rect">
             <a:avLst/>
@@ -6095,151 +5626,97 @@
           <a:p>
             <a:pPr>
               <a:spcAft>
-                <a:spcPts val="1300"/>
+                <a:spcPts val="1500"/>
               </a:spcAft>
             </a:pPr>
             <a:r>
-              <a:rPr sz="1600" b="1">
-                <a:solidFill>
-                  <a:srgbClr val="2F5AA8"/>
-                </a:solidFill>
-                <a:latin typeface="微软雅黑"/>
-              </a:rPr>
-              <a:t>背景：</a:t>
-            </a:r>
-            <a:r>
-              <a:rPr sz="1550" b="0">
+              <a:rPr sz="1600" b="0">
                 <a:solidFill>
                   <a:srgbClr val="1B2430"/>
                 </a:solidFill>
                 <a:latin typeface="微软雅黑"/>
               </a:rPr>
-              <a:t>我上一份工作在一家做自有品牌出海的公司做亚马逊运营，卖阀门/管件、实验室仪器、封口机这类偏专业的产品，在售 SKU 超过 1000 个。</a:t>
+              <a:t>▪ 背景：我上一份工作在一家做自有品牌出海的公司做亚马逊运营，卖阀门/管件、实验室仪器、封口机这类偏专业的产品，在售 SKU 超过 1000 个。</a:t>
             </a:r>
           </a:p>
           <a:p>
             <a:pPr>
               <a:spcAft>
-                <a:spcPts val="1300"/>
+                <a:spcPts val="1500"/>
               </a:spcAft>
             </a:pPr>
             <a:r>
-              <a:rPr sz="1600" b="1">
-                <a:solidFill>
-                  <a:srgbClr val="2F5AA8"/>
-                </a:solidFill>
-                <a:latin typeface="微软雅黑"/>
-              </a:rPr>
-              <a:t>经营模式：</a:t>
-            </a:r>
-            <a:r>
-              <a:rPr sz="1550" b="0">
+              <a:rPr sz="1600" b="0">
                 <a:solidFill>
                   <a:srgbClr val="1B2430"/>
                 </a:solidFill>
                 <a:latin typeface="微软雅黑"/>
               </a:rPr>
-              <a:t>同一类阀门按通径、材质和螺纹标准展开，两通/三通、1/2 到 2 英寸、不锈钢/黄铜/PVC 都会配齐。客户多是工程师、实验室或做自动化改造的人，下单前会核对型号参数。</a:t>
+              <a:t>▪ 经营模式：同一类阀门按通径、材质和螺纹标准展开，两通/三通、1/2 到 2 英寸、不锈钢/黄铜/PVC 都会配齐。客户多是工程师、实验室或做自动化改造的人，下单前会核对型号参数。</a:t>
             </a:r>
           </a:p>
           <a:p>
             <a:pPr>
               <a:spcAft>
-                <a:spcPts val="1300"/>
+                <a:spcPts val="1500"/>
               </a:spcAft>
             </a:pPr>
             <a:r>
-              <a:rPr sz="1600" b="1">
-                <a:solidFill>
-                  <a:srgbClr val="2F5AA8"/>
-                </a:solidFill>
-                <a:latin typeface="微软雅黑"/>
-              </a:rPr>
-              <a:t>负责工作：</a:t>
-            </a:r>
-            <a:r>
-              <a:rPr sz="1550" b="0">
+              <a:rPr sz="1600" b="0">
                 <a:solidFill>
                   <a:srgbClr val="1B2430"/>
                 </a:solidFill>
                 <a:latin typeface="微软雅黑"/>
               </a:rPr>
-              <a:t>日常运营及新品选品，通过市场调研、竞品分析和单件 ROI 测算，制定新品定价、广告投入及备货策略。</a:t>
+              <a:t>▪ 负责工作：日常运营及新品选品，通过市场调研、竞品分析和单件 ROI 测算，制定新品定价、广告投入及备货策略。</a:t>
             </a:r>
           </a:p>
           <a:p>
             <a:pPr>
               <a:spcAft>
-                <a:spcPts val="1300"/>
+                <a:spcPts val="1500"/>
               </a:spcAft>
             </a:pPr>
             <a:r>
-              <a:rPr sz="1600" b="1">
-                <a:solidFill>
-                  <a:srgbClr val="2F5AA8"/>
-                </a:solidFill>
-                <a:latin typeface="微软雅黑"/>
-              </a:rPr>
-              <a:t>问题：</a:t>
-            </a:r>
-            <a:r>
-              <a:rPr sz="1550" b="0">
+              <a:rPr sz="1600" b="0">
                 <a:solidFill>
                   <a:srgbClr val="1B2430"/>
                 </a:solidFill>
                 <a:latin typeface="微软雅黑"/>
               </a:rPr>
-              <a:t>大部分 SKU 单独核算均为盈利，但公司在亚马逊平台的整体表现不佳。为什么“单品盈利”没有转化为“整体增长”？</a:t>
+              <a:t>▪ 问题：大部分 SKU 单独核算均为盈利，但亚马逊平台整体表现却不如前几年。→ 为什么“单品盈利”没有转化为“整体增长”？</a:t>
             </a:r>
           </a:p>
           <a:p>
             <a:pPr>
               <a:spcAft>
-                <a:spcPts val="1300"/>
+                <a:spcPts val="1500"/>
               </a:spcAft>
             </a:pPr>
             <a:r>
-              <a:rPr sz="1600" b="1">
-                <a:solidFill>
-                  <a:srgbClr val="2F5AA8"/>
-                </a:solidFill>
-                <a:latin typeface="微软雅黑"/>
-              </a:rPr>
-              <a:t>猜测：</a:t>
-            </a:r>
-            <a:r>
-              <a:rPr sz="1550" b="0">
+              <a:rPr sz="1600" b="0">
                 <a:solidFill>
                   <a:srgbClr val="1B2430"/>
                 </a:solidFill>
                 <a:latin typeface="微软雅黑"/>
               </a:rPr>
-              <a:t>① 平台佣金、仓储及履约成本上升；② 竞争加剧导致广告获客成本提高；③ 1000+ SKU 铺得过广，资源及库存被长尾 SKU 分散</a:t>
+              <a:t>▪ 猜测：① 平台佣金、仓储及履约成本上升  ② 竞争加剧导致广告获客成本提高  ③ 1000+ SKU 铺得过广，资源及库存被长尾 SKU 分散</a:t>
             </a:r>
           </a:p>
           <a:p>
             <a:pPr>
               <a:spcAft>
-                <a:spcPts val="1300"/>
+                <a:spcPts val="1500"/>
               </a:spcAft>
             </a:pPr>
             <a:r>
-              <a:rPr sz="1600" b="1">
-                <a:solidFill>
-                  <a:srgbClr val="2F5AA8"/>
-                </a:solidFill>
-                <a:latin typeface="微软雅黑"/>
-              </a:rPr>
-              <a:t>验证：</a:t>
-            </a:r>
-            <a:r>
-              <a:rPr sz="1550" b="0">
+              <a:rPr sz="1600" b="0">
                 <a:solidFill>
                   <a:srgbClr val="1B2430"/>
                 </a:solidFill>
                 <a:latin typeface="微软雅黑"/>
               </a:rPr>
-              <a:t>用上市公司财报和海关官方数据，从行业、公司、现金流三个层面拆解业务表现。</a:t>
+              <a:t>▪ 验证：用上市公司财报和海关官方数据，从平台、行业、企业经营三个层面拆解业务表现。</a:t>
             </a:r>
           </a:p>
         </p:txBody>
@@ -6308,7 +5785,7 @@
                 </a:solidFill>
                 <a:latin typeface="微软雅黑"/>
               </a:rPr>
-              <a:t>02 / 16</a:t>
+              <a:t>02 / 14</a:t>
             </a:r>
           </a:p>
         </p:txBody>
@@ -7041,7 +6518,7 @@
                 </a:solidFill>
                 <a:latin typeface="微软雅黑"/>
               </a:rPr>
-              <a:t>03 / 16</a:t>
+              <a:t>03 / 14</a:t>
             </a:r>
           </a:p>
         </p:txBody>
@@ -7341,7 +6818,7 @@
                 </a:solidFill>
                 <a:latin typeface="微软雅黑"/>
               </a:rPr>
-              <a:t>04 / 16</a:t>
+              <a:t>04 / 14</a:t>
             </a:r>
           </a:p>
         </p:txBody>
@@ -7673,7 +7150,7 @@
                 </a:solidFill>
                 <a:latin typeface="微软雅黑"/>
               </a:rPr>
-              <a:t>05 / 16</a:t>
+              <a:t>05 / 14</a:t>
             </a:r>
           </a:p>
         </p:txBody>
@@ -8440,7 +7917,7 @@
                 </a:solidFill>
                 <a:latin typeface="微软雅黑"/>
               </a:rPr>
-              <a:t>06 / 16</a:t>
+              <a:t>06 / 14</a:t>
             </a:r>
           </a:p>
         </p:txBody>
@@ -8748,7 +8225,7 @@
                 </a:solidFill>
                 <a:latin typeface="微软雅黑"/>
               </a:rPr>
-              <a:t>07 / 16</a:t>
+              <a:t>07 / 14</a:t>
             </a:r>
           </a:p>
         </p:txBody>
@@ -9515,7 +8992,7 @@
                 </a:solidFill>
                 <a:latin typeface="微软雅黑"/>
               </a:rPr>
-              <a:t>08 / 16</a:t>
+              <a:t>08 / 14</a:t>
             </a:r>
           </a:p>
         </p:txBody>
@@ -10460,7 +9937,7 @@
                 </a:solidFill>
                 <a:latin typeface="微软雅黑"/>
               </a:rPr>
-              <a:t>09 / 16</a:t>
+              <a:t>09 / 14</a:t>
             </a:r>
           </a:p>
         </p:txBody>

--- a/presentation/中国跨境电商出海赛道分析-项目故事-v2.pptx
+++ b/presentation/中国跨境电商出海赛道分析-项目故事-v2.pptx
@@ -5610,8 +5610,8 @@
         </p:nvSpPr>
         <p:spPr>
           <a:xfrm>
-            <a:off x="640080" y="1874519"/>
-            <a:ext cx="10698480" cy="4572000"/>
+            <a:off x="640080" y="1737360"/>
+            <a:ext cx="10881360" cy="4709160"/>
           </a:xfrm>
           <a:prstGeom prst="rect">
             <a:avLst/>
@@ -5626,97 +5626,151 @@
           <a:p>
             <a:pPr>
               <a:spcAft>
-                <a:spcPts val="1500"/>
+                <a:spcPts val="1300"/>
               </a:spcAft>
             </a:pPr>
             <a:r>
-              <a:rPr sz="1600" b="0">
+              <a:rPr sz="1600" b="1">
+                <a:solidFill>
+                  <a:srgbClr val="2F5AA8"/>
+                </a:solidFill>
+                <a:latin typeface="微软雅黑"/>
+              </a:rPr>
+              <a:t>背景：</a:t>
+            </a:r>
+            <a:r>
+              <a:rPr sz="1550" b="0">
                 <a:solidFill>
                   <a:srgbClr val="1B2430"/>
                 </a:solidFill>
                 <a:latin typeface="微软雅黑"/>
               </a:rPr>
-              <a:t>▪ 背景：我上一份工作在一家做自有品牌出海的公司做亚马逊运营，卖阀门/管件、实验室仪器、封口机这类偏专业的产品，在售 SKU 超过 1000 个。</a:t>
+              <a:t>我上一份工作在一家做自有品牌出海的公司做亚马逊运营，卖阀门/管件、实验室仪器、封口机这类偏专业的产品，在售 SKU 超过 1000 个。</a:t>
             </a:r>
           </a:p>
           <a:p>
             <a:pPr>
               <a:spcAft>
-                <a:spcPts val="1500"/>
+                <a:spcPts val="1300"/>
               </a:spcAft>
             </a:pPr>
             <a:r>
-              <a:rPr sz="1600" b="0">
+              <a:rPr sz="1600" b="1">
+                <a:solidFill>
+                  <a:srgbClr val="2F5AA8"/>
+                </a:solidFill>
+                <a:latin typeface="微软雅黑"/>
+              </a:rPr>
+              <a:t>经营模式：</a:t>
+            </a:r>
+            <a:r>
+              <a:rPr sz="1550" b="0">
                 <a:solidFill>
                   <a:srgbClr val="1B2430"/>
                 </a:solidFill>
                 <a:latin typeface="微软雅黑"/>
               </a:rPr>
-              <a:t>▪ 经营模式：同一类阀门按通径、材质和螺纹标准展开，两通/三通、1/2 到 2 英寸、不锈钢/黄铜/PVC 都会配齐。客户多是工程师、实验室或做自动化改造的人，下单前会核对型号参数。</a:t>
+              <a:t>同一类阀门按通径、材质和螺纹标准展开，两通/三通、1/2 到 2 英寸、不锈钢/黄铜/PVC 都会配齐。客户多是工程师、实验室或做自动化改造的人，下单前会核对型号参数。</a:t>
             </a:r>
           </a:p>
           <a:p>
             <a:pPr>
               <a:spcAft>
-                <a:spcPts val="1500"/>
+                <a:spcPts val="1300"/>
               </a:spcAft>
             </a:pPr>
             <a:r>
-              <a:rPr sz="1600" b="0">
+              <a:rPr sz="1600" b="1">
+                <a:solidFill>
+                  <a:srgbClr val="2F5AA8"/>
+                </a:solidFill>
+                <a:latin typeface="微软雅黑"/>
+              </a:rPr>
+              <a:t>负责工作：</a:t>
+            </a:r>
+            <a:r>
+              <a:rPr sz="1550" b="0">
                 <a:solidFill>
                   <a:srgbClr val="1B2430"/>
                 </a:solidFill>
                 <a:latin typeface="微软雅黑"/>
               </a:rPr>
-              <a:t>▪ 负责工作：日常运营及新品选品，通过市场调研、竞品分析和单件 ROI 测算，制定新品定价、广告投入及备货策略。</a:t>
+              <a:t>日常运营及新品选品，通过市场调研、竞品分析和单件 ROI 测算，制定新品定价、广告投入及备货策略。</a:t>
             </a:r>
           </a:p>
           <a:p>
             <a:pPr>
               <a:spcAft>
-                <a:spcPts val="1500"/>
+                <a:spcPts val="1300"/>
               </a:spcAft>
             </a:pPr>
             <a:r>
-              <a:rPr sz="1600" b="0">
+              <a:rPr sz="1600" b="1">
+                <a:solidFill>
+                  <a:srgbClr val="2F5AA8"/>
+                </a:solidFill>
+                <a:latin typeface="微软雅黑"/>
+              </a:rPr>
+              <a:t>问题：</a:t>
+            </a:r>
+            <a:r>
+              <a:rPr sz="1550" b="0">
                 <a:solidFill>
                   <a:srgbClr val="1B2430"/>
                 </a:solidFill>
                 <a:latin typeface="微软雅黑"/>
               </a:rPr>
-              <a:t>▪ 问题：大部分 SKU 单独核算均为盈利，但亚马逊平台整体表现却不如前几年。→ 为什么“单品盈利”没有转化为“整体增长”？</a:t>
+              <a:t>大部分 SKU 单独核算均为盈利，但公司在亚马逊平台的整体表现不佳。为什么“单品盈利”没有转化为“整体增长”？</a:t>
             </a:r>
           </a:p>
           <a:p>
             <a:pPr>
               <a:spcAft>
-                <a:spcPts val="1500"/>
+                <a:spcPts val="1300"/>
               </a:spcAft>
             </a:pPr>
             <a:r>
-              <a:rPr sz="1600" b="0">
+              <a:rPr sz="1600" b="1">
+                <a:solidFill>
+                  <a:srgbClr val="2F5AA8"/>
+                </a:solidFill>
+                <a:latin typeface="微软雅黑"/>
+              </a:rPr>
+              <a:t>猜测：</a:t>
+            </a:r>
+            <a:r>
+              <a:rPr sz="1550" b="0">
                 <a:solidFill>
                   <a:srgbClr val="1B2430"/>
                 </a:solidFill>
                 <a:latin typeface="微软雅黑"/>
               </a:rPr>
-              <a:t>▪ 猜测：① 平台佣金、仓储及履约成本上升  ② 竞争加剧导致广告获客成本提高  ③ 1000+ SKU 铺得过广，资源及库存被长尾 SKU 分散</a:t>
+              <a:t>① 平台佣金、仓储及履约成本上升；② 竞争加剧导致广告获客成本提高；③ 1000+ SKU 铺得过广，资源及库存被长尾 SKU 分散</a:t>
             </a:r>
           </a:p>
           <a:p>
             <a:pPr>
               <a:spcAft>
-                <a:spcPts val="1500"/>
+                <a:spcPts val="1300"/>
               </a:spcAft>
             </a:pPr>
             <a:r>
-              <a:rPr sz="1600" b="0">
+              <a:rPr sz="1600" b="1">
+                <a:solidFill>
+                  <a:srgbClr val="2F5AA8"/>
+                </a:solidFill>
+                <a:latin typeface="微软雅黑"/>
+              </a:rPr>
+              <a:t>验证：</a:t>
+            </a:r>
+            <a:r>
+              <a:rPr sz="1550" b="0">
                 <a:solidFill>
                   <a:srgbClr val="1B2430"/>
                 </a:solidFill>
                 <a:latin typeface="微软雅黑"/>
               </a:rPr>
-              <a:t>▪ 验证：用上市公司财报和海关官方数据，从平台、行业、企业经营三个层面拆解业务表现。</a:t>
+              <a:t>用上市公司财报和海关官方数据，从行业、公司、现金流三个层面拆解业务表现。</a:t>
             </a:r>
           </a:p>
         </p:txBody>

--- a/presentation/中国跨境电商出海赛道分析-项目故事-v2.pptx
+++ b/presentation/中国跨境电商出海赛道分析-项目故事-v2.pptx
@@ -5745,7 +5745,7 @@
                 </a:solidFill>
                 <a:latin typeface="微软雅黑"/>
               </a:rPr>
-              <a:t>① 平台佣金、仓储及履约成本上升；② 竞争加剧导致广告获客成本提高；③ 1000+ SKU 铺得过广，资源及库存被长尾 SKU 分散</a:t>
+              <a:t>① 行业层面：增速换挡、竞争者涌入，流量与广告成本整体抬升；② 模式层面：精品/铺货/长尾的费用结构差异大，销售费用率可能吃掉毛利；③ 市场与渠道：过度押注单一平台或市场，议价与毛利受限；④ 资金层面：备货与回款占用现金，账面盈利未必变成真金白银</a:t>
             </a:r>
           </a:p>
           <a:p>
@@ -5770,7 +5770,7 @@
                 </a:solidFill>
                 <a:latin typeface="微软雅黑"/>
               </a:rPr>
-              <a:t>用上市公司财报和海关官方数据，从行业、公司、现金流三个层面拆解业务表现。</a:t>
+              <a:t>以 5 家上市公司为样本，用公开财报和海关数据，从行业、公司、现金流三个层面验证：哪些因素真正解释了“单品盈利却没带来整体增长”。</a:t>
             </a:r>
           </a:p>
         </p:txBody>

--- a/presentation/中国跨境电商出海赛道分析-项目故事-v2.pptx
+++ b/presentation/中国跨境电商出海赛道分析-项目故事-v2.pptx
@@ -5720,7 +5720,7 @@
                 </a:solidFill>
                 <a:latin typeface="微软雅黑"/>
               </a:rPr>
-              <a:t>大部分 SKU 单独核算均为盈利，但公司在亚马逊平台的整体表现不佳。为什么“单品盈利”没有转化为“整体增长”？</a:t>
+              <a:t>大部分 SKU 单独核算均为盈利，但公司在亚马逊平台的整体表现不佳。为什么“单品盈利”没有带来“整体赚钱”？</a:t>
             </a:r>
           </a:p>
           <a:p>
@@ -5745,7 +5745,7 @@
                 </a:solidFill>
                 <a:latin typeface="微软雅黑"/>
               </a:rPr>
-              <a:t>① 行业层面：增速换挡、竞争者涌入，流量与广告成本整体抬升；② 模式层面：精品/铺货/长尾的费用结构差异大，销售费用率可能吃掉毛利；③ 市场与渠道：过度押注单一平台或市场，议价与毛利受限；④ 资金层面：备货与回款占用现金，账面盈利未必变成真金白银</a:t>
+              <a:t>① 行业层面：增速放缓、参与者变多，流量与广告成本可能被推高；② 模式层面：精品/铺货/长尾的费用结构不同，销售费用率对净利率影响大；③ 市场与渠道：不同市场与渠道的毛利、费用、本地化门槛存在差异，可能影响整体盈利；④ 资金层面：备货与回款占用资金，盈利与现金流未必同步</a:t>
             </a:r>
           </a:p>
           <a:p>
@@ -5770,7 +5770,7 @@
                 </a:solidFill>
                 <a:latin typeface="微软雅黑"/>
               </a:rPr>
-              <a:t>以 5 家上市公司为样本，用公开财报和海关数据，从行业、公司、现金流三个层面验证：哪些因素真正解释了“单品盈利却没带来整体增长”。</a:t>
+              <a:t>以 5 家上市公司为样本，用公开财报和海关数据，从行业、公司、现金流三个层面验证：哪些因素真正解释了“单品盈利却没带来整体赚钱”。</a:t>
             </a:r>
           </a:p>
         </p:txBody>
@@ -6073,7 +6073,7 @@
                 </a:solidFill>
                 <a:latin typeface="微软雅黑"/>
               </a:rPr>
-              <a:t>① 赛道</a:t>
+              <a:t>① 行业</a:t>
             </a:r>
           </a:p>
           <a:p>
@@ -6089,7 +6089,7 @@
                 </a:solidFill>
                 <a:latin typeface="微软雅黑"/>
               </a:rPr>
-              <a:t>出海这门生意整体还有多大？还在涨吗？</a:t>
+              <a:t>这盘生意还有多大、还在涨吗？为什么门槛低、倒得也多？</a:t>
             </a:r>
           </a:p>
         </p:txBody>
@@ -6227,7 +6227,7 @@
                 </a:solidFill>
                 <a:latin typeface="微软雅黑"/>
               </a:rPr>
-              <a:t>精品 vs 铺货，谁更赚钱、更可持续？</a:t>
+              <a:t>精品 / 铺货 / 长尾，谁的利润更能留下来？</a:t>
             </a:r>
           </a:p>
         </p:txBody>
@@ -6349,7 +6349,7 @@
                 </a:solidFill>
                 <a:latin typeface="微软雅黑"/>
               </a:rPr>
-              <a:t>③ 市场/渠道</a:t>
+              <a:t>③ 市场与渠道</a:t>
             </a:r>
           </a:p>
           <a:p>
@@ -6365,7 +6365,7 @@
                 </a:solidFill>
                 <a:latin typeface="微软雅黑"/>
               </a:rPr>
-              <a:t>北美 vs 欧洲怎么选？依赖平台是不是问题？</a:t>
+              <a:t>北美 vs 欧洲、平台 vs 独立站，如何影响毛利与费用？</a:t>
             </a:r>
           </a:p>
         </p:txBody>
@@ -6487,7 +6487,7 @@
                 </a:solidFill>
                 <a:latin typeface="微软雅黑"/>
               </a:rPr>
-              <a:t>④ 创业视角</a:t>
+              <a:t>④ 经营与资金</a:t>
             </a:r>
           </a:p>
           <a:p>
@@ -6503,7 +6503,7 @@
                 </a:solidFill>
                 <a:latin typeface="微软雅黑"/>
               </a:rPr>
-              <a:t>从活下来的公司反推：怎么起步才能活得久、何时该转型？</a:t>
+              <a:t>为什么“单品盈利”没带来“整体赚钱”？现金流是不是生死线？怎么起步才能活得久？</a:t>
             </a:r>
           </a:p>
         </p:txBody>
@@ -7300,7 +7300,7 @@
                 </a:solidFill>
                 <a:latin typeface="微软雅黑"/>
               </a:rPr>
-              <a:t>FINDING ① · 赛道</a:t>
+              <a:t>DATA · 进入与退出</a:t>
             </a:r>
           </a:p>
           <a:p>

--- a/presentation/中国跨境电商出海赛道分析-项目故事-v2.pptx
+++ b/presentation/中国跨境电商出海赛道分析-项目故事-v2.pptx
@@ -1,26 +1,26 @@
 
 <file path=ppt/presentation.xml><?xml version="1.0" encoding="utf-8"?>
-<p:presentation xmlns:a="http://schemas.openxmlformats.org/drawingml/2006/main" xmlns:r="http://schemas.openxmlformats.org/officeDocument/2006/relationships" xmlns:p="http://schemas.openxmlformats.org/presentationml/2006/main" saveSubsetFonts="1" autoCompressPictures="0">
+<p:presentation xmlns:a="http://schemas.openxmlformats.org/drawingml/2006/main" xmlns:r="http://schemas.openxmlformats.org/officeDocument/2006/relationships" xmlns:p="http://schemas.openxmlformats.org/presentationml/2006/main" autoCompressPictures="0">
   <p:sldMasterIdLst>
     <p:sldMasterId id="2147483648" r:id="rId1"/>
   </p:sldMasterIdLst>
   <p:sldIdLst>
-    <p:sldId id="256" r:id="rId7"/>
-    <p:sldId id="257" r:id="rId8"/>
-    <p:sldId id="258" r:id="rId9"/>
-    <p:sldId id="259" r:id="rId10"/>
-    <p:sldId id="260" r:id="rId11"/>
-    <p:sldId id="261" r:id="rId12"/>
-    <p:sldId id="262" r:id="rId13"/>
-    <p:sldId id="263" r:id="rId14"/>
-    <p:sldId id="264" r:id="rId15"/>
-    <p:sldId id="265" r:id="rId16"/>
-    <p:sldId id="266" r:id="rId17"/>
-    <p:sldId id="267" r:id="rId18"/>
-    <p:sldId id="268" r:id="rId19"/>
-    <p:sldId id="269" r:id="rId20"/>
+    <p:sldId id="256" r:id="rId3"/>
+    <p:sldId id="257" r:id="rId4"/>
+    <p:sldId id="258" r:id="rId5"/>
+    <p:sldId id="259" r:id="rId6"/>
+    <p:sldId id="260" r:id="rId7"/>
+    <p:sldId id="261" r:id="rId8"/>
+    <p:sldId id="262" r:id="rId9"/>
+    <p:sldId id="263" r:id="rId10"/>
+    <p:sldId id="264" r:id="rId11"/>
+    <p:sldId id="265" r:id="rId12"/>
+    <p:sldId id="266" r:id="rId13"/>
+    <p:sldId id="267" r:id="rId14"/>
+    <p:sldId id="268" r:id="rId15"/>
+    <p:sldId id="269" r:id="rId16"/>
   </p:sldIdLst>
-  <p:sldSz cx="12191695" cy="6858000" type="screen4x3"/>
+  <p:sldSz cx="12191365" cy="6858000" type="screen4x3"/>
   <p:notesSz cx="6858000" cy="9144000"/>
   <p:defaultTextStyle>
     <a:defPPr>
@@ -117,6 +117,22 @@
       </a:defRPr>
     </a:lvl9pPr>
   </p:defaultTextStyle>
+  <p:extLst>
+    <p:ext uri="{EFAFB233-063F-42B5-8137-9DF3F51BA10A}">
+      <p15:sldGuideLst xmlns:p15="http://schemas.microsoft.com/office/powerpoint/2012/main">
+        <p15:guide id="1" orient="horz" pos="2192" userDrawn="1">
+          <p15:clr>
+            <a:srgbClr val="A4A3A4"/>
+          </p15:clr>
+        </p15:guide>
+        <p15:guide id="2" pos="2880" userDrawn="1">
+          <p15:clr>
+            <a:srgbClr val="A4A3A4"/>
+          </p15:clr>
+        </p15:guide>
+      </p15:sldGuideLst>
+    </p:ext>
+  </p:extLst>
 </p:presentation>
 </file>
 
@@ -301,7 +317,6 @@
           <a:p>
             <a:fld id="{5BCAD085-E8A6-8845-BD4E-CB4CCA059FC4}" type="datetimeFigureOut">
               <a:rPr lang="en-US" smtClean="0"/>
-              <a:t>1/27/13</a:t>
             </a:fld>
             <a:endParaRPr lang="en-US"/>
           </a:p>
@@ -343,18 +358,12 @@
           <a:p>
             <a:fld id="{C1FF6DA9-008F-8B48-92A6-B652298478BF}" type="slidenum">
               <a:rPr lang="en-US" smtClean="0"/>
-              <a:t>‹#›</a:t>
             </a:fld>
             <a:endParaRPr lang="en-US"/>
           </a:p>
         </p:txBody>
       </p:sp>
     </p:spTree>
-    <p:extLst>
-      <p:ext uri="{BB962C8B-B14F-4D97-AF65-F5344CB8AC3E}">
-        <p14:creationId xmlns:p14="http://schemas.microsoft.com/office/powerpoint/2010/main" val="3168075583"/>
-      </p:ext>
-    </p:extLst>
   </p:cSld>
   <p:clrMapOvr>
     <a:masterClrMapping/>
@@ -422,6 +431,7 @@
               <a:rPr lang="en-US" smtClean="0"/>
               <a:t>Click to edit Master text styles</a:t>
             </a:r>
+            <a:endParaRPr lang="en-US" smtClean="0"/>
           </a:p>
           <a:p>
             <a:pPr lvl="1"/>
@@ -429,6 +439,7 @@
               <a:rPr lang="en-US" smtClean="0"/>
               <a:t>Second level</a:t>
             </a:r>
+            <a:endParaRPr lang="en-US" smtClean="0"/>
           </a:p>
           <a:p>
             <a:pPr lvl="2"/>
@@ -436,6 +447,7 @@
               <a:rPr lang="en-US" smtClean="0"/>
               <a:t>Third level</a:t>
             </a:r>
+            <a:endParaRPr lang="en-US" smtClean="0"/>
           </a:p>
           <a:p>
             <a:pPr lvl="3"/>
@@ -443,6 +455,7 @@
               <a:rPr lang="en-US" smtClean="0"/>
               <a:t>Fourth level</a:t>
             </a:r>
+            <a:endParaRPr lang="en-US" smtClean="0"/>
           </a:p>
           <a:p>
             <a:pPr lvl="4"/>
@@ -471,7 +484,6 @@
           <a:p>
             <a:fld id="{5BCAD085-E8A6-8845-BD4E-CB4CCA059FC4}" type="datetimeFigureOut">
               <a:rPr lang="en-US" smtClean="0"/>
-              <a:t>1/27/13</a:t>
             </a:fld>
             <a:endParaRPr lang="en-US"/>
           </a:p>
@@ -513,18 +525,12 @@
           <a:p>
             <a:fld id="{C1FF6DA9-008F-8B48-92A6-B652298478BF}" type="slidenum">
               <a:rPr lang="en-US" smtClean="0"/>
-              <a:t>‹#›</a:t>
             </a:fld>
             <a:endParaRPr lang="en-US"/>
           </a:p>
         </p:txBody>
       </p:sp>
     </p:spTree>
-    <p:extLst>
-      <p:ext uri="{BB962C8B-B14F-4D97-AF65-F5344CB8AC3E}">
-        <p14:creationId xmlns:p14="http://schemas.microsoft.com/office/powerpoint/2010/main" val="2910927964"/>
-      </p:ext>
-    </p:extLst>
   </p:cSld>
   <p:clrMapOvr>
     <a:masterClrMapping/>
@@ -602,6 +608,7 @@
               <a:rPr lang="en-US" smtClean="0"/>
               <a:t>Click to edit Master text styles</a:t>
             </a:r>
+            <a:endParaRPr lang="en-US" smtClean="0"/>
           </a:p>
           <a:p>
             <a:pPr lvl="1"/>
@@ -609,6 +616,7 @@
               <a:rPr lang="en-US" smtClean="0"/>
               <a:t>Second level</a:t>
             </a:r>
+            <a:endParaRPr lang="en-US" smtClean="0"/>
           </a:p>
           <a:p>
             <a:pPr lvl="2"/>
@@ -616,6 +624,7 @@
               <a:rPr lang="en-US" smtClean="0"/>
               <a:t>Third level</a:t>
             </a:r>
+            <a:endParaRPr lang="en-US" smtClean="0"/>
           </a:p>
           <a:p>
             <a:pPr lvl="3"/>
@@ -623,6 +632,7 @@
               <a:rPr lang="en-US" smtClean="0"/>
               <a:t>Fourth level</a:t>
             </a:r>
+            <a:endParaRPr lang="en-US" smtClean="0"/>
           </a:p>
           <a:p>
             <a:pPr lvl="4"/>
@@ -651,7 +661,6 @@
           <a:p>
             <a:fld id="{5BCAD085-E8A6-8845-BD4E-CB4CCA059FC4}" type="datetimeFigureOut">
               <a:rPr lang="en-US" smtClean="0"/>
-              <a:t>1/27/13</a:t>
             </a:fld>
             <a:endParaRPr lang="en-US"/>
           </a:p>
@@ -693,18 +702,12 @@
           <a:p>
             <a:fld id="{C1FF6DA9-008F-8B48-92A6-B652298478BF}" type="slidenum">
               <a:rPr lang="en-US" smtClean="0"/>
-              <a:t>‹#›</a:t>
             </a:fld>
             <a:endParaRPr lang="en-US"/>
           </a:p>
         </p:txBody>
       </p:sp>
     </p:spTree>
-    <p:extLst>
-      <p:ext uri="{BB962C8B-B14F-4D97-AF65-F5344CB8AC3E}">
-        <p14:creationId xmlns:p14="http://schemas.microsoft.com/office/powerpoint/2010/main" val="3612223792"/>
-      </p:ext>
-    </p:extLst>
   </p:cSld>
   <p:clrMapOvr>
     <a:masterClrMapping/>
@@ -772,6 +775,7 @@
               <a:rPr lang="en-US" smtClean="0"/>
               <a:t>Click to edit Master text styles</a:t>
             </a:r>
+            <a:endParaRPr lang="en-US" smtClean="0"/>
           </a:p>
           <a:p>
             <a:pPr lvl="1"/>
@@ -779,6 +783,7 @@
               <a:rPr lang="en-US" smtClean="0"/>
               <a:t>Second level</a:t>
             </a:r>
+            <a:endParaRPr lang="en-US" smtClean="0"/>
           </a:p>
           <a:p>
             <a:pPr lvl="2"/>
@@ -786,6 +791,7 @@
               <a:rPr lang="en-US" smtClean="0"/>
               <a:t>Third level</a:t>
             </a:r>
+            <a:endParaRPr lang="en-US" smtClean="0"/>
           </a:p>
           <a:p>
             <a:pPr lvl="3"/>
@@ -793,6 +799,7 @@
               <a:rPr lang="en-US" smtClean="0"/>
               <a:t>Fourth level</a:t>
             </a:r>
+            <a:endParaRPr lang="en-US" smtClean="0"/>
           </a:p>
           <a:p>
             <a:pPr lvl="4"/>
@@ -821,7 +828,6 @@
           <a:p>
             <a:fld id="{5BCAD085-E8A6-8845-BD4E-CB4CCA059FC4}" type="datetimeFigureOut">
               <a:rPr lang="en-US" smtClean="0"/>
-              <a:t>1/27/13</a:t>
             </a:fld>
             <a:endParaRPr lang="en-US"/>
           </a:p>
@@ -863,18 +869,12 @@
           <a:p>
             <a:fld id="{C1FF6DA9-008F-8B48-92A6-B652298478BF}" type="slidenum">
               <a:rPr lang="en-US" smtClean="0"/>
-              <a:t>‹#›</a:t>
             </a:fld>
             <a:endParaRPr lang="en-US"/>
           </a:p>
         </p:txBody>
       </p:sp>
     </p:spTree>
-    <p:extLst>
-      <p:ext uri="{BB962C8B-B14F-4D97-AF65-F5344CB8AC3E}">
-        <p14:creationId xmlns:p14="http://schemas.microsoft.com/office/powerpoint/2010/main" val="2614314258"/>
-      </p:ext>
-    </p:extLst>
   </p:cSld>
   <p:clrMapOvr>
     <a:masterClrMapping/>
@@ -1047,6 +1047,7 @@
               <a:rPr lang="en-US" smtClean="0"/>
               <a:t>Click to edit Master text styles</a:t>
             </a:r>
+            <a:endParaRPr lang="en-US" smtClean="0"/>
           </a:p>
         </p:txBody>
       </p:sp>
@@ -1067,7 +1068,6 @@
           <a:p>
             <a:fld id="{5BCAD085-E8A6-8845-BD4E-CB4CCA059FC4}" type="datetimeFigureOut">
               <a:rPr lang="en-US" smtClean="0"/>
-              <a:t>1/27/13</a:t>
             </a:fld>
             <a:endParaRPr lang="en-US"/>
           </a:p>
@@ -1109,18 +1109,12 @@
           <a:p>
             <a:fld id="{C1FF6DA9-008F-8B48-92A6-B652298478BF}" type="slidenum">
               <a:rPr lang="en-US" smtClean="0"/>
-              <a:t>‹#›</a:t>
             </a:fld>
             <a:endParaRPr lang="en-US"/>
           </a:p>
         </p:txBody>
       </p:sp>
     </p:spTree>
-    <p:extLst>
-      <p:ext uri="{BB962C8B-B14F-4D97-AF65-F5344CB8AC3E}">
-        <p14:creationId xmlns:p14="http://schemas.microsoft.com/office/powerpoint/2010/main" val="960648375"/>
-      </p:ext>
-    </p:extLst>
   </p:cSld>
   <p:clrMapOvr>
     <a:masterClrMapping/>
@@ -1221,6 +1215,7 @@
               <a:rPr lang="en-US" smtClean="0"/>
               <a:t>Click to edit Master text styles</a:t>
             </a:r>
+            <a:endParaRPr lang="en-US" smtClean="0"/>
           </a:p>
           <a:p>
             <a:pPr lvl="1"/>
@@ -1228,6 +1223,7 @@
               <a:rPr lang="en-US" smtClean="0"/>
               <a:t>Second level</a:t>
             </a:r>
+            <a:endParaRPr lang="en-US" smtClean="0"/>
           </a:p>
           <a:p>
             <a:pPr lvl="2"/>
@@ -1235,6 +1231,7 @@
               <a:rPr lang="en-US" smtClean="0"/>
               <a:t>Third level</a:t>
             </a:r>
+            <a:endParaRPr lang="en-US" smtClean="0"/>
           </a:p>
           <a:p>
             <a:pPr lvl="3"/>
@@ -1242,6 +1239,7 @@
               <a:rPr lang="en-US" smtClean="0"/>
               <a:t>Fourth level</a:t>
             </a:r>
+            <a:endParaRPr lang="en-US" smtClean="0"/>
           </a:p>
           <a:p>
             <a:pPr lvl="4"/>
@@ -1306,6 +1304,7 @@
               <a:rPr lang="en-US" smtClean="0"/>
               <a:t>Click to edit Master text styles</a:t>
             </a:r>
+            <a:endParaRPr lang="en-US" smtClean="0"/>
           </a:p>
           <a:p>
             <a:pPr lvl="1"/>
@@ -1313,6 +1312,7 @@
               <a:rPr lang="en-US" smtClean="0"/>
               <a:t>Second level</a:t>
             </a:r>
+            <a:endParaRPr lang="en-US" smtClean="0"/>
           </a:p>
           <a:p>
             <a:pPr lvl="2"/>
@@ -1320,6 +1320,7 @@
               <a:rPr lang="en-US" smtClean="0"/>
               <a:t>Third level</a:t>
             </a:r>
+            <a:endParaRPr lang="en-US" smtClean="0"/>
           </a:p>
           <a:p>
             <a:pPr lvl="3"/>
@@ -1327,6 +1328,7 @@
               <a:rPr lang="en-US" smtClean="0"/>
               <a:t>Fourth level</a:t>
             </a:r>
+            <a:endParaRPr lang="en-US" smtClean="0"/>
           </a:p>
           <a:p>
             <a:pPr lvl="4"/>
@@ -1355,7 +1357,6 @@
           <a:p>
             <a:fld id="{5BCAD085-E8A6-8845-BD4E-CB4CCA059FC4}" type="datetimeFigureOut">
               <a:rPr lang="en-US" smtClean="0"/>
-              <a:t>1/27/13</a:t>
             </a:fld>
             <a:endParaRPr lang="en-US"/>
           </a:p>
@@ -1397,18 +1398,12 @@
           <a:p>
             <a:fld id="{C1FF6DA9-008F-8B48-92A6-B652298478BF}" type="slidenum">
               <a:rPr lang="en-US" smtClean="0"/>
-              <a:t>‹#›</a:t>
             </a:fld>
             <a:endParaRPr lang="en-US"/>
           </a:p>
         </p:txBody>
       </p:sp>
     </p:spTree>
-    <p:extLst>
-      <p:ext uri="{BB962C8B-B14F-4D97-AF65-F5344CB8AC3E}">
-        <p14:creationId xmlns:p14="http://schemas.microsoft.com/office/powerpoint/2010/main" val="2782244947"/>
-      </p:ext>
-    </p:extLst>
   </p:cSld>
   <p:clrMapOvr>
     <a:masterClrMapping/>
@@ -1522,6 +1517,7 @@
               <a:rPr lang="en-US" smtClean="0"/>
               <a:t>Click to edit Master text styles</a:t>
             </a:r>
+            <a:endParaRPr lang="en-US" smtClean="0"/>
           </a:p>
         </p:txBody>
       </p:sp>
@@ -1578,6 +1574,7 @@
               <a:rPr lang="en-US" smtClean="0"/>
               <a:t>Click to edit Master text styles</a:t>
             </a:r>
+            <a:endParaRPr lang="en-US" smtClean="0"/>
           </a:p>
           <a:p>
             <a:pPr lvl="1"/>
@@ -1585,6 +1582,7 @@
               <a:rPr lang="en-US" smtClean="0"/>
               <a:t>Second level</a:t>
             </a:r>
+            <a:endParaRPr lang="en-US" smtClean="0"/>
           </a:p>
           <a:p>
             <a:pPr lvl="2"/>
@@ -1592,6 +1590,7 @@
               <a:rPr lang="en-US" smtClean="0"/>
               <a:t>Third level</a:t>
             </a:r>
+            <a:endParaRPr lang="en-US" smtClean="0"/>
           </a:p>
           <a:p>
             <a:pPr lvl="3"/>
@@ -1599,6 +1598,7 @@
               <a:rPr lang="en-US" smtClean="0"/>
               <a:t>Fourth level</a:t>
             </a:r>
+            <a:endParaRPr lang="en-US" smtClean="0"/>
           </a:p>
           <a:p>
             <a:pPr lvl="4"/>
@@ -1672,6 +1672,7 @@
               <a:rPr lang="en-US" smtClean="0"/>
               <a:t>Click to edit Master text styles</a:t>
             </a:r>
+            <a:endParaRPr lang="en-US" smtClean="0"/>
           </a:p>
         </p:txBody>
       </p:sp>
@@ -1728,6 +1729,7 @@
               <a:rPr lang="en-US" smtClean="0"/>
               <a:t>Click to edit Master text styles</a:t>
             </a:r>
+            <a:endParaRPr lang="en-US" smtClean="0"/>
           </a:p>
           <a:p>
             <a:pPr lvl="1"/>
@@ -1735,6 +1737,7 @@
               <a:rPr lang="en-US" smtClean="0"/>
               <a:t>Second level</a:t>
             </a:r>
+            <a:endParaRPr lang="en-US" smtClean="0"/>
           </a:p>
           <a:p>
             <a:pPr lvl="2"/>
@@ -1742,6 +1745,7 @@
               <a:rPr lang="en-US" smtClean="0"/>
               <a:t>Third level</a:t>
             </a:r>
+            <a:endParaRPr lang="en-US" smtClean="0"/>
           </a:p>
           <a:p>
             <a:pPr lvl="3"/>
@@ -1749,6 +1753,7 @@
               <a:rPr lang="en-US" smtClean="0"/>
               <a:t>Fourth level</a:t>
             </a:r>
+            <a:endParaRPr lang="en-US" smtClean="0"/>
           </a:p>
           <a:p>
             <a:pPr lvl="4"/>
@@ -1777,7 +1782,6 @@
           <a:p>
             <a:fld id="{5BCAD085-E8A6-8845-BD4E-CB4CCA059FC4}" type="datetimeFigureOut">
               <a:rPr lang="en-US" smtClean="0"/>
-              <a:t>1/27/13</a:t>
             </a:fld>
             <a:endParaRPr lang="en-US"/>
           </a:p>
@@ -1819,18 +1823,12 @@
           <a:p>
             <a:fld id="{C1FF6DA9-008F-8B48-92A6-B652298478BF}" type="slidenum">
               <a:rPr lang="en-US" smtClean="0"/>
-              <a:t>‹#›</a:t>
             </a:fld>
             <a:endParaRPr lang="en-US"/>
           </a:p>
         </p:txBody>
       </p:sp>
     </p:spTree>
-    <p:extLst>
-      <p:ext uri="{BB962C8B-B14F-4D97-AF65-F5344CB8AC3E}">
-        <p14:creationId xmlns:p14="http://schemas.microsoft.com/office/powerpoint/2010/main" val="990158736"/>
-      </p:ext>
-    </p:extLst>
   </p:cSld>
   <p:clrMapOvr>
     <a:masterClrMapping/>
@@ -1895,7 +1893,6 @@
           <a:p>
             <a:fld id="{5BCAD085-E8A6-8845-BD4E-CB4CCA059FC4}" type="datetimeFigureOut">
               <a:rPr lang="en-US" smtClean="0"/>
-              <a:t>1/27/13</a:t>
             </a:fld>
             <a:endParaRPr lang="en-US"/>
           </a:p>
@@ -1937,18 +1934,12 @@
           <a:p>
             <a:fld id="{C1FF6DA9-008F-8B48-92A6-B652298478BF}" type="slidenum">
               <a:rPr lang="en-US" smtClean="0"/>
-              <a:t>‹#›</a:t>
             </a:fld>
             <a:endParaRPr lang="en-US"/>
           </a:p>
         </p:txBody>
       </p:sp>
     </p:spTree>
-    <p:extLst>
-      <p:ext uri="{BB962C8B-B14F-4D97-AF65-F5344CB8AC3E}">
-        <p14:creationId xmlns:p14="http://schemas.microsoft.com/office/powerpoint/2010/main" val="727027711"/>
-      </p:ext>
-    </p:extLst>
   </p:cSld>
   <p:clrMapOvr>
     <a:masterClrMapping/>
@@ -1990,7 +1981,6 @@
           <a:p>
             <a:fld id="{5BCAD085-E8A6-8845-BD4E-CB4CCA059FC4}" type="datetimeFigureOut">
               <a:rPr lang="en-US" smtClean="0"/>
-              <a:t>1/27/13</a:t>
             </a:fld>
             <a:endParaRPr lang="en-US"/>
           </a:p>
@@ -2032,18 +2022,12 @@
           <a:p>
             <a:fld id="{C1FF6DA9-008F-8B48-92A6-B652298478BF}" type="slidenum">
               <a:rPr lang="en-US" smtClean="0"/>
-              <a:t>‹#›</a:t>
             </a:fld>
             <a:endParaRPr lang="en-US"/>
           </a:p>
         </p:txBody>
       </p:sp>
     </p:spTree>
-    <p:extLst>
-      <p:ext uri="{BB962C8B-B14F-4D97-AF65-F5344CB8AC3E}">
-        <p14:creationId xmlns:p14="http://schemas.microsoft.com/office/powerpoint/2010/main" val="1212999818"/>
-      </p:ext>
-    </p:extLst>
   </p:cSld>
   <p:clrMapOvr>
     <a:masterClrMapping/>
@@ -2153,6 +2137,7 @@
               <a:rPr lang="en-US" smtClean="0"/>
               <a:t>Click to edit Master text styles</a:t>
             </a:r>
+            <a:endParaRPr lang="en-US" smtClean="0"/>
           </a:p>
           <a:p>
             <a:pPr lvl="1"/>
@@ -2160,6 +2145,7 @@
               <a:rPr lang="en-US" smtClean="0"/>
               <a:t>Second level</a:t>
             </a:r>
+            <a:endParaRPr lang="en-US" smtClean="0"/>
           </a:p>
           <a:p>
             <a:pPr lvl="2"/>
@@ -2167,6 +2153,7 @@
               <a:rPr lang="en-US" smtClean="0"/>
               <a:t>Third level</a:t>
             </a:r>
+            <a:endParaRPr lang="en-US" smtClean="0"/>
           </a:p>
           <a:p>
             <a:pPr lvl="3"/>
@@ -2174,6 +2161,7 @@
               <a:rPr lang="en-US" smtClean="0"/>
               <a:t>Fourth level</a:t>
             </a:r>
+            <a:endParaRPr lang="en-US" smtClean="0"/>
           </a:p>
           <a:p>
             <a:pPr lvl="4"/>
@@ -2247,6 +2235,7 @@
               <a:rPr lang="en-US" smtClean="0"/>
               <a:t>Click to edit Master text styles</a:t>
             </a:r>
+            <a:endParaRPr lang="en-US" smtClean="0"/>
           </a:p>
         </p:txBody>
       </p:sp>
@@ -2267,7 +2256,6 @@
           <a:p>
             <a:fld id="{5BCAD085-E8A6-8845-BD4E-CB4CCA059FC4}" type="datetimeFigureOut">
               <a:rPr lang="en-US" smtClean="0"/>
-              <a:t>1/27/13</a:t>
             </a:fld>
             <a:endParaRPr lang="en-US"/>
           </a:p>
@@ -2309,18 +2297,12 @@
           <a:p>
             <a:fld id="{C1FF6DA9-008F-8B48-92A6-B652298478BF}" type="slidenum">
               <a:rPr lang="en-US" smtClean="0"/>
-              <a:t>‹#›</a:t>
             </a:fld>
             <a:endParaRPr lang="en-US"/>
           </a:p>
         </p:txBody>
       </p:sp>
     </p:spTree>
-    <p:extLst>
-      <p:ext uri="{BB962C8B-B14F-4D97-AF65-F5344CB8AC3E}">
-        <p14:creationId xmlns:p14="http://schemas.microsoft.com/office/powerpoint/2010/main" val="1840726560"/>
-      </p:ext>
-    </p:extLst>
   </p:cSld>
   <p:clrMapOvr>
     <a:masterClrMapping/>
@@ -2500,6 +2482,7 @@
               <a:rPr lang="en-US" smtClean="0"/>
               <a:t>Click to edit Master text styles</a:t>
             </a:r>
+            <a:endParaRPr lang="en-US" smtClean="0"/>
           </a:p>
         </p:txBody>
       </p:sp>
@@ -2520,7 +2503,6 @@
           <a:p>
             <a:fld id="{5BCAD085-E8A6-8845-BD4E-CB4CCA059FC4}" type="datetimeFigureOut">
               <a:rPr lang="en-US" smtClean="0"/>
-              <a:t>1/27/13</a:t>
             </a:fld>
             <a:endParaRPr lang="en-US"/>
           </a:p>
@@ -2562,18 +2544,12 @@
           <a:p>
             <a:fld id="{C1FF6DA9-008F-8B48-92A6-B652298478BF}" type="slidenum">
               <a:rPr lang="en-US" smtClean="0"/>
-              <a:t>‹#›</a:t>
             </a:fld>
             <a:endParaRPr lang="en-US"/>
           </a:p>
         </p:txBody>
       </p:sp>
     </p:spTree>
-    <p:extLst>
-      <p:ext uri="{BB962C8B-B14F-4D97-AF65-F5344CB8AC3E}">
-        <p14:creationId xmlns:p14="http://schemas.microsoft.com/office/powerpoint/2010/main" val="3889236939"/>
-      </p:ext>
-    </p:extLst>
   </p:cSld>
   <p:clrMapOvr>
     <a:masterClrMapping/>
@@ -2666,6 +2642,7 @@
               <a:rPr lang="en-US" smtClean="0"/>
               <a:t>Click to edit Master text styles</a:t>
             </a:r>
+            <a:endParaRPr lang="en-US" smtClean="0"/>
           </a:p>
           <a:p>
             <a:pPr lvl="1"/>
@@ -2673,6 +2650,7 @@
               <a:rPr lang="en-US" smtClean="0"/>
               <a:t>Second level</a:t>
             </a:r>
+            <a:endParaRPr lang="en-US" smtClean="0"/>
           </a:p>
           <a:p>
             <a:pPr lvl="2"/>
@@ -2680,6 +2658,7 @@
               <a:rPr lang="en-US" smtClean="0"/>
               <a:t>Third level</a:t>
             </a:r>
+            <a:endParaRPr lang="en-US" smtClean="0"/>
           </a:p>
           <a:p>
             <a:pPr lvl="3"/>
@@ -2687,6 +2666,7 @@
               <a:rPr lang="en-US" smtClean="0"/>
               <a:t>Fourth level</a:t>
             </a:r>
+            <a:endParaRPr lang="en-US" smtClean="0"/>
           </a:p>
           <a:p>
             <a:pPr lvl="4"/>
@@ -2733,7 +2713,6 @@
           <a:p>
             <a:fld id="{5BCAD085-E8A6-8845-BD4E-CB4CCA059FC4}" type="datetimeFigureOut">
               <a:rPr lang="en-US" smtClean="0"/>
-              <a:t>1/27/13</a:t>
             </a:fld>
             <a:endParaRPr lang="en-US"/>
           </a:p>
@@ -2811,18 +2790,12 @@
           <a:p>
             <a:fld id="{C1FF6DA9-008F-8B48-92A6-B652298478BF}" type="slidenum">
               <a:rPr lang="en-US" smtClean="0"/>
-              <a:t>‹#›</a:t>
             </a:fld>
             <a:endParaRPr lang="en-US"/>
           </a:p>
         </p:txBody>
       </p:sp>
     </p:spTree>
-    <p:extLst>
-      <p:ext uri="{BB962C8B-B14F-4D97-AF65-F5344CB8AC3E}">
-        <p14:creationId xmlns:p14="http://schemas.microsoft.com/office/powerpoint/2010/main" val="2209977519"/>
-      </p:ext>
-    </p:extLst>
   </p:cSld>
   <p:clrMap bg1="lt1" tx1="dk1" bg2="lt2" tx2="dk2" accent1="accent1" accent2="accent2" accent3="accent3" accent4="accent4" accent5="accent5" accent6="accent6" hlink="hlink" folHlink="folHlink"/>
   <p:sldLayoutIdLst>
@@ -2860,7 +2833,7 @@
         <a:spcBef>
           <a:spcPct val="20000"/>
         </a:spcBef>
-        <a:buFont typeface="Arial"/>
+        <a:buFont typeface="Arial" panose="020B0604020202090204"/>
         <a:buChar char="•"/>
         <a:defRPr sz="3200" kern="1200">
           <a:solidFill>
@@ -2875,7 +2848,7 @@
         <a:spcBef>
           <a:spcPct val="20000"/>
         </a:spcBef>
-        <a:buFont typeface="Arial"/>
+        <a:buFont typeface="Arial" panose="020B0604020202090204"/>
         <a:buChar char="–"/>
         <a:defRPr sz="2800" kern="1200">
           <a:solidFill>
@@ -2890,7 +2863,7 @@
         <a:spcBef>
           <a:spcPct val="20000"/>
         </a:spcBef>
-        <a:buFont typeface="Arial"/>
+        <a:buFont typeface="Arial" panose="020B0604020202090204"/>
         <a:buChar char="•"/>
         <a:defRPr sz="2400" kern="1200">
           <a:solidFill>
@@ -2905,7 +2878,7 @@
         <a:spcBef>
           <a:spcPct val="20000"/>
         </a:spcBef>
-        <a:buFont typeface="Arial"/>
+        <a:buFont typeface="Arial" panose="020B0604020202090204"/>
         <a:buChar char="–"/>
         <a:defRPr sz="2000" kern="1200">
           <a:solidFill>
@@ -2920,7 +2893,7 @@
         <a:spcBef>
           <a:spcPct val="20000"/>
         </a:spcBef>
-        <a:buFont typeface="Arial"/>
+        <a:buFont typeface="Arial" panose="020B0604020202090204"/>
         <a:buChar char="»"/>
         <a:defRPr sz="2000" kern="1200">
           <a:solidFill>
@@ -2935,7 +2908,7 @@
         <a:spcBef>
           <a:spcPct val="20000"/>
         </a:spcBef>
-        <a:buFont typeface="Arial"/>
+        <a:buFont typeface="Arial" panose="020B0604020202090204"/>
         <a:buChar char="•"/>
         <a:defRPr sz="2000" kern="1200">
           <a:solidFill>
@@ -2950,7 +2923,7 @@
         <a:spcBef>
           <a:spcPct val="20000"/>
         </a:spcBef>
-        <a:buFont typeface="Arial"/>
+        <a:buFont typeface="Arial" panose="020B0604020202090204"/>
         <a:buChar char="•"/>
         <a:defRPr sz="2000" kern="1200">
           <a:solidFill>
@@ -2965,7 +2938,7 @@
         <a:spcBef>
           <a:spcPct val="20000"/>
         </a:spcBef>
-        <a:buFont typeface="Arial"/>
+        <a:buFont typeface="Arial" panose="020B0604020202090204"/>
         <a:buChar char="•"/>
         <a:defRPr sz="2000" kern="1200">
           <a:solidFill>
@@ -2980,7 +2953,7 @@
         <a:spcBef>
           <a:spcPct val="20000"/>
         </a:spcBef>
-        <a:buFont typeface="Arial"/>
+        <a:buFont typeface="Arial" panose="020B0604020202090204"/>
         <a:buChar char="•"/>
         <a:defRPr sz="2000" kern="1200">
           <a:solidFill>
@@ -3092,7 +3065,7 @@
 </file>
 
 <file path=ppt/slides/slide1.xml><?xml version="1.0" encoding="utf-8"?>
-<p:sld xmlns:a="http://schemas.openxmlformats.org/drawingml/2006/main" xmlns:p="http://schemas.openxmlformats.org/presentationml/2006/main" xmlns:r="http://schemas.openxmlformats.org/officeDocument/2006/relationships">
+<p:sld xmlns:a="http://schemas.openxmlformats.org/drawingml/2006/main" xmlns:r="http://schemas.openxmlformats.org/officeDocument/2006/relationships" xmlns:p="http://schemas.openxmlformats.org/presentationml/2006/main">
   <p:cSld>
     <p:spTree>
       <p:nvGrpSpPr>
@@ -3176,6 +3149,12 @@
               </a:rPr>
               <a:t>中国跨境电商 / 出海赛道分析</a:t>
             </a:r>
+            <a:endParaRPr sz="4400" b="1">
+              <a:solidFill>
+                <a:srgbClr val="1B2430"/>
+              </a:solidFill>
+              <a:latin typeface="微软雅黑"/>
+            </a:endParaRPr>
           </a:p>
           <a:p>
             <a:pPr>
@@ -3192,6 +3171,12 @@
               </a:rPr>
               <a:t>一个从亲身经历出发、用公开数据验证的行业研究</a:t>
             </a:r>
+            <a:endParaRPr sz="1900" b="0">
+              <a:solidFill>
+                <a:srgbClr val="5B6470"/>
+              </a:solidFill>
+              <a:latin typeface="微软雅黑"/>
+            </a:endParaRPr>
           </a:p>
           <a:p>
             <a:pPr>
@@ -3208,6 +3193,12 @@
               </a:rPr>
               <a:t>5 家上市公司 · 精品 vs 铺货 · 现金流深挖 · 创业决策工作台</a:t>
             </a:r>
+            <a:endParaRPr sz="1350" b="0">
+              <a:solidFill>
+                <a:srgbClr val="2F5AA8"/>
+              </a:solidFill>
+              <a:latin typeface="微软雅黑"/>
+            </a:endParaRPr>
           </a:p>
         </p:txBody>
       </p:sp>
@@ -3291,6 +3282,12 @@
               </a:rPr>
               <a:t>Xuefei Wang  ·  数据分析 / 商业分析 / 产品方向</a:t>
             </a:r>
+            <a:endParaRPr sz="1300" b="0">
+              <a:solidFill>
+                <a:srgbClr val="5B6470"/>
+              </a:solidFill>
+              <a:latin typeface="微软雅黑"/>
+            </a:endParaRPr>
           </a:p>
           <a:p>
             <a:pPr>
@@ -3307,6 +3304,12 @@
               </a:rPr>
               <a:t>2026 秋招  ·  项目叙事版</a:t>
             </a:r>
+            <a:endParaRPr sz="1300" b="0">
+              <a:solidFill>
+                <a:srgbClr val="5B6470"/>
+              </a:solidFill>
+              <a:latin typeface="微软雅黑"/>
+            </a:endParaRPr>
           </a:p>
         </p:txBody>
       </p:sp>
@@ -3319,7 +3322,7 @@
 </file>
 
 <file path=ppt/slides/slide10.xml><?xml version="1.0" encoding="utf-8"?>
-<p:sld xmlns:a="http://schemas.openxmlformats.org/drawingml/2006/main" xmlns:p="http://schemas.openxmlformats.org/presentationml/2006/main" xmlns:r="http://schemas.openxmlformats.org/officeDocument/2006/relationships">
+<p:sld xmlns:a="http://schemas.openxmlformats.org/drawingml/2006/main" xmlns:r="http://schemas.openxmlformats.org/officeDocument/2006/relationships" xmlns:p="http://schemas.openxmlformats.org/presentationml/2006/main">
   <p:cSld>
     <p:spTree>
       <p:nvGrpSpPr>
@@ -3403,6 +3406,12 @@
               </a:rPr>
               <a:t>FINDING ③ · 市场</a:t>
             </a:r>
+            <a:endParaRPr sz="1150" b="1">
+              <a:solidFill>
+                <a:srgbClr val="2F5AA8"/>
+              </a:solidFill>
+              <a:latin typeface="微软雅黑"/>
+            </a:endParaRPr>
           </a:p>
           <a:p>
             <a:pPr>
@@ -3419,6 +3428,12 @@
               </a:rPr>
               <a:t>欧洲毛利更高，但天花板与本地化门槛并存</a:t>
             </a:r>
+            <a:endParaRPr sz="2700" b="1">
+              <a:solidFill>
+                <a:srgbClr val="1B2430"/>
+              </a:solidFill>
+              <a:latin typeface="微软雅黑"/>
+            </a:endParaRPr>
           </a:p>
         </p:txBody>
       </p:sp>
@@ -3430,8 +3445,8 @@
         </p:nvSpPr>
         <p:spPr>
           <a:xfrm>
-            <a:off x="640080" y="1874519"/>
-            <a:ext cx="5669280" cy="4572000"/>
+            <a:off x="640080" y="1554480"/>
+            <a:ext cx="10862945" cy="1814830"/>
           </a:xfrm>
           <a:prstGeom prst="rect">
             <a:avLst/>
@@ -3458,6 +3473,12 @@
               </a:rPr>
               <a:t>▪ 致欧是唯一披露欧美细分的公司：欧洲毛利率 36.4% &gt; 美加 30.3%</a:t>
             </a:r>
+            <a:endParaRPr sz="1500" b="1">
+              <a:solidFill>
+                <a:srgbClr val="1B2430"/>
+              </a:solidFill>
+              <a:latin typeface="微软雅黑"/>
+            </a:endParaRPr>
           </a:p>
           <a:p>
             <a:pPr>
@@ -3474,6 +3495,12 @@
               </a:rPr>
               <a:t>▪ 但致欧增速 +7.1%，明显慢于北美为主的安克（+23.5%）</a:t>
             </a:r>
+            <a:endParaRPr sz="1500" b="0">
+              <a:solidFill>
+                <a:srgbClr val="1B2430"/>
+              </a:solidFill>
+              <a:latin typeface="微软雅黑"/>
+            </a:endParaRPr>
           </a:p>
           <a:p>
             <a:pPr lvl="1">
@@ -3490,6 +3517,12 @@
               </a:rPr>
               <a:t>— 本地化门槛：VAT/EPR、多语言、产品标准</a:t>
             </a:r>
+            <a:endParaRPr sz="1350" b="0">
+              <a:solidFill>
+                <a:srgbClr val="5B6470"/>
+              </a:solidFill>
+              <a:latin typeface="微软雅黑"/>
+            </a:endParaRPr>
           </a:p>
           <a:p>
             <a:pPr lvl="1">
@@ -3506,6 +3539,12 @@
               </a:rPr>
               <a:t>— 我的亲历：美国 NPT 螺纹 vs 欧洲 G 螺纹 → 同一品类要重做产品线</a:t>
             </a:r>
+            <a:endParaRPr sz="1350" b="1">
+              <a:solidFill>
+                <a:srgbClr val="5B6470"/>
+              </a:solidFill>
+              <a:latin typeface="微软雅黑"/>
+            </a:endParaRPr>
           </a:p>
           <a:p>
             <a:pPr>
@@ -3522,6 +3561,12 @@
               </a:rPr>
               <a:t>▪ 判断：美国走规模、欧洲赚毛利；先单点跑通再复制</a:t>
             </a:r>
+            <a:endParaRPr sz="1500" b="1">
+              <a:solidFill>
+                <a:srgbClr val="1B2430"/>
+              </a:solidFill>
+              <a:latin typeface="微软雅黑"/>
+            </a:endParaRPr>
           </a:p>
         </p:txBody>
       </p:sp>
@@ -3534,15 +3579,15 @@
           <p:nvPr/>
         </p:nvPicPr>
         <p:blipFill>
-          <a:blip r:embed="rId2"/>
+          <a:blip r:embed="rId1"/>
           <a:stretch>
             <a:fillRect/>
           </a:stretch>
         </p:blipFill>
         <p:spPr>
           <a:xfrm>
-            <a:off x="6492240" y="2103120"/>
-            <a:ext cx="5120640" cy="2531552"/>
+            <a:off x="6382385" y="3111500"/>
+            <a:ext cx="5120640" cy="2873375"/>
           </a:xfrm>
           <a:prstGeom prst="rect">
             <a:avLst/>
@@ -3580,6 +3625,12 @@
               </a:rPr>
               <a:t>Xuefei Wang · 2026</a:t>
             </a:r>
+            <a:endParaRPr sz="950" b="0">
+              <a:solidFill>
+                <a:srgbClr val="5B6470"/>
+              </a:solidFill>
+              <a:latin typeface="微软雅黑"/>
+            </a:endParaRPr>
           </a:p>
         </p:txBody>
       </p:sp>
@@ -3615,6 +3666,12 @@
               </a:rPr>
               <a:t>10 / 14</a:t>
             </a:r>
+            <a:endParaRPr sz="950" b="0">
+              <a:solidFill>
+                <a:srgbClr val="5B6470"/>
+              </a:solidFill>
+              <a:latin typeface="微软雅黑"/>
+            </a:endParaRPr>
           </a:p>
         </p:txBody>
       </p:sp>
@@ -3627,7 +3684,7 @@
 </file>
 
 <file path=ppt/slides/slide11.xml><?xml version="1.0" encoding="utf-8"?>
-<p:sld xmlns:a="http://schemas.openxmlformats.org/drawingml/2006/main" xmlns:p="http://schemas.openxmlformats.org/presentationml/2006/main" xmlns:r="http://schemas.openxmlformats.org/officeDocument/2006/relationships">
+<p:sld xmlns:a="http://schemas.openxmlformats.org/drawingml/2006/main" xmlns:r="http://schemas.openxmlformats.org/officeDocument/2006/relationships" xmlns:p="http://schemas.openxmlformats.org/presentationml/2006/main">
   <p:cSld>
     <p:spTree>
       <p:nvGrpSpPr>
@@ -3711,6 +3768,12 @@
               </a:rPr>
               <a:t>FINDING ④ · 现金流</a:t>
             </a:r>
+            <a:endParaRPr sz="1150" b="1">
+              <a:solidFill>
+                <a:srgbClr val="2F5AA8"/>
+              </a:solidFill>
+              <a:latin typeface="微软雅黑"/>
+            </a:endParaRPr>
           </a:p>
           <a:p>
             <a:pPr>
@@ -3727,6 +3790,12 @@
               </a:rPr>
               <a:t>利润 ≠ 现金：安克 2025 的“有利润没现金”</a:t>
             </a:r>
+            <a:endParaRPr sz="2700" b="1">
+              <a:solidFill>
+                <a:srgbClr val="1B2430"/>
+              </a:solidFill>
+              <a:latin typeface="微软雅黑"/>
+            </a:endParaRPr>
           </a:p>
         </p:txBody>
       </p:sp>
@@ -3738,8 +3807,8 @@
         </p:nvSpPr>
         <p:spPr>
           <a:xfrm>
-            <a:off x="640080" y="1874519"/>
-            <a:ext cx="5669280" cy="4572000"/>
+            <a:off x="640080" y="1410970"/>
+            <a:ext cx="10832465" cy="1814830"/>
           </a:xfrm>
           <a:prstGeom prst="rect">
             <a:avLst/>
@@ -3766,6 +3835,12 @@
               </a:rPr>
               <a:t>▪ 安克 2025：归母净利 25.5 亿，经营现金流仅 4.8 亿（OCF/净利 ≈ 0.19）</a:t>
             </a:r>
+            <a:endParaRPr sz="1500" b="1">
+              <a:solidFill>
+                <a:srgbClr val="1B2430"/>
+              </a:solidFill>
+              <a:latin typeface="微软雅黑"/>
+            </a:endParaRPr>
           </a:p>
           <a:p>
             <a:pPr>
@@ -3782,6 +3857,12 @@
               </a:rPr>
               <a:t>▪ 追查调节附表：存货增加占用约 20 亿、应收增加约 6.6 亿</a:t>
             </a:r>
+            <a:endParaRPr sz="1500" b="0">
+              <a:solidFill>
+                <a:srgbClr val="1B2430"/>
+              </a:solidFill>
+              <a:latin typeface="微软雅黑"/>
+            </a:endParaRPr>
           </a:p>
           <a:p>
             <a:pPr lvl="1">
@@ -3798,6 +3879,12 @@
               </a:rPr>
               <a:t>— 资产负债表交叉验证：存货余额 24 → 32 → 50 亿</a:t>
             </a:r>
+            <a:endParaRPr sz="1350" b="0">
+              <a:solidFill>
+                <a:srgbClr val="5B6470"/>
+              </a:solidFill>
+              <a:latin typeface="微软雅黑"/>
+            </a:endParaRPr>
           </a:p>
           <a:p>
             <a:pPr>
@@ -3814,6 +3901,12 @@
               </a:rPr>
               <a:t>▪ 这就是我上一份工作困惑的“上市公司版”：利润被货和应收占住了</a:t>
             </a:r>
+            <a:endParaRPr sz="1500" b="1">
+              <a:solidFill>
+                <a:srgbClr val="1B2430"/>
+              </a:solidFill>
+              <a:latin typeface="微软雅黑"/>
+            </a:endParaRPr>
           </a:p>
           <a:p>
             <a:pPr lvl="1">
@@ -3830,6 +3923,12 @@
               </a:rPr>
               <a:t>— 结论：规模扩张期，经营现金流才是生命线</a:t>
             </a:r>
+            <a:endParaRPr sz="1350" b="0">
+              <a:solidFill>
+                <a:srgbClr val="5B6470"/>
+              </a:solidFill>
+              <a:latin typeface="微软雅黑"/>
+            </a:endParaRPr>
           </a:p>
         </p:txBody>
       </p:sp>
@@ -3842,15 +3941,15 @@
           <p:nvPr/>
         </p:nvPicPr>
         <p:blipFill>
-          <a:blip r:embed="rId2"/>
+          <a:blip r:embed="rId1"/>
           <a:stretch>
             <a:fillRect/>
           </a:stretch>
         </p:blipFill>
         <p:spPr>
           <a:xfrm>
-            <a:off x="6492240" y="2103120"/>
-            <a:ext cx="5120640" cy="2020069"/>
+            <a:off x="4297680" y="3225800"/>
+            <a:ext cx="7174865" cy="2830195"/>
           </a:xfrm>
           <a:prstGeom prst="rect">
             <a:avLst/>
@@ -3888,6 +3987,12 @@
               </a:rPr>
               <a:t>Xuefei Wang · 2026</a:t>
             </a:r>
+            <a:endParaRPr sz="950" b="0">
+              <a:solidFill>
+                <a:srgbClr val="5B6470"/>
+              </a:solidFill>
+              <a:latin typeface="微软雅黑"/>
+            </a:endParaRPr>
           </a:p>
         </p:txBody>
       </p:sp>
@@ -3923,6 +4028,12 @@
               </a:rPr>
               <a:t>11 / 14</a:t>
             </a:r>
+            <a:endParaRPr sz="950" b="0">
+              <a:solidFill>
+                <a:srgbClr val="5B6470"/>
+              </a:solidFill>
+              <a:latin typeface="微软雅黑"/>
+            </a:endParaRPr>
           </a:p>
         </p:txBody>
       </p:sp>
@@ -3935,7 +4046,7 @@
 </file>
 
 <file path=ppt/slides/slide12.xml><?xml version="1.0" encoding="utf-8"?>
-<p:sld xmlns:a="http://schemas.openxmlformats.org/drawingml/2006/main" xmlns:p="http://schemas.openxmlformats.org/presentationml/2006/main" xmlns:r="http://schemas.openxmlformats.org/officeDocument/2006/relationships">
+<p:sld xmlns:a="http://schemas.openxmlformats.org/drawingml/2006/main" xmlns:r="http://schemas.openxmlformats.org/officeDocument/2006/relationships" xmlns:p="http://schemas.openxmlformats.org/presentationml/2006/main">
   <p:cSld>
     <p:spTree>
       <p:nvGrpSpPr>
@@ -4019,6 +4130,12 @@
               </a:rPr>
               <a:t>VALIDATION · 验证</a:t>
             </a:r>
+            <a:endParaRPr sz="1150" b="1">
+              <a:solidFill>
+                <a:srgbClr val="2F5AA8"/>
+              </a:solidFill>
+              <a:latin typeface="微软雅黑"/>
+            </a:endParaRPr>
           </a:p>
           <a:p>
             <a:pPr>
@@ -4035,6 +4152,12 @@
               </a:rPr>
               <a:t>结论之前，我先做三件事</a:t>
             </a:r>
+            <a:endParaRPr sz="2700" b="1">
+              <a:solidFill>
+                <a:srgbClr val="1B2430"/>
+              </a:solidFill>
+              <a:latin typeface="微软雅黑"/>
+            </a:endParaRPr>
           </a:p>
         </p:txBody>
       </p:sp>
@@ -4046,8 +4169,8 @@
         </p:nvSpPr>
         <p:spPr>
           <a:xfrm>
-            <a:off x="640080" y="1874519"/>
-            <a:ext cx="6035040" cy="4572000"/>
+            <a:off x="640080" y="1874520"/>
+            <a:ext cx="10862945" cy="1537970"/>
           </a:xfrm>
           <a:prstGeom prst="rect">
             <a:avLst/>
@@ -4074,6 +4197,12 @@
               </a:rPr>
               <a:t>① 数据抽查：安克 2025 营收 305.1 亿 与公开报道核对一致</a:t>
             </a:r>
+            <a:endParaRPr sz="1600" b="0">
+              <a:solidFill>
+                <a:srgbClr val="1B2430"/>
+              </a:solidFill>
+              <a:latin typeface="微软雅黑"/>
+            </a:endParaRPr>
           </a:p>
           <a:p>
             <a:pPr>
@@ -4090,6 +4219,12 @@
               </a:rPr>
               <a:t>② 交叉验证：调节表（存货 -20 亿）↔ 资产负债表（存货 +17.6 亿）互相印证</a:t>
             </a:r>
+            <a:endParaRPr sz="1600" b="0">
+              <a:solidFill>
+                <a:srgbClr val="1B2430"/>
+              </a:solidFill>
+              <a:latin typeface="微软雅黑"/>
+            </a:endParaRPr>
           </a:p>
           <a:p>
             <a:pPr>
@@ -4106,6 +4241,12 @@
               </a:rPr>
               <a:t>③ 主动声明局限：上市公司是幸存者（幸存者偏差）；欧美细分只有致欧披露；吉宏含包装需看分部</a:t>
             </a:r>
+            <a:endParaRPr sz="1600" b="0">
+              <a:solidFill>
+                <a:srgbClr val="1B2430"/>
+              </a:solidFill>
+              <a:latin typeface="微软雅黑"/>
+            </a:endParaRPr>
           </a:p>
           <a:p>
             <a:pPr>
@@ -4122,6 +4263,12 @@
               </a:rPr>
               <a:t>▪ 结论只到证据能到的地方：安克备货是主动还是被动？→ 标“待年报附注确认”，不下定论</a:t>
             </a:r>
+            <a:endParaRPr sz="1600" b="1">
+              <a:solidFill>
+                <a:srgbClr val="1B2430"/>
+              </a:solidFill>
+              <a:latin typeface="微软雅黑"/>
+            </a:endParaRPr>
           </a:p>
         </p:txBody>
       </p:sp>
@@ -4156,6 +4303,12 @@
               </a:rPr>
               <a:t>Xuefei Wang · 2026</a:t>
             </a:r>
+            <a:endParaRPr sz="950" b="0">
+              <a:solidFill>
+                <a:srgbClr val="5B6470"/>
+              </a:solidFill>
+              <a:latin typeface="微软雅黑"/>
+            </a:endParaRPr>
           </a:p>
         </p:txBody>
       </p:sp>
@@ -4191,6 +4344,12 @@
               </a:rPr>
               <a:t>12 / 14</a:t>
             </a:r>
+            <a:endParaRPr sz="950" b="0">
+              <a:solidFill>
+                <a:srgbClr val="5B6470"/>
+              </a:solidFill>
+              <a:latin typeface="微软雅黑"/>
+            </a:endParaRPr>
           </a:p>
         </p:txBody>
       </p:sp>
@@ -4203,7 +4362,7 @@
 </file>
 
 <file path=ppt/slides/slide13.xml><?xml version="1.0" encoding="utf-8"?>
-<p:sld xmlns:a="http://schemas.openxmlformats.org/drawingml/2006/main" xmlns:p="http://schemas.openxmlformats.org/presentationml/2006/main" xmlns:r="http://schemas.openxmlformats.org/officeDocument/2006/relationships">
+<p:sld xmlns:a="http://schemas.openxmlformats.org/drawingml/2006/main" xmlns:r="http://schemas.openxmlformats.org/officeDocument/2006/relationships" xmlns:p="http://schemas.openxmlformats.org/presentationml/2006/main">
   <p:cSld>
     <p:spTree>
       <p:nvGrpSpPr>
@@ -4265,7 +4424,7 @@
         <p:spPr>
           <a:xfrm>
             <a:off x="896112" y="457200"/>
-            <a:ext cx="10607040" cy="1097280"/>
+            <a:ext cx="10607040" cy="734695"/>
           </a:xfrm>
           <a:prstGeom prst="rect">
             <a:avLst/>
@@ -4287,6 +4446,12 @@
               </a:rPr>
               <a:t>CONCLUSION · 结论</a:t>
             </a:r>
+            <a:endParaRPr sz="1150" b="1">
+              <a:solidFill>
+                <a:srgbClr val="2F5AA8"/>
+              </a:solidFill>
+              <a:latin typeface="微软雅黑"/>
+            </a:endParaRPr>
           </a:p>
           <a:p>
             <a:pPr>
@@ -4301,21 +4466,108 @@
                 </a:solidFill>
                 <a:latin typeface="微软雅黑"/>
               </a:rPr>
-              <a:t>四个可以带走、也能被追问的判断</a:t>
-            </a:r>
-          </a:p>
-        </p:txBody>
-      </p:sp>
-      <p:sp>
-        <p:nvSpPr>
-          <p:cNvPr id="4" name="Rectangle 3"/>
+              <a:t>四个判断</a:t>
+            </a:r>
+            <a:endParaRPr sz="2700" b="1">
+              <a:solidFill>
+                <a:srgbClr val="1B2430"/>
+              </a:solidFill>
+              <a:latin typeface="微软雅黑"/>
+            </a:endParaRPr>
+          </a:p>
+        </p:txBody>
+      </p:sp>
+      <p:sp>
+        <p:nvSpPr>
+          <p:cNvPr id="16" name="TextBox 15"/>
+          <p:cNvSpPr txBox="1"/>
+          <p:nvPr/>
+        </p:nvSpPr>
+        <p:spPr>
+          <a:xfrm>
+            <a:off x="640080" y="6446520"/>
+            <a:ext cx="3657600" cy="320040"/>
+          </a:xfrm>
+          <a:prstGeom prst="rect">
+            <a:avLst/>
+          </a:prstGeom>
+          <a:noFill/>
+        </p:spPr>
+        <p:txBody>
+          <a:bodyPr wrap="square">
+            <a:spAutoFit/>
+          </a:bodyPr>
+          <a:lstStyle/>
+          <a:p>
+            <a:r>
+              <a:rPr sz="950" b="0">
+                <a:solidFill>
+                  <a:srgbClr val="5B6470"/>
+                </a:solidFill>
+                <a:latin typeface="微软雅黑"/>
+              </a:rPr>
+              <a:t>Xuefei Wang · 2026</a:t>
+            </a:r>
+            <a:endParaRPr sz="950" b="0">
+              <a:solidFill>
+                <a:srgbClr val="5B6470"/>
+              </a:solidFill>
+              <a:latin typeface="微软雅黑"/>
+            </a:endParaRPr>
+          </a:p>
+        </p:txBody>
+      </p:sp>
+      <p:sp>
+        <p:nvSpPr>
+          <p:cNvPr id="17" name="TextBox 16"/>
+          <p:cNvSpPr txBox="1"/>
+          <p:nvPr/>
+        </p:nvSpPr>
+        <p:spPr>
+          <a:xfrm>
+            <a:off x="10972800" y="6446520"/>
+            <a:ext cx="640080" cy="320040"/>
+          </a:xfrm>
+          <a:prstGeom prst="rect">
+            <a:avLst/>
+          </a:prstGeom>
+          <a:noFill/>
+        </p:spPr>
+        <p:txBody>
+          <a:bodyPr wrap="square">
+            <a:spAutoFit/>
+          </a:bodyPr>
+          <a:lstStyle/>
+          <a:p>
+            <a:pPr algn="r"/>
+            <a:r>
+              <a:rPr sz="950" b="0">
+                <a:solidFill>
+                  <a:srgbClr val="5B6470"/>
+                </a:solidFill>
+                <a:latin typeface="微软雅黑"/>
+              </a:rPr>
+              <a:t>13 / 14</a:t>
+            </a:r>
+            <a:endParaRPr sz="950" b="0">
+              <a:solidFill>
+                <a:srgbClr val="5B6470"/>
+              </a:solidFill>
+              <a:latin typeface="微软雅黑"/>
+            </a:endParaRPr>
+          </a:p>
+        </p:txBody>
+      </p:sp>
+      <p:sp>
+        <p:nvSpPr>
+          <p:cNvPr id="18" name="Rectangle 17"/>
           <p:cNvSpPr/>
           <p:nvPr/>
         </p:nvSpPr>
         <p:spPr>
           <a:xfrm>
-            <a:off x="640080" y="2011680"/>
-            <a:ext cx="658368" cy="841248"/>
+            <a:off x="640080" y="1965960"/>
+            <a:ext cx="1481328" cy="566928"/>
           </a:xfrm>
           <a:prstGeom prst="rect">
             <a:avLst/>
@@ -4343,23 +4595,32 @@
           </a:fontRef>
         </p:style>
         <p:txBody>
-          <a:bodyPr rtlCol="0" anchor="ctr"/>
+          <a:bodyPr rtlCol="0" anchor="ctr" wrap="none" lIns="0" rIns="0" tIns="0" bIns="0"/>
           <a:lstStyle/>
           <a:p>
             <a:pPr algn="ctr"/>
-          </a:p>
-        </p:txBody>
-      </p:sp>
-      <p:sp>
-        <p:nvSpPr>
-          <p:cNvPr id="5" name="TextBox 4"/>
+            <a:r>
+              <a:rPr sz="1400" b="1">
+                <a:solidFill>
+                  <a:srgbClr val="FFFFFF"/>
+                </a:solidFill>
+                <a:latin typeface="微软雅黑"/>
+              </a:rPr>
+              <a:t>① 模式</a:t>
+            </a:r>
+          </a:p>
+        </p:txBody>
+      </p:sp>
+      <p:sp>
+        <p:nvSpPr>
+          <p:cNvPr id="19" name="TextBox 18"/>
           <p:cNvSpPr txBox="1"/>
           <p:nvPr/>
         </p:nvSpPr>
         <p:spPr>
           <a:xfrm>
-            <a:off x="640080" y="2212848"/>
-            <a:ext cx="658368" cy="457200"/>
+            <a:off x="2395728" y="1965960"/>
+            <a:ext cx="9144000" cy="566928"/>
           </a:xfrm>
           <a:prstGeom prst="rect">
             <a:avLst/>
@@ -4367,46 +4628,14 @@
           <a:noFill/>
         </p:spPr>
         <p:txBody>
-          <a:bodyPr wrap="square">
+          <a:bodyPr wrap="square" lIns="0" rIns="0" tIns="0" bIns="0" anchor="ctr">
             <a:spAutoFit/>
           </a:bodyPr>
           <a:lstStyle/>
           <a:p>
-            <a:pPr algn="ctr"/>
-            <a:r>
-              <a:rPr sz="1500" b="1">
-                <a:solidFill>
-                  <a:srgbClr val="FFFFFF"/>
-                </a:solidFill>
-                <a:latin typeface="微软雅黑"/>
-              </a:rPr>
-              <a:t>① 模式</a:t>
-            </a:r>
-          </a:p>
-        </p:txBody>
-      </p:sp>
-      <p:sp>
-        <p:nvSpPr>
-          <p:cNvPr id="6" name="TextBox 5"/>
-          <p:cNvSpPr txBox="1"/>
-          <p:nvPr/>
-        </p:nvSpPr>
-        <p:spPr>
-          <a:xfrm>
-            <a:off x="1554480" y="2103120"/>
-            <a:ext cx="9966960" cy="685800"/>
-          </a:xfrm>
-          <a:prstGeom prst="rect">
-            <a:avLst/>
-          </a:prstGeom>
-          <a:noFill/>
-        </p:spPr>
-        <p:txBody>
-          <a:bodyPr wrap="square">
-            <a:spAutoFit/>
-          </a:bodyPr>
-          <a:lstStyle/>
-          <a:p>
+            <a:pPr algn="l">
+              <a:defRPr/>
+            </a:pPr>
             <a:r>
               <a:rPr sz="1550" b="0">
                 <a:solidFill>
@@ -4421,14 +4650,14 @@
       </p:sp>
       <p:sp>
         <p:nvSpPr>
-          <p:cNvPr id="7" name="Rectangle 6"/>
+          <p:cNvPr id="20" name="Rectangle 19"/>
           <p:cNvSpPr/>
           <p:nvPr/>
         </p:nvSpPr>
         <p:spPr>
           <a:xfrm>
-            <a:off x="640080" y="3044952"/>
-            <a:ext cx="658368" cy="841248"/>
+            <a:off x="640080" y="2990088"/>
+            <a:ext cx="1481328" cy="566928"/>
           </a:xfrm>
           <a:prstGeom prst="rect">
             <a:avLst/>
@@ -4456,23 +4685,32 @@
           </a:fontRef>
         </p:style>
         <p:txBody>
-          <a:bodyPr rtlCol="0" anchor="ctr"/>
+          <a:bodyPr rtlCol="0" anchor="ctr" wrap="none" lIns="0" rIns="0" tIns="0" bIns="0"/>
           <a:lstStyle/>
           <a:p>
             <a:pPr algn="ctr"/>
-          </a:p>
-        </p:txBody>
-      </p:sp>
-      <p:sp>
-        <p:nvSpPr>
-          <p:cNvPr id="8" name="TextBox 7"/>
+            <a:r>
+              <a:rPr sz="1400" b="1">
+                <a:solidFill>
+                  <a:srgbClr val="FFFFFF"/>
+                </a:solidFill>
+                <a:latin typeface="微软雅黑"/>
+              </a:rPr>
+              <a:t>② 市场</a:t>
+            </a:r>
+          </a:p>
+        </p:txBody>
+      </p:sp>
+      <p:sp>
+        <p:nvSpPr>
+          <p:cNvPr id="21" name="TextBox 20"/>
           <p:cNvSpPr txBox="1"/>
           <p:nvPr/>
         </p:nvSpPr>
         <p:spPr>
           <a:xfrm>
-            <a:off x="640080" y="3246120"/>
-            <a:ext cx="658368" cy="457200"/>
+            <a:off x="2395728" y="2990088"/>
+            <a:ext cx="9144000" cy="566928"/>
           </a:xfrm>
           <a:prstGeom prst="rect">
             <a:avLst/>
@@ -4480,46 +4718,14 @@
           <a:noFill/>
         </p:spPr>
         <p:txBody>
-          <a:bodyPr wrap="square">
+          <a:bodyPr wrap="square" lIns="0" rIns="0" tIns="0" bIns="0" anchor="ctr">
             <a:spAutoFit/>
           </a:bodyPr>
           <a:lstStyle/>
           <a:p>
-            <a:pPr algn="ctr"/>
-            <a:r>
-              <a:rPr sz="1500" b="1">
-                <a:solidFill>
-                  <a:srgbClr val="FFFFFF"/>
-                </a:solidFill>
-                <a:latin typeface="微软雅黑"/>
-              </a:rPr>
-              <a:t>② 市场</a:t>
-            </a:r>
-          </a:p>
-        </p:txBody>
-      </p:sp>
-      <p:sp>
-        <p:nvSpPr>
-          <p:cNvPr id="9" name="TextBox 8"/>
-          <p:cNvSpPr txBox="1"/>
-          <p:nvPr/>
-        </p:nvSpPr>
-        <p:spPr>
-          <a:xfrm>
-            <a:off x="1554480" y="3136392"/>
-            <a:ext cx="9966960" cy="685800"/>
-          </a:xfrm>
-          <a:prstGeom prst="rect">
-            <a:avLst/>
-          </a:prstGeom>
-          <a:noFill/>
-        </p:spPr>
-        <p:txBody>
-          <a:bodyPr wrap="square">
-            <a:spAutoFit/>
-          </a:bodyPr>
-          <a:lstStyle/>
-          <a:p>
+            <a:pPr algn="l">
+              <a:defRPr/>
+            </a:pPr>
             <a:r>
               <a:rPr sz="1550" b="0">
                 <a:solidFill>
@@ -4534,14 +4740,14 @@
       </p:sp>
       <p:sp>
         <p:nvSpPr>
-          <p:cNvPr id="10" name="Rectangle 9"/>
+          <p:cNvPr id="22" name="Rectangle 21"/>
           <p:cNvSpPr/>
           <p:nvPr/>
         </p:nvSpPr>
         <p:spPr>
           <a:xfrm>
-            <a:off x="640080" y="4078224"/>
-            <a:ext cx="658368" cy="841248"/>
+            <a:off x="640080" y="4014216"/>
+            <a:ext cx="1481328" cy="566928"/>
           </a:xfrm>
           <a:prstGeom prst="rect">
             <a:avLst/>
@@ -4569,23 +4775,32 @@
           </a:fontRef>
         </p:style>
         <p:txBody>
-          <a:bodyPr rtlCol="0" anchor="ctr"/>
+          <a:bodyPr rtlCol="0" anchor="ctr" wrap="none" lIns="0" rIns="0" tIns="0" bIns="0"/>
           <a:lstStyle/>
           <a:p>
             <a:pPr algn="ctr"/>
-          </a:p>
-        </p:txBody>
-      </p:sp>
-      <p:sp>
-        <p:nvSpPr>
-          <p:cNvPr id="11" name="TextBox 10"/>
+            <a:r>
+              <a:rPr sz="1400" b="1">
+                <a:solidFill>
+                  <a:srgbClr val="FFFFFF"/>
+                </a:solidFill>
+                <a:latin typeface="微软雅黑"/>
+              </a:rPr>
+              <a:t>③ 现金流</a:t>
+            </a:r>
+          </a:p>
+        </p:txBody>
+      </p:sp>
+      <p:sp>
+        <p:nvSpPr>
+          <p:cNvPr id="23" name="TextBox 22"/>
           <p:cNvSpPr txBox="1"/>
           <p:nvPr/>
         </p:nvSpPr>
         <p:spPr>
           <a:xfrm>
-            <a:off x="640080" y="4279392"/>
-            <a:ext cx="658368" cy="457200"/>
+            <a:off x="2395728" y="4014216"/>
+            <a:ext cx="9144000" cy="566928"/>
           </a:xfrm>
           <a:prstGeom prst="rect">
             <a:avLst/>
@@ -4593,46 +4808,14 @@
           <a:noFill/>
         </p:spPr>
         <p:txBody>
-          <a:bodyPr wrap="square">
+          <a:bodyPr wrap="square" lIns="0" rIns="0" tIns="0" bIns="0" anchor="ctr">
             <a:spAutoFit/>
           </a:bodyPr>
           <a:lstStyle/>
           <a:p>
-            <a:pPr algn="ctr"/>
-            <a:r>
-              <a:rPr sz="1500" b="1">
-                <a:solidFill>
-                  <a:srgbClr val="FFFFFF"/>
-                </a:solidFill>
-                <a:latin typeface="微软雅黑"/>
-              </a:rPr>
-              <a:t>③ 现金流</a:t>
-            </a:r>
-          </a:p>
-        </p:txBody>
-      </p:sp>
-      <p:sp>
-        <p:nvSpPr>
-          <p:cNvPr id="12" name="TextBox 11"/>
-          <p:cNvSpPr txBox="1"/>
-          <p:nvPr/>
-        </p:nvSpPr>
-        <p:spPr>
-          <a:xfrm>
-            <a:off x="1554480" y="4169663"/>
-            <a:ext cx="9966960" cy="685800"/>
-          </a:xfrm>
-          <a:prstGeom prst="rect">
-            <a:avLst/>
-          </a:prstGeom>
-          <a:noFill/>
-        </p:spPr>
-        <p:txBody>
-          <a:bodyPr wrap="square">
-            <a:spAutoFit/>
-          </a:bodyPr>
-          <a:lstStyle/>
-          <a:p>
+            <a:pPr algn="l">
+              <a:defRPr/>
+            </a:pPr>
             <a:r>
               <a:rPr sz="1550" b="0">
                 <a:solidFill>
@@ -4647,14 +4830,14 @@
       </p:sp>
       <p:sp>
         <p:nvSpPr>
-          <p:cNvPr id="13" name="Rectangle 12"/>
+          <p:cNvPr id="24" name="Rectangle 23"/>
           <p:cNvSpPr/>
           <p:nvPr/>
         </p:nvSpPr>
         <p:spPr>
           <a:xfrm>
-            <a:off x="640080" y="5111496"/>
-            <a:ext cx="658368" cy="841248"/>
+            <a:off x="640080" y="5038344"/>
+            <a:ext cx="1481328" cy="566928"/>
           </a:xfrm>
           <a:prstGeom prst="rect">
             <a:avLst/>
@@ -4682,23 +4865,32 @@
           </a:fontRef>
         </p:style>
         <p:txBody>
-          <a:bodyPr rtlCol="0" anchor="ctr"/>
+          <a:bodyPr rtlCol="0" anchor="ctr" wrap="none" lIns="0" rIns="0" tIns="0" bIns="0"/>
           <a:lstStyle/>
           <a:p>
             <a:pPr algn="ctr"/>
-          </a:p>
-        </p:txBody>
-      </p:sp>
-      <p:sp>
-        <p:nvSpPr>
-          <p:cNvPr id="14" name="TextBox 13"/>
+            <a:r>
+              <a:rPr sz="1400" b="1">
+                <a:solidFill>
+                  <a:srgbClr val="FFFFFF"/>
+                </a:solidFill>
+                <a:latin typeface="微软雅黑"/>
+              </a:rPr>
+              <a:t>④ 格局</a:t>
+            </a:r>
+          </a:p>
+        </p:txBody>
+      </p:sp>
+      <p:sp>
+        <p:nvSpPr>
+          <p:cNvPr id="25" name="TextBox 24"/>
           <p:cNvSpPr txBox="1"/>
           <p:nvPr/>
         </p:nvSpPr>
         <p:spPr>
           <a:xfrm>
-            <a:off x="640080" y="5312664"/>
-            <a:ext cx="658368" cy="457200"/>
+            <a:off x="2395728" y="5038344"/>
+            <a:ext cx="9144000" cy="566928"/>
           </a:xfrm>
           <a:prstGeom prst="rect">
             <a:avLst/>
@@ -4706,46 +4898,14 @@
           <a:noFill/>
         </p:spPr>
         <p:txBody>
-          <a:bodyPr wrap="square">
+          <a:bodyPr wrap="square" lIns="0" rIns="0" tIns="0" bIns="0" anchor="ctr">
             <a:spAutoFit/>
           </a:bodyPr>
           <a:lstStyle/>
           <a:p>
-            <a:pPr algn="ctr"/>
-            <a:r>
-              <a:rPr sz="1500" b="1">
-                <a:solidFill>
-                  <a:srgbClr val="FFFFFF"/>
-                </a:solidFill>
-                <a:latin typeface="微软雅黑"/>
-              </a:rPr>
-              <a:t>④ 格局</a:t>
-            </a:r>
-          </a:p>
-        </p:txBody>
-      </p:sp>
-      <p:sp>
-        <p:nvSpPr>
-          <p:cNvPr id="15" name="TextBox 14"/>
-          <p:cNvSpPr txBox="1"/>
-          <p:nvPr/>
-        </p:nvSpPr>
-        <p:spPr>
-          <a:xfrm>
-            <a:off x="1554480" y="5202936"/>
-            <a:ext cx="9966960" cy="685800"/>
-          </a:xfrm>
-          <a:prstGeom prst="rect">
-            <a:avLst/>
-          </a:prstGeom>
-          <a:noFill/>
-        </p:spPr>
-        <p:txBody>
-          <a:bodyPr wrap="square">
-            <a:spAutoFit/>
-          </a:bodyPr>
-          <a:lstStyle/>
-          <a:p>
+            <a:pPr algn="l">
+              <a:defRPr/>
+            </a:pPr>
             <a:r>
               <a:rPr sz="1550" b="0">
                 <a:solidFill>
@@ -4754,75 +4914,6 @@
                 <a:latin typeface="微软雅黑"/>
               </a:rPr>
               <a:t>龙头集中度 &lt;3%：细分做深（如目录式长尾品牌）是中小卖家的路</a:t>
-            </a:r>
-          </a:p>
-        </p:txBody>
-      </p:sp>
-      <p:sp>
-        <p:nvSpPr>
-          <p:cNvPr id="16" name="TextBox 15"/>
-          <p:cNvSpPr txBox="1"/>
-          <p:nvPr/>
-        </p:nvSpPr>
-        <p:spPr>
-          <a:xfrm>
-            <a:off x="640080" y="6446520"/>
-            <a:ext cx="3657600" cy="320040"/>
-          </a:xfrm>
-          <a:prstGeom prst="rect">
-            <a:avLst/>
-          </a:prstGeom>
-          <a:noFill/>
-        </p:spPr>
-        <p:txBody>
-          <a:bodyPr wrap="square">
-            <a:spAutoFit/>
-          </a:bodyPr>
-          <a:lstStyle/>
-          <a:p>
-            <a:r>
-              <a:rPr sz="950" b="0">
-                <a:solidFill>
-                  <a:srgbClr val="5B6470"/>
-                </a:solidFill>
-                <a:latin typeface="微软雅黑"/>
-              </a:rPr>
-              <a:t>Xuefei Wang · 2026</a:t>
-            </a:r>
-          </a:p>
-        </p:txBody>
-      </p:sp>
-      <p:sp>
-        <p:nvSpPr>
-          <p:cNvPr id="17" name="TextBox 16"/>
-          <p:cNvSpPr txBox="1"/>
-          <p:nvPr/>
-        </p:nvSpPr>
-        <p:spPr>
-          <a:xfrm>
-            <a:off x="10972800" y="6446520"/>
-            <a:ext cx="640080" cy="320040"/>
-          </a:xfrm>
-          <a:prstGeom prst="rect">
-            <a:avLst/>
-          </a:prstGeom>
-          <a:noFill/>
-        </p:spPr>
-        <p:txBody>
-          <a:bodyPr wrap="square">
-            <a:spAutoFit/>
-          </a:bodyPr>
-          <a:lstStyle/>
-          <a:p>
-            <a:pPr algn="r"/>
-            <a:r>
-              <a:rPr sz="950" b="0">
-                <a:solidFill>
-                  <a:srgbClr val="5B6470"/>
-                </a:solidFill>
-                <a:latin typeface="微软雅黑"/>
-              </a:rPr>
-              <a:t>13 / 14</a:t>
             </a:r>
           </a:p>
         </p:txBody>
@@ -4836,7 +4927,7 @@
 </file>
 
 <file path=ppt/slides/slide14.xml><?xml version="1.0" encoding="utf-8"?>
-<p:sld xmlns:a="http://schemas.openxmlformats.org/drawingml/2006/main" xmlns:p="http://schemas.openxmlformats.org/presentationml/2006/main" xmlns:r="http://schemas.openxmlformats.org/officeDocument/2006/relationships">
+<p:sld xmlns:a="http://schemas.openxmlformats.org/drawingml/2006/main" xmlns:r="http://schemas.openxmlformats.org/officeDocument/2006/relationships" xmlns:p="http://schemas.openxmlformats.org/presentationml/2006/main">
   <p:cSld>
     <p:spTree>
       <p:nvGrpSpPr>
@@ -4920,6 +5011,12 @@
               </a:rPr>
               <a:t>PRODUCTIZE · 落地</a:t>
             </a:r>
+            <a:endParaRPr sz="1150" b="1">
+              <a:solidFill>
+                <a:srgbClr val="2F5AA8"/>
+              </a:solidFill>
+              <a:latin typeface="微软雅黑"/>
+            </a:endParaRPr>
           </a:p>
           <a:p>
             <a:pPr>
@@ -4936,6 +5033,12 @@
               </a:rPr>
               <a:t>把结论做成能用的工具：创业决策工作台</a:t>
             </a:r>
+            <a:endParaRPr sz="2700" b="1">
+              <a:solidFill>
+                <a:srgbClr val="1B2430"/>
+              </a:solidFill>
+              <a:latin typeface="微软雅黑"/>
+            </a:endParaRPr>
           </a:p>
         </p:txBody>
       </p:sp>
@@ -5014,6 +5117,12 @@
               </a:rPr>
               <a:t>P1 单位经济测算</a:t>
             </a:r>
+            <a:endParaRPr sz="1550" b="1">
+              <a:solidFill>
+                <a:srgbClr val="2F5AA8"/>
+              </a:solidFill>
+              <a:latin typeface="微软雅黑"/>
+            </a:endParaRPr>
           </a:p>
         </p:txBody>
       </p:sp>
@@ -5048,6 +5157,12 @@
               </a:rPr>
               <a:t>单件赚不赚钱？盈亏平衡 ACOS；Case Pack 双方案对比</a:t>
             </a:r>
+            <a:endParaRPr sz="1400" b="0">
+              <a:solidFill>
+                <a:srgbClr val="5B6470"/>
+              </a:solidFill>
+              <a:latin typeface="微软雅黑"/>
+            </a:endParaRPr>
           </a:p>
         </p:txBody>
       </p:sp>
@@ -5126,6 +5241,12 @@
               </a:rPr>
               <a:t>P2 选品类助手</a:t>
             </a:r>
+            <a:endParaRPr sz="1550" b="1">
+              <a:solidFill>
+                <a:srgbClr val="2F5AA8"/>
+              </a:solidFill>
+              <a:latin typeface="微软雅黑"/>
+            </a:endParaRPr>
           </a:p>
         </p:txBody>
       </p:sp>
@@ -5160,6 +5281,12 @@
               </a:rPr>
               <a:t>单位经济可行性 + 风险规则 → 能不能做</a:t>
             </a:r>
+            <a:endParaRPr sz="1400" b="0">
+              <a:solidFill>
+                <a:srgbClr val="5B6470"/>
+              </a:solidFill>
+              <a:latin typeface="微软雅黑"/>
+            </a:endParaRPr>
           </a:p>
         </p:txBody>
       </p:sp>
@@ -5238,6 +5365,12 @@
               </a:rPr>
               <a:t>P3 市场选择器</a:t>
             </a:r>
+            <a:endParaRPr sz="1550" b="1">
+              <a:solidFill>
+                <a:srgbClr val="2F5AA8"/>
+              </a:solidFill>
+              <a:latin typeface="微软雅黑"/>
+            </a:endParaRPr>
           </a:p>
         </p:txBody>
       </p:sp>
@@ -5272,6 +5405,12 @@
               </a:rPr>
               <a:t>规模 / 毛利 / 竞争 / 本地化 加权 → 先做哪个市场</a:t>
             </a:r>
+            <a:endParaRPr sz="1400" b="0">
+              <a:solidFill>
+                <a:srgbClr val="5B6470"/>
+              </a:solidFill>
+              <a:latin typeface="微软雅黑"/>
+            </a:endParaRPr>
           </a:p>
         </p:txBody>
       </p:sp>
@@ -5350,6 +5489,12 @@
               </a:rPr>
               <a:t>P4 经营健康体检</a:t>
             </a:r>
+            <a:endParaRPr sz="1550" b="1">
+              <a:solidFill>
+                <a:srgbClr val="2F5AA8"/>
+              </a:solidFill>
+              <a:latin typeface="微软雅黑"/>
+            </a:endParaRPr>
           </a:p>
         </p:txBody>
       </p:sp>
@@ -5384,6 +5529,12 @@
               </a:rPr>
               <a:t>输入你的指标 → 对标 5 家上市公司 → 危险信号 + 阶段建议</a:t>
             </a:r>
+            <a:endParaRPr sz="1400" b="0">
+              <a:solidFill>
+                <a:srgbClr val="5B6470"/>
+              </a:solidFill>
+              <a:latin typeface="微软雅黑"/>
+            </a:endParaRPr>
           </a:p>
         </p:txBody>
       </p:sp>
@@ -5418,6 +5569,12 @@
               </a:rPr>
               <a:t>从“看报表”到“能决策”：每一页都基于 5 家公司的真实财务基准</a:t>
             </a:r>
+            <a:endParaRPr sz="1250" b="1">
+              <a:solidFill>
+                <a:srgbClr val="C97B1E"/>
+              </a:solidFill>
+              <a:latin typeface="微软雅黑"/>
+            </a:endParaRPr>
           </a:p>
         </p:txBody>
       </p:sp>
@@ -5452,6 +5609,12 @@
               </a:rPr>
               <a:t>Xuefei Wang · 2026</a:t>
             </a:r>
+            <a:endParaRPr sz="950" b="0">
+              <a:solidFill>
+                <a:srgbClr val="5B6470"/>
+              </a:solidFill>
+              <a:latin typeface="微软雅黑"/>
+            </a:endParaRPr>
           </a:p>
         </p:txBody>
       </p:sp>
@@ -5487,6 +5650,12 @@
               </a:rPr>
               <a:t>14 / 14</a:t>
             </a:r>
+            <a:endParaRPr sz="950" b="0">
+              <a:solidFill>
+                <a:srgbClr val="5B6470"/>
+              </a:solidFill>
+              <a:latin typeface="微软雅黑"/>
+            </a:endParaRPr>
           </a:p>
         </p:txBody>
       </p:sp>
@@ -5499,7 +5668,7 @@
 </file>
 
 <file path=ppt/slides/slide2.xml><?xml version="1.0" encoding="utf-8"?>
-<p:sld xmlns:a="http://schemas.openxmlformats.org/drawingml/2006/main" xmlns:p="http://schemas.openxmlformats.org/presentationml/2006/main" xmlns:r="http://schemas.openxmlformats.org/officeDocument/2006/relationships">
+<p:sld xmlns:a="http://schemas.openxmlformats.org/drawingml/2006/main" xmlns:r="http://schemas.openxmlformats.org/officeDocument/2006/relationships" xmlns:p="http://schemas.openxmlformats.org/presentationml/2006/main">
   <p:cSld>
     <p:spTree>
       <p:nvGrpSpPr>
@@ -5583,6 +5752,12 @@
               </a:rPr>
               <a:t>WHY · 起点</a:t>
             </a:r>
+            <a:endParaRPr sz="1150" b="1">
+              <a:solidFill>
+                <a:srgbClr val="2F5AA8"/>
+              </a:solidFill>
+              <a:latin typeface="微软雅黑"/>
+            </a:endParaRPr>
           </a:p>
           <a:p>
             <a:pPr>
@@ -5599,6 +5774,12 @@
               </a:rPr>
               <a:t>我为什么做这个项目</a:t>
             </a:r>
+            <a:endParaRPr sz="2700" b="1">
+              <a:solidFill>
+                <a:srgbClr val="1B2430"/>
+              </a:solidFill>
+              <a:latin typeface="微软雅黑"/>
+            </a:endParaRPr>
           </a:p>
         </p:txBody>
       </p:sp>
@@ -5611,7 +5792,7 @@
         <p:spPr>
           <a:xfrm>
             <a:off x="640080" y="1737360"/>
-            <a:ext cx="10881360" cy="4709160"/>
+            <a:ext cx="10881360" cy="3833495"/>
           </a:xfrm>
           <a:prstGeom prst="rect">
             <a:avLst/>
@@ -5647,6 +5828,12 @@
               </a:rPr>
               <a:t>我上一份工作在一家做自有品牌出海的公司做亚马逊运营，卖阀门/管件、实验室仪器、封口机这类偏专业的产品，在售 SKU 超过 1000 个。</a:t>
             </a:r>
+            <a:endParaRPr sz="1550" b="0">
+              <a:solidFill>
+                <a:srgbClr val="1B2430"/>
+              </a:solidFill>
+              <a:latin typeface="微软雅黑"/>
+            </a:endParaRPr>
           </a:p>
           <a:p>
             <a:pPr>
@@ -5672,6 +5859,12 @@
               </a:rPr>
               <a:t>同一类阀门按通径、材质和螺纹标准展开，两通/三通、1/2 到 2 英寸、不锈钢/黄铜/PVC 都会配齐。客户多是工程师、实验室或做自动化改造的人，下单前会核对型号参数。</a:t>
             </a:r>
+            <a:endParaRPr sz="1550" b="0">
+              <a:solidFill>
+                <a:srgbClr val="1B2430"/>
+              </a:solidFill>
+              <a:latin typeface="微软雅黑"/>
+            </a:endParaRPr>
           </a:p>
           <a:p>
             <a:pPr>
@@ -5697,6 +5890,12 @@
               </a:rPr>
               <a:t>日常运营及新品选品，通过市场调研、竞品分析和单件 ROI 测算，制定新品定价、广告投入及备货策略。</a:t>
             </a:r>
+            <a:endParaRPr sz="1550" b="0">
+              <a:solidFill>
+                <a:srgbClr val="1B2430"/>
+              </a:solidFill>
+              <a:latin typeface="微软雅黑"/>
+            </a:endParaRPr>
           </a:p>
           <a:p>
             <a:pPr>
@@ -5720,8 +5919,32 @@
                 </a:solidFill>
                 <a:latin typeface="微软雅黑"/>
               </a:rPr>
-              <a:t>大部分 SKU 单独核算均为盈利，但公司在亚马逊平台的整体表现不佳。为什么“单品盈利”没有带来“整体赚钱”？</a:t>
-            </a:r>
+              <a:t>大部分 SKU 单独核算均为盈利，但公司在亚马逊平台的整体表现</a:t>
+            </a:r>
+            <a:r>
+              <a:rPr lang="zh-CN" sz="1550" b="0">
+                <a:solidFill>
+                  <a:srgbClr val="1B2430"/>
+                </a:solidFill>
+                <a:latin typeface="微软雅黑"/>
+              </a:rPr>
+              <a:t>较前几年下降</a:t>
+            </a:r>
+            <a:r>
+              <a:rPr sz="1550" b="0">
+                <a:solidFill>
+                  <a:srgbClr val="1B2430"/>
+                </a:solidFill>
+                <a:latin typeface="微软雅黑"/>
+              </a:rPr>
+              <a:t>。为什么“单品盈利”没有带来“整体赚钱”？</a:t>
+            </a:r>
+            <a:endParaRPr sz="1550" b="0">
+              <a:solidFill>
+                <a:srgbClr val="1B2430"/>
+              </a:solidFill>
+              <a:latin typeface="微软雅黑"/>
+            </a:endParaRPr>
           </a:p>
           <a:p>
             <a:pPr>
@@ -5747,6 +5970,12 @@
               </a:rPr>
               <a:t>① 行业层面：增速放缓、参与者变多，流量与广告成本可能被推高；② 模式层面：精品/铺货/长尾的费用结构不同，销售费用率对净利率影响大；③ 市场与渠道：不同市场与渠道的毛利、费用、本地化门槛存在差异，可能影响整体盈利；④ 资金层面：备货与回款占用资金，盈利与现金流未必同步</a:t>
             </a:r>
+            <a:endParaRPr sz="1550" b="0">
+              <a:solidFill>
+                <a:srgbClr val="1B2430"/>
+              </a:solidFill>
+              <a:latin typeface="微软雅黑"/>
+            </a:endParaRPr>
           </a:p>
           <a:p>
             <a:pPr>
@@ -5772,6 +6001,12 @@
               </a:rPr>
               <a:t>以 5 家上市公司为样本，用公开财报和海关数据，从行业、公司、现金流三个层面验证：哪些因素真正解释了“单品盈利却没带来整体赚钱”。</a:t>
             </a:r>
+            <a:endParaRPr sz="1550" b="0">
+              <a:solidFill>
+                <a:srgbClr val="1B2430"/>
+              </a:solidFill>
+              <a:latin typeface="微软雅黑"/>
+            </a:endParaRPr>
           </a:p>
         </p:txBody>
       </p:sp>
@@ -5806,6 +6041,12 @@
               </a:rPr>
               <a:t>Xuefei Wang · 2026</a:t>
             </a:r>
+            <a:endParaRPr sz="950" b="0">
+              <a:solidFill>
+                <a:srgbClr val="5B6470"/>
+              </a:solidFill>
+              <a:latin typeface="微软雅黑"/>
+            </a:endParaRPr>
           </a:p>
         </p:txBody>
       </p:sp>
@@ -5841,6 +6082,12 @@
               </a:rPr>
               <a:t>02 / 14</a:t>
             </a:r>
+            <a:endParaRPr sz="950" b="0">
+              <a:solidFill>
+                <a:srgbClr val="5B6470"/>
+              </a:solidFill>
+              <a:latin typeface="微软雅黑"/>
+            </a:endParaRPr>
           </a:p>
         </p:txBody>
       </p:sp>
@@ -5853,7 +6100,7 @@
 </file>
 
 <file path=ppt/slides/slide3.xml><?xml version="1.0" encoding="utf-8"?>
-<p:sld xmlns:a="http://schemas.openxmlformats.org/drawingml/2006/main" xmlns:p="http://schemas.openxmlformats.org/presentationml/2006/main" xmlns:r="http://schemas.openxmlformats.org/officeDocument/2006/relationships">
+<p:sld xmlns:a="http://schemas.openxmlformats.org/drawingml/2006/main" xmlns:r="http://schemas.openxmlformats.org/officeDocument/2006/relationships" xmlns:p="http://schemas.openxmlformats.org/presentationml/2006/main">
   <p:cSld>
     <p:spTree>
       <p:nvGrpSpPr>
@@ -5937,6 +6184,12 @@
               </a:rPr>
               <a:t>QUESTION · 问题</a:t>
             </a:r>
+            <a:endParaRPr sz="1150" b="1">
+              <a:solidFill>
+                <a:srgbClr val="2F5AA8"/>
+              </a:solidFill>
+              <a:latin typeface="微软雅黑"/>
+            </a:endParaRPr>
           </a:p>
           <a:p>
             <a:pPr>
@@ -5953,6 +6206,12 @@
               </a:rPr>
               <a:t>我把困惑拆成四个可量化的问题</a:t>
             </a:r>
+            <a:endParaRPr sz="2700" b="1">
+              <a:solidFill>
+                <a:srgbClr val="1B2430"/>
+              </a:solidFill>
+              <a:latin typeface="微软雅黑"/>
+            </a:endParaRPr>
           </a:p>
         </p:txBody>
       </p:sp>
@@ -6075,6 +6334,12 @@
               </a:rPr>
               <a:t>① 行业</a:t>
             </a:r>
+            <a:endParaRPr sz="1500" b="1">
+              <a:solidFill>
+                <a:srgbClr val="1B2430"/>
+              </a:solidFill>
+              <a:latin typeface="微软雅黑"/>
+            </a:endParaRPr>
           </a:p>
           <a:p>
             <a:pPr>
@@ -6091,6 +6356,12 @@
               </a:rPr>
               <a:t>这盘生意还有多大、还在涨吗？为什么门槛低、倒得也多？</a:t>
             </a:r>
+            <a:endParaRPr sz="1250" b="0">
+              <a:solidFill>
+                <a:srgbClr val="5B6470"/>
+              </a:solidFill>
+              <a:latin typeface="微软雅黑"/>
+            </a:endParaRPr>
           </a:p>
         </p:txBody>
       </p:sp>
@@ -6213,6 +6484,12 @@
               </a:rPr>
               <a:t>② 模式</a:t>
             </a:r>
+            <a:endParaRPr sz="1500" b="1">
+              <a:solidFill>
+                <a:srgbClr val="1B2430"/>
+              </a:solidFill>
+              <a:latin typeface="微软雅黑"/>
+            </a:endParaRPr>
           </a:p>
           <a:p>
             <a:pPr>
@@ -6229,6 +6506,12 @@
               </a:rPr>
               <a:t>精品 / 铺货 / 长尾，谁的利润更能留下来？</a:t>
             </a:r>
+            <a:endParaRPr sz="1250" b="0">
+              <a:solidFill>
+                <a:srgbClr val="5B6470"/>
+              </a:solidFill>
+              <a:latin typeface="微软雅黑"/>
+            </a:endParaRPr>
           </a:p>
         </p:txBody>
       </p:sp>
@@ -6351,6 +6634,12 @@
               </a:rPr>
               <a:t>③ 市场与渠道</a:t>
             </a:r>
+            <a:endParaRPr sz="1500" b="1">
+              <a:solidFill>
+                <a:srgbClr val="1B2430"/>
+              </a:solidFill>
+              <a:latin typeface="微软雅黑"/>
+            </a:endParaRPr>
           </a:p>
           <a:p>
             <a:pPr>
@@ -6367,6 +6656,12 @@
               </a:rPr>
               <a:t>北美 vs 欧洲、平台 vs 独立站，如何影响毛利与费用？</a:t>
             </a:r>
+            <a:endParaRPr sz="1250" b="0">
+              <a:solidFill>
+                <a:srgbClr val="5B6470"/>
+              </a:solidFill>
+              <a:latin typeface="微软雅黑"/>
+            </a:endParaRPr>
           </a:p>
         </p:txBody>
       </p:sp>
@@ -6489,6 +6784,12 @@
               </a:rPr>
               <a:t>④ 经营与资金</a:t>
             </a:r>
+            <a:endParaRPr sz="1500" b="1">
+              <a:solidFill>
+                <a:srgbClr val="1B2430"/>
+              </a:solidFill>
+              <a:latin typeface="微软雅黑"/>
+            </a:endParaRPr>
           </a:p>
           <a:p>
             <a:pPr>
@@ -6505,6 +6806,12 @@
               </a:rPr>
               <a:t>为什么“单品盈利”没带来“整体赚钱”？现金流是不是生死线？怎么起步才能活得久？</a:t>
             </a:r>
+            <a:endParaRPr sz="1250" b="0">
+              <a:solidFill>
+                <a:srgbClr val="5B6470"/>
+              </a:solidFill>
+              <a:latin typeface="微软雅黑"/>
+            </a:endParaRPr>
           </a:p>
         </p:txBody>
       </p:sp>
@@ -6539,6 +6846,12 @@
               </a:rPr>
               <a:t>Xuefei Wang · 2026</a:t>
             </a:r>
+            <a:endParaRPr sz="950" b="0">
+              <a:solidFill>
+                <a:srgbClr val="5B6470"/>
+              </a:solidFill>
+              <a:latin typeface="微软雅黑"/>
+            </a:endParaRPr>
           </a:p>
         </p:txBody>
       </p:sp>
@@ -6574,6 +6887,12 @@
               </a:rPr>
               <a:t>03 / 14</a:t>
             </a:r>
+            <a:endParaRPr sz="950" b="0">
+              <a:solidFill>
+                <a:srgbClr val="5B6470"/>
+              </a:solidFill>
+              <a:latin typeface="微软雅黑"/>
+            </a:endParaRPr>
           </a:p>
         </p:txBody>
       </p:sp>
@@ -6586,7 +6905,7 @@
 </file>
 
 <file path=ppt/slides/slide4.xml><?xml version="1.0" encoding="utf-8"?>
-<p:sld xmlns:a="http://schemas.openxmlformats.org/drawingml/2006/main" xmlns:p="http://schemas.openxmlformats.org/presentationml/2006/main" xmlns:r="http://schemas.openxmlformats.org/officeDocument/2006/relationships">
+<p:sld xmlns:a="http://schemas.openxmlformats.org/drawingml/2006/main" xmlns:r="http://schemas.openxmlformats.org/officeDocument/2006/relationships" xmlns:p="http://schemas.openxmlformats.org/presentationml/2006/main">
   <p:cSld>
     <p:spTree>
       <p:nvGrpSpPr>
@@ -6670,6 +6989,12 @@
               </a:rPr>
               <a:t>METHOD · 方法</a:t>
             </a:r>
+            <a:endParaRPr sz="1150" b="1">
+              <a:solidFill>
+                <a:srgbClr val="2F5AA8"/>
+              </a:solidFill>
+              <a:latin typeface="微软雅黑"/>
+            </a:endParaRPr>
           </a:p>
           <a:p>
             <a:pPr>
@@ -6686,6 +7011,12 @@
               </a:rPr>
               <a:t>数据怎么来：全部公开、可核验</a:t>
             </a:r>
+            <a:endParaRPr sz="2700" b="1">
+              <a:solidFill>
+                <a:srgbClr val="1B2430"/>
+              </a:solidFill>
+              <a:latin typeface="微软雅黑"/>
+            </a:endParaRPr>
           </a:p>
         </p:txBody>
       </p:sp>
@@ -6697,8 +7028,8 @@
         </p:nvSpPr>
         <p:spPr>
           <a:xfrm>
-            <a:off x="640080" y="1874519"/>
-            <a:ext cx="6035040" cy="4572000"/>
+            <a:off x="640080" y="1874520"/>
+            <a:ext cx="10856595" cy="2291715"/>
           </a:xfrm>
           <a:prstGeom prst="rect">
             <a:avLst/>
@@ -6725,6 +7056,12 @@
               </a:rPr>
               <a:t>▪ 对象：5 家 A 股上市公司（安克创新 / 致欧科技 / 赛维时代 / 华凯易佰 / 吉宏股份）</a:t>
             </a:r>
+            <a:endParaRPr sz="1600" b="1">
+              <a:solidFill>
+                <a:srgbClr val="1B2430"/>
+              </a:solidFill>
+              <a:latin typeface="微软雅黑"/>
+            </a:endParaRPr>
           </a:p>
           <a:p>
             <a:pPr lvl="1">
@@ -6741,6 +7078,12 @@
               </a:rPr>
               <a:t>— 数据：多期财务摘要 + 主营构成 + 现金流量表/资产负债表（akshare 采集，与公开报道抽查核对）</a:t>
             </a:r>
+            <a:endParaRPr sz="1450" b="0">
+              <a:solidFill>
+                <a:srgbClr val="5B6470"/>
+              </a:solidFill>
+              <a:latin typeface="微软雅黑"/>
+            </a:endParaRPr>
           </a:p>
           <a:p>
             <a:pPr lvl="1">
@@ -6757,6 +7100,12 @@
               </a:rPr>
               <a:t>— 宏观：海关总署跨境电商进出口数据 + 行业公开统计</a:t>
             </a:r>
+            <a:endParaRPr sz="1450" b="0">
+              <a:solidFill>
+                <a:srgbClr val="5B6470"/>
+              </a:solidFill>
+              <a:latin typeface="微软雅黑"/>
+            </a:endParaRPr>
           </a:p>
           <a:p>
             <a:pPr>
@@ -6773,6 +7122,12 @@
               </a:rPr>
               <a:t>▪ 三层框架：宏观（行业规模）→ 中观（公司对比）→ 微观（现金流验证）</a:t>
             </a:r>
+            <a:endParaRPr sz="1600" b="1">
+              <a:solidFill>
+                <a:srgbClr val="1B2430"/>
+              </a:solidFill>
+              <a:latin typeface="微软雅黑"/>
+            </a:endParaRPr>
           </a:p>
           <a:p>
             <a:pPr>
@@ -6789,6 +7144,12 @@
               </a:rPr>
               <a:t>▪ 为什么是这 5 家：同属“跨境卖家”，覆盖 精品/铺货/长尾 × 北美/欧洲/东南亚 × 平台/独立站</a:t>
             </a:r>
+            <a:endParaRPr sz="1600" b="0">
+              <a:solidFill>
+                <a:srgbClr val="1B2430"/>
+              </a:solidFill>
+              <a:latin typeface="微软雅黑"/>
+            </a:endParaRPr>
           </a:p>
           <a:p>
             <a:pPr>
@@ -6805,6 +7166,12 @@
               </a:rPr>
               <a:t>▪ 合规：全部公开数据，无爬取；每个口径都记录在数据字典</a:t>
             </a:r>
+            <a:endParaRPr sz="1600" b="0">
+              <a:solidFill>
+                <a:srgbClr val="1B2430"/>
+              </a:solidFill>
+              <a:latin typeface="微软雅黑"/>
+            </a:endParaRPr>
           </a:p>
         </p:txBody>
       </p:sp>
@@ -6839,6 +7206,12 @@
               </a:rPr>
               <a:t>Xuefei Wang · 2026</a:t>
             </a:r>
+            <a:endParaRPr sz="950" b="0">
+              <a:solidFill>
+                <a:srgbClr val="5B6470"/>
+              </a:solidFill>
+              <a:latin typeface="微软雅黑"/>
+            </a:endParaRPr>
           </a:p>
         </p:txBody>
       </p:sp>
@@ -6874,6 +7247,12 @@
               </a:rPr>
               <a:t>04 / 14</a:t>
             </a:r>
+            <a:endParaRPr sz="950" b="0">
+              <a:solidFill>
+                <a:srgbClr val="5B6470"/>
+              </a:solidFill>
+              <a:latin typeface="微软雅黑"/>
+            </a:endParaRPr>
           </a:p>
         </p:txBody>
       </p:sp>
@@ -6886,7 +7265,7 @@
 </file>
 
 <file path=ppt/slides/slide5.xml><?xml version="1.0" encoding="utf-8"?>
-<p:sld xmlns:a="http://schemas.openxmlformats.org/drawingml/2006/main" xmlns:p="http://schemas.openxmlformats.org/presentationml/2006/main" xmlns:r="http://schemas.openxmlformats.org/officeDocument/2006/relationships">
+<p:sld xmlns:a="http://schemas.openxmlformats.org/drawingml/2006/main" xmlns:r="http://schemas.openxmlformats.org/officeDocument/2006/relationships" xmlns:p="http://schemas.openxmlformats.org/presentationml/2006/main">
   <p:cSld>
     <p:spTree>
       <p:nvGrpSpPr>
@@ -6970,6 +7349,12 @@
               </a:rPr>
               <a:t>FINDING ① · 赛道</a:t>
             </a:r>
+            <a:endParaRPr sz="1150" b="1">
+              <a:solidFill>
+                <a:srgbClr val="2F5AA8"/>
+              </a:solidFill>
+              <a:latin typeface="微软雅黑"/>
+            </a:endParaRPr>
           </a:p>
           <a:p>
             <a:pPr>
@@ -6986,6 +7371,12 @@
               </a:rPr>
               <a:t>行业还在增长，但增速换挡、格局极度分散</a:t>
             </a:r>
+            <a:endParaRPr sz="2700" b="1">
+              <a:solidFill>
+                <a:srgbClr val="1B2430"/>
+              </a:solidFill>
+              <a:latin typeface="微软雅黑"/>
+            </a:endParaRPr>
           </a:p>
         </p:txBody>
       </p:sp>
@@ -6997,8 +7388,8 @@
         </p:nvSpPr>
         <p:spPr>
           <a:xfrm>
-            <a:off x="640080" y="1874519"/>
-            <a:ext cx="5669280" cy="4572000"/>
+            <a:off x="640080" y="1340485"/>
+            <a:ext cx="10863580" cy="2303145"/>
           </a:xfrm>
           <a:prstGeom prst="rect">
             <a:avLst/>
@@ -7007,7 +7398,7 @@
         </p:spPr>
         <p:txBody>
           <a:bodyPr wrap="square">
-            <a:spAutoFit/>
+            <a:noAutofit/>
           </a:bodyPr>
           <a:lstStyle/>
           <a:p>
@@ -7025,6 +7416,12 @@
               </a:rPr>
               <a:t>▪ 2025 终核 2.84 万亿元（出口 2.27 万亿），同比 +4.8%（前几年 +10~15%）</a:t>
             </a:r>
+            <a:endParaRPr sz="1500" b="1">
+              <a:solidFill>
+                <a:srgbClr val="1B2430"/>
+              </a:solidFill>
+              <a:latin typeface="微软雅黑"/>
+            </a:endParaRPr>
           </a:p>
           <a:p>
             <a:pPr>
@@ -7041,6 +7438,12 @@
               </a:rPr>
               <a:t>▪ 美国仍是第一大出口目的国，占比约 36.2%</a:t>
             </a:r>
+            <a:endParaRPr sz="1500" b="0">
+              <a:solidFill>
+                <a:srgbClr val="1B2430"/>
+              </a:solidFill>
+              <a:latin typeface="微软雅黑"/>
+            </a:endParaRPr>
           </a:p>
           <a:p>
             <a:pPr>
@@ -7057,6 +7460,12 @@
               </a:rPr>
               <a:t>▪ 5 家龙头 2025 营收合计 ≈ 668.8 亿 ≈ 出口额的 2.9%</a:t>
             </a:r>
+            <a:endParaRPr sz="1500" b="1">
+              <a:solidFill>
+                <a:srgbClr val="1B2430"/>
+              </a:solidFill>
+              <a:latin typeface="微软雅黑"/>
+            </a:endParaRPr>
           </a:p>
           <a:p>
             <a:pPr lvl="1">
@@ -7073,6 +7482,12 @@
               </a:rPr>
               <a:t>— 最大的安克 ≈ 1.3% —— 行业高度分散、长尾玩家众多</a:t>
             </a:r>
+            <a:endParaRPr sz="1350" b="0">
+              <a:solidFill>
+                <a:srgbClr val="5B6470"/>
+              </a:solidFill>
+              <a:latin typeface="微软雅黑"/>
+            </a:endParaRPr>
           </a:p>
           <a:p>
             <a:pPr lvl="1">
@@ -7089,12 +7504,42 @@
               </a:rPr>
               <a:t>— 含义：门槛低、进入多、竞争激烈，也解释“起得快、倒得多”</a:t>
             </a:r>
+            <a:endParaRPr sz="1350" b="0">
+              <a:solidFill>
+                <a:srgbClr val="5B6470"/>
+              </a:solidFill>
+              <a:latin typeface="微软雅黑"/>
+            </a:endParaRPr>
           </a:p>
         </p:txBody>
       </p:sp>
       <p:pic>
         <p:nvPicPr>
           <p:cNvPr id="5" name="Picture 4" descr="m2_market_size.png"/>
+          <p:cNvPicPr>
+            <a:picLocks noChangeAspect="1"/>
+          </p:cNvPicPr>
+          <p:nvPr/>
+        </p:nvPicPr>
+        <p:blipFill>
+          <a:blip r:embed="rId1"/>
+          <a:stretch>
+            <a:fillRect/>
+          </a:stretch>
+        </p:blipFill>
+        <p:spPr>
+          <a:xfrm>
+            <a:off x="895985" y="3510280"/>
+            <a:ext cx="5120640" cy="2780665"/>
+          </a:xfrm>
+          <a:prstGeom prst="rect">
+            <a:avLst/>
+          </a:prstGeom>
+        </p:spPr>
+      </p:pic>
+      <p:pic>
+        <p:nvPicPr>
+          <p:cNvPr id="6" name="Picture 5" descr="m2_export_destination.png"/>
           <p:cNvPicPr>
             <a:picLocks noChangeAspect="1"/>
           </p:cNvPicPr>
@@ -7108,31 +7553,7 @@
         </p:blipFill>
         <p:spPr>
           <a:xfrm>
-            <a:off x="6492240" y="1828800"/>
-            <a:ext cx="5120640" cy="2499360"/>
-          </a:xfrm>
-          <a:prstGeom prst="rect">
-            <a:avLst/>
-          </a:prstGeom>
-        </p:spPr>
-      </p:pic>
-      <p:pic>
-        <p:nvPicPr>
-          <p:cNvPr id="6" name="Picture 5" descr="m2_export_destination.png"/>
-          <p:cNvPicPr>
-            <a:picLocks noChangeAspect="1"/>
-          </p:cNvPicPr>
-          <p:nvPr/>
-        </p:nvPicPr>
-        <p:blipFill>
-          <a:blip r:embed="rId3"/>
-          <a:stretch>
-            <a:fillRect/>
-          </a:stretch>
-        </p:blipFill>
-        <p:spPr>
-          <a:xfrm>
-            <a:off x="6492240" y="4160520"/>
+            <a:off x="6492240" y="3510280"/>
             <a:ext cx="5120640" cy="2837111"/>
           </a:xfrm>
           <a:prstGeom prst="rect">
@@ -7171,6 +7592,12 @@
               </a:rPr>
               <a:t>Xuefei Wang · 2026</a:t>
             </a:r>
+            <a:endParaRPr sz="950" b="0">
+              <a:solidFill>
+                <a:srgbClr val="5B6470"/>
+              </a:solidFill>
+              <a:latin typeface="微软雅黑"/>
+            </a:endParaRPr>
           </a:p>
         </p:txBody>
       </p:sp>
@@ -7206,6 +7633,12 @@
               </a:rPr>
               <a:t>05 / 14</a:t>
             </a:r>
+            <a:endParaRPr sz="950" b="0">
+              <a:solidFill>
+                <a:srgbClr val="5B6470"/>
+              </a:solidFill>
+              <a:latin typeface="微软雅黑"/>
+            </a:endParaRPr>
           </a:p>
         </p:txBody>
       </p:sp>
@@ -7218,7 +7651,7 @@
 </file>
 
 <file path=ppt/slides/slide6.xml><?xml version="1.0" encoding="utf-8"?>
-<p:sld xmlns:a="http://schemas.openxmlformats.org/drawingml/2006/main" xmlns:p="http://schemas.openxmlformats.org/presentationml/2006/main" xmlns:r="http://schemas.openxmlformats.org/officeDocument/2006/relationships">
+<p:sld xmlns:a="http://schemas.openxmlformats.org/drawingml/2006/main" xmlns:r="http://schemas.openxmlformats.org/officeDocument/2006/relationships" xmlns:p="http://schemas.openxmlformats.org/presentationml/2006/main">
   <p:cSld>
     <p:spTree>
       <p:nvGrpSpPr>
@@ -7302,6 +7735,12 @@
               </a:rPr>
               <a:t>DATA · 进入与退出</a:t>
             </a:r>
+            <a:endParaRPr sz="1150" b="1">
+              <a:solidFill>
+                <a:srgbClr val="2F5AA8"/>
+              </a:solidFill>
+              <a:latin typeface="微软雅黑"/>
+            </a:endParaRPr>
           </a:p>
           <a:p>
             <a:pPr>
@@ -7318,6 +7757,12 @@
               </a:rPr>
               <a:t>支撑数据：这个行业进得有多快、洗牌有多快</a:t>
             </a:r>
+            <a:endParaRPr sz="2700" b="1">
+              <a:solidFill>
+                <a:srgbClr val="1B2430"/>
+              </a:solidFill>
+              <a:latin typeface="微软雅黑"/>
+            </a:endParaRPr>
           </a:p>
         </p:txBody>
       </p:sp>
@@ -7440,6 +7885,12 @@
               </a:rPr>
               <a:t>体量 · 官方口径</a:t>
             </a:r>
+            <a:endParaRPr sz="1450" b="1">
+              <a:solidFill>
+                <a:srgbClr val="1B2430"/>
+              </a:solidFill>
+              <a:latin typeface="微软雅黑"/>
+            </a:endParaRPr>
           </a:p>
           <a:p>
             <a:pPr>
@@ -7456,6 +7907,12 @@
               </a:rPr>
               <a:t>跨境电商主体超 12 万家（约占近 70 万家有进出口记录经营主体的 1/6）；2024 进出口 2.63 万亿、+10.8%。来源：商务部 / 经济日报 2025-02</a:t>
             </a:r>
+            <a:endParaRPr sz="1150" b="0">
+              <a:solidFill>
+                <a:srgbClr val="5B6470"/>
+              </a:solidFill>
+              <a:latin typeface="微软雅黑"/>
+            </a:endParaRPr>
           </a:p>
         </p:txBody>
       </p:sp>
@@ -7578,6 +8035,12 @@
               </a:rPr>
               <a:t>新增进入 ① · 企查查</a:t>
             </a:r>
+            <a:endParaRPr sz="1450" b="1">
+              <a:solidFill>
+                <a:srgbClr val="1B2430"/>
+              </a:solidFill>
+              <a:latin typeface="微软雅黑"/>
+            </a:endParaRPr>
           </a:p>
           <a:p>
             <a:pPr>
@@ -7594,6 +8057,12 @@
               </a:rPr>
               <a:t>2023 注册 5,818 家（+44%）→ 2024 注册 8,598 家（+47%）→ 2025 前 4 月 5,080 家（+173%）；现存 2.89 万家（2025-05）</a:t>
             </a:r>
+            <a:endParaRPr sz="1150" b="0">
+              <a:solidFill>
+                <a:srgbClr val="5B6470"/>
+              </a:solidFill>
+              <a:latin typeface="微软雅黑"/>
+            </a:endParaRPr>
           </a:p>
         </p:txBody>
       </p:sp>
@@ -7716,6 +8185,12 @@
               </a:rPr>
               <a:t>新增进入 ② · 天眼查</a:t>
             </a:r>
+            <a:endParaRPr sz="1450" b="1">
+              <a:solidFill>
+                <a:srgbClr val="1B2430"/>
+              </a:solidFill>
+              <a:latin typeface="微软雅黑"/>
+            </a:endParaRPr>
           </a:p>
           <a:p>
             <a:pPr>
@@ -7732,6 +8207,12 @@
               </a:rPr>
               <a:t>现存超 3.4 万家（2025-09）；2024 新增 7,000+（较 2023 约 +50%）；2025 已新增 1.3 万+；成立不足 1 年的企业占 46.7%</a:t>
             </a:r>
+            <a:endParaRPr sz="1150" b="0">
+              <a:solidFill>
+                <a:srgbClr val="5B6470"/>
+              </a:solidFill>
+              <a:latin typeface="微软雅黑"/>
+            </a:endParaRPr>
           </a:p>
         </p:txBody>
       </p:sp>
@@ -7854,6 +8335,12 @@
               </a:rPr>
               <a:t>退出 · 可见案例</a:t>
             </a:r>
+            <a:endParaRPr sz="1450" b="1">
+              <a:solidFill>
+                <a:srgbClr val="1B2430"/>
+              </a:solidFill>
+              <a:latin typeface="微软雅黑"/>
+            </a:endParaRPr>
           </a:p>
           <a:p>
             <a:pPr>
@@ -7870,6 +8357,12 @@
               </a:rPr>
               <a:t>网经社“死亡名单”：2022 年 31 家 → 2023 年 11 家 → 2024 年 50 家（+354.5%）。仅统计有知名度的倒闭/关停，不是退出总数</a:t>
             </a:r>
+            <a:endParaRPr sz="1150" b="0">
+              <a:solidFill>
+                <a:srgbClr val="5B6470"/>
+              </a:solidFill>
+              <a:latin typeface="微软雅黑"/>
+            </a:endParaRPr>
           </a:p>
         </p:txBody>
       </p:sp>
@@ -7904,6 +8397,12 @@
               </a:rPr>
               <a:t>口径提醒：官方“主体 12 万”≠工商注册“2.9~3.4 万家”（多数卖家经营范围不含“跨境电商”字样）；企查查/天眼查不能混比；退出无官方逐年统计，故只做定性判断。</a:t>
             </a:r>
+            <a:endParaRPr sz="1150" b="0">
+              <a:solidFill>
+                <a:srgbClr val="5B6470"/>
+              </a:solidFill>
+              <a:latin typeface="微软雅黑"/>
+            </a:endParaRPr>
           </a:p>
         </p:txBody>
       </p:sp>
@@ -7938,6 +8437,12 @@
               </a:rPr>
               <a:t>Xuefei Wang · 2026</a:t>
             </a:r>
+            <a:endParaRPr sz="950" b="0">
+              <a:solidFill>
+                <a:srgbClr val="5B6470"/>
+              </a:solidFill>
+              <a:latin typeface="微软雅黑"/>
+            </a:endParaRPr>
           </a:p>
         </p:txBody>
       </p:sp>
@@ -7973,6 +8478,12 @@
               </a:rPr>
               <a:t>06 / 14</a:t>
             </a:r>
+            <a:endParaRPr sz="950" b="0">
+              <a:solidFill>
+                <a:srgbClr val="5B6470"/>
+              </a:solidFill>
+              <a:latin typeface="微软雅黑"/>
+            </a:endParaRPr>
           </a:p>
         </p:txBody>
       </p:sp>
@@ -7985,7 +8496,7 @@
 </file>
 
 <file path=ppt/slides/slide7.xml><?xml version="1.0" encoding="utf-8"?>
-<p:sld xmlns:a="http://schemas.openxmlformats.org/drawingml/2006/main" xmlns:p="http://schemas.openxmlformats.org/presentationml/2006/main" xmlns:r="http://schemas.openxmlformats.org/officeDocument/2006/relationships">
+<p:sld xmlns:a="http://schemas.openxmlformats.org/drawingml/2006/main" xmlns:r="http://schemas.openxmlformats.org/officeDocument/2006/relationships" xmlns:p="http://schemas.openxmlformats.org/presentationml/2006/main">
   <p:cSld>
     <p:spTree>
       <p:nvGrpSpPr>
@@ -8069,6 +8580,12 @@
               </a:rPr>
               <a:t>FINDING ② · 模式</a:t>
             </a:r>
+            <a:endParaRPr sz="1150" b="1">
+              <a:solidFill>
+                <a:srgbClr val="2F5AA8"/>
+              </a:solidFill>
+              <a:latin typeface="微软雅黑"/>
+            </a:endParaRPr>
           </a:p>
           <a:p>
             <a:pPr>
@@ -8085,6 +8602,12 @@
               </a:rPr>
               <a:t>精品 vs 铺货：销售费用率是分水岭</a:t>
             </a:r>
+            <a:endParaRPr sz="2700" b="1">
+              <a:solidFill>
+                <a:srgbClr val="1B2430"/>
+              </a:solidFill>
+              <a:latin typeface="微软雅黑"/>
+            </a:endParaRPr>
           </a:p>
         </p:txBody>
       </p:sp>
@@ -8096,8 +8619,8 @@
         </p:nvSpPr>
         <p:spPr>
           <a:xfrm>
-            <a:off x="640080" y="1874519"/>
-            <a:ext cx="5669280" cy="4572000"/>
+            <a:off x="640080" y="1554480"/>
+            <a:ext cx="11123295" cy="1814830"/>
           </a:xfrm>
           <a:prstGeom prst="rect">
             <a:avLst/>
@@ -8124,6 +8647,12 @@
               </a:rPr>
               <a:t>▪ 安克（精品品牌）：毛利 45% + 销售费用 22% → 净利 8.3%、营收 +23.5%</a:t>
             </a:r>
+            <a:endParaRPr sz="1500" b="1">
+              <a:solidFill>
+                <a:srgbClr val="1B2430"/>
+              </a:solidFill>
+              <a:latin typeface="微软雅黑"/>
+            </a:endParaRPr>
           </a:p>
           <a:p>
             <a:pPr>
@@ -8140,6 +8669,12 @@
               </a:rPr>
               <a:t>▪ 赛维（铺货）：毛利 43% 不低，但销售费用 35% → 净利只剩 2.4%</a:t>
             </a:r>
+            <a:endParaRPr sz="1500" b="0">
+              <a:solidFill>
+                <a:srgbClr val="1B2430"/>
+              </a:solidFill>
+              <a:latin typeface="微软雅黑"/>
+            </a:endParaRPr>
           </a:p>
           <a:p>
             <a:pPr lvl="1">
@@ -8156,6 +8691,12 @@
               </a:rPr>
               <a:t>— 华凯易佰（铺货）：净利 1.6%、增速 +1.2% —— 增收不增利、增长见顶</a:t>
             </a:r>
+            <a:endParaRPr sz="1350" b="0">
+              <a:solidFill>
+                <a:srgbClr val="5B6470"/>
+              </a:solidFill>
+              <a:latin typeface="微软雅黑"/>
+            </a:endParaRPr>
           </a:p>
           <a:p>
             <a:pPr>
@@ -8172,6 +8713,12 @@
               </a:rPr>
               <a:t>▪ 结论：毛利率高 ≠ 赚钱，费用结构才是模式分水岭</a:t>
             </a:r>
+            <a:endParaRPr sz="1500" b="1">
+              <a:solidFill>
+                <a:srgbClr val="1B2430"/>
+              </a:solidFill>
+              <a:latin typeface="微软雅黑"/>
+            </a:endParaRPr>
           </a:p>
           <a:p>
             <a:pPr lvl="1">
@@ -8188,6 +8735,12 @@
               </a:rPr>
               <a:t>— 精品靠产品力与复购压低“流量税”，铺货靠买量，天然更重</a:t>
             </a:r>
+            <a:endParaRPr sz="1350" b="0">
+              <a:solidFill>
+                <a:srgbClr val="5B6470"/>
+              </a:solidFill>
+              <a:latin typeface="微软雅黑"/>
+            </a:endParaRPr>
           </a:p>
         </p:txBody>
       </p:sp>
@@ -8200,15 +8753,15 @@
           <p:nvPr/>
         </p:nvPicPr>
         <p:blipFill>
-          <a:blip r:embed="rId2"/>
+          <a:blip r:embed="rId1"/>
           <a:stretch>
             <a:fillRect/>
           </a:stretch>
         </p:blipFill>
         <p:spPr>
           <a:xfrm>
-            <a:off x="6492240" y="2103120"/>
-            <a:ext cx="5120640" cy="2531552"/>
+            <a:off x="6492240" y="3295015"/>
+            <a:ext cx="5120640" cy="2836545"/>
           </a:xfrm>
           <a:prstGeom prst="rect">
             <a:avLst/>
@@ -8246,6 +8799,12 @@
               </a:rPr>
               <a:t>Xuefei Wang · 2026</a:t>
             </a:r>
+            <a:endParaRPr sz="950" b="0">
+              <a:solidFill>
+                <a:srgbClr val="5B6470"/>
+              </a:solidFill>
+              <a:latin typeface="微软雅黑"/>
+            </a:endParaRPr>
           </a:p>
         </p:txBody>
       </p:sp>
@@ -8281,6 +8840,12 @@
               </a:rPr>
               <a:t>07 / 14</a:t>
             </a:r>
+            <a:endParaRPr sz="950" b="0">
+              <a:solidFill>
+                <a:srgbClr val="5B6470"/>
+              </a:solidFill>
+              <a:latin typeface="微软雅黑"/>
+            </a:endParaRPr>
           </a:p>
         </p:txBody>
       </p:sp>
@@ -8293,7 +8858,7 @@
 </file>
 
 <file path=ppt/slides/slide8.xml><?xml version="1.0" encoding="utf-8"?>
-<p:sld xmlns:a="http://schemas.openxmlformats.org/drawingml/2006/main" xmlns:p="http://schemas.openxmlformats.org/presentationml/2006/main" xmlns:r="http://schemas.openxmlformats.org/officeDocument/2006/relationships">
+<p:sld xmlns:a="http://schemas.openxmlformats.org/drawingml/2006/main" xmlns:r="http://schemas.openxmlformats.org/officeDocument/2006/relationships" xmlns:p="http://schemas.openxmlformats.org/presentationml/2006/main">
   <p:cSld>
     <p:spTree>
       <p:nvGrpSpPr>
@@ -8377,6 +8942,12 @@
               </a:rPr>
               <a:t>METHOD · 分类</a:t>
             </a:r>
+            <a:endParaRPr sz="1150" b="1">
+              <a:solidFill>
+                <a:srgbClr val="2F5AA8"/>
+              </a:solidFill>
+              <a:latin typeface="微软雅黑"/>
+            </a:endParaRPr>
           </a:p>
           <a:p>
             <a:pPr>
@@ -8393,6 +8964,12 @@
               </a:rPr>
               <a:t>我怎么定义“精品 vs 铺货”：四个可核对的信号</a:t>
             </a:r>
+            <a:endParaRPr sz="2700" b="1">
+              <a:solidFill>
+                <a:srgbClr val="1B2430"/>
+              </a:solidFill>
+              <a:latin typeface="微软雅黑"/>
+            </a:endParaRPr>
           </a:p>
         </p:txBody>
       </p:sp>
@@ -8515,6 +9092,12 @@
               </a:rPr>
               <a:t>研发 / 产品投入</a:t>
             </a:r>
+            <a:endParaRPr sz="1400" b="1">
+              <a:solidFill>
+                <a:srgbClr val="1B2430"/>
+              </a:solidFill>
+              <a:latin typeface="微软雅黑"/>
+            </a:endParaRPr>
           </a:p>
           <a:p>
             <a:pPr>
@@ -8531,6 +9114,12 @@
               </a:rPr>
               <a:t>精品高（私模、自研、专利）；铺货低（贴牌、公模、跟随选品）</a:t>
             </a:r>
+            <a:endParaRPr sz="1200" b="0">
+              <a:solidFill>
+                <a:srgbClr val="5B6470"/>
+              </a:solidFill>
+              <a:latin typeface="微软雅黑"/>
+            </a:endParaRPr>
           </a:p>
         </p:txBody>
       </p:sp>
@@ -8653,6 +9242,12 @@
               </a:rPr>
               <a:t>SKU 广度与打法</a:t>
             </a:r>
+            <a:endParaRPr sz="1400" b="1">
+              <a:solidFill>
+                <a:srgbClr val="1B2430"/>
+              </a:solidFill>
+              <a:latin typeface="微软雅黑"/>
+            </a:endParaRPr>
           </a:p>
           <a:p>
             <a:pPr>
@@ -8669,6 +9264,12 @@
               </a:rPr>
               <a:t>精品少而聚焦、靠爆款+系列；铺货海量 SKU、上架测款跑概率</a:t>
             </a:r>
+            <a:endParaRPr sz="1200" b="0">
+              <a:solidFill>
+                <a:srgbClr val="5B6470"/>
+              </a:solidFill>
+              <a:latin typeface="微软雅黑"/>
+            </a:endParaRPr>
           </a:p>
         </p:txBody>
       </p:sp>
@@ -8791,6 +9392,12 @@
               </a:rPr>
               <a:t>收入集中度</a:t>
             </a:r>
+            <a:endParaRPr sz="1400" b="1">
+              <a:solidFill>
+                <a:srgbClr val="1B2430"/>
+              </a:solidFill>
+              <a:latin typeface="微软雅黑"/>
+            </a:endParaRPr>
           </a:p>
           <a:p>
             <a:pPr>
@@ -8807,6 +9414,12 @@
               </a:rPr>
               <a:t>精品头部品类占比高（安克充电储能 50.5%）；铺货分散在无数 SKU</a:t>
             </a:r>
+            <a:endParaRPr sz="1200" b="0">
+              <a:solidFill>
+                <a:srgbClr val="5B6470"/>
+              </a:solidFill>
+              <a:latin typeface="微软雅黑"/>
+            </a:endParaRPr>
           </a:p>
         </p:txBody>
       </p:sp>
@@ -8929,6 +9542,12 @@
               </a:rPr>
               <a:t>销售费用率与流量</a:t>
             </a:r>
+            <a:endParaRPr sz="1400" b="1">
+              <a:solidFill>
+                <a:srgbClr val="1B2430"/>
+              </a:solidFill>
+              <a:latin typeface="微软雅黑"/>
+            </a:endParaRPr>
           </a:p>
           <a:p>
             <a:pPr>
@@ -8945,6 +9564,12 @@
               </a:rPr>
               <a:t>精品较低（品牌词/复购）；铺货高（广告买量，靠流量吃饭）</a:t>
             </a:r>
+            <a:endParaRPr sz="1200" b="0">
+              <a:solidFill>
+                <a:srgbClr val="5B6470"/>
+              </a:solidFill>
+              <a:latin typeface="微软雅黑"/>
+            </a:endParaRPr>
           </a:p>
         </p:txBody>
       </p:sp>
@@ -8979,6 +9604,12 @@
               </a:rPr>
               <a:t>说明：这是“谱带”不是“开关”——判断看经营结构，而非有没有品牌名。</a:t>
             </a:r>
+            <a:endParaRPr sz="1200" b="0">
+              <a:solidFill>
+                <a:srgbClr val="5B6470"/>
+              </a:solidFill>
+              <a:latin typeface="微软雅黑"/>
+            </a:endParaRPr>
           </a:p>
         </p:txBody>
       </p:sp>
@@ -9013,6 +9644,12 @@
               </a:rPr>
               <a:t>Xuefei Wang · 2026</a:t>
             </a:r>
+            <a:endParaRPr sz="950" b="0">
+              <a:solidFill>
+                <a:srgbClr val="5B6470"/>
+              </a:solidFill>
+              <a:latin typeface="微软雅黑"/>
+            </a:endParaRPr>
           </a:p>
         </p:txBody>
       </p:sp>
@@ -9048,6 +9685,12 @@
               </a:rPr>
               <a:t>08 / 14</a:t>
             </a:r>
+            <a:endParaRPr sz="950" b="0">
+              <a:solidFill>
+                <a:srgbClr val="5B6470"/>
+              </a:solidFill>
+              <a:latin typeface="微软雅黑"/>
+            </a:endParaRPr>
           </a:p>
         </p:txBody>
       </p:sp>
@@ -9060,7 +9703,7 @@
 </file>
 
 <file path=ppt/slides/slide9.xml><?xml version="1.0" encoding="utf-8"?>
-<p:sld xmlns:a="http://schemas.openxmlformats.org/drawingml/2006/main" xmlns:p="http://schemas.openxmlformats.org/presentationml/2006/main" xmlns:r="http://schemas.openxmlformats.org/officeDocument/2006/relationships">
+<p:sld xmlns:a="http://schemas.openxmlformats.org/drawingml/2006/main" xmlns:r="http://schemas.openxmlformats.org/officeDocument/2006/relationships" xmlns:p="http://schemas.openxmlformats.org/presentationml/2006/main">
   <p:cSld>
     <p:spTree>
       <p:nvGrpSpPr>
@@ -9144,6 +9787,12 @@
               </a:rPr>
               <a:t>METHOD · 定位</a:t>
             </a:r>
+            <a:endParaRPr sz="1150" b="1">
+              <a:solidFill>
+                <a:srgbClr val="2F5AA8"/>
+              </a:solidFill>
+              <a:latin typeface="微软雅黑"/>
+            </a:endParaRPr>
           </a:p>
           <a:p>
             <a:pPr>
@@ -9160,6 +9809,12 @@
               </a:rPr>
               <a:t>5 家上市公司落在哪里 + 三种原型</a:t>
             </a:r>
+            <a:endParaRPr sz="2700" b="1">
+              <a:solidFill>
+                <a:srgbClr val="1B2430"/>
+              </a:solidFill>
+              <a:latin typeface="微软雅黑"/>
+            </a:endParaRPr>
           </a:p>
         </p:txBody>
       </p:sp>
@@ -9238,6 +9893,12 @@
               </a:rPr>
               <a:t>安克创新</a:t>
             </a:r>
+            <a:endParaRPr sz="1350" b="1">
+              <a:solidFill>
+                <a:srgbClr val="1B2430"/>
+              </a:solidFill>
+              <a:latin typeface="微软雅黑"/>
+            </a:endParaRPr>
           </a:p>
         </p:txBody>
       </p:sp>
@@ -9272,6 +9933,12 @@
               </a:rPr>
               <a:t>精品品牌</a:t>
             </a:r>
+            <a:endParaRPr sz="1300" b="1">
+              <a:solidFill>
+                <a:srgbClr val="2F5AA8"/>
+              </a:solidFill>
+              <a:latin typeface="微软雅黑"/>
+            </a:endParaRPr>
           </a:p>
         </p:txBody>
       </p:sp>
@@ -9306,6 +9973,12 @@
               </a:rPr>
               <a:t>研发 9.5% 全场最高；充电储能占 50.5%；品牌+私模</a:t>
             </a:r>
+            <a:endParaRPr sz="1150" b="0">
+              <a:solidFill>
+                <a:srgbClr val="5B6470"/>
+              </a:solidFill>
+              <a:latin typeface="微软雅黑"/>
+            </a:endParaRPr>
           </a:p>
         </p:txBody>
       </p:sp>
@@ -9384,6 +10057,12 @@
               </a:rPr>
               <a:t>致欧科技</a:t>
             </a:r>
+            <a:endParaRPr sz="1350" b="1">
+              <a:solidFill>
+                <a:srgbClr val="1B2430"/>
+              </a:solidFill>
+              <a:latin typeface="微软雅黑"/>
+            </a:endParaRPr>
           </a:p>
         </p:txBody>
       </p:sp>
@@ -9418,6 +10097,12 @@
               </a:rPr>
               <a:t>目录式长尾品牌</a:t>
             </a:r>
+            <a:endParaRPr sz="1300" b="1">
+              <a:solidFill>
+                <a:srgbClr val="2F5AA8"/>
+              </a:solidFill>
+              <a:latin typeface="微软雅黑"/>
+            </a:endParaRPr>
           </a:p>
         </p:txBody>
       </p:sp>
@@ -9452,6 +10137,12 @@
               </a:rPr>
               <a:t>自有品牌矩阵、SKU 大而全；重产品设计而非铺货</a:t>
             </a:r>
+            <a:endParaRPr sz="1150" b="0">
+              <a:solidFill>
+                <a:srgbClr val="5B6470"/>
+              </a:solidFill>
+              <a:latin typeface="微软雅黑"/>
+            </a:endParaRPr>
           </a:p>
         </p:txBody>
       </p:sp>
@@ -9530,6 +10221,12 @@
               </a:rPr>
               <a:t>赛维时代</a:t>
             </a:r>
+            <a:endParaRPr sz="1350" b="1">
+              <a:solidFill>
+                <a:srgbClr val="1B2430"/>
+              </a:solidFill>
+              <a:latin typeface="微软雅黑"/>
+            </a:endParaRPr>
           </a:p>
         </p:txBody>
       </p:sp>
@@ -9564,6 +10261,12 @@
               </a:rPr>
               <a:t>铺货（泛品）</a:t>
             </a:r>
+            <a:endParaRPr sz="1300" b="1">
+              <a:solidFill>
+                <a:srgbClr val="2F5AA8"/>
+              </a:solidFill>
+              <a:latin typeface="微软雅黑"/>
+            </a:endParaRPr>
           </a:p>
         </p:txBody>
       </p:sp>
@@ -9598,6 +10301,12 @@
               </a:rPr>
               <a:t>数十万 SKU；研发 &lt;1%；销售费用 35.4%</a:t>
             </a:r>
+            <a:endParaRPr sz="1150" b="0">
+              <a:solidFill>
+                <a:srgbClr val="5B6470"/>
+              </a:solidFill>
+              <a:latin typeface="微软雅黑"/>
+            </a:endParaRPr>
           </a:p>
         </p:txBody>
       </p:sp>
@@ -9676,6 +10385,12 @@
               </a:rPr>
               <a:t>华凯易佰</a:t>
             </a:r>
+            <a:endParaRPr sz="1350" b="1">
+              <a:solidFill>
+                <a:srgbClr val="1B2430"/>
+              </a:solidFill>
+              <a:latin typeface="微软雅黑"/>
+            </a:endParaRPr>
           </a:p>
         </p:txBody>
       </p:sp>
@@ -9710,6 +10425,12 @@
               </a:rPr>
               <a:t>铺货（泛品）</a:t>
             </a:r>
+            <a:endParaRPr sz="1300" b="1">
+              <a:solidFill>
+                <a:srgbClr val="2F5AA8"/>
+              </a:solidFill>
+              <a:latin typeface="微软雅黑"/>
+            </a:endParaRPr>
           </a:p>
         </p:txBody>
       </p:sp>
@@ -9744,6 +10465,12 @@
               </a:rPr>
               <a:t>海量 SKU + 综合服务；净利率 1.6%、增速 +1.2%</a:t>
             </a:r>
+            <a:endParaRPr sz="1150" b="0">
+              <a:solidFill>
+                <a:srgbClr val="5B6470"/>
+              </a:solidFill>
+              <a:latin typeface="微软雅黑"/>
+            </a:endParaRPr>
           </a:p>
         </p:txBody>
       </p:sp>
@@ -9822,6 +10549,12 @@
               </a:rPr>
               <a:t>吉宏股份</a:t>
             </a:r>
+            <a:endParaRPr sz="1350" b="1">
+              <a:solidFill>
+                <a:srgbClr val="1B2430"/>
+              </a:solidFill>
+              <a:latin typeface="微软雅黑"/>
+            </a:endParaRPr>
           </a:p>
         </p:txBody>
       </p:sp>
@@ -9856,6 +10589,12 @@
               </a:rPr>
               <a:t>流量驱动（非典型）</a:t>
             </a:r>
+            <a:endParaRPr sz="1300" b="1">
+              <a:solidFill>
+                <a:srgbClr val="2F5AA8"/>
+              </a:solidFill>
+              <a:latin typeface="微软雅黑"/>
+            </a:endParaRPr>
           </a:p>
         </p:txBody>
       </p:sp>
@@ -9890,6 +10629,12 @@
               </a:rPr>
               <a:t>社交电商/独立站投放为主；另含包装需分部看</a:t>
             </a:r>
+            <a:endParaRPr sz="1150" b="0">
+              <a:solidFill>
+                <a:srgbClr val="5B6470"/>
+              </a:solidFill>
+              <a:latin typeface="微软雅黑"/>
+            </a:endParaRPr>
           </a:p>
         </p:txBody>
       </p:sp>
@@ -9924,6 +10669,12 @@
               </a:rPr>
               <a:t>我的经历：上一家公司 1000+ SKU 按规格矩阵做全 —— 第三种路径“目录式长尾品牌”。</a:t>
             </a:r>
+            <a:endParaRPr sz="1250" b="1">
+              <a:solidFill>
+                <a:srgbClr val="C97B1E"/>
+              </a:solidFill>
+              <a:latin typeface="微软雅黑"/>
+            </a:endParaRPr>
           </a:p>
         </p:txBody>
       </p:sp>
@@ -9958,6 +10709,12 @@
               </a:rPr>
               <a:t>Xuefei Wang · 2026</a:t>
             </a:r>
+            <a:endParaRPr sz="950" b="0">
+              <a:solidFill>
+                <a:srgbClr val="5B6470"/>
+              </a:solidFill>
+              <a:latin typeface="微软雅黑"/>
+            </a:endParaRPr>
           </a:p>
         </p:txBody>
       </p:sp>
@@ -9993,6 +10750,12 @@
               </a:rPr>
               <a:t>09 / 14</a:t>
             </a:r>
+            <a:endParaRPr sz="950" b="0">
+              <a:solidFill>
+                <a:srgbClr val="5B6470"/>
+              </a:solidFill>
+              <a:latin typeface="微软雅黑"/>
+            </a:endParaRPr>
           </a:p>
         </p:txBody>
       </p:sp>
@@ -10320,6 +11083,10 @@
       </a:style>
     </a:lnDef>
   </a:objectDefaults>
-  <a:extraClrSchemeLst/>
+  <a:extLst>
+    <a:ext uri="{05A4C25C-085E-4340-85A3-A5531E510DB2}">
+      <thm15:themeFamily xmlns:thm15="http://schemas.microsoft.com/office/thememl/2012/main" name="Office Theme" id="{62F939B6-93AF-4DB8-9C6B-D6C7DFDC589F}" vid="{4A3C46E8-61CC-4603-A589-7422A47A8E4A}"/>
+    </a:ext>
+  </a:extLst>
 </a:theme>
 </file>
--- a/presentation/中国跨境电商出海赛道分析-项目故事-v2.pptx
+++ b/presentation/中国跨境电商出海赛道分析-项目故事-v2.pptx
@@ -3570,16 +3570,97 @@
           </a:p>
         </p:txBody>
       </p:sp>
+      <p:sp>
+        <p:nvSpPr>
+          <p:cNvPr id="6" name="TextBox 5"/>
+          <p:cNvSpPr txBox="1"/>
+          <p:nvPr/>
+        </p:nvSpPr>
+        <p:spPr>
+          <a:xfrm>
+            <a:off x="640080" y="6446520"/>
+            <a:ext cx="3657600" cy="320040"/>
+          </a:xfrm>
+          <a:prstGeom prst="rect">
+            <a:avLst/>
+          </a:prstGeom>
+          <a:noFill/>
+        </p:spPr>
+        <p:txBody>
+          <a:bodyPr wrap="square">
+            <a:spAutoFit/>
+          </a:bodyPr>
+          <a:lstStyle/>
+          <a:p>
+            <a:r>
+              <a:rPr sz="950" b="0">
+                <a:solidFill>
+                  <a:srgbClr val="5B6470"/>
+                </a:solidFill>
+                <a:latin typeface="微软雅黑"/>
+              </a:rPr>
+              <a:t>Xuefei Wang · 2026</a:t>
+            </a:r>
+            <a:endParaRPr sz="950" b="0">
+              <a:solidFill>
+                <a:srgbClr val="5B6470"/>
+              </a:solidFill>
+              <a:latin typeface="微软雅黑"/>
+            </a:endParaRPr>
+          </a:p>
+        </p:txBody>
+      </p:sp>
+      <p:sp>
+        <p:nvSpPr>
+          <p:cNvPr id="7" name="TextBox 6"/>
+          <p:cNvSpPr txBox="1"/>
+          <p:nvPr/>
+        </p:nvSpPr>
+        <p:spPr>
+          <a:xfrm>
+            <a:off x="10972800" y="6446520"/>
+            <a:ext cx="640080" cy="320040"/>
+          </a:xfrm>
+          <a:prstGeom prst="rect">
+            <a:avLst/>
+          </a:prstGeom>
+          <a:noFill/>
+        </p:spPr>
+        <p:txBody>
+          <a:bodyPr wrap="square">
+            <a:spAutoFit/>
+          </a:bodyPr>
+          <a:lstStyle/>
+          <a:p>
+            <a:pPr algn="r"/>
+            <a:r>
+              <a:rPr sz="950" b="0">
+                <a:solidFill>
+                  <a:srgbClr val="5B6470"/>
+                </a:solidFill>
+                <a:latin typeface="微软雅黑"/>
+              </a:rPr>
+              <a:t>10 / 14</a:t>
+            </a:r>
+            <a:endParaRPr sz="950" b="0">
+              <a:solidFill>
+                <a:srgbClr val="5B6470"/>
+              </a:solidFill>
+              <a:latin typeface="微软雅黑"/>
+            </a:endParaRPr>
+          </a:p>
+        </p:txBody>
+      </p:sp>
       <p:pic>
         <p:nvPicPr>
-          <p:cNvPr id="5" name="Picture 4" descr="m3_revenue.png"/>
+          <p:cNvPr id="8" name="Picture 7" descr="m3_revenue.png"/>
           <p:cNvPicPr>
             <a:picLocks noChangeAspect="1"/>
           </p:cNvPicPr>
           <p:nvPr/>
         </p:nvPicPr>
         <p:blipFill>
-          <a:blip r:embed="rId1"/>
+          <a:blip r:embed="rId3"/>
           <a:stretch>
             <a:fillRect/>
           </a:stretch>
@@ -3594,87 +3675,6 @@
           </a:prstGeom>
         </p:spPr>
       </p:pic>
-      <p:sp>
-        <p:nvSpPr>
-          <p:cNvPr id="6" name="TextBox 5"/>
-          <p:cNvSpPr txBox="1"/>
-          <p:nvPr/>
-        </p:nvSpPr>
-        <p:spPr>
-          <a:xfrm>
-            <a:off x="640080" y="6446520"/>
-            <a:ext cx="3657600" cy="320040"/>
-          </a:xfrm>
-          <a:prstGeom prst="rect">
-            <a:avLst/>
-          </a:prstGeom>
-          <a:noFill/>
-        </p:spPr>
-        <p:txBody>
-          <a:bodyPr wrap="square">
-            <a:spAutoFit/>
-          </a:bodyPr>
-          <a:lstStyle/>
-          <a:p>
-            <a:r>
-              <a:rPr sz="950" b="0">
-                <a:solidFill>
-                  <a:srgbClr val="5B6470"/>
-                </a:solidFill>
-                <a:latin typeface="微软雅黑"/>
-              </a:rPr>
-              <a:t>Xuefei Wang · 2026</a:t>
-            </a:r>
-            <a:endParaRPr sz="950" b="0">
-              <a:solidFill>
-                <a:srgbClr val="5B6470"/>
-              </a:solidFill>
-              <a:latin typeface="微软雅黑"/>
-            </a:endParaRPr>
-          </a:p>
-        </p:txBody>
-      </p:sp>
-      <p:sp>
-        <p:nvSpPr>
-          <p:cNvPr id="7" name="TextBox 6"/>
-          <p:cNvSpPr txBox="1"/>
-          <p:nvPr/>
-        </p:nvSpPr>
-        <p:spPr>
-          <a:xfrm>
-            <a:off x="10972800" y="6446520"/>
-            <a:ext cx="640080" cy="320040"/>
-          </a:xfrm>
-          <a:prstGeom prst="rect">
-            <a:avLst/>
-          </a:prstGeom>
-          <a:noFill/>
-        </p:spPr>
-        <p:txBody>
-          <a:bodyPr wrap="square">
-            <a:spAutoFit/>
-          </a:bodyPr>
-          <a:lstStyle/>
-          <a:p>
-            <a:pPr algn="r"/>
-            <a:r>
-              <a:rPr sz="950" b="0">
-                <a:solidFill>
-                  <a:srgbClr val="5B6470"/>
-                </a:solidFill>
-                <a:latin typeface="微软雅黑"/>
-              </a:rPr>
-              <a:t>10 / 14</a:t>
-            </a:r>
-            <a:endParaRPr sz="950" b="0">
-              <a:solidFill>
-                <a:srgbClr val="5B6470"/>
-              </a:solidFill>
-              <a:latin typeface="微软雅黑"/>
-            </a:endParaRPr>
-          </a:p>
-        </p:txBody>
-      </p:sp>
     </p:spTree>
   </p:cSld>
   <p:clrMapOvr>
@@ -3932,16 +3932,97 @@
           </a:p>
         </p:txBody>
       </p:sp>
+      <p:sp>
+        <p:nvSpPr>
+          <p:cNvPr id="6" name="TextBox 5"/>
+          <p:cNvSpPr txBox="1"/>
+          <p:nvPr/>
+        </p:nvSpPr>
+        <p:spPr>
+          <a:xfrm>
+            <a:off x="640080" y="6446520"/>
+            <a:ext cx="3657600" cy="320040"/>
+          </a:xfrm>
+          <a:prstGeom prst="rect">
+            <a:avLst/>
+          </a:prstGeom>
+          <a:noFill/>
+        </p:spPr>
+        <p:txBody>
+          <a:bodyPr wrap="square">
+            <a:spAutoFit/>
+          </a:bodyPr>
+          <a:lstStyle/>
+          <a:p>
+            <a:r>
+              <a:rPr sz="950" b="0">
+                <a:solidFill>
+                  <a:srgbClr val="5B6470"/>
+                </a:solidFill>
+                <a:latin typeface="微软雅黑"/>
+              </a:rPr>
+              <a:t>Xuefei Wang · 2026</a:t>
+            </a:r>
+            <a:endParaRPr sz="950" b="0">
+              <a:solidFill>
+                <a:srgbClr val="5B6470"/>
+              </a:solidFill>
+              <a:latin typeface="微软雅黑"/>
+            </a:endParaRPr>
+          </a:p>
+        </p:txBody>
+      </p:sp>
+      <p:sp>
+        <p:nvSpPr>
+          <p:cNvPr id="7" name="TextBox 6"/>
+          <p:cNvSpPr txBox="1"/>
+          <p:nvPr/>
+        </p:nvSpPr>
+        <p:spPr>
+          <a:xfrm>
+            <a:off x="10972800" y="6446520"/>
+            <a:ext cx="640080" cy="320040"/>
+          </a:xfrm>
+          <a:prstGeom prst="rect">
+            <a:avLst/>
+          </a:prstGeom>
+          <a:noFill/>
+        </p:spPr>
+        <p:txBody>
+          <a:bodyPr wrap="square">
+            <a:spAutoFit/>
+          </a:bodyPr>
+          <a:lstStyle/>
+          <a:p>
+            <a:pPr algn="r"/>
+            <a:r>
+              <a:rPr sz="950" b="0">
+                <a:solidFill>
+                  <a:srgbClr val="5B6470"/>
+                </a:solidFill>
+                <a:latin typeface="微软雅黑"/>
+              </a:rPr>
+              <a:t>11 / 14</a:t>
+            </a:r>
+            <a:endParaRPr sz="950" b="0">
+              <a:solidFill>
+                <a:srgbClr val="5B6470"/>
+              </a:solidFill>
+              <a:latin typeface="微软雅黑"/>
+            </a:endParaRPr>
+          </a:p>
+        </p:txBody>
+      </p:sp>
       <p:pic>
         <p:nvPicPr>
-          <p:cNvPr id="5" name="Picture 4" descr="m3b_anker_cashflow.png"/>
+          <p:cNvPr id="8" name="Picture 7" descr="m3b_anker_cashflow.png"/>
           <p:cNvPicPr>
             <a:picLocks noChangeAspect="1"/>
           </p:cNvPicPr>
           <p:nvPr/>
         </p:nvPicPr>
         <p:blipFill>
-          <a:blip r:embed="rId1"/>
+          <a:blip r:embed="rId3"/>
           <a:stretch>
             <a:fillRect/>
           </a:stretch>
@@ -3956,87 +4037,6 @@
           </a:prstGeom>
         </p:spPr>
       </p:pic>
-      <p:sp>
-        <p:nvSpPr>
-          <p:cNvPr id="6" name="TextBox 5"/>
-          <p:cNvSpPr txBox="1"/>
-          <p:nvPr/>
-        </p:nvSpPr>
-        <p:spPr>
-          <a:xfrm>
-            <a:off x="640080" y="6446520"/>
-            <a:ext cx="3657600" cy="320040"/>
-          </a:xfrm>
-          <a:prstGeom prst="rect">
-            <a:avLst/>
-          </a:prstGeom>
-          <a:noFill/>
-        </p:spPr>
-        <p:txBody>
-          <a:bodyPr wrap="square">
-            <a:spAutoFit/>
-          </a:bodyPr>
-          <a:lstStyle/>
-          <a:p>
-            <a:r>
-              <a:rPr sz="950" b="0">
-                <a:solidFill>
-                  <a:srgbClr val="5B6470"/>
-                </a:solidFill>
-                <a:latin typeface="微软雅黑"/>
-              </a:rPr>
-              <a:t>Xuefei Wang · 2026</a:t>
-            </a:r>
-            <a:endParaRPr sz="950" b="0">
-              <a:solidFill>
-                <a:srgbClr val="5B6470"/>
-              </a:solidFill>
-              <a:latin typeface="微软雅黑"/>
-            </a:endParaRPr>
-          </a:p>
-        </p:txBody>
-      </p:sp>
-      <p:sp>
-        <p:nvSpPr>
-          <p:cNvPr id="7" name="TextBox 6"/>
-          <p:cNvSpPr txBox="1"/>
-          <p:nvPr/>
-        </p:nvSpPr>
-        <p:spPr>
-          <a:xfrm>
-            <a:off x="10972800" y="6446520"/>
-            <a:ext cx="640080" cy="320040"/>
-          </a:xfrm>
-          <a:prstGeom prst="rect">
-            <a:avLst/>
-          </a:prstGeom>
-          <a:noFill/>
-        </p:spPr>
-        <p:txBody>
-          <a:bodyPr wrap="square">
-            <a:spAutoFit/>
-          </a:bodyPr>
-          <a:lstStyle/>
-          <a:p>
-            <a:pPr algn="r"/>
-            <a:r>
-              <a:rPr sz="950" b="0">
-                <a:solidFill>
-                  <a:srgbClr val="5B6470"/>
-                </a:solidFill>
-                <a:latin typeface="微软雅黑"/>
-              </a:rPr>
-              <a:t>11 / 14</a:t>
-            </a:r>
-            <a:endParaRPr sz="950" b="0">
-              <a:solidFill>
-                <a:srgbClr val="5B6470"/>
-              </a:solidFill>
-              <a:latin typeface="微软雅黑"/>
-            </a:endParaRPr>
-          </a:p>
-        </p:txBody>
-      </p:sp>
     </p:spTree>
   </p:cSld>
   <p:clrMapOvr>
@@ -7513,16 +7513,97 @@
           </a:p>
         </p:txBody>
       </p:sp>
+      <p:sp>
+        <p:nvSpPr>
+          <p:cNvPr id="7" name="TextBox 6"/>
+          <p:cNvSpPr txBox="1"/>
+          <p:nvPr/>
+        </p:nvSpPr>
+        <p:spPr>
+          <a:xfrm>
+            <a:off x="640080" y="6446520"/>
+            <a:ext cx="3657600" cy="320040"/>
+          </a:xfrm>
+          <a:prstGeom prst="rect">
+            <a:avLst/>
+          </a:prstGeom>
+          <a:noFill/>
+        </p:spPr>
+        <p:txBody>
+          <a:bodyPr wrap="square">
+            <a:spAutoFit/>
+          </a:bodyPr>
+          <a:lstStyle/>
+          <a:p>
+            <a:r>
+              <a:rPr sz="950" b="0">
+                <a:solidFill>
+                  <a:srgbClr val="5B6470"/>
+                </a:solidFill>
+                <a:latin typeface="微软雅黑"/>
+              </a:rPr>
+              <a:t>Xuefei Wang · 2026</a:t>
+            </a:r>
+            <a:endParaRPr sz="950" b="0">
+              <a:solidFill>
+                <a:srgbClr val="5B6470"/>
+              </a:solidFill>
+              <a:latin typeface="微软雅黑"/>
+            </a:endParaRPr>
+          </a:p>
+        </p:txBody>
+      </p:sp>
+      <p:sp>
+        <p:nvSpPr>
+          <p:cNvPr id="8" name="TextBox 7"/>
+          <p:cNvSpPr txBox="1"/>
+          <p:nvPr/>
+        </p:nvSpPr>
+        <p:spPr>
+          <a:xfrm>
+            <a:off x="10972800" y="6446520"/>
+            <a:ext cx="640080" cy="320040"/>
+          </a:xfrm>
+          <a:prstGeom prst="rect">
+            <a:avLst/>
+          </a:prstGeom>
+          <a:noFill/>
+        </p:spPr>
+        <p:txBody>
+          <a:bodyPr wrap="square">
+            <a:spAutoFit/>
+          </a:bodyPr>
+          <a:lstStyle/>
+          <a:p>
+            <a:pPr algn="r"/>
+            <a:r>
+              <a:rPr sz="950" b="0">
+                <a:solidFill>
+                  <a:srgbClr val="5B6470"/>
+                </a:solidFill>
+                <a:latin typeface="微软雅黑"/>
+              </a:rPr>
+              <a:t>05 / 14</a:t>
+            </a:r>
+            <a:endParaRPr sz="950" b="0">
+              <a:solidFill>
+                <a:srgbClr val="5B6470"/>
+              </a:solidFill>
+              <a:latin typeface="微软雅黑"/>
+            </a:endParaRPr>
+          </a:p>
+        </p:txBody>
+      </p:sp>
       <p:pic>
         <p:nvPicPr>
-          <p:cNvPr id="5" name="Picture 4" descr="m2_market_size.png"/>
+          <p:cNvPr id="9" name="Picture 8" descr="m2_market_size.png"/>
           <p:cNvPicPr>
             <a:picLocks noChangeAspect="1"/>
           </p:cNvPicPr>
           <p:nvPr/>
         </p:nvPicPr>
         <p:blipFill>
-          <a:blip r:embed="rId1"/>
+          <a:blip r:embed="rId4"/>
           <a:stretch>
             <a:fillRect/>
           </a:stretch>
@@ -7539,14 +7620,14 @@
       </p:pic>
       <p:pic>
         <p:nvPicPr>
-          <p:cNvPr id="6" name="Picture 5" descr="m2_export_destination.png"/>
+          <p:cNvPr id="10" name="Picture 9" descr="m2_export_destination.png"/>
           <p:cNvPicPr>
             <a:picLocks noChangeAspect="1"/>
           </p:cNvPicPr>
           <p:nvPr/>
         </p:nvPicPr>
         <p:blipFill>
-          <a:blip r:embed="rId2"/>
+          <a:blip r:embed="rId5"/>
           <a:stretch>
             <a:fillRect/>
           </a:stretch>
@@ -7561,87 +7642,6 @@
           </a:prstGeom>
         </p:spPr>
       </p:pic>
-      <p:sp>
-        <p:nvSpPr>
-          <p:cNvPr id="7" name="TextBox 6"/>
-          <p:cNvSpPr txBox="1"/>
-          <p:nvPr/>
-        </p:nvSpPr>
-        <p:spPr>
-          <a:xfrm>
-            <a:off x="640080" y="6446520"/>
-            <a:ext cx="3657600" cy="320040"/>
-          </a:xfrm>
-          <a:prstGeom prst="rect">
-            <a:avLst/>
-          </a:prstGeom>
-          <a:noFill/>
-        </p:spPr>
-        <p:txBody>
-          <a:bodyPr wrap="square">
-            <a:spAutoFit/>
-          </a:bodyPr>
-          <a:lstStyle/>
-          <a:p>
-            <a:r>
-              <a:rPr sz="950" b="0">
-                <a:solidFill>
-                  <a:srgbClr val="5B6470"/>
-                </a:solidFill>
-                <a:latin typeface="微软雅黑"/>
-              </a:rPr>
-              <a:t>Xuefei Wang · 2026</a:t>
-            </a:r>
-            <a:endParaRPr sz="950" b="0">
-              <a:solidFill>
-                <a:srgbClr val="5B6470"/>
-              </a:solidFill>
-              <a:latin typeface="微软雅黑"/>
-            </a:endParaRPr>
-          </a:p>
-        </p:txBody>
-      </p:sp>
-      <p:sp>
-        <p:nvSpPr>
-          <p:cNvPr id="8" name="TextBox 7"/>
-          <p:cNvSpPr txBox="1"/>
-          <p:nvPr/>
-        </p:nvSpPr>
-        <p:spPr>
-          <a:xfrm>
-            <a:off x="10972800" y="6446520"/>
-            <a:ext cx="640080" cy="320040"/>
-          </a:xfrm>
-          <a:prstGeom prst="rect">
-            <a:avLst/>
-          </a:prstGeom>
-          <a:noFill/>
-        </p:spPr>
-        <p:txBody>
-          <a:bodyPr wrap="square">
-            <a:spAutoFit/>
-          </a:bodyPr>
-          <a:lstStyle/>
-          <a:p>
-            <a:pPr algn="r"/>
-            <a:r>
-              <a:rPr sz="950" b="0">
-                <a:solidFill>
-                  <a:srgbClr val="5B6470"/>
-                </a:solidFill>
-                <a:latin typeface="微软雅黑"/>
-              </a:rPr>
-              <a:t>05 / 14</a:t>
-            </a:r>
-            <a:endParaRPr sz="950" b="0">
-              <a:solidFill>
-                <a:srgbClr val="5B6470"/>
-              </a:solidFill>
-              <a:latin typeface="微软雅黑"/>
-            </a:endParaRPr>
-          </a:p>
-        </p:txBody>
-      </p:sp>
     </p:spTree>
   </p:cSld>
   <p:clrMapOvr>
@@ -8744,16 +8744,97 @@
           </a:p>
         </p:txBody>
       </p:sp>
+      <p:sp>
+        <p:nvSpPr>
+          <p:cNvPr id="6" name="TextBox 5"/>
+          <p:cNvSpPr txBox="1"/>
+          <p:nvPr/>
+        </p:nvSpPr>
+        <p:spPr>
+          <a:xfrm>
+            <a:off x="640080" y="6446520"/>
+            <a:ext cx="3657600" cy="320040"/>
+          </a:xfrm>
+          <a:prstGeom prst="rect">
+            <a:avLst/>
+          </a:prstGeom>
+          <a:noFill/>
+        </p:spPr>
+        <p:txBody>
+          <a:bodyPr wrap="square">
+            <a:spAutoFit/>
+          </a:bodyPr>
+          <a:lstStyle/>
+          <a:p>
+            <a:r>
+              <a:rPr sz="950" b="0">
+                <a:solidFill>
+                  <a:srgbClr val="5B6470"/>
+                </a:solidFill>
+                <a:latin typeface="微软雅黑"/>
+              </a:rPr>
+              <a:t>Xuefei Wang · 2026</a:t>
+            </a:r>
+            <a:endParaRPr sz="950" b="0">
+              <a:solidFill>
+                <a:srgbClr val="5B6470"/>
+              </a:solidFill>
+              <a:latin typeface="微软雅黑"/>
+            </a:endParaRPr>
+          </a:p>
+        </p:txBody>
+      </p:sp>
+      <p:sp>
+        <p:nvSpPr>
+          <p:cNvPr id="7" name="TextBox 6"/>
+          <p:cNvSpPr txBox="1"/>
+          <p:nvPr/>
+        </p:nvSpPr>
+        <p:spPr>
+          <a:xfrm>
+            <a:off x="10972800" y="6446520"/>
+            <a:ext cx="640080" cy="320040"/>
+          </a:xfrm>
+          <a:prstGeom prst="rect">
+            <a:avLst/>
+          </a:prstGeom>
+          <a:noFill/>
+        </p:spPr>
+        <p:txBody>
+          <a:bodyPr wrap="square">
+            <a:spAutoFit/>
+          </a:bodyPr>
+          <a:lstStyle/>
+          <a:p>
+            <a:pPr algn="r"/>
+            <a:r>
+              <a:rPr sz="950" b="0">
+                <a:solidFill>
+                  <a:srgbClr val="5B6470"/>
+                </a:solidFill>
+                <a:latin typeface="微软雅黑"/>
+              </a:rPr>
+              <a:t>07 / 14</a:t>
+            </a:r>
+            <a:endParaRPr sz="950" b="0">
+              <a:solidFill>
+                <a:srgbClr val="5B6470"/>
+              </a:solidFill>
+              <a:latin typeface="微软雅黑"/>
+            </a:endParaRPr>
+          </a:p>
+        </p:txBody>
+      </p:sp>
       <p:pic>
         <p:nvPicPr>
-          <p:cNvPr id="5" name="Picture 4" descr="m3_margin_2025.png"/>
+          <p:cNvPr id="8" name="Picture 7" descr="m3_margin_2025.png"/>
           <p:cNvPicPr>
             <a:picLocks noChangeAspect="1"/>
           </p:cNvPicPr>
           <p:nvPr/>
         </p:nvPicPr>
         <p:blipFill>
-          <a:blip r:embed="rId1"/>
+          <a:blip r:embed="rId3"/>
           <a:stretch>
             <a:fillRect/>
           </a:stretch>
@@ -8768,87 +8849,6 @@
           </a:prstGeom>
         </p:spPr>
       </p:pic>
-      <p:sp>
-        <p:nvSpPr>
-          <p:cNvPr id="6" name="TextBox 5"/>
-          <p:cNvSpPr txBox="1"/>
-          <p:nvPr/>
-        </p:nvSpPr>
-        <p:spPr>
-          <a:xfrm>
-            <a:off x="640080" y="6446520"/>
-            <a:ext cx="3657600" cy="320040"/>
-          </a:xfrm>
-          <a:prstGeom prst="rect">
-            <a:avLst/>
-          </a:prstGeom>
-          <a:noFill/>
-        </p:spPr>
-        <p:txBody>
-          <a:bodyPr wrap="square">
-            <a:spAutoFit/>
-          </a:bodyPr>
-          <a:lstStyle/>
-          <a:p>
-            <a:r>
-              <a:rPr sz="950" b="0">
-                <a:solidFill>
-                  <a:srgbClr val="5B6470"/>
-                </a:solidFill>
-                <a:latin typeface="微软雅黑"/>
-              </a:rPr>
-              <a:t>Xuefei Wang · 2026</a:t>
-            </a:r>
-            <a:endParaRPr sz="950" b="0">
-              <a:solidFill>
-                <a:srgbClr val="5B6470"/>
-              </a:solidFill>
-              <a:latin typeface="微软雅黑"/>
-            </a:endParaRPr>
-          </a:p>
-        </p:txBody>
-      </p:sp>
-      <p:sp>
-        <p:nvSpPr>
-          <p:cNvPr id="7" name="TextBox 6"/>
-          <p:cNvSpPr txBox="1"/>
-          <p:nvPr/>
-        </p:nvSpPr>
-        <p:spPr>
-          <a:xfrm>
-            <a:off x="10972800" y="6446520"/>
-            <a:ext cx="640080" cy="320040"/>
-          </a:xfrm>
-          <a:prstGeom prst="rect">
-            <a:avLst/>
-          </a:prstGeom>
-          <a:noFill/>
-        </p:spPr>
-        <p:txBody>
-          <a:bodyPr wrap="square">
-            <a:spAutoFit/>
-          </a:bodyPr>
-          <a:lstStyle/>
-          <a:p>
-            <a:pPr algn="r"/>
-            <a:r>
-              <a:rPr sz="950" b="0">
-                <a:solidFill>
-                  <a:srgbClr val="5B6470"/>
-                </a:solidFill>
-                <a:latin typeface="微软雅黑"/>
-              </a:rPr>
-              <a:t>07 / 14</a:t>
-            </a:r>
-            <a:endParaRPr sz="950" b="0">
-              <a:solidFill>
-                <a:srgbClr val="5B6470"/>
-              </a:solidFill>
-              <a:latin typeface="微软雅黑"/>
-            </a:endParaRPr>
-          </a:p>
-        </p:txBody>
-      </p:sp>
     </p:spTree>
   </p:cSld>
   <p:clrMapOvr>

--- a/presentation/中国跨境电商出海赛道分析-项目故事-v2.pptx
+++ b/presentation/中国跨境电商出海赛道分析-项目故事-v2.pptx
@@ -16,7 +16,6 @@
     <p:sldId id="264" r:id="rId11"/>
     <p:sldId id="265" r:id="rId12"/>
     <p:sldId id="266" r:id="rId13"/>
-    <p:sldId id="267" r:id="rId14"/>
     <p:sldId id="268" r:id="rId15"/>
     <p:sldId id="269" r:id="rId16"/>
   </p:sldIdLst>
@@ -3127,7 +3126,7 @@
         <p:spPr>
           <a:xfrm>
             <a:off x="914400" y="1828800"/>
-            <a:ext cx="10332720" cy="2926080"/>
+            <a:ext cx="10332720" cy="1576070"/>
           </a:xfrm>
           <a:prstGeom prst="rect">
             <a:avLst/>
@@ -3147,7 +3146,7 @@
                 </a:solidFill>
                 <a:latin typeface="微软雅黑"/>
               </a:rPr>
-              <a:t>中国跨境电商 / 出海赛道分析</a:t>
+              <a:t>中国跨境电商出海赛道分析</a:t>
             </a:r>
             <a:endParaRPr sz="4400" b="1">
               <a:solidFill>
@@ -3255,7 +3254,7 @@
         <p:spPr>
           <a:xfrm>
             <a:off x="914400" y="5577840"/>
-            <a:ext cx="10058400" cy="914400"/>
+            <a:ext cx="10058400" cy="291465"/>
           </a:xfrm>
           <a:prstGeom prst="rect">
             <a:avLst/>
@@ -3280,29 +3279,7 @@
                 </a:solidFill>
                 <a:latin typeface="微软雅黑"/>
               </a:rPr>
-              <a:t>Xuefei Wang  ·  数据分析 / 商业分析 / 产品方向</a:t>
-            </a:r>
-            <a:endParaRPr sz="1300" b="0">
-              <a:solidFill>
-                <a:srgbClr val="5B6470"/>
-              </a:solidFill>
-              <a:latin typeface="微软雅黑"/>
-            </a:endParaRPr>
-          </a:p>
-          <a:p>
-            <a:pPr>
-              <a:spcAft>
-                <a:spcPts val="400"/>
-              </a:spcAft>
-            </a:pPr>
-            <a:r>
-              <a:rPr sz="1300" b="0">
-                <a:solidFill>
-                  <a:srgbClr val="5B6470"/>
-                </a:solidFill>
-                <a:latin typeface="微软雅黑"/>
-              </a:rPr>
-              <a:t>2026 秋招  ·  项目叙事版</a:t>
+              <a:t>Xuefei Wang</a:t>
             </a:r>
             <a:endParaRPr sz="1300" b="0">
               <a:solidFill>
@@ -3640,7 +3617,7 @@
                 </a:solidFill>
                 <a:latin typeface="微软雅黑"/>
               </a:rPr>
-              <a:t>10 / 14</a:t>
+              <a:t>10 / 13</a:t>
             </a:r>
             <a:endParaRPr sz="950" b="0">
               <a:solidFill>
@@ -3660,15 +3637,15 @@
           <p:nvPr/>
         </p:nvPicPr>
         <p:blipFill>
-          <a:blip r:embed="rId3"/>
+          <a:blip r:embed="rId1"/>
           <a:stretch>
             <a:fillRect/>
           </a:stretch>
         </p:blipFill>
         <p:spPr>
           <a:xfrm>
-            <a:off x="6382385" y="3111500"/>
-            <a:ext cx="5120640" cy="2873375"/>
+            <a:off x="5864225" y="3111500"/>
+            <a:ext cx="5406390" cy="3034030"/>
           </a:xfrm>
           <a:prstGeom prst="rect">
             <a:avLst/>
@@ -4002,7 +3979,7 @@
                 </a:solidFill>
                 <a:latin typeface="微软雅黑"/>
               </a:rPr>
-              <a:t>11 / 14</a:t>
+              <a:t>11 / 13</a:t>
             </a:r>
             <a:endParaRPr sz="950" b="0">
               <a:solidFill>
@@ -4022,337 +3999,21 @@
           <p:nvPr/>
         </p:nvPicPr>
         <p:blipFill>
-          <a:blip r:embed="rId3"/>
+          <a:blip r:embed="rId1"/>
           <a:stretch>
             <a:fillRect/>
           </a:stretch>
         </p:blipFill>
         <p:spPr>
           <a:xfrm>
-            <a:off x="4297680" y="3225800"/>
-            <a:ext cx="7174865" cy="2830195"/>
+            <a:off x="4833620" y="3225800"/>
+            <a:ext cx="6250305" cy="2937510"/>
           </a:xfrm>
           <a:prstGeom prst="rect">
             <a:avLst/>
           </a:prstGeom>
         </p:spPr>
       </p:pic>
-    </p:spTree>
-  </p:cSld>
-  <p:clrMapOvr>
-    <a:masterClrMapping/>
-  </p:clrMapOvr>
-</p:sld>
-</file>
-
-<file path=ppt/slides/slide12.xml><?xml version="1.0" encoding="utf-8"?>
-<p:sld xmlns:a="http://schemas.openxmlformats.org/drawingml/2006/main" xmlns:r="http://schemas.openxmlformats.org/officeDocument/2006/relationships" xmlns:p="http://schemas.openxmlformats.org/presentationml/2006/main">
-  <p:cSld>
-    <p:spTree>
-      <p:nvGrpSpPr>
-        <p:cNvPr id="1" name=""/>
-        <p:cNvGrpSpPr/>
-        <p:nvPr/>
-      </p:nvGrpSpPr>
-      <p:grpSpPr/>
-      <p:sp>
-        <p:nvSpPr>
-          <p:cNvPr id="2" name="Rectangle 1"/>
-          <p:cNvSpPr/>
-          <p:nvPr/>
-        </p:nvSpPr>
-        <p:spPr>
-          <a:xfrm>
-            <a:off x="640080" y="502920"/>
-            <a:ext cx="82296" cy="566928"/>
-          </a:xfrm>
-          <a:prstGeom prst="rect">
-            <a:avLst/>
-          </a:prstGeom>
-          <a:solidFill>
-            <a:srgbClr val="2F5AA8"/>
-          </a:solidFill>
-          <a:ln>
-            <a:noFill/>
-          </a:ln>
-          <a:effectLst/>
-        </p:spPr>
-        <p:style>
-          <a:lnRef idx="1">
-            <a:schemeClr val="accent1"/>
-          </a:lnRef>
-          <a:fillRef idx="3">
-            <a:schemeClr val="accent1"/>
-          </a:fillRef>
-          <a:effectRef idx="2">
-            <a:schemeClr val="accent1"/>
-          </a:effectRef>
-          <a:fontRef idx="minor">
-            <a:schemeClr val="lt1"/>
-          </a:fontRef>
-        </p:style>
-        <p:txBody>
-          <a:bodyPr rtlCol="0" anchor="ctr"/>
-          <a:lstStyle/>
-          <a:p>
-            <a:pPr algn="ctr"/>
-          </a:p>
-        </p:txBody>
-      </p:sp>
-      <p:sp>
-        <p:nvSpPr>
-          <p:cNvPr id="3" name="TextBox 2"/>
-          <p:cNvSpPr txBox="1"/>
-          <p:nvPr/>
-        </p:nvSpPr>
-        <p:spPr>
-          <a:xfrm>
-            <a:off x="896112" y="457200"/>
-            <a:ext cx="10607040" cy="1097280"/>
-          </a:xfrm>
-          <a:prstGeom prst="rect">
-            <a:avLst/>
-          </a:prstGeom>
-          <a:noFill/>
-        </p:spPr>
-        <p:txBody>
-          <a:bodyPr wrap="square">
-            <a:spAutoFit/>
-          </a:bodyPr>
-          <a:lstStyle/>
-          <a:p>
-            <a:r>
-              <a:rPr sz="1150" b="1">
-                <a:solidFill>
-                  <a:srgbClr val="2F5AA8"/>
-                </a:solidFill>
-                <a:latin typeface="微软雅黑"/>
-              </a:rPr>
-              <a:t>VALIDATION · 验证</a:t>
-            </a:r>
-            <a:endParaRPr sz="1150" b="1">
-              <a:solidFill>
-                <a:srgbClr val="2F5AA8"/>
-              </a:solidFill>
-              <a:latin typeface="微软雅黑"/>
-            </a:endParaRPr>
-          </a:p>
-          <a:p>
-            <a:pPr>
-              <a:spcBef>
-                <a:spcPts val="400"/>
-              </a:spcBef>
-            </a:pPr>
-            <a:r>
-              <a:rPr sz="2700" b="1">
-                <a:solidFill>
-                  <a:srgbClr val="1B2430"/>
-                </a:solidFill>
-                <a:latin typeface="微软雅黑"/>
-              </a:rPr>
-              <a:t>结论之前，我先做三件事</a:t>
-            </a:r>
-            <a:endParaRPr sz="2700" b="1">
-              <a:solidFill>
-                <a:srgbClr val="1B2430"/>
-              </a:solidFill>
-              <a:latin typeface="微软雅黑"/>
-            </a:endParaRPr>
-          </a:p>
-        </p:txBody>
-      </p:sp>
-      <p:sp>
-        <p:nvSpPr>
-          <p:cNvPr id="4" name="TextBox 3"/>
-          <p:cNvSpPr txBox="1"/>
-          <p:nvPr/>
-        </p:nvSpPr>
-        <p:spPr>
-          <a:xfrm>
-            <a:off x="640080" y="1874520"/>
-            <a:ext cx="10862945" cy="1537970"/>
-          </a:xfrm>
-          <a:prstGeom prst="rect">
-            <a:avLst/>
-          </a:prstGeom>
-          <a:noFill/>
-        </p:spPr>
-        <p:txBody>
-          <a:bodyPr wrap="square">
-            <a:spAutoFit/>
-          </a:bodyPr>
-          <a:lstStyle/>
-          <a:p>
-            <a:pPr>
-              <a:spcAft>
-                <a:spcPts val="1200"/>
-              </a:spcAft>
-            </a:pPr>
-            <a:r>
-              <a:rPr sz="1600" b="0">
-                <a:solidFill>
-                  <a:srgbClr val="1B2430"/>
-                </a:solidFill>
-                <a:latin typeface="微软雅黑"/>
-              </a:rPr>
-              <a:t>① 数据抽查：安克 2025 营收 305.1 亿 与公开报道核对一致</a:t>
-            </a:r>
-            <a:endParaRPr sz="1600" b="0">
-              <a:solidFill>
-                <a:srgbClr val="1B2430"/>
-              </a:solidFill>
-              <a:latin typeface="微软雅黑"/>
-            </a:endParaRPr>
-          </a:p>
-          <a:p>
-            <a:pPr>
-              <a:spcAft>
-                <a:spcPts val="1200"/>
-              </a:spcAft>
-            </a:pPr>
-            <a:r>
-              <a:rPr sz="1600" b="0">
-                <a:solidFill>
-                  <a:srgbClr val="1B2430"/>
-                </a:solidFill>
-                <a:latin typeface="微软雅黑"/>
-              </a:rPr>
-              <a:t>② 交叉验证：调节表（存货 -20 亿）↔ 资产负债表（存货 +17.6 亿）互相印证</a:t>
-            </a:r>
-            <a:endParaRPr sz="1600" b="0">
-              <a:solidFill>
-                <a:srgbClr val="1B2430"/>
-              </a:solidFill>
-              <a:latin typeface="微软雅黑"/>
-            </a:endParaRPr>
-          </a:p>
-          <a:p>
-            <a:pPr>
-              <a:spcAft>
-                <a:spcPts val="1200"/>
-              </a:spcAft>
-            </a:pPr>
-            <a:r>
-              <a:rPr sz="1600" b="0">
-                <a:solidFill>
-                  <a:srgbClr val="1B2430"/>
-                </a:solidFill>
-                <a:latin typeface="微软雅黑"/>
-              </a:rPr>
-              <a:t>③ 主动声明局限：上市公司是幸存者（幸存者偏差）；欧美细分只有致欧披露；吉宏含包装需看分部</a:t>
-            </a:r>
-            <a:endParaRPr sz="1600" b="0">
-              <a:solidFill>
-                <a:srgbClr val="1B2430"/>
-              </a:solidFill>
-              <a:latin typeface="微软雅黑"/>
-            </a:endParaRPr>
-          </a:p>
-          <a:p>
-            <a:pPr>
-              <a:spcAft>
-                <a:spcPts val="1200"/>
-              </a:spcAft>
-            </a:pPr>
-            <a:r>
-              <a:rPr sz="1600" b="1">
-                <a:solidFill>
-                  <a:srgbClr val="1B2430"/>
-                </a:solidFill>
-                <a:latin typeface="微软雅黑"/>
-              </a:rPr>
-              <a:t>▪ 结论只到证据能到的地方：安克备货是主动还是被动？→ 标“待年报附注确认”，不下定论</a:t>
-            </a:r>
-            <a:endParaRPr sz="1600" b="1">
-              <a:solidFill>
-                <a:srgbClr val="1B2430"/>
-              </a:solidFill>
-              <a:latin typeface="微软雅黑"/>
-            </a:endParaRPr>
-          </a:p>
-        </p:txBody>
-      </p:sp>
-      <p:sp>
-        <p:nvSpPr>
-          <p:cNvPr id="5" name="TextBox 4"/>
-          <p:cNvSpPr txBox="1"/>
-          <p:nvPr/>
-        </p:nvSpPr>
-        <p:spPr>
-          <a:xfrm>
-            <a:off x="640080" y="6446520"/>
-            <a:ext cx="3657600" cy="320040"/>
-          </a:xfrm>
-          <a:prstGeom prst="rect">
-            <a:avLst/>
-          </a:prstGeom>
-          <a:noFill/>
-        </p:spPr>
-        <p:txBody>
-          <a:bodyPr wrap="square">
-            <a:spAutoFit/>
-          </a:bodyPr>
-          <a:lstStyle/>
-          <a:p>
-            <a:r>
-              <a:rPr sz="950" b="0">
-                <a:solidFill>
-                  <a:srgbClr val="5B6470"/>
-                </a:solidFill>
-                <a:latin typeface="微软雅黑"/>
-              </a:rPr>
-              <a:t>Xuefei Wang · 2026</a:t>
-            </a:r>
-            <a:endParaRPr sz="950" b="0">
-              <a:solidFill>
-                <a:srgbClr val="5B6470"/>
-              </a:solidFill>
-              <a:latin typeface="微软雅黑"/>
-            </a:endParaRPr>
-          </a:p>
-        </p:txBody>
-      </p:sp>
-      <p:sp>
-        <p:nvSpPr>
-          <p:cNvPr id="6" name="TextBox 5"/>
-          <p:cNvSpPr txBox="1"/>
-          <p:nvPr/>
-        </p:nvSpPr>
-        <p:spPr>
-          <a:xfrm>
-            <a:off x="10972800" y="6446520"/>
-            <a:ext cx="640080" cy="320040"/>
-          </a:xfrm>
-          <a:prstGeom prst="rect">
-            <a:avLst/>
-          </a:prstGeom>
-          <a:noFill/>
-        </p:spPr>
-        <p:txBody>
-          <a:bodyPr wrap="square">
-            <a:spAutoFit/>
-          </a:bodyPr>
-          <a:lstStyle/>
-          <a:p>
-            <a:pPr algn="r"/>
-            <a:r>
-              <a:rPr sz="950" b="0">
-                <a:solidFill>
-                  <a:srgbClr val="5B6470"/>
-                </a:solidFill>
-                <a:latin typeface="微软雅黑"/>
-              </a:rPr>
-              <a:t>12 / 14</a:t>
-            </a:r>
-            <a:endParaRPr sz="950" b="0">
-              <a:solidFill>
-                <a:srgbClr val="5B6470"/>
-              </a:solidFill>
-              <a:latin typeface="微软雅黑"/>
-            </a:endParaRPr>
-          </a:p>
-        </p:txBody>
-      </p:sp>
     </p:spTree>
   </p:cSld>
   <p:clrMapOvr>
@@ -4547,7 +4208,7 @@
                 </a:solidFill>
                 <a:latin typeface="微软雅黑"/>
               </a:rPr>
-              <a:t>13 / 14</a:t>
+              <a:t>12 / 13</a:t>
             </a:r>
             <a:endParaRPr sz="950" b="0">
               <a:solidFill>
@@ -4595,7 +4256,7 @@
           </a:fontRef>
         </p:style>
         <p:txBody>
-          <a:bodyPr rtlCol="0" anchor="ctr" wrap="none" lIns="0" rIns="0" tIns="0" bIns="0"/>
+          <a:bodyPr wrap="none" lIns="0" tIns="0" rIns="0" bIns="0" rtlCol="0" anchor="ctr"/>
           <a:lstStyle/>
           <a:p>
             <a:pPr algn="ctr"/>
@@ -4608,6 +4269,12 @@
               </a:rPr>
               <a:t>① 模式</a:t>
             </a:r>
+            <a:endParaRPr sz="1400" b="1">
+              <a:solidFill>
+                <a:srgbClr val="FFFFFF"/>
+              </a:solidFill>
+              <a:latin typeface="微软雅黑"/>
+            </a:endParaRPr>
           </a:p>
         </p:txBody>
       </p:sp>
@@ -4628,7 +4295,7 @@
           <a:noFill/>
         </p:spPr>
         <p:txBody>
-          <a:bodyPr wrap="square" lIns="0" rIns="0" tIns="0" bIns="0" anchor="ctr">
+          <a:bodyPr wrap="square" lIns="0" tIns="0" rIns="0" bIns="0" anchor="ctr">
             <a:spAutoFit/>
           </a:bodyPr>
           <a:lstStyle/>
@@ -4645,6 +4312,12 @@
               </a:rPr>
               <a:t>销售费用率是分水岭：精品 22% vs 铺货 35%，毛利率高≠赚钱</a:t>
             </a:r>
+            <a:endParaRPr sz="1550" b="0">
+              <a:solidFill>
+                <a:srgbClr val="1B2430"/>
+              </a:solidFill>
+              <a:latin typeface="微软雅黑"/>
+            </a:endParaRPr>
           </a:p>
         </p:txBody>
       </p:sp>
@@ -4685,7 +4358,7 @@
           </a:fontRef>
         </p:style>
         <p:txBody>
-          <a:bodyPr rtlCol="0" anchor="ctr" wrap="none" lIns="0" rIns="0" tIns="0" bIns="0"/>
+          <a:bodyPr wrap="none" lIns="0" tIns="0" rIns="0" bIns="0" rtlCol="0" anchor="ctr"/>
           <a:lstStyle/>
           <a:p>
             <a:pPr algn="ctr"/>
@@ -4698,6 +4371,12 @@
               </a:rPr>
               <a:t>② 市场</a:t>
             </a:r>
+            <a:endParaRPr sz="1400" b="1">
+              <a:solidFill>
+                <a:srgbClr val="FFFFFF"/>
+              </a:solidFill>
+              <a:latin typeface="微软雅黑"/>
+            </a:endParaRPr>
           </a:p>
         </p:txBody>
       </p:sp>
@@ -4718,7 +4397,7 @@
           <a:noFill/>
         </p:spPr>
         <p:txBody>
-          <a:bodyPr wrap="square" lIns="0" rIns="0" tIns="0" bIns="0" anchor="ctr">
+          <a:bodyPr wrap="square" lIns="0" tIns="0" rIns="0" bIns="0" anchor="ctr">
             <a:spAutoFit/>
           </a:bodyPr>
           <a:lstStyle/>
@@ -4735,6 +4414,12 @@
               </a:rPr>
               <a:t>美国走规模、欧洲赚毛利；本地化是欧洲的隐形门槛</a:t>
             </a:r>
+            <a:endParaRPr sz="1550" b="0">
+              <a:solidFill>
+                <a:srgbClr val="1B2430"/>
+              </a:solidFill>
+              <a:latin typeface="微软雅黑"/>
+            </a:endParaRPr>
           </a:p>
         </p:txBody>
       </p:sp>
@@ -4775,7 +4460,7 @@
           </a:fontRef>
         </p:style>
         <p:txBody>
-          <a:bodyPr rtlCol="0" anchor="ctr" wrap="none" lIns="0" rIns="0" tIns="0" bIns="0"/>
+          <a:bodyPr wrap="none" lIns="0" tIns="0" rIns="0" bIns="0" rtlCol="0" anchor="ctr"/>
           <a:lstStyle/>
           <a:p>
             <a:pPr algn="ctr"/>
@@ -4788,6 +4473,12 @@
               </a:rPr>
               <a:t>③ 现金流</a:t>
             </a:r>
+            <a:endParaRPr sz="1400" b="1">
+              <a:solidFill>
+                <a:srgbClr val="FFFFFF"/>
+              </a:solidFill>
+              <a:latin typeface="微软雅黑"/>
+            </a:endParaRPr>
           </a:p>
         </p:txBody>
       </p:sp>
@@ -4808,7 +4499,7 @@
           <a:noFill/>
         </p:spPr>
         <p:txBody>
-          <a:bodyPr wrap="square" lIns="0" rIns="0" tIns="0" bIns="0" anchor="ctr">
+          <a:bodyPr wrap="square" lIns="0" tIns="0" rIns="0" bIns="0" anchor="ctr">
             <a:spAutoFit/>
           </a:bodyPr>
           <a:lstStyle/>
@@ -4825,6 +4516,12 @@
               </a:rPr>
               <a:t>利润≠现金：备货与回款是跨境电商的生死线</a:t>
             </a:r>
+            <a:endParaRPr sz="1550" b="0">
+              <a:solidFill>
+                <a:srgbClr val="1B2430"/>
+              </a:solidFill>
+              <a:latin typeface="微软雅黑"/>
+            </a:endParaRPr>
           </a:p>
         </p:txBody>
       </p:sp>
@@ -4865,7 +4562,7 @@
           </a:fontRef>
         </p:style>
         <p:txBody>
-          <a:bodyPr rtlCol="0" anchor="ctr" wrap="none" lIns="0" rIns="0" tIns="0" bIns="0"/>
+          <a:bodyPr wrap="none" lIns="0" tIns="0" rIns="0" bIns="0" rtlCol="0" anchor="ctr"/>
           <a:lstStyle/>
           <a:p>
             <a:pPr algn="ctr"/>
@@ -4878,6 +4575,12 @@
               </a:rPr>
               <a:t>④ 格局</a:t>
             </a:r>
+            <a:endParaRPr sz="1400" b="1">
+              <a:solidFill>
+                <a:srgbClr val="FFFFFF"/>
+              </a:solidFill>
+              <a:latin typeface="微软雅黑"/>
+            </a:endParaRPr>
           </a:p>
         </p:txBody>
       </p:sp>
@@ -4898,7 +4601,7 @@
           <a:noFill/>
         </p:spPr>
         <p:txBody>
-          <a:bodyPr wrap="square" lIns="0" rIns="0" tIns="0" bIns="0" anchor="ctr">
+          <a:bodyPr wrap="square" lIns="0" tIns="0" rIns="0" bIns="0" anchor="ctr">
             <a:spAutoFit/>
           </a:bodyPr>
           <a:lstStyle/>
@@ -4915,6 +4618,12 @@
               </a:rPr>
               <a:t>龙头集中度 &lt;3%：细分做深（如目录式长尾品牌）是中小卖家的路</a:t>
             </a:r>
+            <a:endParaRPr sz="1550" b="0">
+              <a:solidFill>
+                <a:srgbClr val="1B2430"/>
+              </a:solidFill>
+              <a:latin typeface="微软雅黑"/>
+            </a:endParaRPr>
           </a:p>
         </p:txBody>
       </p:sp>
@@ -5648,7 +5357,7 @@
                 </a:solidFill>
                 <a:latin typeface="微软雅黑"/>
               </a:rPr>
-              <a:t>14 / 14</a:t>
+              <a:t>13 / 13</a:t>
             </a:r>
             <a:endParaRPr sz="950" b="0">
               <a:solidFill>
@@ -6080,7 +5789,7 @@
                 </a:solidFill>
                 <a:latin typeface="微软雅黑"/>
               </a:rPr>
-              <a:t>02 / 14</a:t>
+              <a:t>02 / 13</a:t>
             </a:r>
             <a:endParaRPr sz="950" b="0">
               <a:solidFill>
@@ -6885,7 +6594,7 @@
                 </a:solidFill>
                 <a:latin typeface="微软雅黑"/>
               </a:rPr>
-              <a:t>03 / 14</a:t>
+              <a:t>03 / 13</a:t>
             </a:r>
             <a:endParaRPr sz="950" b="0">
               <a:solidFill>
@@ -7245,7 +6954,7 @@
                 </a:solidFill>
                 <a:latin typeface="微软雅黑"/>
               </a:rPr>
-              <a:t>04 / 14</a:t>
+              <a:t>04 / 13</a:t>
             </a:r>
             <a:endParaRPr sz="950" b="0">
               <a:solidFill>
@@ -7389,7 +7098,7 @@
         <p:spPr>
           <a:xfrm>
             <a:off x="640080" y="1340485"/>
-            <a:ext cx="10863580" cy="2303145"/>
+            <a:ext cx="10863580" cy="1933575"/>
           </a:xfrm>
           <a:prstGeom prst="rect">
             <a:avLst/>
@@ -7502,7 +7211,7 @@
                 </a:solidFill>
                 <a:latin typeface="微软雅黑"/>
               </a:rPr>
-              <a:t>— 含义：门槛低、进入多、竞争激烈，也解释“起得快、倒得多”</a:t>
+              <a:t>— 含义：门槛低、进入多、竞争激烈</a:t>
             </a:r>
             <a:endParaRPr sz="1350" b="0">
               <a:solidFill>
@@ -7583,7 +7292,7 @@
                 </a:solidFill>
                 <a:latin typeface="微软雅黑"/>
               </a:rPr>
-              <a:t>05 / 14</a:t>
+              <a:t>05 / 13</a:t>
             </a:r>
             <a:endParaRPr sz="950" b="0">
               <a:solidFill>
@@ -7603,15 +7312,15 @@
           <p:nvPr/>
         </p:nvPicPr>
         <p:blipFill>
-          <a:blip r:embed="rId4"/>
+          <a:blip r:embed="rId1"/>
           <a:stretch>
             <a:fillRect/>
           </a:stretch>
         </p:blipFill>
         <p:spPr>
           <a:xfrm>
-            <a:off x="895985" y="3510280"/>
-            <a:ext cx="5120640" cy="2780665"/>
+            <a:off x="895985" y="3429635"/>
+            <a:ext cx="4852035" cy="2861310"/>
           </a:xfrm>
           <a:prstGeom prst="rect">
             <a:avLst/>
@@ -7627,15 +7336,15 @@
           <p:nvPr/>
         </p:nvPicPr>
         <p:blipFill>
-          <a:blip r:embed="rId5"/>
+          <a:blip r:embed="rId2"/>
           <a:stretch>
             <a:fillRect/>
           </a:stretch>
         </p:blipFill>
         <p:spPr>
           <a:xfrm>
-            <a:off x="6492240" y="3510280"/>
-            <a:ext cx="5120640" cy="2837111"/>
+            <a:off x="6955155" y="3429635"/>
+            <a:ext cx="3499485" cy="2917825"/>
           </a:xfrm>
           <a:prstGeom prst="rect">
             <a:avLst/>
@@ -8476,7 +8185,7 @@
                 </a:solidFill>
                 <a:latin typeface="微软雅黑"/>
               </a:rPr>
-              <a:t>06 / 14</a:t>
+              <a:t>06 / 13</a:t>
             </a:r>
             <a:endParaRPr sz="950" b="0">
               <a:solidFill>
@@ -8814,7 +8523,7 @@
                 </a:solidFill>
                 <a:latin typeface="微软雅黑"/>
               </a:rPr>
-              <a:t>07 / 14</a:t>
+              <a:t>07 / 13</a:t>
             </a:r>
             <a:endParaRPr sz="950" b="0">
               <a:solidFill>
@@ -8834,7 +8543,7 @@
           <p:nvPr/>
         </p:nvPicPr>
         <p:blipFill>
-          <a:blip r:embed="rId3"/>
+          <a:blip r:embed="rId1"/>
           <a:stretch>
             <a:fillRect/>
           </a:stretch>
@@ -9683,7 +9392,7 @@
                 </a:solidFill>
                 <a:latin typeface="微软雅黑"/>
               </a:rPr>
-              <a:t>08 / 14</a:t>
+              <a:t>08 / 13</a:t>
             </a:r>
             <a:endParaRPr sz="950" b="0">
               <a:solidFill>
@@ -10748,7 +10457,7 @@
                 </a:solidFill>
                 <a:latin typeface="微软雅黑"/>
               </a:rPr>
-              <a:t>09 / 14</a:t>
+              <a:t>09 / 13</a:t>
             </a:r>
             <a:endParaRPr sz="950" b="0">
               <a:solidFill>

--- a/presentation/中国跨境电商出海赛道分析-项目故事-v2.pptx
+++ b/presentation/中国跨境电商出海赛道分析-项目故事-v2.pptx
@@ -5397,7 +5397,7 @@
                   <a:srgbClr val="6E675E"/>
                 </a:solidFill>
               </a:rPr>
-              <a:t>▶ 想亲手试试？点击进入在线 Demo：</a:t>
+              <a:t>▶ 点击进入在线 Demo：</a:t>
             </a:r>
             <a:r>
               <a:rPr sz="1200" b="1">

--- a/presentation/中国跨境电商出海赛道分析-项目故事-v2.pptx
+++ b/presentation/中国跨境电商出海赛道分析-项目故事-v2.pptx
@@ -5406,7 +5406,7 @@
                 </a:solidFill>
                 <a:hlinkClick r:id="rId2"/>
               </a:rPr>
-              <a:t>https://cross-border-analysis-w42yqftvzzhsyleappvj6py.streamlit.app</a:t>
+              <a:t>https://cross-border-analysis.streamlit.app</a:t>
             </a:r>
           </a:p>
         </p:txBody>

--- a/presentation/中国跨境电商出海赛道分析-项目故事-v2.pptx
+++ b/presentation/中国跨境电商出海赛道分析-项目故事-v2.pptx
@@ -3876,7 +3876,7 @@
                 </a:solidFill>
                 <a:latin typeface="微软雅黑"/>
               </a:rPr>
-              <a:t>▪ 这就是我上一份工作困惑的“上市公司版”：利润被货和应收占住了</a:t>
+              <a:t>▪ 这是跨境行业“账面赚钱、手里没现金”的典型：利润被货和应收占住了</a:t>
             </a:r>
             <a:endParaRPr sz="1500" b="1">
               <a:solidFill>
@@ -5671,7 +5671,7 @@
                 </a:solidFill>
                 <a:latin typeface="微软雅黑"/>
               </a:rPr>
-              <a:t>大部分 SKU 单独核算均为盈利，但公司在亚马逊平台的整体表现</a:t>
+              <a:t>跨境电商怎么赚钱、怎么走得长远，受哪些因素影响？平台佣金、广告、库存与现金流，如何改变一家公司的盈利结构？</a:t>
             </a:r>
             <a:r>
               <a:rPr lang="zh-CN" sz="1550" b="0">
@@ -5680,7 +5680,7 @@
                 </a:solidFill>
                 <a:latin typeface="微软雅黑"/>
               </a:rPr>
-              <a:t>较前几年下降</a:t>
+              <a:t/>
             </a:r>
             <a:r>
               <a:rPr sz="1550" b="0">
@@ -5689,7 +5689,7 @@
                 </a:solidFill>
                 <a:latin typeface="微软雅黑"/>
               </a:rPr>
-              <a:t>。为什么“单品盈利”没有带来“整体赚钱”？</a:t>
+              <a:t/>
             </a:r>
             <a:endParaRPr sz="1550" b="0">
               <a:solidFill>
@@ -5751,7 +5751,7 @@
                 </a:solidFill>
                 <a:latin typeface="微软雅黑"/>
               </a:rPr>
-              <a:t>以 5 家上市公司为样本，用公开财报和海关数据，从行业、公司、现金流三个层面验证：哪些因素真正解释了“单品盈利却没带来整体赚钱”。</a:t>
+              <a:t>以 5 家上市公司为样本，用公开财报和海关数据，从行业、公司、现金流三个层面验证：哪些因素真正决定了跨境电商公司能不能赚钱、能不能走得长远。</a:t>
             </a:r>
             <a:endParaRPr sz="1550" b="0">
               <a:solidFill>
@@ -5956,7 +5956,7 @@
                 </a:solidFill>
                 <a:latin typeface="微软雅黑"/>
               </a:rPr>
-              <a:t>我把困惑拆成四个可量化的问题</a:t>
+              <a:t>我把“怎么赚钱、怎么走得长远”拆成四个可量化的问题</a:t>
             </a:r>
             <a:endParaRPr sz="2700" b="1">
               <a:solidFill>
@@ -6556,7 +6556,7 @@
                 </a:solidFill>
                 <a:latin typeface="微软雅黑"/>
               </a:rPr>
-              <a:t>为什么“单品盈利”没带来“整体赚钱”？现金流是不是生死线？怎么起步才能活得久？</a:t>
+              <a:t>为什么利润和现金流经常对不上？现金流是不是生死线，如何判断该转型？</a:t>
             </a:r>
             <a:endParaRPr sz="1250" b="0">
               <a:solidFill>
